--- a/PPT/week2.pptx
+++ b/PPT/week2.pptx
@@ -8,11 +8,11 @@
     <p:notesMasterId r:id="rId7"/>
   </p:notesMasterIdLst>
   <p:sldIdLst>
-    <p:sldId id="256" r:id="rId2"/>
+    <p:sldId id="262" r:id="rId2"/>
     <p:sldId id="257" r:id="rId3"/>
     <p:sldId id="260" r:id="rId4"/>
     <p:sldId id="261" r:id="rId5"/>
-    <p:sldId id="259" r:id="rId6"/>
+    <p:sldId id="265" r:id="rId6"/>
   </p:sldIdLst>
   <p:sldSz cx="12192000" cy="6858000"/>
   <p:notesSz cx="6858000" cy="9144000"/>
@@ -635,7 +635,7 @@
     </p:spTree>
     <p:extLst>
       <p:ext uri="{BB962C8B-B14F-4D97-AF65-F5344CB8AC3E}">
-        <p14:creationId xmlns:p14="http://schemas.microsoft.com/office/powerpoint/2010/main" val="4024578733"/>
+        <p14:creationId xmlns:p14="http://schemas.microsoft.com/office/powerpoint/2010/main" val="1348682730"/>
       </p:ext>
     </p:extLst>
   </p:cSld>
@@ -667,7 +667,7 @@
           <p:cNvPr id="2" name="제목 1">
             <a:extLst>
               <a:ext uri="{FF2B5EF4-FFF2-40B4-BE49-F238E27FC236}">
-                <a16:creationId xmlns:a16="http://schemas.microsoft.com/office/drawing/2014/main" id="{47C6A88D-EDAF-CEC2-712F-FA6A7E4FF53C}"/>
+                <a16:creationId xmlns:a16="http://schemas.microsoft.com/office/drawing/2014/main" xmlns="" id="{47C6A88D-EDAF-CEC2-712F-FA6A7E4FF53C}"/>
               </a:ext>
             </a:extLst>
           </p:cNvPr>
@@ -704,7 +704,7 @@
           <p:cNvPr id="3" name="부제목 2">
             <a:extLst>
               <a:ext uri="{FF2B5EF4-FFF2-40B4-BE49-F238E27FC236}">
-                <a16:creationId xmlns:a16="http://schemas.microsoft.com/office/drawing/2014/main" id="{1F7A10E8-4E5D-A611-E577-EBA5676A507E}"/>
+                <a16:creationId xmlns:a16="http://schemas.microsoft.com/office/drawing/2014/main" xmlns="" id="{1F7A10E8-4E5D-A611-E577-EBA5676A507E}"/>
               </a:ext>
             </a:extLst>
           </p:cNvPr>
@@ -774,7 +774,7 @@
           <p:cNvPr id="4" name="날짜 개체 틀 3">
             <a:extLst>
               <a:ext uri="{FF2B5EF4-FFF2-40B4-BE49-F238E27FC236}">
-                <a16:creationId xmlns:a16="http://schemas.microsoft.com/office/drawing/2014/main" id="{FA4EF1CD-FA03-944B-0EC0-2AABE3B0C471}"/>
+                <a16:creationId xmlns:a16="http://schemas.microsoft.com/office/drawing/2014/main" xmlns="" id="{FA4EF1CD-FA03-944B-0EC0-2AABE3B0C471}"/>
               </a:ext>
             </a:extLst>
           </p:cNvPr>
@@ -803,7 +803,7 @@
           <p:cNvPr id="5" name="바닥글 개체 틀 4">
             <a:extLst>
               <a:ext uri="{FF2B5EF4-FFF2-40B4-BE49-F238E27FC236}">
-                <a16:creationId xmlns:a16="http://schemas.microsoft.com/office/drawing/2014/main" id="{D7E1904F-F41F-7809-481D-7E79FCD2132E}"/>
+                <a16:creationId xmlns:a16="http://schemas.microsoft.com/office/drawing/2014/main" xmlns="" id="{D7E1904F-F41F-7809-481D-7E79FCD2132E}"/>
               </a:ext>
             </a:extLst>
           </p:cNvPr>
@@ -828,7 +828,7 @@
           <p:cNvPr id="6" name="슬라이드 번호 개체 틀 5">
             <a:extLst>
               <a:ext uri="{FF2B5EF4-FFF2-40B4-BE49-F238E27FC236}">
-                <a16:creationId xmlns:a16="http://schemas.microsoft.com/office/drawing/2014/main" id="{46C721DE-9DEE-BACB-B354-8E260F43215D}"/>
+                <a16:creationId xmlns:a16="http://schemas.microsoft.com/office/drawing/2014/main" xmlns="" id="{46C721DE-9DEE-BACB-B354-8E260F43215D}"/>
               </a:ext>
             </a:extLst>
           </p:cNvPr>
@@ -887,7 +887,7 @@
           <p:cNvPr id="2" name="제목 1">
             <a:extLst>
               <a:ext uri="{FF2B5EF4-FFF2-40B4-BE49-F238E27FC236}">
-                <a16:creationId xmlns:a16="http://schemas.microsoft.com/office/drawing/2014/main" id="{8EC6E50E-2954-B290-1563-C4936B9E8431}"/>
+                <a16:creationId xmlns:a16="http://schemas.microsoft.com/office/drawing/2014/main" xmlns="" id="{8EC6E50E-2954-B290-1563-C4936B9E8431}"/>
               </a:ext>
             </a:extLst>
           </p:cNvPr>
@@ -915,7 +915,7 @@
           <p:cNvPr id="3" name="세로 텍스트 개체 틀 2">
             <a:extLst>
               <a:ext uri="{FF2B5EF4-FFF2-40B4-BE49-F238E27FC236}">
-                <a16:creationId xmlns:a16="http://schemas.microsoft.com/office/drawing/2014/main" id="{5B6A99E4-1414-E268-7B72-A4C896708AE3}"/>
+                <a16:creationId xmlns:a16="http://schemas.microsoft.com/office/drawing/2014/main" xmlns="" id="{5B6A99E4-1414-E268-7B72-A4C896708AE3}"/>
               </a:ext>
             </a:extLst>
           </p:cNvPr>
@@ -972,7 +972,7 @@
           <p:cNvPr id="4" name="날짜 개체 틀 3">
             <a:extLst>
               <a:ext uri="{FF2B5EF4-FFF2-40B4-BE49-F238E27FC236}">
-                <a16:creationId xmlns:a16="http://schemas.microsoft.com/office/drawing/2014/main" id="{3A9BB3C2-1FA4-4151-9ADB-996284F1BDE2}"/>
+                <a16:creationId xmlns:a16="http://schemas.microsoft.com/office/drawing/2014/main" xmlns="" id="{3A9BB3C2-1FA4-4151-9ADB-996284F1BDE2}"/>
               </a:ext>
             </a:extLst>
           </p:cNvPr>
@@ -1001,7 +1001,7 @@
           <p:cNvPr id="5" name="바닥글 개체 틀 4">
             <a:extLst>
               <a:ext uri="{FF2B5EF4-FFF2-40B4-BE49-F238E27FC236}">
-                <a16:creationId xmlns:a16="http://schemas.microsoft.com/office/drawing/2014/main" id="{8A27C81A-BE4E-27CE-6CE4-0AE5876D470A}"/>
+                <a16:creationId xmlns:a16="http://schemas.microsoft.com/office/drawing/2014/main" xmlns="" id="{8A27C81A-BE4E-27CE-6CE4-0AE5876D470A}"/>
               </a:ext>
             </a:extLst>
           </p:cNvPr>
@@ -1026,7 +1026,7 @@
           <p:cNvPr id="6" name="슬라이드 번호 개체 틀 5">
             <a:extLst>
               <a:ext uri="{FF2B5EF4-FFF2-40B4-BE49-F238E27FC236}">
-                <a16:creationId xmlns:a16="http://schemas.microsoft.com/office/drawing/2014/main" id="{B4E3C814-C417-2E3F-F02B-1B9ED6941FBD}"/>
+                <a16:creationId xmlns:a16="http://schemas.microsoft.com/office/drawing/2014/main" xmlns="" id="{B4E3C814-C417-2E3F-F02B-1B9ED6941FBD}"/>
               </a:ext>
             </a:extLst>
           </p:cNvPr>
@@ -1085,7 +1085,7 @@
           <p:cNvPr id="2" name="세로 제목 1">
             <a:extLst>
               <a:ext uri="{FF2B5EF4-FFF2-40B4-BE49-F238E27FC236}">
-                <a16:creationId xmlns:a16="http://schemas.microsoft.com/office/drawing/2014/main" id="{AC1D687F-54E9-57A3-FDA2-5A8060E79A80}"/>
+                <a16:creationId xmlns:a16="http://schemas.microsoft.com/office/drawing/2014/main" xmlns="" id="{AC1D687F-54E9-57A3-FDA2-5A8060E79A80}"/>
               </a:ext>
             </a:extLst>
           </p:cNvPr>
@@ -1118,7 +1118,7 @@
           <p:cNvPr id="3" name="세로 텍스트 개체 틀 2">
             <a:extLst>
               <a:ext uri="{FF2B5EF4-FFF2-40B4-BE49-F238E27FC236}">
-                <a16:creationId xmlns:a16="http://schemas.microsoft.com/office/drawing/2014/main" id="{BC846A14-940B-8FE8-A769-3DABAE11AD25}"/>
+                <a16:creationId xmlns:a16="http://schemas.microsoft.com/office/drawing/2014/main" xmlns="" id="{BC846A14-940B-8FE8-A769-3DABAE11AD25}"/>
               </a:ext>
             </a:extLst>
           </p:cNvPr>
@@ -1180,7 +1180,7 @@
           <p:cNvPr id="4" name="날짜 개체 틀 3">
             <a:extLst>
               <a:ext uri="{FF2B5EF4-FFF2-40B4-BE49-F238E27FC236}">
-                <a16:creationId xmlns:a16="http://schemas.microsoft.com/office/drawing/2014/main" id="{393732A3-4427-5A76-3A9C-DBE87A4364DD}"/>
+                <a16:creationId xmlns:a16="http://schemas.microsoft.com/office/drawing/2014/main" xmlns="" id="{393732A3-4427-5A76-3A9C-DBE87A4364DD}"/>
               </a:ext>
             </a:extLst>
           </p:cNvPr>
@@ -1209,7 +1209,7 @@
           <p:cNvPr id="5" name="바닥글 개체 틀 4">
             <a:extLst>
               <a:ext uri="{FF2B5EF4-FFF2-40B4-BE49-F238E27FC236}">
-                <a16:creationId xmlns:a16="http://schemas.microsoft.com/office/drawing/2014/main" id="{16A5B672-F383-0FF5-2D72-72E1E7F0F0D3}"/>
+                <a16:creationId xmlns:a16="http://schemas.microsoft.com/office/drawing/2014/main" xmlns="" id="{16A5B672-F383-0FF5-2D72-72E1E7F0F0D3}"/>
               </a:ext>
             </a:extLst>
           </p:cNvPr>
@@ -1234,7 +1234,7 @@
           <p:cNvPr id="6" name="슬라이드 번호 개체 틀 5">
             <a:extLst>
               <a:ext uri="{FF2B5EF4-FFF2-40B4-BE49-F238E27FC236}">
-                <a16:creationId xmlns:a16="http://schemas.microsoft.com/office/drawing/2014/main" id="{DE28928A-9906-D889-A8B7-B97D729CDB76}"/>
+                <a16:creationId xmlns:a16="http://schemas.microsoft.com/office/drawing/2014/main" xmlns="" id="{DE28928A-9906-D889-A8B7-B97D729CDB76}"/>
               </a:ext>
             </a:extLst>
           </p:cNvPr>
@@ -1293,7 +1293,7 @@
           <p:cNvPr id="2" name="제목 1">
             <a:extLst>
               <a:ext uri="{FF2B5EF4-FFF2-40B4-BE49-F238E27FC236}">
-                <a16:creationId xmlns:a16="http://schemas.microsoft.com/office/drawing/2014/main" id="{54F5793F-94FE-56B0-E0CB-A317DA7FB4BC}"/>
+                <a16:creationId xmlns:a16="http://schemas.microsoft.com/office/drawing/2014/main" xmlns="" id="{54F5793F-94FE-56B0-E0CB-A317DA7FB4BC}"/>
               </a:ext>
             </a:extLst>
           </p:cNvPr>
@@ -1321,7 +1321,7 @@
           <p:cNvPr id="3" name="내용 개체 틀 2">
             <a:extLst>
               <a:ext uri="{FF2B5EF4-FFF2-40B4-BE49-F238E27FC236}">
-                <a16:creationId xmlns:a16="http://schemas.microsoft.com/office/drawing/2014/main" id="{BFAF79B8-2AD1-69C6-D4D5-21827C6802F8}"/>
+                <a16:creationId xmlns:a16="http://schemas.microsoft.com/office/drawing/2014/main" xmlns="" id="{BFAF79B8-2AD1-69C6-D4D5-21827C6802F8}"/>
               </a:ext>
             </a:extLst>
           </p:cNvPr>
@@ -1378,7 +1378,7 @@
           <p:cNvPr id="4" name="날짜 개체 틀 3">
             <a:extLst>
               <a:ext uri="{FF2B5EF4-FFF2-40B4-BE49-F238E27FC236}">
-                <a16:creationId xmlns:a16="http://schemas.microsoft.com/office/drawing/2014/main" id="{6718AF63-4F49-82B6-24FC-BB457FC964FC}"/>
+                <a16:creationId xmlns:a16="http://schemas.microsoft.com/office/drawing/2014/main" xmlns="" id="{6718AF63-4F49-82B6-24FC-BB457FC964FC}"/>
               </a:ext>
             </a:extLst>
           </p:cNvPr>
@@ -1407,7 +1407,7 @@
           <p:cNvPr id="5" name="바닥글 개체 틀 4">
             <a:extLst>
               <a:ext uri="{FF2B5EF4-FFF2-40B4-BE49-F238E27FC236}">
-                <a16:creationId xmlns:a16="http://schemas.microsoft.com/office/drawing/2014/main" id="{AA45FF19-25D7-1FF3-E311-2C2E07B26764}"/>
+                <a16:creationId xmlns:a16="http://schemas.microsoft.com/office/drawing/2014/main" xmlns="" id="{AA45FF19-25D7-1FF3-E311-2C2E07B26764}"/>
               </a:ext>
             </a:extLst>
           </p:cNvPr>
@@ -1432,7 +1432,7 @@
           <p:cNvPr id="6" name="슬라이드 번호 개체 틀 5">
             <a:extLst>
               <a:ext uri="{FF2B5EF4-FFF2-40B4-BE49-F238E27FC236}">
-                <a16:creationId xmlns:a16="http://schemas.microsoft.com/office/drawing/2014/main" id="{6F43D8BF-52A4-97EB-612B-F9899664EFD5}"/>
+                <a16:creationId xmlns:a16="http://schemas.microsoft.com/office/drawing/2014/main" xmlns="" id="{6F43D8BF-52A4-97EB-612B-F9899664EFD5}"/>
               </a:ext>
             </a:extLst>
           </p:cNvPr>
@@ -1491,7 +1491,7 @@
           <p:cNvPr id="2" name="제목 1">
             <a:extLst>
               <a:ext uri="{FF2B5EF4-FFF2-40B4-BE49-F238E27FC236}">
-                <a16:creationId xmlns:a16="http://schemas.microsoft.com/office/drawing/2014/main" id="{1EB95909-78E9-5BAC-68EA-7DCA2A1271F7}"/>
+                <a16:creationId xmlns:a16="http://schemas.microsoft.com/office/drawing/2014/main" xmlns="" id="{1EB95909-78E9-5BAC-68EA-7DCA2A1271F7}"/>
               </a:ext>
             </a:extLst>
           </p:cNvPr>
@@ -1528,7 +1528,7 @@
           <p:cNvPr id="3" name="텍스트 개체 틀 2">
             <a:extLst>
               <a:ext uri="{FF2B5EF4-FFF2-40B4-BE49-F238E27FC236}">
-                <a16:creationId xmlns:a16="http://schemas.microsoft.com/office/drawing/2014/main" id="{D6B98DAF-2A47-3ECD-807C-96FB70CF9854}"/>
+                <a16:creationId xmlns:a16="http://schemas.microsoft.com/office/drawing/2014/main" xmlns="" id="{D6B98DAF-2A47-3ECD-807C-96FB70CF9854}"/>
               </a:ext>
             </a:extLst>
           </p:cNvPr>
@@ -1653,7 +1653,7 @@
           <p:cNvPr id="4" name="날짜 개체 틀 3">
             <a:extLst>
               <a:ext uri="{FF2B5EF4-FFF2-40B4-BE49-F238E27FC236}">
-                <a16:creationId xmlns:a16="http://schemas.microsoft.com/office/drawing/2014/main" id="{A3AD9670-C268-56FC-281A-FE1F59541EB9}"/>
+                <a16:creationId xmlns:a16="http://schemas.microsoft.com/office/drawing/2014/main" xmlns="" id="{A3AD9670-C268-56FC-281A-FE1F59541EB9}"/>
               </a:ext>
             </a:extLst>
           </p:cNvPr>
@@ -1682,7 +1682,7 @@
           <p:cNvPr id="5" name="바닥글 개체 틀 4">
             <a:extLst>
               <a:ext uri="{FF2B5EF4-FFF2-40B4-BE49-F238E27FC236}">
-                <a16:creationId xmlns:a16="http://schemas.microsoft.com/office/drawing/2014/main" id="{A4946F37-FE38-E38E-7339-DC6E4EFA5B3B}"/>
+                <a16:creationId xmlns:a16="http://schemas.microsoft.com/office/drawing/2014/main" xmlns="" id="{A4946F37-FE38-E38E-7339-DC6E4EFA5B3B}"/>
               </a:ext>
             </a:extLst>
           </p:cNvPr>
@@ -1707,7 +1707,7 @@
           <p:cNvPr id="6" name="슬라이드 번호 개체 틀 5">
             <a:extLst>
               <a:ext uri="{FF2B5EF4-FFF2-40B4-BE49-F238E27FC236}">
-                <a16:creationId xmlns:a16="http://schemas.microsoft.com/office/drawing/2014/main" id="{7C17C39B-6348-28CC-59AF-B1A65BE2F149}"/>
+                <a16:creationId xmlns:a16="http://schemas.microsoft.com/office/drawing/2014/main" xmlns="" id="{7C17C39B-6348-28CC-59AF-B1A65BE2F149}"/>
               </a:ext>
             </a:extLst>
           </p:cNvPr>
@@ -1766,7 +1766,7 @@
           <p:cNvPr id="2" name="제목 1">
             <a:extLst>
               <a:ext uri="{FF2B5EF4-FFF2-40B4-BE49-F238E27FC236}">
-                <a16:creationId xmlns:a16="http://schemas.microsoft.com/office/drawing/2014/main" id="{0D0EFA0F-10D7-865F-1370-4EA34C786709}"/>
+                <a16:creationId xmlns:a16="http://schemas.microsoft.com/office/drawing/2014/main" xmlns="" id="{0D0EFA0F-10D7-865F-1370-4EA34C786709}"/>
               </a:ext>
             </a:extLst>
           </p:cNvPr>
@@ -1794,7 +1794,7 @@
           <p:cNvPr id="3" name="내용 개체 틀 2">
             <a:extLst>
               <a:ext uri="{FF2B5EF4-FFF2-40B4-BE49-F238E27FC236}">
-                <a16:creationId xmlns:a16="http://schemas.microsoft.com/office/drawing/2014/main" id="{0498CDB5-9D2B-5F68-9DD8-ED20454B1044}"/>
+                <a16:creationId xmlns:a16="http://schemas.microsoft.com/office/drawing/2014/main" xmlns="" id="{0498CDB5-9D2B-5F68-9DD8-ED20454B1044}"/>
               </a:ext>
             </a:extLst>
           </p:cNvPr>
@@ -1856,7 +1856,7 @@
           <p:cNvPr id="4" name="내용 개체 틀 3">
             <a:extLst>
               <a:ext uri="{FF2B5EF4-FFF2-40B4-BE49-F238E27FC236}">
-                <a16:creationId xmlns:a16="http://schemas.microsoft.com/office/drawing/2014/main" id="{570EB1B7-8EDE-2794-EA53-E0C1972FAF1A}"/>
+                <a16:creationId xmlns:a16="http://schemas.microsoft.com/office/drawing/2014/main" xmlns="" id="{570EB1B7-8EDE-2794-EA53-E0C1972FAF1A}"/>
               </a:ext>
             </a:extLst>
           </p:cNvPr>
@@ -1918,7 +1918,7 @@
           <p:cNvPr id="5" name="날짜 개체 틀 4">
             <a:extLst>
               <a:ext uri="{FF2B5EF4-FFF2-40B4-BE49-F238E27FC236}">
-                <a16:creationId xmlns:a16="http://schemas.microsoft.com/office/drawing/2014/main" id="{31FBCFA4-CF51-706E-F9F0-8B66CA1A0E1B}"/>
+                <a16:creationId xmlns:a16="http://schemas.microsoft.com/office/drawing/2014/main" xmlns="" id="{31FBCFA4-CF51-706E-F9F0-8B66CA1A0E1B}"/>
               </a:ext>
             </a:extLst>
           </p:cNvPr>
@@ -1947,7 +1947,7 @@
           <p:cNvPr id="6" name="바닥글 개체 틀 5">
             <a:extLst>
               <a:ext uri="{FF2B5EF4-FFF2-40B4-BE49-F238E27FC236}">
-                <a16:creationId xmlns:a16="http://schemas.microsoft.com/office/drawing/2014/main" id="{FD56636A-469F-7FE9-480E-955BCC0E6D70}"/>
+                <a16:creationId xmlns:a16="http://schemas.microsoft.com/office/drawing/2014/main" xmlns="" id="{FD56636A-469F-7FE9-480E-955BCC0E6D70}"/>
               </a:ext>
             </a:extLst>
           </p:cNvPr>
@@ -1972,7 +1972,7 @@
           <p:cNvPr id="7" name="슬라이드 번호 개체 틀 6">
             <a:extLst>
               <a:ext uri="{FF2B5EF4-FFF2-40B4-BE49-F238E27FC236}">
-                <a16:creationId xmlns:a16="http://schemas.microsoft.com/office/drawing/2014/main" id="{3971D272-167D-EE36-E685-CD8BFE8CC9A6}"/>
+                <a16:creationId xmlns:a16="http://schemas.microsoft.com/office/drawing/2014/main" xmlns="" id="{3971D272-167D-EE36-E685-CD8BFE8CC9A6}"/>
               </a:ext>
             </a:extLst>
           </p:cNvPr>
@@ -2031,7 +2031,7 @@
           <p:cNvPr id="2" name="제목 1">
             <a:extLst>
               <a:ext uri="{FF2B5EF4-FFF2-40B4-BE49-F238E27FC236}">
-                <a16:creationId xmlns:a16="http://schemas.microsoft.com/office/drawing/2014/main" id="{9AC7230E-A2F3-4027-B6F6-9C5C289B1314}"/>
+                <a16:creationId xmlns:a16="http://schemas.microsoft.com/office/drawing/2014/main" xmlns="" id="{9AC7230E-A2F3-4027-B6F6-9C5C289B1314}"/>
               </a:ext>
             </a:extLst>
           </p:cNvPr>
@@ -2064,7 +2064,7 @@
           <p:cNvPr id="3" name="텍스트 개체 틀 2">
             <a:extLst>
               <a:ext uri="{FF2B5EF4-FFF2-40B4-BE49-F238E27FC236}">
-                <a16:creationId xmlns:a16="http://schemas.microsoft.com/office/drawing/2014/main" id="{0C685356-7419-AD93-377A-8D9A0293423E}"/>
+                <a16:creationId xmlns:a16="http://schemas.microsoft.com/office/drawing/2014/main" xmlns="" id="{0C685356-7419-AD93-377A-8D9A0293423E}"/>
               </a:ext>
             </a:extLst>
           </p:cNvPr>
@@ -2135,7 +2135,7 @@
           <p:cNvPr id="4" name="내용 개체 틀 3">
             <a:extLst>
               <a:ext uri="{FF2B5EF4-FFF2-40B4-BE49-F238E27FC236}">
-                <a16:creationId xmlns:a16="http://schemas.microsoft.com/office/drawing/2014/main" id="{CC36E6CA-94A6-3223-C91A-F6E9648C8EAD}"/>
+                <a16:creationId xmlns:a16="http://schemas.microsoft.com/office/drawing/2014/main" xmlns="" id="{CC36E6CA-94A6-3223-C91A-F6E9648C8EAD}"/>
               </a:ext>
             </a:extLst>
           </p:cNvPr>
@@ -2197,7 +2197,7 @@
           <p:cNvPr id="5" name="텍스트 개체 틀 4">
             <a:extLst>
               <a:ext uri="{FF2B5EF4-FFF2-40B4-BE49-F238E27FC236}">
-                <a16:creationId xmlns:a16="http://schemas.microsoft.com/office/drawing/2014/main" id="{F4DFD790-787A-88A3-300F-C173DAD2E1AF}"/>
+                <a16:creationId xmlns:a16="http://schemas.microsoft.com/office/drawing/2014/main" xmlns="" id="{F4DFD790-787A-88A3-300F-C173DAD2E1AF}"/>
               </a:ext>
             </a:extLst>
           </p:cNvPr>
@@ -2268,7 +2268,7 @@
           <p:cNvPr id="6" name="내용 개체 틀 5">
             <a:extLst>
               <a:ext uri="{FF2B5EF4-FFF2-40B4-BE49-F238E27FC236}">
-                <a16:creationId xmlns:a16="http://schemas.microsoft.com/office/drawing/2014/main" id="{012AE83D-2990-A6E4-CC9C-06D342A67C09}"/>
+                <a16:creationId xmlns:a16="http://schemas.microsoft.com/office/drawing/2014/main" xmlns="" id="{012AE83D-2990-A6E4-CC9C-06D342A67C09}"/>
               </a:ext>
             </a:extLst>
           </p:cNvPr>
@@ -2330,7 +2330,7 @@
           <p:cNvPr id="7" name="날짜 개체 틀 6">
             <a:extLst>
               <a:ext uri="{FF2B5EF4-FFF2-40B4-BE49-F238E27FC236}">
-                <a16:creationId xmlns:a16="http://schemas.microsoft.com/office/drawing/2014/main" id="{3C11F8C3-5AD3-730B-8ADB-304185DAA67E}"/>
+                <a16:creationId xmlns:a16="http://schemas.microsoft.com/office/drawing/2014/main" xmlns="" id="{3C11F8C3-5AD3-730B-8ADB-304185DAA67E}"/>
               </a:ext>
             </a:extLst>
           </p:cNvPr>
@@ -2359,7 +2359,7 @@
           <p:cNvPr id="8" name="바닥글 개체 틀 7">
             <a:extLst>
               <a:ext uri="{FF2B5EF4-FFF2-40B4-BE49-F238E27FC236}">
-                <a16:creationId xmlns:a16="http://schemas.microsoft.com/office/drawing/2014/main" id="{EF36ABA7-53C4-C11E-CC9D-F5E59BDBBD9B}"/>
+                <a16:creationId xmlns:a16="http://schemas.microsoft.com/office/drawing/2014/main" xmlns="" id="{EF36ABA7-53C4-C11E-CC9D-F5E59BDBBD9B}"/>
               </a:ext>
             </a:extLst>
           </p:cNvPr>
@@ -2384,7 +2384,7 @@
           <p:cNvPr id="9" name="슬라이드 번호 개체 틀 8">
             <a:extLst>
               <a:ext uri="{FF2B5EF4-FFF2-40B4-BE49-F238E27FC236}">
-                <a16:creationId xmlns:a16="http://schemas.microsoft.com/office/drawing/2014/main" id="{5E29E145-D4AE-F9FB-A218-47B323C43E03}"/>
+                <a16:creationId xmlns:a16="http://schemas.microsoft.com/office/drawing/2014/main" xmlns="" id="{5E29E145-D4AE-F9FB-A218-47B323C43E03}"/>
               </a:ext>
             </a:extLst>
           </p:cNvPr>
@@ -2443,7 +2443,7 @@
           <p:cNvPr id="2" name="제목 1">
             <a:extLst>
               <a:ext uri="{FF2B5EF4-FFF2-40B4-BE49-F238E27FC236}">
-                <a16:creationId xmlns:a16="http://schemas.microsoft.com/office/drawing/2014/main" id="{13D855E6-5AD7-B657-346A-38D87715A5E7}"/>
+                <a16:creationId xmlns:a16="http://schemas.microsoft.com/office/drawing/2014/main" xmlns="" id="{13D855E6-5AD7-B657-346A-38D87715A5E7}"/>
               </a:ext>
             </a:extLst>
           </p:cNvPr>
@@ -2471,7 +2471,7 @@
           <p:cNvPr id="3" name="날짜 개체 틀 2">
             <a:extLst>
               <a:ext uri="{FF2B5EF4-FFF2-40B4-BE49-F238E27FC236}">
-                <a16:creationId xmlns:a16="http://schemas.microsoft.com/office/drawing/2014/main" id="{F3052B06-09E1-1CD0-A032-AEB30F69A0E7}"/>
+                <a16:creationId xmlns:a16="http://schemas.microsoft.com/office/drawing/2014/main" xmlns="" id="{F3052B06-09E1-1CD0-A032-AEB30F69A0E7}"/>
               </a:ext>
             </a:extLst>
           </p:cNvPr>
@@ -2500,7 +2500,7 @@
           <p:cNvPr id="4" name="바닥글 개체 틀 3">
             <a:extLst>
               <a:ext uri="{FF2B5EF4-FFF2-40B4-BE49-F238E27FC236}">
-                <a16:creationId xmlns:a16="http://schemas.microsoft.com/office/drawing/2014/main" id="{DE18691A-8582-987D-DF06-E6D8B618E7BB}"/>
+                <a16:creationId xmlns:a16="http://schemas.microsoft.com/office/drawing/2014/main" xmlns="" id="{DE18691A-8582-987D-DF06-E6D8B618E7BB}"/>
               </a:ext>
             </a:extLst>
           </p:cNvPr>
@@ -2525,7 +2525,7 @@
           <p:cNvPr id="5" name="슬라이드 번호 개체 틀 4">
             <a:extLst>
               <a:ext uri="{FF2B5EF4-FFF2-40B4-BE49-F238E27FC236}">
-                <a16:creationId xmlns:a16="http://schemas.microsoft.com/office/drawing/2014/main" id="{6F997ACE-7D00-7B35-1F16-F56C5450EF85}"/>
+                <a16:creationId xmlns:a16="http://schemas.microsoft.com/office/drawing/2014/main" xmlns="" id="{6F997ACE-7D00-7B35-1F16-F56C5450EF85}"/>
               </a:ext>
             </a:extLst>
           </p:cNvPr>
@@ -2584,7 +2584,7 @@
           <p:cNvPr id="2" name="날짜 개체 틀 1">
             <a:extLst>
               <a:ext uri="{FF2B5EF4-FFF2-40B4-BE49-F238E27FC236}">
-                <a16:creationId xmlns:a16="http://schemas.microsoft.com/office/drawing/2014/main" id="{2703D88F-9D50-1761-731E-68DD1FC6B740}"/>
+                <a16:creationId xmlns:a16="http://schemas.microsoft.com/office/drawing/2014/main" xmlns="" id="{2703D88F-9D50-1761-731E-68DD1FC6B740}"/>
               </a:ext>
             </a:extLst>
           </p:cNvPr>
@@ -2613,7 +2613,7 @@
           <p:cNvPr id="3" name="바닥글 개체 틀 2">
             <a:extLst>
               <a:ext uri="{FF2B5EF4-FFF2-40B4-BE49-F238E27FC236}">
-                <a16:creationId xmlns:a16="http://schemas.microsoft.com/office/drawing/2014/main" id="{70793086-842E-7906-6019-4284A9E469F4}"/>
+                <a16:creationId xmlns:a16="http://schemas.microsoft.com/office/drawing/2014/main" xmlns="" id="{70793086-842E-7906-6019-4284A9E469F4}"/>
               </a:ext>
             </a:extLst>
           </p:cNvPr>
@@ -2638,7 +2638,7 @@
           <p:cNvPr id="4" name="슬라이드 번호 개체 틀 3">
             <a:extLst>
               <a:ext uri="{FF2B5EF4-FFF2-40B4-BE49-F238E27FC236}">
-                <a16:creationId xmlns:a16="http://schemas.microsoft.com/office/drawing/2014/main" id="{6D4FE3DE-7F26-4352-74EE-A720C7AF5564}"/>
+                <a16:creationId xmlns:a16="http://schemas.microsoft.com/office/drawing/2014/main" xmlns="" id="{6D4FE3DE-7F26-4352-74EE-A720C7AF5564}"/>
               </a:ext>
             </a:extLst>
           </p:cNvPr>
@@ -2697,7 +2697,7 @@
           <p:cNvPr id="2" name="제목 1">
             <a:extLst>
               <a:ext uri="{FF2B5EF4-FFF2-40B4-BE49-F238E27FC236}">
-                <a16:creationId xmlns:a16="http://schemas.microsoft.com/office/drawing/2014/main" id="{0AFB6F63-D5C7-EB4A-A651-8DA5561AD0DC}"/>
+                <a16:creationId xmlns:a16="http://schemas.microsoft.com/office/drawing/2014/main" xmlns="" id="{0AFB6F63-D5C7-EB4A-A651-8DA5561AD0DC}"/>
               </a:ext>
             </a:extLst>
           </p:cNvPr>
@@ -2734,7 +2734,7 @@
           <p:cNvPr id="3" name="내용 개체 틀 2">
             <a:extLst>
               <a:ext uri="{FF2B5EF4-FFF2-40B4-BE49-F238E27FC236}">
-                <a16:creationId xmlns:a16="http://schemas.microsoft.com/office/drawing/2014/main" id="{2000FB2D-0CF3-1A3C-E704-F8CA96C2D5D5}"/>
+                <a16:creationId xmlns:a16="http://schemas.microsoft.com/office/drawing/2014/main" xmlns="" id="{2000FB2D-0CF3-1A3C-E704-F8CA96C2D5D5}"/>
               </a:ext>
             </a:extLst>
           </p:cNvPr>
@@ -2824,7 +2824,7 @@
           <p:cNvPr id="4" name="텍스트 개체 틀 3">
             <a:extLst>
               <a:ext uri="{FF2B5EF4-FFF2-40B4-BE49-F238E27FC236}">
-                <a16:creationId xmlns:a16="http://schemas.microsoft.com/office/drawing/2014/main" id="{88C3C47D-E633-BB5D-0FA3-41A5E3C28A6A}"/>
+                <a16:creationId xmlns:a16="http://schemas.microsoft.com/office/drawing/2014/main" xmlns="" id="{88C3C47D-E633-BB5D-0FA3-41A5E3C28A6A}"/>
               </a:ext>
             </a:extLst>
           </p:cNvPr>
@@ -2895,7 +2895,7 @@
           <p:cNvPr id="5" name="날짜 개체 틀 4">
             <a:extLst>
               <a:ext uri="{FF2B5EF4-FFF2-40B4-BE49-F238E27FC236}">
-                <a16:creationId xmlns:a16="http://schemas.microsoft.com/office/drawing/2014/main" id="{603DA118-0D2F-73A1-6311-85E95462C569}"/>
+                <a16:creationId xmlns:a16="http://schemas.microsoft.com/office/drawing/2014/main" xmlns="" id="{603DA118-0D2F-73A1-6311-85E95462C569}"/>
               </a:ext>
             </a:extLst>
           </p:cNvPr>
@@ -2924,7 +2924,7 @@
           <p:cNvPr id="6" name="바닥글 개체 틀 5">
             <a:extLst>
               <a:ext uri="{FF2B5EF4-FFF2-40B4-BE49-F238E27FC236}">
-                <a16:creationId xmlns:a16="http://schemas.microsoft.com/office/drawing/2014/main" id="{DE46749A-348F-886F-32BD-A562F1A2A3B9}"/>
+                <a16:creationId xmlns:a16="http://schemas.microsoft.com/office/drawing/2014/main" xmlns="" id="{DE46749A-348F-886F-32BD-A562F1A2A3B9}"/>
               </a:ext>
             </a:extLst>
           </p:cNvPr>
@@ -2949,7 +2949,7 @@
           <p:cNvPr id="7" name="슬라이드 번호 개체 틀 6">
             <a:extLst>
               <a:ext uri="{FF2B5EF4-FFF2-40B4-BE49-F238E27FC236}">
-                <a16:creationId xmlns:a16="http://schemas.microsoft.com/office/drawing/2014/main" id="{0BF22D09-FBE9-294C-014E-9A808723A1A7}"/>
+                <a16:creationId xmlns:a16="http://schemas.microsoft.com/office/drawing/2014/main" xmlns="" id="{0BF22D09-FBE9-294C-014E-9A808723A1A7}"/>
               </a:ext>
             </a:extLst>
           </p:cNvPr>
@@ -3008,7 +3008,7 @@
           <p:cNvPr id="2" name="제목 1">
             <a:extLst>
               <a:ext uri="{FF2B5EF4-FFF2-40B4-BE49-F238E27FC236}">
-                <a16:creationId xmlns:a16="http://schemas.microsoft.com/office/drawing/2014/main" id="{DA50C132-3A30-7E9C-0BBB-1CD1A789CE68}"/>
+                <a16:creationId xmlns:a16="http://schemas.microsoft.com/office/drawing/2014/main" xmlns="" id="{DA50C132-3A30-7E9C-0BBB-1CD1A789CE68}"/>
               </a:ext>
             </a:extLst>
           </p:cNvPr>
@@ -3045,7 +3045,7 @@
           <p:cNvPr id="3" name="그림 개체 틀 2">
             <a:extLst>
               <a:ext uri="{FF2B5EF4-FFF2-40B4-BE49-F238E27FC236}">
-                <a16:creationId xmlns:a16="http://schemas.microsoft.com/office/drawing/2014/main" id="{2F31776A-D32D-34F5-8A99-A26F4F6535B9}"/>
+                <a16:creationId xmlns:a16="http://schemas.microsoft.com/office/drawing/2014/main" xmlns="" id="{2F31776A-D32D-34F5-8A99-A26F4F6535B9}"/>
               </a:ext>
             </a:extLst>
           </p:cNvPr>
@@ -3112,7 +3112,7 @@
           <p:cNvPr id="4" name="텍스트 개체 틀 3">
             <a:extLst>
               <a:ext uri="{FF2B5EF4-FFF2-40B4-BE49-F238E27FC236}">
-                <a16:creationId xmlns:a16="http://schemas.microsoft.com/office/drawing/2014/main" id="{3E500BF3-C366-20F6-6257-8233A0794521}"/>
+                <a16:creationId xmlns:a16="http://schemas.microsoft.com/office/drawing/2014/main" xmlns="" id="{3E500BF3-C366-20F6-6257-8233A0794521}"/>
               </a:ext>
             </a:extLst>
           </p:cNvPr>
@@ -3183,7 +3183,7 @@
           <p:cNvPr id="5" name="날짜 개체 틀 4">
             <a:extLst>
               <a:ext uri="{FF2B5EF4-FFF2-40B4-BE49-F238E27FC236}">
-                <a16:creationId xmlns:a16="http://schemas.microsoft.com/office/drawing/2014/main" id="{DB1C119C-B590-D055-6B10-AAE861F0D2B1}"/>
+                <a16:creationId xmlns:a16="http://schemas.microsoft.com/office/drawing/2014/main" xmlns="" id="{DB1C119C-B590-D055-6B10-AAE861F0D2B1}"/>
               </a:ext>
             </a:extLst>
           </p:cNvPr>
@@ -3212,7 +3212,7 @@
           <p:cNvPr id="6" name="바닥글 개체 틀 5">
             <a:extLst>
               <a:ext uri="{FF2B5EF4-FFF2-40B4-BE49-F238E27FC236}">
-                <a16:creationId xmlns:a16="http://schemas.microsoft.com/office/drawing/2014/main" id="{00064F92-4550-973E-464E-89CA3E7EED4F}"/>
+                <a16:creationId xmlns:a16="http://schemas.microsoft.com/office/drawing/2014/main" xmlns="" id="{00064F92-4550-973E-464E-89CA3E7EED4F}"/>
               </a:ext>
             </a:extLst>
           </p:cNvPr>
@@ -3237,7 +3237,7 @@
           <p:cNvPr id="7" name="슬라이드 번호 개체 틀 6">
             <a:extLst>
               <a:ext uri="{FF2B5EF4-FFF2-40B4-BE49-F238E27FC236}">
-                <a16:creationId xmlns:a16="http://schemas.microsoft.com/office/drawing/2014/main" id="{708384D1-792D-8EA8-718E-F756CEE623A7}"/>
+                <a16:creationId xmlns:a16="http://schemas.microsoft.com/office/drawing/2014/main" xmlns="" id="{708384D1-792D-8EA8-718E-F756CEE623A7}"/>
               </a:ext>
             </a:extLst>
           </p:cNvPr>
@@ -3301,7 +3301,7 @@
           <p:cNvPr id="2" name="제목 개체 틀 1">
             <a:extLst>
               <a:ext uri="{FF2B5EF4-FFF2-40B4-BE49-F238E27FC236}">
-                <a16:creationId xmlns:a16="http://schemas.microsoft.com/office/drawing/2014/main" id="{C0AC0570-6E75-D8C0-582D-3A448969CF8B}"/>
+                <a16:creationId xmlns:a16="http://schemas.microsoft.com/office/drawing/2014/main" xmlns="" id="{C0AC0570-6E75-D8C0-582D-3A448969CF8B}"/>
               </a:ext>
             </a:extLst>
           </p:cNvPr>
@@ -3339,7 +3339,7 @@
           <p:cNvPr id="3" name="텍스트 개체 틀 2">
             <a:extLst>
               <a:ext uri="{FF2B5EF4-FFF2-40B4-BE49-F238E27FC236}">
-                <a16:creationId xmlns:a16="http://schemas.microsoft.com/office/drawing/2014/main" id="{79ADFDDF-DF3C-19FA-0ED8-5D640C08DB4B}"/>
+                <a16:creationId xmlns:a16="http://schemas.microsoft.com/office/drawing/2014/main" xmlns="" id="{79ADFDDF-DF3C-19FA-0ED8-5D640C08DB4B}"/>
               </a:ext>
             </a:extLst>
           </p:cNvPr>
@@ -3406,7 +3406,7 @@
           <p:cNvPr id="4" name="날짜 개체 틀 3">
             <a:extLst>
               <a:ext uri="{FF2B5EF4-FFF2-40B4-BE49-F238E27FC236}">
-                <a16:creationId xmlns:a16="http://schemas.microsoft.com/office/drawing/2014/main" id="{AB9AC677-7913-29B2-30F7-969771FA5D05}"/>
+                <a16:creationId xmlns:a16="http://schemas.microsoft.com/office/drawing/2014/main" xmlns="" id="{AB9AC677-7913-29B2-30F7-969771FA5D05}"/>
               </a:ext>
             </a:extLst>
           </p:cNvPr>
@@ -3453,7 +3453,7 @@
           <p:cNvPr id="5" name="바닥글 개체 틀 4">
             <a:extLst>
               <a:ext uri="{FF2B5EF4-FFF2-40B4-BE49-F238E27FC236}">
-                <a16:creationId xmlns:a16="http://schemas.microsoft.com/office/drawing/2014/main" id="{3A6836E4-21B2-245A-8933-7F64F64AC382}"/>
+                <a16:creationId xmlns:a16="http://schemas.microsoft.com/office/drawing/2014/main" xmlns="" id="{3A6836E4-21B2-245A-8933-7F64F64AC382}"/>
               </a:ext>
             </a:extLst>
           </p:cNvPr>
@@ -3496,7 +3496,7 @@
           <p:cNvPr id="6" name="슬라이드 번호 개체 틀 5">
             <a:extLst>
               <a:ext uri="{FF2B5EF4-FFF2-40B4-BE49-F238E27FC236}">
-                <a16:creationId xmlns:a16="http://schemas.microsoft.com/office/drawing/2014/main" id="{6F2D0B4E-8F0D-F1B8-2A71-9862FC9749C5}"/>
+                <a16:creationId xmlns:a16="http://schemas.microsoft.com/office/drawing/2014/main" xmlns="" id="{6F2D0B4E-8F0D-F1B8-2A71-9862FC9749C5}"/>
               </a:ext>
             </a:extLst>
           </p:cNvPr>
@@ -3867,8 +3867,8 @@
         </p:nvSpPr>
         <p:spPr>
           <a:xfrm>
-            <a:off x="540190" y="3059668"/>
-            <a:ext cx="7417806" cy="738664"/>
+            <a:off x="540190" y="2959688"/>
+            <a:ext cx="7417806" cy="461665"/>
           </a:xfrm>
           <a:prstGeom prst="rect">
             <a:avLst/>
@@ -3881,46 +3881,101 @@
           <a:lstStyle/>
           <a:p>
             <a:r>
-              <a:rPr lang="ko-KR" altLang="en-US" sz="2400" dirty="0"/>
+              <a:rPr lang="ko-KR" altLang="en-US" sz="2400" dirty="0">
+                <a:latin typeface="나눔바른고딕" panose="020B0603020101020101" pitchFamily="34" charset="-127"/>
+                <a:ea typeface="나눔바른고딕" panose="020B0603020101020101" pitchFamily="34" charset="-127"/>
+              </a:rPr>
               <a:t>주제 </a:t>
             </a:r>
             <a:r>
-              <a:rPr lang="en-US" altLang="ko-KR" sz="2400" dirty="0"/>
+              <a:rPr lang="en-US" altLang="ko-KR" sz="2400" dirty="0">
+                <a:latin typeface="나눔바른고딕" panose="020B0603020101020101" pitchFamily="34" charset="-127"/>
+                <a:ea typeface="나눔바른고딕" panose="020B0603020101020101" pitchFamily="34" charset="-127"/>
+              </a:rPr>
               <a:t>: </a:t>
             </a:r>
             <a:r>
-              <a:rPr lang="ko-KR" altLang="en-US" sz="2400" dirty="0"/>
+              <a:rPr lang="ko-KR" altLang="en-US" sz="2400" dirty="0">
+                <a:latin typeface="나눔바른고딕" panose="020B0603020101020101" pitchFamily="34" charset="-127"/>
+                <a:ea typeface="나눔바른고딕" panose="020B0603020101020101" pitchFamily="34" charset="-127"/>
+              </a:rPr>
               <a:t>캐릭터 애니메이션 </a:t>
             </a:r>
             <a:r>
-              <a:rPr lang="ko-KR" altLang="en-US" sz="2400" dirty="0" err="1"/>
+              <a:rPr lang="ko-KR" altLang="en-US" sz="2400" dirty="0" err="1">
+                <a:latin typeface="나눔바른고딕" panose="020B0603020101020101" pitchFamily="34" charset="-127"/>
+                <a:ea typeface="나눔바른고딕" panose="020B0603020101020101" pitchFamily="34" charset="-127"/>
+              </a:rPr>
               <a:t>파쿠르</a:t>
             </a:r>
             <a:r>
-              <a:rPr lang="ko-KR" altLang="en-US" sz="2400" dirty="0"/>
+              <a:rPr lang="ko-KR" altLang="en-US" sz="2400" dirty="0">
+                <a:latin typeface="나눔바른고딕" panose="020B0603020101020101" pitchFamily="34" charset="-127"/>
+                <a:ea typeface="나눔바른고딕" panose="020B0603020101020101" pitchFamily="34" charset="-127"/>
+              </a:rPr>
               <a:t> 시스템 </a:t>
             </a:r>
             <a:r>
-              <a:rPr lang="en-US" altLang="ko-KR" sz="2400" dirty="0"/>
-              <a:t>2</a:t>
-            </a:r>
-            <a:r>
-              <a:rPr lang="ko-KR" altLang="en-US" sz="2400"/>
+              <a:rPr lang="en-US" altLang="ko-KR" sz="2400" dirty="0">
+                <a:latin typeface="나눔바른고딕" panose="020B0603020101020101" pitchFamily="34" charset="-127"/>
+                <a:ea typeface="나눔바른고딕" panose="020B0603020101020101" pitchFamily="34" charset="-127"/>
+              </a:rPr>
+              <a:t>1</a:t>
+            </a:r>
+            <a:r>
+              <a:rPr lang="ko-KR" altLang="en-US" sz="2400" dirty="0" smtClean="0">
+                <a:latin typeface="나눔바른고딕" panose="020B0603020101020101" pitchFamily="34" charset="-127"/>
+                <a:ea typeface="나눔바른고딕" panose="020B0603020101020101" pitchFamily="34" charset="-127"/>
+              </a:rPr>
               <a:t>주차</a:t>
             </a:r>
-            <a:endParaRPr lang="en-US" altLang="ko-KR" sz="2400" dirty="0"/>
-          </a:p>
-          <a:p>
-            <a:r>
-              <a:rPr lang="ko-KR" altLang="en-US" dirty="0"/>
+            <a:endParaRPr lang="en-US" altLang="ko-KR" sz="2400" dirty="0">
+              <a:latin typeface="나눔바른고딕" panose="020B0603020101020101" pitchFamily="34" charset="-127"/>
+              <a:ea typeface="나눔바른고딕" panose="020B0603020101020101" pitchFamily="34" charset="-127"/>
+            </a:endParaRPr>
+          </a:p>
+        </p:txBody>
+      </p:sp>
+      <p:sp>
+        <p:nvSpPr>
+          <p:cNvPr id="3" name="직사각형 2"/>
+          <p:cNvSpPr/>
+          <p:nvPr/>
+        </p:nvSpPr>
+        <p:spPr>
+          <a:xfrm>
+            <a:off x="540190" y="3421353"/>
+            <a:ext cx="1587294" cy="369332"/>
+          </a:xfrm>
+          <a:prstGeom prst="rect">
+            <a:avLst/>
+          </a:prstGeom>
+        </p:spPr>
+        <p:txBody>
+          <a:bodyPr wrap="none">
+            <a:spAutoFit/>
+          </a:bodyPr>
+          <a:lstStyle/>
+          <a:p>
+            <a:r>
+              <a:rPr lang="ko-KR" altLang="en-US" dirty="0">
+                <a:latin typeface="나눔바른고딕" panose="020B0603020101020101" pitchFamily="34" charset="-127"/>
+                <a:ea typeface="나눔바른고딕" panose="020B0603020101020101" pitchFamily="34" charset="-127"/>
+              </a:rPr>
               <a:t>발표자 </a:t>
             </a:r>
             <a:r>
-              <a:rPr lang="en-US" altLang="ko-KR" dirty="0"/>
+              <a:rPr lang="en-US" altLang="ko-KR" dirty="0">
+                <a:latin typeface="나눔바른고딕" panose="020B0603020101020101" pitchFamily="34" charset="-127"/>
+                <a:ea typeface="나눔바른고딕" panose="020B0603020101020101" pitchFamily="34" charset="-127"/>
+              </a:rPr>
               <a:t>: </a:t>
             </a:r>
             <a:r>
-              <a:rPr lang="ko-KR" altLang="en-US" dirty="0"/>
+              <a:rPr lang="ko-KR" altLang="en-US" dirty="0">
+                <a:latin typeface="나눔바른고딕" panose="020B0603020101020101" pitchFamily="34" charset="-127"/>
+                <a:ea typeface="나눔바른고딕" panose="020B0603020101020101" pitchFamily="34" charset="-127"/>
+              </a:rPr>
               <a:t>김정환</a:t>
             </a:r>
           </a:p>
@@ -3929,7 +3984,7 @@
     </p:spTree>
     <p:extLst>
       <p:ext uri="{BB962C8B-B14F-4D97-AF65-F5344CB8AC3E}">
-        <p14:creationId xmlns:p14="http://schemas.microsoft.com/office/powerpoint/2010/main" val="2763767845"/>
+        <p14:creationId xmlns:p14="http://schemas.microsoft.com/office/powerpoint/2010/main" val="3459223942"/>
       </p:ext>
     </p:extLst>
   </p:cSld>
@@ -3947,7 +4002,7 @@
         <p:cNvPr id="1" name="">
           <a:extLst>
             <a:ext uri="{FF2B5EF4-FFF2-40B4-BE49-F238E27FC236}">
-              <a16:creationId xmlns:a16="http://schemas.microsoft.com/office/drawing/2014/main" id="{49DA7EAA-204E-2F90-E52A-6C83B9013025}"/>
+              <a16:creationId xmlns:a16="http://schemas.microsoft.com/office/drawing/2014/main" xmlns="" id="{49DA7EAA-204E-2F90-E52A-6C83B9013025}"/>
             </a:ext>
           </a:extLst>
         </p:cNvPr>
@@ -3967,7 +4022,7 @@
           <p:cNvPr id="8" name="TextBox 7">
             <a:extLst>
               <a:ext uri="{FF2B5EF4-FFF2-40B4-BE49-F238E27FC236}">
-                <a16:creationId xmlns:a16="http://schemas.microsoft.com/office/drawing/2014/main" id="{701093AF-254C-83D7-8032-465A5FB513FB}"/>
+                <a16:creationId xmlns:a16="http://schemas.microsoft.com/office/drawing/2014/main" xmlns="" id="{701093AF-254C-83D7-8032-465A5FB513FB}"/>
               </a:ext>
             </a:extLst>
           </p:cNvPr>
@@ -3991,10 +4046,16 @@
           <a:lstStyle/>
           <a:p>
             <a:r>
-              <a:rPr lang="ko-KR" altLang="en-US" dirty="0"/>
+              <a:rPr lang="ko-KR" altLang="en-US" dirty="0">
+                <a:latin typeface="나눔바른고딕" panose="020B0603020101020101" pitchFamily="34" charset="-127"/>
+                <a:ea typeface="나눔바른고딕" panose="020B0603020101020101" pitchFamily="34" charset="-127"/>
+              </a:rPr>
               <a:t>이번 주 작업 내역</a:t>
             </a:r>
-            <a:endParaRPr lang="en-US" altLang="ko-KR" dirty="0"/>
+            <a:endParaRPr lang="en-US" altLang="ko-KR" dirty="0">
+              <a:latin typeface="나눔바른고딕" panose="020B0603020101020101" pitchFamily="34" charset="-127"/>
+              <a:ea typeface="나눔바른고딕" panose="020B0603020101020101" pitchFamily="34" charset="-127"/>
+            </a:endParaRPr>
           </a:p>
         </p:txBody>
       </p:sp>
@@ -4003,7 +4064,7 @@
           <p:cNvPr id="10" name="TextBox 9">
             <a:extLst>
               <a:ext uri="{FF2B5EF4-FFF2-40B4-BE49-F238E27FC236}">
-                <a16:creationId xmlns:a16="http://schemas.microsoft.com/office/drawing/2014/main" id="{2D538815-CBEF-E37B-5659-B5091F86B485}"/>
+                <a16:creationId xmlns:a16="http://schemas.microsoft.com/office/drawing/2014/main" xmlns="" id="{2D538815-CBEF-E37B-5659-B5091F86B485}"/>
               </a:ext>
             </a:extLst>
           </p:cNvPr>
@@ -4026,15 +4087,17 @@
           </a:bodyPr>
           <a:lstStyle/>
           <a:p>
-            <a:pPr marL="285750" indent="-285750">
-              <a:buFont typeface="Arial" panose="020B0604020202020204" pitchFamily="34" charset="0"/>
-              <a:buChar char="•"/>
-            </a:pPr>
-            <a:r>
-              <a:rPr lang="ko-KR" altLang="en-US" sz="1600" dirty="0"/>
+            <a:r>
+              <a:rPr lang="ko-KR" altLang="en-US" sz="1600" dirty="0">
+                <a:latin typeface="나눔바른고딕" panose="020B0603020101020101" pitchFamily="34" charset="-127"/>
+                <a:ea typeface="나눔바른고딕" panose="020B0603020101020101" pitchFamily="34" charset="-127"/>
+              </a:rPr>
               <a:t>애니메이션 시스템</a:t>
             </a:r>
-            <a:endParaRPr lang="en-US" altLang="ko-KR" sz="1600" dirty="0"/>
+            <a:endParaRPr lang="en-US" altLang="ko-KR" sz="1600" dirty="0">
+              <a:latin typeface="나눔바른고딕" panose="020B0603020101020101" pitchFamily="34" charset="-127"/>
+              <a:ea typeface="나눔바른고딕" panose="020B0603020101020101" pitchFamily="34" charset="-127"/>
+            </a:endParaRPr>
           </a:p>
           <a:p>
             <a:pPr marL="742950" lvl="1" indent="-285750">
@@ -4042,21 +4105,58 @@
               <a:buChar char="•"/>
             </a:pPr>
             <a:r>
-              <a:rPr lang="ko-KR" altLang="en-US" sz="1600" dirty="0"/>
+              <a:rPr lang="ko-KR" altLang="en-US" sz="1600" dirty="0">
+                <a:latin typeface="나눔바른고딕" panose="020B0603020101020101" pitchFamily="34" charset="-127"/>
+                <a:ea typeface="나눔바른고딕" panose="020B0603020101020101" pitchFamily="34" charset="-127"/>
+              </a:rPr>
               <a:t>애니메이션 </a:t>
             </a:r>
             <a:r>
-              <a:rPr lang="ko-KR" altLang="en-US" sz="1600" dirty="0" err="1"/>
+              <a:rPr lang="ko-KR" altLang="en-US" sz="1600" dirty="0" err="1">
+                <a:latin typeface="나눔바른고딕" panose="020B0603020101020101" pitchFamily="34" charset="-127"/>
+                <a:ea typeface="나눔바른고딕" panose="020B0603020101020101" pitchFamily="34" charset="-127"/>
+              </a:rPr>
               <a:t>블렌드</a:t>
             </a:r>
             <a:r>
-              <a:rPr lang="ko-KR" altLang="en-US" sz="1600" dirty="0"/>
+              <a:rPr lang="ko-KR" altLang="en-US" sz="1600" dirty="0">
+                <a:latin typeface="나눔바른고딕" panose="020B0603020101020101" pitchFamily="34" charset="-127"/>
+                <a:ea typeface="나눔바른고딕" panose="020B0603020101020101" pitchFamily="34" charset="-127"/>
+              </a:rPr>
               <a:t> </a:t>
             </a:r>
             <a:r>
-              <a:rPr lang="en-US" altLang="ko-KR" sz="1600" dirty="0"/>
-              <a:t>(2D)</a:t>
-            </a:r>
+              <a:rPr lang="en-US" altLang="ko-KR" sz="1600" dirty="0">
+                <a:latin typeface="나눔바른고딕" panose="020B0603020101020101" pitchFamily="34" charset="-127"/>
+                <a:ea typeface="나눔바른고딕" panose="020B0603020101020101" pitchFamily="34" charset="-127"/>
+              </a:rPr>
+              <a:t>(2D</a:t>
+            </a:r>
+            <a:r>
+              <a:rPr lang="en-US" altLang="ko-KR" sz="1600" dirty="0" smtClean="0">
+                <a:latin typeface="나눔바른고딕" panose="020B0603020101020101" pitchFamily="34" charset="-127"/>
+                <a:ea typeface="나눔바른고딕" panose="020B0603020101020101" pitchFamily="34" charset="-127"/>
+              </a:rPr>
+              <a:t>) – 4</a:t>
+            </a:r>
+            <a:r>
+              <a:rPr lang="ko-KR" altLang="en-US" sz="1600" dirty="0" smtClean="0">
+                <a:latin typeface="나눔바른고딕" panose="020B0603020101020101" pitchFamily="34" charset="-127"/>
+                <a:ea typeface="나눔바른고딕" panose="020B0603020101020101" pitchFamily="34" charset="-127"/>
+              </a:rPr>
+              <a:t>방향 애니메이션을 가중치에 따라 </a:t>
+            </a:r>
+            <a:r>
+              <a:rPr lang="ko-KR" altLang="en-US" sz="1600" dirty="0" err="1" smtClean="0">
+                <a:latin typeface="나눔바른고딕" panose="020B0603020101020101" pitchFamily="34" charset="-127"/>
+                <a:ea typeface="나눔바른고딕" panose="020B0603020101020101" pitchFamily="34" charset="-127"/>
+              </a:rPr>
+              <a:t>블렌드</a:t>
+            </a:r>
+            <a:endParaRPr lang="en-US" altLang="ko-KR" sz="1600" dirty="0">
+              <a:latin typeface="나눔바른고딕" panose="020B0603020101020101" pitchFamily="34" charset="-127"/>
+              <a:ea typeface="나눔바른고딕" panose="020B0603020101020101" pitchFamily="34" charset="-127"/>
+            </a:endParaRPr>
           </a:p>
           <a:p>
             <a:pPr marL="742950" lvl="1" indent="-285750">
@@ -4064,10 +4164,44 @@
               <a:buChar char="•"/>
             </a:pPr>
             <a:r>
-              <a:rPr lang="ko-KR" altLang="en-US" sz="1600" dirty="0"/>
-              <a:t>애니메이션 몽타주</a:t>
-            </a:r>
-            <a:endParaRPr lang="en-US" altLang="ko-KR" sz="1600" dirty="0"/>
+              <a:rPr lang="ko-KR" altLang="en-US" sz="1600" dirty="0">
+                <a:latin typeface="나눔바른고딕" panose="020B0603020101020101" pitchFamily="34" charset="-127"/>
+                <a:ea typeface="나눔바른고딕" panose="020B0603020101020101" pitchFamily="34" charset="-127"/>
+              </a:rPr>
+              <a:t>애니메이션 </a:t>
+            </a:r>
+            <a:r>
+              <a:rPr lang="ko-KR" altLang="en-US" sz="1600" dirty="0" smtClean="0">
+                <a:latin typeface="나눔바른고딕" panose="020B0603020101020101" pitchFamily="34" charset="-127"/>
+                <a:ea typeface="나눔바른고딕" panose="020B0603020101020101" pitchFamily="34" charset="-127"/>
+              </a:rPr>
+              <a:t>몽타주</a:t>
+            </a:r>
+            <a:r>
+              <a:rPr lang="en-US" altLang="ko-KR" sz="1600" dirty="0">
+                <a:latin typeface="나눔바른고딕" panose="020B0603020101020101" pitchFamily="34" charset="-127"/>
+                <a:ea typeface="나눔바른고딕" panose="020B0603020101020101" pitchFamily="34" charset="-127"/>
+              </a:rPr>
+              <a:t> </a:t>
+            </a:r>
+            <a:r>
+              <a:rPr lang="en-US" altLang="ko-KR" sz="1600" dirty="0" smtClean="0">
+                <a:latin typeface="나눔바른고딕" panose="020B0603020101020101" pitchFamily="34" charset="-127"/>
+                <a:ea typeface="나눔바른고딕" panose="020B0603020101020101" pitchFamily="34" charset="-127"/>
+              </a:rPr>
+              <a:t>– </a:t>
+            </a:r>
+            <a:r>
+              <a:rPr lang="ko-KR" altLang="en-US" sz="1600" smtClean="0">
+                <a:latin typeface="나눔바른고딕" panose="020B0603020101020101" pitchFamily="34" charset="-127"/>
+                <a:ea typeface="나눔바른고딕" panose="020B0603020101020101" pitchFamily="34" charset="-127"/>
+              </a:rPr>
+              <a:t>단발성 재생을 위한 애니메이션 처리</a:t>
+            </a:r>
+            <a:endParaRPr lang="en-US" altLang="ko-KR" sz="1600" dirty="0">
+              <a:latin typeface="나눔바른고딕" panose="020B0603020101020101" pitchFamily="34" charset="-127"/>
+              <a:ea typeface="나눔바른고딕" panose="020B0603020101020101" pitchFamily="34" charset="-127"/>
+            </a:endParaRPr>
           </a:p>
         </p:txBody>
       </p:sp>
@@ -4076,7 +4210,7 @@
           <p:cNvPr id="12" name="TextBox 11">
             <a:extLst>
               <a:ext uri="{FF2B5EF4-FFF2-40B4-BE49-F238E27FC236}">
-                <a16:creationId xmlns:a16="http://schemas.microsoft.com/office/drawing/2014/main" id="{8E37654D-B1C1-B17B-2A32-BB0F324B7AC3}"/>
+                <a16:creationId xmlns:a16="http://schemas.microsoft.com/office/drawing/2014/main" xmlns="" id="{8E37654D-B1C1-B17B-2A32-BB0F324B7AC3}"/>
               </a:ext>
             </a:extLst>
           </p:cNvPr>
@@ -4085,8 +4219,8 @@
         </p:nvSpPr>
         <p:spPr>
           <a:xfrm>
-            <a:off x="302451" y="1825652"/>
-            <a:ext cx="8118068" cy="338554"/>
+            <a:off x="302451" y="3075030"/>
+            <a:ext cx="8118068" cy="1323439"/>
           </a:xfrm>
           <a:prstGeom prst="rect">
             <a:avLst/>
@@ -4099,15 +4233,182 @@
           </a:bodyPr>
           <a:lstStyle/>
           <a:p>
-            <a:pPr marL="285750" indent="-285750">
+            <a:r>
+              <a:rPr lang="ko-KR" altLang="en-US" sz="1600" dirty="0" smtClean="0">
+                <a:latin typeface="나눔바른고딕" panose="020B0603020101020101" pitchFamily="34" charset="-127"/>
+                <a:ea typeface="나눔바른고딕" panose="020B0603020101020101" pitchFamily="34" charset="-127"/>
+              </a:rPr>
+              <a:t>향후 구현 방향  </a:t>
+            </a:r>
+            <a:endParaRPr lang="en-US" altLang="ko-KR" sz="1600" dirty="0" smtClean="0">
+              <a:latin typeface="나눔바른고딕" panose="020B0603020101020101" pitchFamily="34" charset="-127"/>
+              <a:ea typeface="나눔바른고딕" panose="020B0603020101020101" pitchFamily="34" charset="-127"/>
+            </a:endParaRPr>
+          </a:p>
+          <a:p>
+            <a:pPr marL="742950" lvl="1" indent="-285750">
               <a:buFont typeface="Arial" panose="020B0604020202020204" pitchFamily="34" charset="0"/>
               <a:buChar char="•"/>
             </a:pPr>
             <a:r>
-              <a:rPr lang="ko-KR" altLang="en-US" sz="1600" dirty="0"/>
-              <a:t>구성</a:t>
-            </a:r>
-            <a:endParaRPr lang="en-US" altLang="ko-KR" sz="1600" dirty="0"/>
+              <a:rPr lang="ko-KR" altLang="en-US" sz="1600" dirty="0" smtClean="0">
+                <a:latin typeface="나눔바른고딕" panose="020B0603020101020101" pitchFamily="34" charset="-127"/>
+                <a:ea typeface="나눔바른고딕" panose="020B0603020101020101" pitchFamily="34" charset="-127"/>
+              </a:rPr>
+              <a:t>지속적인 재생 필요 </a:t>
+            </a:r>
+            <a:r>
+              <a:rPr lang="en-US" altLang="ko-KR" sz="1600" dirty="0">
+                <a:latin typeface="나눔바른고딕" panose="020B0603020101020101" pitchFamily="34" charset="-127"/>
+                <a:ea typeface="나눔바른고딕" panose="020B0603020101020101" pitchFamily="34" charset="-127"/>
+              </a:rPr>
+              <a:t> </a:t>
+            </a:r>
+            <a:r>
+              <a:rPr lang="en-US" altLang="ko-KR" sz="1600" dirty="0" smtClean="0">
+                <a:latin typeface="나눔바른고딕" panose="020B0603020101020101" pitchFamily="34" charset="-127"/>
+                <a:ea typeface="나눔바른고딕" panose="020B0603020101020101" pitchFamily="34" charset="-127"/>
+              </a:rPr>
+              <a:t>-&gt; Base Layer (</a:t>
+            </a:r>
+            <a:r>
+              <a:rPr lang="en-US" altLang="ko-KR" sz="1600" dirty="0" err="1" smtClean="0">
+                <a:latin typeface="나눔바른고딕" panose="020B0603020101020101" pitchFamily="34" charset="-127"/>
+                <a:ea typeface="나눔바른고딕" panose="020B0603020101020101" pitchFamily="34" charset="-127"/>
+              </a:rPr>
+              <a:t>BlendClip</a:t>
+            </a:r>
+            <a:r>
+              <a:rPr lang="en-US" altLang="ko-KR" sz="1600" dirty="0" smtClean="0">
+                <a:latin typeface="나눔바른고딕" panose="020B0603020101020101" pitchFamily="34" charset="-127"/>
+                <a:ea typeface="나눔바른고딕" panose="020B0603020101020101" pitchFamily="34" charset="-127"/>
+              </a:rPr>
+              <a:t>)</a:t>
+            </a:r>
+          </a:p>
+          <a:p>
+            <a:pPr marL="1200150" lvl="2" indent="-285750">
+              <a:buFont typeface="Arial" panose="020B0604020202020204" pitchFamily="34" charset="0"/>
+              <a:buChar char="•"/>
+            </a:pPr>
+            <a:r>
+              <a:rPr lang="ko-KR" altLang="en-US" sz="1600" dirty="0" smtClean="0">
+                <a:latin typeface="나눔바른고딕" panose="020B0603020101020101" pitchFamily="34" charset="-127"/>
+                <a:ea typeface="나눔바른고딕" panose="020B0603020101020101" pitchFamily="34" charset="-127"/>
+              </a:rPr>
+              <a:t>평지</a:t>
+            </a:r>
+            <a:r>
+              <a:rPr lang="en-US" altLang="ko-KR" sz="1600" dirty="0" smtClean="0">
+                <a:latin typeface="나눔바른고딕" panose="020B0603020101020101" pitchFamily="34" charset="-127"/>
+                <a:ea typeface="나눔바른고딕" panose="020B0603020101020101" pitchFamily="34" charset="-127"/>
+              </a:rPr>
+              <a:t>, </a:t>
+            </a:r>
+            <a:r>
+              <a:rPr lang="ko-KR" altLang="en-US" sz="1600" dirty="0" smtClean="0">
+                <a:latin typeface="나눔바른고딕" panose="020B0603020101020101" pitchFamily="34" charset="-127"/>
+                <a:ea typeface="나눔바른고딕" panose="020B0603020101020101" pitchFamily="34" charset="-127"/>
+              </a:rPr>
+              <a:t>벽면 매달린 상태</a:t>
+            </a:r>
+            <a:r>
+              <a:rPr lang="en-US" altLang="ko-KR" sz="1600" dirty="0" smtClean="0">
+                <a:latin typeface="나눔바른고딕" panose="020B0603020101020101" pitchFamily="34" charset="-127"/>
+                <a:ea typeface="나눔바른고딕" panose="020B0603020101020101" pitchFamily="34" charset="-127"/>
+              </a:rPr>
+              <a:t>, </a:t>
+            </a:r>
+            <a:r>
+              <a:rPr lang="ko-KR" altLang="en-US" sz="1600" dirty="0" smtClean="0">
+                <a:latin typeface="나눔바른고딕" panose="020B0603020101020101" pitchFamily="34" charset="-127"/>
+                <a:ea typeface="나눔바른고딕" panose="020B0603020101020101" pitchFamily="34" charset="-127"/>
+              </a:rPr>
+              <a:t>벽 오르기 등 상태 머신 구현</a:t>
+            </a:r>
+            <a:endParaRPr lang="en-US" altLang="ko-KR" sz="1600" dirty="0" smtClean="0">
+              <a:latin typeface="나눔바른고딕" panose="020B0603020101020101" pitchFamily="34" charset="-127"/>
+              <a:ea typeface="나눔바른고딕" panose="020B0603020101020101" pitchFamily="34" charset="-127"/>
+            </a:endParaRPr>
+          </a:p>
+          <a:p>
+            <a:pPr marL="742950" lvl="1" indent="-285750">
+              <a:buFont typeface="Arial" panose="020B0604020202020204" pitchFamily="34" charset="0"/>
+              <a:buChar char="•"/>
+            </a:pPr>
+            <a:r>
+              <a:rPr lang="ko-KR" altLang="en-US" sz="1600" dirty="0" smtClean="0">
+                <a:latin typeface="나눔바른고딕" panose="020B0603020101020101" pitchFamily="34" charset="-127"/>
+                <a:ea typeface="나눔바른고딕" panose="020B0603020101020101" pitchFamily="34" charset="-127"/>
+              </a:rPr>
+              <a:t>한 차례 재생 필요 </a:t>
+            </a:r>
+            <a:r>
+              <a:rPr lang="en-US" altLang="ko-KR" sz="1600" dirty="0" smtClean="0">
+                <a:latin typeface="나눔바른고딕" panose="020B0603020101020101" pitchFamily="34" charset="-127"/>
+                <a:ea typeface="나눔바른고딕" panose="020B0603020101020101" pitchFamily="34" charset="-127"/>
+              </a:rPr>
+              <a:t>-&gt; Override Layer (</a:t>
+            </a:r>
+            <a:r>
+              <a:rPr lang="en-US" altLang="ko-KR" sz="1600" dirty="0" err="1" smtClean="0">
+                <a:latin typeface="나눔바른고딕" panose="020B0603020101020101" pitchFamily="34" charset="-127"/>
+                <a:ea typeface="나눔바른고딕" panose="020B0603020101020101" pitchFamily="34" charset="-127"/>
+              </a:rPr>
+              <a:t>ActionClip</a:t>
+            </a:r>
+            <a:r>
+              <a:rPr lang="en-US" altLang="ko-KR" sz="1600" dirty="0" smtClean="0">
+                <a:latin typeface="나눔바른고딕" panose="020B0603020101020101" pitchFamily="34" charset="-127"/>
+                <a:ea typeface="나눔바른고딕" panose="020B0603020101020101" pitchFamily="34" charset="-127"/>
+              </a:rPr>
+              <a:t>)</a:t>
+            </a:r>
+          </a:p>
+          <a:p>
+            <a:pPr marL="1200150" lvl="2" indent="-285750">
+              <a:buFont typeface="Arial" panose="020B0604020202020204" pitchFamily="34" charset="0"/>
+              <a:buChar char="•"/>
+            </a:pPr>
+            <a:r>
+              <a:rPr lang="ko-KR" altLang="en-US" sz="1600" dirty="0" smtClean="0">
+                <a:latin typeface="나눔바른고딕" panose="020B0603020101020101" pitchFamily="34" charset="-127"/>
+                <a:ea typeface="나눔바른고딕" panose="020B0603020101020101" pitchFamily="34" charset="-127"/>
+              </a:rPr>
+              <a:t>점프</a:t>
+            </a:r>
+            <a:r>
+              <a:rPr lang="en-US" altLang="ko-KR" sz="1600" dirty="0" smtClean="0">
+                <a:latin typeface="나눔바른고딕" panose="020B0603020101020101" pitchFamily="34" charset="-127"/>
+                <a:ea typeface="나눔바른고딕" panose="020B0603020101020101" pitchFamily="34" charset="-127"/>
+              </a:rPr>
+              <a:t>, </a:t>
+            </a:r>
+            <a:r>
+              <a:rPr lang="ko-KR" altLang="en-US" sz="1600" dirty="0" smtClean="0">
+                <a:latin typeface="나눔바른고딕" panose="020B0603020101020101" pitchFamily="34" charset="-127"/>
+                <a:ea typeface="나눔바른고딕" panose="020B0603020101020101" pitchFamily="34" charset="-127"/>
+              </a:rPr>
+              <a:t>담 넘기</a:t>
+            </a:r>
+            <a:r>
+              <a:rPr lang="en-US" altLang="ko-KR" sz="1600" dirty="0">
+                <a:latin typeface="나눔바른고딕" panose="020B0603020101020101" pitchFamily="34" charset="-127"/>
+                <a:ea typeface="나눔바른고딕" panose="020B0603020101020101" pitchFamily="34" charset="-127"/>
+              </a:rPr>
+              <a:t> </a:t>
+            </a:r>
+            <a:r>
+              <a:rPr lang="ko-KR" altLang="en-US" sz="1600" dirty="0" smtClean="0">
+                <a:latin typeface="나눔바른고딕" panose="020B0603020101020101" pitchFamily="34" charset="-127"/>
+                <a:ea typeface="나눔바른고딕" panose="020B0603020101020101" pitchFamily="34" charset="-127"/>
+              </a:rPr>
+              <a:t>등 </a:t>
+            </a:r>
+            <a:endParaRPr lang="en-US" altLang="ko-KR" sz="1600" dirty="0" smtClean="0">
+              <a:latin typeface="나눔바른고딕" panose="020B0603020101020101" pitchFamily="34" charset="-127"/>
+              <a:ea typeface="나눔바른고딕" panose="020B0603020101020101" pitchFamily="34" charset="-127"/>
+            </a:endParaRPr>
           </a:p>
         </p:txBody>
       </p:sp>
@@ -4132,7 +4433,7 @@
         <p:cNvPr id="1" name="">
           <a:extLst>
             <a:ext uri="{FF2B5EF4-FFF2-40B4-BE49-F238E27FC236}">
-              <a16:creationId xmlns:a16="http://schemas.microsoft.com/office/drawing/2014/main" id="{A8A918DD-265C-DDB9-B7FC-A9D58086B7F3}"/>
+              <a16:creationId xmlns:a16="http://schemas.microsoft.com/office/drawing/2014/main" xmlns="" id="{A8A918DD-265C-DDB9-B7FC-A9D58086B7F3}"/>
             </a:ext>
           </a:extLst>
         </p:cNvPr>
@@ -4152,7 +4453,7 @@
           <p:cNvPr id="8" name="TextBox 7">
             <a:extLst>
               <a:ext uri="{FF2B5EF4-FFF2-40B4-BE49-F238E27FC236}">
-                <a16:creationId xmlns:a16="http://schemas.microsoft.com/office/drawing/2014/main" id="{38DA243F-1ACF-A8F6-3DE3-D3DB1A8A7D80}"/>
+                <a16:creationId xmlns:a16="http://schemas.microsoft.com/office/drawing/2014/main" xmlns="" id="{38DA243F-1ACF-A8F6-3DE3-D3DB1A8A7D80}"/>
               </a:ext>
             </a:extLst>
           </p:cNvPr>
@@ -4176,10 +4477,16 @@
           <a:lstStyle/>
           <a:p>
             <a:r>
-              <a:rPr lang="ko-KR" altLang="en-US" dirty="0"/>
+              <a:rPr lang="ko-KR" altLang="en-US" dirty="0">
+                <a:latin typeface="나눔바른고딕" panose="020B0603020101020101" pitchFamily="34" charset="-127"/>
+                <a:ea typeface="나눔바른고딕" panose="020B0603020101020101" pitchFamily="34" charset="-127"/>
+              </a:rPr>
               <a:t>이번 주 작업 내역</a:t>
             </a:r>
-            <a:endParaRPr lang="en-US" altLang="ko-KR" dirty="0"/>
+            <a:endParaRPr lang="en-US" altLang="ko-KR" dirty="0">
+              <a:latin typeface="나눔바른고딕" panose="020B0603020101020101" pitchFamily="34" charset="-127"/>
+              <a:ea typeface="나눔바른고딕" panose="020B0603020101020101" pitchFamily="34" charset="-127"/>
+            </a:endParaRPr>
           </a:p>
         </p:txBody>
       </p:sp>
@@ -4188,7 +4495,7 @@
           <p:cNvPr id="10" name="TextBox 9">
             <a:extLst>
               <a:ext uri="{FF2B5EF4-FFF2-40B4-BE49-F238E27FC236}">
-                <a16:creationId xmlns:a16="http://schemas.microsoft.com/office/drawing/2014/main" id="{75DAA775-31E2-50BB-2BF3-4EF90C8083FC}"/>
+                <a16:creationId xmlns:a16="http://schemas.microsoft.com/office/drawing/2014/main" xmlns="" id="{75DAA775-31E2-50BB-2BF3-4EF90C8083FC}"/>
               </a:ext>
             </a:extLst>
           </p:cNvPr>
@@ -4198,7 +4505,7 @@
         <p:spPr>
           <a:xfrm>
             <a:off x="302451" y="758852"/>
-            <a:ext cx="8118068" cy="338554"/>
+            <a:ext cx="8118068" cy="830997"/>
           </a:xfrm>
           <a:prstGeom prst="rect">
             <a:avLst/>
@@ -4216,30 +4523,200 @@
               <a:buChar char="•"/>
             </a:pPr>
             <a:r>
-              <a:rPr lang="en-US" altLang="ko-KR" sz="1600" dirty="0"/>
+              <a:rPr lang="en-US" altLang="ko-KR" sz="1600" dirty="0">
+                <a:latin typeface="나눔바른고딕" panose="020B0603020101020101" pitchFamily="34" charset="-127"/>
+                <a:ea typeface="나눔바른고딕" panose="020B0603020101020101" pitchFamily="34" charset="-127"/>
+              </a:rPr>
               <a:t>PhysX</a:t>
             </a:r>
             <a:r>
-              <a:rPr lang="ko-KR" altLang="en-US" sz="1600" dirty="0"/>
-              <a:t> 적용</a:t>
-            </a:r>
-            <a:r>
-              <a:rPr lang="en-US" altLang="ko-KR" sz="1600" dirty="0"/>
+              <a:rPr lang="ko-KR" altLang="en-US" sz="1600" dirty="0">
+                <a:latin typeface="나눔바른고딕" panose="020B0603020101020101" pitchFamily="34" charset="-127"/>
+                <a:ea typeface="나눔바른고딕" panose="020B0603020101020101" pitchFamily="34" charset="-127"/>
+              </a:rPr>
               <a:t> </a:t>
             </a:r>
             <a:r>
-              <a:rPr lang="ko-KR" altLang="en-US" sz="1600" dirty="0"/>
-              <a:t>및</a:t>
-            </a:r>
-            <a:r>
-              <a:rPr lang="en-US" altLang="ko-KR" sz="1600" dirty="0"/>
-              <a:t> </a:t>
-            </a:r>
-            <a:r>
-              <a:rPr lang="ko-KR" altLang="en-US" sz="1600" dirty="0"/>
-              <a:t>객체 식별</a:t>
-            </a:r>
-            <a:endParaRPr lang="en-US" altLang="ko-KR" sz="1600" dirty="0"/>
+              <a:rPr lang="ko-KR" altLang="en-US" sz="1600" dirty="0" smtClean="0">
+                <a:latin typeface="나눔바른고딕" panose="020B0603020101020101" pitchFamily="34" charset="-127"/>
+                <a:ea typeface="나눔바른고딕" panose="020B0603020101020101" pitchFamily="34" charset="-127"/>
+              </a:rPr>
+              <a:t>적용</a:t>
+            </a:r>
+            <a:endParaRPr lang="en-US" altLang="ko-KR" sz="1600" dirty="0" smtClean="0">
+              <a:latin typeface="나눔바른고딕" panose="020B0603020101020101" pitchFamily="34" charset="-127"/>
+              <a:ea typeface="나눔바른고딕" panose="020B0603020101020101" pitchFamily="34" charset="-127"/>
+            </a:endParaRPr>
+          </a:p>
+          <a:p>
+            <a:pPr marL="742950" lvl="1" indent="-285750">
+              <a:buFont typeface="Arial" panose="020B0604020202020204" pitchFamily="34" charset="0"/>
+              <a:buChar char="•"/>
+            </a:pPr>
+            <a:r>
+              <a:rPr lang="ko-KR" altLang="en-US" sz="1600" dirty="0" smtClean="0">
+                <a:latin typeface="나눔바른고딕" panose="020B0603020101020101" pitchFamily="34" charset="-127"/>
+                <a:ea typeface="나눔바른고딕" panose="020B0603020101020101" pitchFamily="34" charset="-127"/>
+              </a:rPr>
+              <a:t>지형지물 충돌</a:t>
+            </a:r>
+            <a:endParaRPr lang="en-US" altLang="ko-KR" sz="1600" dirty="0">
+              <a:latin typeface="나눔바른고딕" panose="020B0603020101020101" pitchFamily="34" charset="-127"/>
+              <a:ea typeface="나눔바른고딕" panose="020B0603020101020101" pitchFamily="34" charset="-127"/>
+            </a:endParaRPr>
+          </a:p>
+          <a:p>
+            <a:pPr marL="742950" lvl="1" indent="-285750">
+              <a:buFont typeface="Arial" panose="020B0604020202020204" pitchFamily="34" charset="0"/>
+              <a:buChar char="•"/>
+            </a:pPr>
+            <a:r>
+              <a:rPr lang="ko-KR" altLang="en-US" sz="1600" dirty="0" smtClean="0">
+                <a:latin typeface="나눔바른고딕" panose="020B0603020101020101" pitchFamily="34" charset="-127"/>
+                <a:ea typeface="나눔바른고딕" panose="020B0603020101020101" pitchFamily="34" charset="-127"/>
+              </a:rPr>
+              <a:t>장애물을 향해 </a:t>
+            </a:r>
+            <a:r>
+              <a:rPr lang="ko-KR" altLang="en-US" sz="1600" dirty="0" err="1" smtClean="0">
+                <a:latin typeface="나눔바른고딕" panose="020B0603020101020101" pitchFamily="34" charset="-127"/>
+                <a:ea typeface="나눔바른고딕" panose="020B0603020101020101" pitchFamily="34" charset="-127"/>
+              </a:rPr>
+              <a:t>레이캐스트로</a:t>
+            </a:r>
+            <a:r>
+              <a:rPr lang="ko-KR" altLang="en-US" sz="1600" dirty="0" smtClean="0">
+                <a:latin typeface="나눔바른고딕" panose="020B0603020101020101" pitchFamily="34" charset="-127"/>
+                <a:ea typeface="나눔바른고딕" panose="020B0603020101020101" pitchFamily="34" charset="-127"/>
+              </a:rPr>
+              <a:t> 환경 탐색</a:t>
+            </a:r>
+            <a:endParaRPr lang="en-US" altLang="ko-KR" sz="1600" dirty="0" smtClean="0">
+              <a:latin typeface="나눔바른고딕" panose="020B0603020101020101" pitchFamily="34" charset="-127"/>
+              <a:ea typeface="나눔바른고딕" panose="020B0603020101020101" pitchFamily="34" charset="-127"/>
+            </a:endParaRPr>
+          </a:p>
+        </p:txBody>
+      </p:sp>
+      <p:sp>
+        <p:nvSpPr>
+          <p:cNvPr id="4" name="TextBox 3">
+            <a:extLst>
+              <a:ext uri="{FF2B5EF4-FFF2-40B4-BE49-F238E27FC236}">
+                <a16:creationId xmlns:a16="http://schemas.microsoft.com/office/drawing/2014/main" xmlns="" id="{75DAA775-31E2-50BB-2BF3-4EF90C8083FC}"/>
+              </a:ext>
+            </a:extLst>
+          </p:cNvPr>
+          <p:cNvSpPr txBox="1"/>
+          <p:nvPr/>
+        </p:nvSpPr>
+        <p:spPr>
+          <a:xfrm>
+            <a:off x="302451" y="3654452"/>
+            <a:ext cx="8118068" cy="830997"/>
+          </a:xfrm>
+          <a:prstGeom prst="rect">
+            <a:avLst/>
+          </a:prstGeom>
+          <a:noFill/>
+        </p:spPr>
+        <p:txBody>
+          <a:bodyPr wrap="square" rtlCol="0">
+            <a:spAutoFit/>
+          </a:bodyPr>
+          <a:lstStyle/>
+          <a:p>
+            <a:pPr marL="285750" indent="-285750">
+              <a:buFont typeface="Arial" panose="020B0604020202020204" pitchFamily="34" charset="0"/>
+              <a:buChar char="•"/>
+            </a:pPr>
+            <a:r>
+              <a:rPr lang="ko-KR" altLang="en-US" sz="1600" dirty="0" smtClean="0">
+                <a:latin typeface="나눔바른고딕" panose="020B0603020101020101" pitchFamily="34" charset="-127"/>
+                <a:ea typeface="나눔바른고딕" panose="020B0603020101020101" pitchFamily="34" charset="-127"/>
+              </a:rPr>
+              <a:t>객체 식별 </a:t>
+            </a:r>
+            <a:r>
+              <a:rPr lang="en-US" altLang="ko-KR" sz="1600" dirty="0" smtClean="0">
+                <a:latin typeface="나눔바른고딕" panose="020B0603020101020101" pitchFamily="34" charset="-127"/>
+                <a:ea typeface="나눔바른고딕" panose="020B0603020101020101" pitchFamily="34" charset="-127"/>
+              </a:rPr>
+              <a:t>:</a:t>
+            </a:r>
+            <a:r>
+              <a:rPr lang="ko-KR" altLang="en-US" sz="1600" dirty="0" smtClean="0">
+                <a:latin typeface="나눔바른고딕" panose="020B0603020101020101" pitchFamily="34" charset="-127"/>
+                <a:ea typeface="나눔바른고딕" panose="020B0603020101020101" pitchFamily="34" charset="-127"/>
+              </a:rPr>
+              <a:t> 태그</a:t>
+            </a:r>
+            <a:endParaRPr lang="en-US" altLang="ko-KR" sz="1600" dirty="0" smtClean="0">
+              <a:latin typeface="나눔바른고딕" panose="020B0603020101020101" pitchFamily="34" charset="-127"/>
+              <a:ea typeface="나눔바른고딕" panose="020B0603020101020101" pitchFamily="34" charset="-127"/>
+            </a:endParaRPr>
+          </a:p>
+          <a:p>
+            <a:pPr marL="742950" lvl="1" indent="-285750">
+              <a:buFont typeface="Arial" panose="020B0604020202020204" pitchFamily="34" charset="0"/>
+              <a:buChar char="•"/>
+            </a:pPr>
+            <a:r>
+              <a:rPr lang="ko-KR" altLang="en-US" sz="1600" dirty="0" smtClean="0">
+                <a:latin typeface="나눔바른고딕" panose="020B0603020101020101" pitchFamily="34" charset="-127"/>
+                <a:ea typeface="나눔바른고딕" panose="020B0603020101020101" pitchFamily="34" charset="-127"/>
+              </a:rPr>
+              <a:t>부여한 태그를 기반으로 캐릭터의 행위를 결정</a:t>
+            </a:r>
+            <a:endParaRPr lang="en-US" altLang="ko-KR" sz="1600" dirty="0" smtClean="0">
+              <a:latin typeface="나눔바른고딕" panose="020B0603020101020101" pitchFamily="34" charset="-127"/>
+              <a:ea typeface="나눔바른고딕" panose="020B0603020101020101" pitchFamily="34" charset="-127"/>
+            </a:endParaRPr>
+          </a:p>
+          <a:p>
+            <a:pPr marL="742950" lvl="1" indent="-285750">
+              <a:buFont typeface="Arial" panose="020B0604020202020204" pitchFamily="34" charset="0"/>
+              <a:buChar char="•"/>
+            </a:pPr>
+            <a:r>
+              <a:rPr lang="ko-KR" altLang="en-US" sz="1600" dirty="0" smtClean="0">
+                <a:latin typeface="나눔바른고딕" panose="020B0603020101020101" pitchFamily="34" charset="-127"/>
+                <a:ea typeface="나눔바른고딕" panose="020B0603020101020101" pitchFamily="34" charset="-127"/>
+              </a:rPr>
+              <a:t>객체 종류 </a:t>
+            </a:r>
+            <a:r>
+              <a:rPr lang="en-US" altLang="ko-KR" sz="1600" dirty="0" smtClean="0">
+                <a:latin typeface="나눔바른고딕" panose="020B0603020101020101" pitchFamily="34" charset="-127"/>
+                <a:ea typeface="나눔바른고딕" panose="020B0603020101020101" pitchFamily="34" charset="-127"/>
+              </a:rPr>
+              <a:t>– </a:t>
+            </a:r>
+            <a:r>
+              <a:rPr lang="ko-KR" altLang="en-US" sz="1600" dirty="0" smtClean="0">
+                <a:latin typeface="나눔바른고딕" panose="020B0603020101020101" pitchFamily="34" charset="-127"/>
+                <a:ea typeface="나눔바른고딕" panose="020B0603020101020101" pitchFamily="34" charset="-127"/>
+              </a:rPr>
+              <a:t>행동 양식 </a:t>
+            </a:r>
+            <a:r>
+              <a:rPr lang="en-US" altLang="ko-KR" sz="1600" dirty="0" smtClean="0">
+                <a:latin typeface="나눔바른고딕" panose="020B0603020101020101" pitchFamily="34" charset="-127"/>
+                <a:ea typeface="나눔바른고딕" panose="020B0603020101020101" pitchFamily="34" charset="-127"/>
+              </a:rPr>
+              <a:t>– </a:t>
+            </a:r>
+            <a:r>
+              <a:rPr lang="ko-KR" altLang="en-US" sz="1600" dirty="0" smtClean="0">
+                <a:latin typeface="나눔바른고딕" panose="020B0603020101020101" pitchFamily="34" charset="-127"/>
+                <a:ea typeface="나눔바른고딕" panose="020B0603020101020101" pitchFamily="34" charset="-127"/>
+              </a:rPr>
+              <a:t>높낮이 유형</a:t>
+            </a:r>
+            <a:endParaRPr lang="en-US" altLang="ko-KR" sz="1600" dirty="0" smtClean="0">
+              <a:latin typeface="나눔바른고딕" panose="020B0603020101020101" pitchFamily="34" charset="-127"/>
+              <a:ea typeface="나눔바른고딕" panose="020B0603020101020101" pitchFamily="34" charset="-127"/>
+            </a:endParaRPr>
           </a:p>
         </p:txBody>
       </p:sp>
@@ -4264,7 +4741,7 @@
         <p:cNvPr id="1" name="">
           <a:extLst>
             <a:ext uri="{FF2B5EF4-FFF2-40B4-BE49-F238E27FC236}">
-              <a16:creationId xmlns:a16="http://schemas.microsoft.com/office/drawing/2014/main" id="{960F3801-1345-73B1-BC4D-455683B38EDD}"/>
+              <a16:creationId xmlns:a16="http://schemas.microsoft.com/office/drawing/2014/main" xmlns="" id="{960F3801-1345-73B1-BC4D-455683B38EDD}"/>
             </a:ext>
           </a:extLst>
         </p:cNvPr>
@@ -4284,7 +4761,7 @@
           <p:cNvPr id="8" name="TextBox 7">
             <a:extLst>
               <a:ext uri="{FF2B5EF4-FFF2-40B4-BE49-F238E27FC236}">
-                <a16:creationId xmlns:a16="http://schemas.microsoft.com/office/drawing/2014/main" id="{953A2C19-7BB6-4B8F-B088-53F2041DCA07}"/>
+                <a16:creationId xmlns:a16="http://schemas.microsoft.com/office/drawing/2014/main" xmlns="" id="{953A2C19-7BB6-4B8F-B088-53F2041DCA07}"/>
               </a:ext>
             </a:extLst>
           </p:cNvPr>
@@ -4308,10 +4785,16 @@
           <a:lstStyle/>
           <a:p>
             <a:r>
-              <a:rPr lang="ko-KR" altLang="en-US" dirty="0"/>
+              <a:rPr lang="ko-KR" altLang="en-US" dirty="0">
+                <a:latin typeface="나눔바른고딕" panose="020B0603020101020101" pitchFamily="34" charset="-127"/>
+                <a:ea typeface="나눔바른고딕" panose="020B0603020101020101" pitchFamily="34" charset="-127"/>
+              </a:rPr>
               <a:t>이번 주 작업 내역</a:t>
             </a:r>
-            <a:endParaRPr lang="en-US" altLang="ko-KR" dirty="0"/>
+            <a:endParaRPr lang="en-US" altLang="ko-KR" dirty="0">
+              <a:latin typeface="나눔바른고딕" panose="020B0603020101020101" pitchFamily="34" charset="-127"/>
+              <a:ea typeface="나눔바른고딕" panose="020B0603020101020101" pitchFamily="34" charset="-127"/>
+            </a:endParaRPr>
           </a:p>
         </p:txBody>
       </p:sp>
@@ -4320,7 +4803,7 @@
           <p:cNvPr id="10" name="TextBox 9">
             <a:extLst>
               <a:ext uri="{FF2B5EF4-FFF2-40B4-BE49-F238E27FC236}">
-                <a16:creationId xmlns:a16="http://schemas.microsoft.com/office/drawing/2014/main" id="{1C05991D-1DDC-77AC-5E76-B990175DF25D}"/>
+                <a16:creationId xmlns:a16="http://schemas.microsoft.com/office/drawing/2014/main" xmlns="" id="{1C05991D-1DDC-77AC-5E76-B990175DF25D}"/>
               </a:ext>
             </a:extLst>
           </p:cNvPr>
@@ -4348,10 +4831,16 @@
               <a:buChar char="•"/>
             </a:pPr>
             <a:r>
-              <a:rPr lang="ko-KR" altLang="en-US" sz="1600" dirty="0"/>
+              <a:rPr lang="ko-KR" altLang="en-US" sz="1600" dirty="0">
+                <a:latin typeface="나눔바른고딕" panose="020B0603020101020101" pitchFamily="34" charset="-127"/>
+                <a:ea typeface="나눔바른고딕" panose="020B0603020101020101" pitchFamily="34" charset="-127"/>
+              </a:rPr>
               <a:t>애니메이션 재생 결과</a:t>
             </a:r>
-            <a:endParaRPr lang="en-US" altLang="ko-KR" sz="1600" dirty="0"/>
+            <a:endParaRPr lang="en-US" altLang="ko-KR" sz="1600" dirty="0">
+              <a:latin typeface="나눔바른고딕" panose="020B0603020101020101" pitchFamily="34" charset="-127"/>
+              <a:ea typeface="나눔바른고딕" panose="020B0603020101020101" pitchFamily="34" charset="-127"/>
+            </a:endParaRPr>
           </a:p>
           <a:p>
             <a:pPr marL="742950" lvl="1" indent="-285750">
@@ -4359,58 +4848,100 @@
               <a:buChar char="•"/>
             </a:pPr>
             <a:r>
-              <a:rPr lang="ko-KR" altLang="en-US" sz="1600" dirty="0"/>
+              <a:rPr lang="ko-KR" altLang="en-US" sz="1600" dirty="0">
+                <a:latin typeface="나눔바른고딕" panose="020B0603020101020101" pitchFamily="34" charset="-127"/>
+                <a:ea typeface="나눔바른고딕" panose="020B0603020101020101" pitchFamily="34" charset="-127"/>
+              </a:rPr>
               <a:t>평지 </a:t>
             </a:r>
             <a:r>
-              <a:rPr lang="ko-KR" altLang="en-US" sz="1600" dirty="0" err="1"/>
+              <a:rPr lang="ko-KR" altLang="en-US" sz="1600" dirty="0" err="1">
+                <a:latin typeface="나눔바른고딕" panose="020B0603020101020101" pitchFamily="34" charset="-127"/>
+                <a:ea typeface="나눔바른고딕" panose="020B0603020101020101" pitchFamily="34" charset="-127"/>
+              </a:rPr>
               <a:t>로코모션</a:t>
             </a:r>
             <a:r>
-              <a:rPr lang="ko-KR" altLang="en-US" sz="1600" dirty="0"/>
+              <a:rPr lang="ko-KR" altLang="en-US" sz="1600" dirty="0">
+                <a:latin typeface="나눔바른고딕" panose="020B0603020101020101" pitchFamily="34" charset="-127"/>
+                <a:ea typeface="나눔바른고딕" panose="020B0603020101020101" pitchFamily="34" charset="-127"/>
+              </a:rPr>
               <a:t> </a:t>
             </a:r>
             <a:r>
-              <a:rPr lang="en-US" altLang="ko-KR" sz="1600" dirty="0"/>
+              <a:rPr lang="en-US" altLang="ko-KR" sz="1600" dirty="0">
+                <a:latin typeface="나눔바른고딕" panose="020B0603020101020101" pitchFamily="34" charset="-127"/>
+                <a:ea typeface="나눔바른고딕" panose="020B0603020101020101" pitchFamily="34" charset="-127"/>
+              </a:rPr>
               <a:t>-&gt; </a:t>
             </a:r>
             <a:r>
-              <a:rPr lang="en-US" altLang="ko-KR" sz="1600" dirty="0" err="1"/>
+              <a:rPr lang="en-US" altLang="ko-KR" sz="1600" dirty="0" err="1">
+                <a:latin typeface="나눔바른고딕" panose="020B0603020101020101" pitchFamily="34" charset="-127"/>
+                <a:ea typeface="나눔바른고딕" panose="020B0603020101020101" pitchFamily="34" charset="-127"/>
+              </a:rPr>
               <a:t>Lshift</a:t>
             </a:r>
             <a:r>
-              <a:rPr lang="en-US" altLang="ko-KR" sz="1600" dirty="0"/>
+              <a:rPr lang="en-US" altLang="ko-KR" sz="1600" dirty="0">
+                <a:latin typeface="나눔바른고딕" panose="020B0603020101020101" pitchFamily="34" charset="-127"/>
+                <a:ea typeface="나눔바른고딕" panose="020B0603020101020101" pitchFamily="34" charset="-127"/>
+              </a:rPr>
               <a:t> </a:t>
             </a:r>
             <a:r>
-              <a:rPr lang="ko-KR" altLang="en-US" sz="1600" dirty="0" err="1"/>
+              <a:rPr lang="ko-KR" altLang="en-US" sz="1600" dirty="0" err="1">
+                <a:latin typeface="나눔바른고딕" panose="020B0603020101020101" pitchFamily="34" charset="-127"/>
+                <a:ea typeface="나눔바른고딕" panose="020B0603020101020101" pitchFamily="34" charset="-127"/>
+              </a:rPr>
               <a:t>레이캐스트</a:t>
             </a:r>
             <a:r>
-              <a:rPr lang="ko-KR" altLang="en-US" sz="1600" dirty="0"/>
+              <a:rPr lang="ko-KR" altLang="en-US" sz="1600" dirty="0">
+                <a:latin typeface="나눔바른고딕" panose="020B0603020101020101" pitchFamily="34" charset="-127"/>
+                <a:ea typeface="나눔바른고딕" panose="020B0603020101020101" pitchFamily="34" charset="-127"/>
+              </a:rPr>
               <a:t> 장애물 식별 </a:t>
             </a:r>
             <a:r>
-              <a:rPr lang="en-US" altLang="ko-KR" sz="1600" dirty="0"/>
+              <a:rPr lang="en-US" altLang="ko-KR" sz="1600" dirty="0">
+                <a:latin typeface="나눔바른고딕" panose="020B0603020101020101" pitchFamily="34" charset="-127"/>
+                <a:ea typeface="나눔바른고딕" panose="020B0603020101020101" pitchFamily="34" charset="-127"/>
+              </a:rPr>
               <a:t>-&gt; </a:t>
             </a:r>
             <a:r>
-              <a:rPr lang="ko-KR" altLang="en-US" sz="1600" dirty="0"/>
+              <a:rPr lang="ko-KR" altLang="en-US" sz="1600" dirty="0">
+                <a:latin typeface="나눔바른고딕" panose="020B0603020101020101" pitchFamily="34" charset="-127"/>
+                <a:ea typeface="나눔바른고딕" panose="020B0603020101020101" pitchFamily="34" charset="-127"/>
+              </a:rPr>
               <a:t>담 넘기 </a:t>
             </a:r>
             <a:r>
-              <a:rPr lang="en-US" altLang="ko-KR" sz="1600" dirty="0"/>
+              <a:rPr lang="en-US" altLang="ko-KR" sz="1600" dirty="0">
+                <a:latin typeface="나눔바른고딕" panose="020B0603020101020101" pitchFamily="34" charset="-127"/>
+                <a:ea typeface="나눔바른고딕" panose="020B0603020101020101" pitchFamily="34" charset="-127"/>
+              </a:rPr>
               <a:t>-&gt; </a:t>
             </a:r>
             <a:r>
-              <a:rPr lang="ko-KR" altLang="en-US" sz="1600" dirty="0"/>
+              <a:rPr lang="ko-KR" altLang="en-US" sz="1600" dirty="0">
+                <a:latin typeface="나눔바른고딕" panose="020B0603020101020101" pitchFamily="34" charset="-127"/>
+                <a:ea typeface="나눔바른고딕" panose="020B0603020101020101" pitchFamily="34" charset="-127"/>
+              </a:rPr>
               <a:t>평지 </a:t>
             </a:r>
             <a:r>
-              <a:rPr lang="ko-KR" altLang="en-US" sz="1600" dirty="0" err="1"/>
+              <a:rPr lang="ko-KR" altLang="en-US" sz="1600" dirty="0" err="1">
+                <a:latin typeface="나눔바른고딕" panose="020B0603020101020101" pitchFamily="34" charset="-127"/>
+                <a:ea typeface="나눔바른고딕" panose="020B0603020101020101" pitchFamily="34" charset="-127"/>
+              </a:rPr>
               <a:t>로코모션</a:t>
             </a:r>
-            <a:endParaRPr lang="en-US" altLang="ko-KR" sz="1600" dirty="0"/>
+            <a:endParaRPr lang="en-US" altLang="ko-KR" sz="1600" dirty="0">
+              <a:latin typeface="나눔바른고딕" panose="020B0603020101020101" pitchFamily="34" charset="-127"/>
+              <a:ea typeface="나눔바른고딕" panose="020B0603020101020101" pitchFamily="34" charset="-127"/>
+            </a:endParaRPr>
           </a:p>
         </p:txBody>
       </p:sp>
@@ -4435,7 +4966,7 @@
         <p:cNvPr id="1" name="">
           <a:extLst>
             <a:ext uri="{FF2B5EF4-FFF2-40B4-BE49-F238E27FC236}">
-              <a16:creationId xmlns:a16="http://schemas.microsoft.com/office/drawing/2014/main" id="{49DA7EAA-204E-2F90-E52A-6C83B9013025}"/>
+              <a16:creationId xmlns="" xmlns:a16="http://schemas.microsoft.com/office/drawing/2014/main" id="{49DA7EAA-204E-2F90-E52A-6C83B9013025}"/>
             </a:ext>
           </a:extLst>
         </p:cNvPr>
@@ -4455,7 +4986,7 @@
           <p:cNvPr id="5" name="TextBox 4">
             <a:extLst>
               <a:ext uri="{FF2B5EF4-FFF2-40B4-BE49-F238E27FC236}">
-                <a16:creationId xmlns:a16="http://schemas.microsoft.com/office/drawing/2014/main" id="{4715F932-2F2C-4A3F-7F16-1B13D352985A}"/>
+                <a16:creationId xmlns="" xmlns:a16="http://schemas.microsoft.com/office/drawing/2014/main" id="{4715F932-2F2C-4A3F-7F16-1B13D352985A}"/>
               </a:ext>
             </a:extLst>
           </p:cNvPr>
@@ -4464,7 +4995,7 @@
         </p:nvSpPr>
         <p:spPr>
           <a:xfrm>
-            <a:off x="302451" y="315453"/>
+            <a:off x="354702" y="315453"/>
             <a:ext cx="4944140" cy="369332"/>
           </a:xfrm>
           <a:prstGeom prst="rect">
@@ -4479,23 +5010,38 @@
           <a:lstStyle/>
           <a:p>
             <a:r>
-              <a:rPr lang="ko-KR" altLang="en-US" dirty="0"/>
+              <a:rPr lang="ko-KR" altLang="en-US" dirty="0">
+                <a:latin typeface="나눔바른고딕" panose="020B0603020101020101" pitchFamily="34" charset="-127"/>
+                <a:ea typeface="나눔바른고딕" panose="020B0603020101020101" pitchFamily="34" charset="-127"/>
+              </a:rPr>
               <a:t>진행 계획</a:t>
             </a:r>
             <a:r>
-              <a:rPr lang="en-US" altLang="ko-KR" dirty="0"/>
+              <a:rPr lang="en-US" altLang="ko-KR" dirty="0">
+                <a:latin typeface="나눔바른고딕" panose="020B0603020101020101" pitchFamily="34" charset="-127"/>
+                <a:ea typeface="나눔바른고딕" panose="020B0603020101020101" pitchFamily="34" charset="-127"/>
+              </a:rPr>
               <a:t> (</a:t>
             </a:r>
             <a:r>
-              <a:rPr lang="ko-KR" altLang="en-US" dirty="0" err="1"/>
+              <a:rPr lang="ko-KR" altLang="en-US" dirty="0" err="1">
+                <a:latin typeface="나눔바른고딕" panose="020B0603020101020101" pitchFamily="34" charset="-127"/>
+                <a:ea typeface="나눔바른고딕" panose="020B0603020101020101" pitchFamily="34" charset="-127"/>
+              </a:rPr>
               <a:t>주차별</a:t>
             </a:r>
             <a:r>
-              <a:rPr lang="ko-KR" altLang="en-US" dirty="0"/>
+              <a:rPr lang="ko-KR" altLang="en-US" dirty="0">
+                <a:latin typeface="나눔바른고딕" panose="020B0603020101020101" pitchFamily="34" charset="-127"/>
+                <a:ea typeface="나눔바른고딕" panose="020B0603020101020101" pitchFamily="34" charset="-127"/>
+              </a:rPr>
               <a:t> 목표</a:t>
             </a:r>
             <a:r>
-              <a:rPr lang="en-US" altLang="ko-KR" dirty="0"/>
+              <a:rPr lang="en-US" altLang="ko-KR" dirty="0">
+                <a:latin typeface="나눔바른고딕" panose="020B0603020101020101" pitchFamily="34" charset="-127"/>
+                <a:ea typeface="나눔바른고딕" panose="020B0603020101020101" pitchFamily="34" charset="-127"/>
+              </a:rPr>
               <a:t>)</a:t>
             </a:r>
           </a:p>
@@ -4508,11 +5054,7 @@
             <a:graphicFrameLocks noGrp="1"/>
           </p:cNvGraphicFramePr>
           <p:nvPr>
-            <p:extLst>
-              <p:ext uri="{D42A27DB-BD31-4B8C-83A1-F6EECF244321}">
-                <p14:modId xmlns:p14="http://schemas.microsoft.com/office/powerpoint/2010/main" val="2195933453"/>
-              </p:ext>
-            </p:extLst>
+            <p:extLst/>
           </p:nvPr>
         </p:nvGraphicFramePr>
         <p:xfrm>
@@ -4523,27 +5065,27 @@
           <a:graphicData uri="http://schemas.openxmlformats.org/drawingml/2006/table">
             <a:tbl>
               <a:tblPr firstRow="1" bandRow="1">
-                <a:tableStyleId>{5C22544A-7EE6-4342-B048-85BDC9FD1C3A}</a:tableStyleId>
+                <a:tableStyleId>{7E9639D4-E3E2-4D34-9284-5A2195B3D0D7}</a:tableStyleId>
               </a:tblPr>
               <a:tblGrid>
                 <a:gridCol w="791436">
                   <a:extLst>
                     <a:ext uri="{9D8B030D-6E8A-4147-A177-3AD203B41FA5}">
-                      <a16:colId xmlns:a16="http://schemas.microsoft.com/office/drawing/2014/main" val="20000"/>
+                      <a16:colId xmlns="" xmlns:a16="http://schemas.microsoft.com/office/drawing/2014/main" val="20000"/>
                     </a:ext>
                   </a:extLst>
                 </a:gridCol>
                 <a:gridCol w="4207281">
                   <a:extLst>
                     <a:ext uri="{9D8B030D-6E8A-4147-A177-3AD203B41FA5}">
-                      <a16:colId xmlns:a16="http://schemas.microsoft.com/office/drawing/2014/main" val="20001"/>
+                      <a16:colId xmlns="" xmlns:a16="http://schemas.microsoft.com/office/drawing/2014/main" val="20001"/>
                     </a:ext>
                   </a:extLst>
                 </a:gridCol>
                 <a:gridCol w="6320143">
                   <a:extLst>
                     <a:ext uri="{9D8B030D-6E8A-4147-A177-3AD203B41FA5}">
-                      <a16:colId xmlns:a16="http://schemas.microsoft.com/office/drawing/2014/main" val="20002"/>
+                      <a16:colId xmlns="" xmlns:a16="http://schemas.microsoft.com/office/drawing/2014/main" val="20002"/>
                     </a:ext>
                   </a:extLst>
                 </a:gridCol>
@@ -4555,7 +5097,10 @@
                     <a:lstStyle/>
                     <a:p>
                       <a:pPr algn="ctr" latinLnBrk="1"/>
-                      <a:endParaRPr lang="ko-KR" altLang="en-US" sz="1400" b="0" dirty="0"/>
+                      <a:endParaRPr lang="ko-KR" altLang="en-US" sz="1400" b="0" dirty="0">
+                        <a:latin typeface="나눔바른고딕" panose="020B0603020101020101" pitchFamily="34" charset="-127"/>
+                        <a:ea typeface="나눔바른고딕" panose="020B0603020101020101" pitchFamily="34" charset="-127"/>
+                      </a:endParaRPr>
                     </a:p>
                   </a:txBody>
                   <a:tcPr/>
@@ -4567,12 +5112,15 @@
                     <a:p>
                       <a:pPr algn="ctr" latinLnBrk="1"/>
                       <a:r>
-                        <a:rPr lang="ko-KR" altLang="en-US" sz="2000" b="0" dirty="0"/>
+                        <a:rPr lang="ko-KR" altLang="en-US" sz="2000" b="0" dirty="0">
+                          <a:latin typeface="나눔바른고딕" panose="020B0603020101020101" pitchFamily="34" charset="-127"/>
+                          <a:ea typeface="나눔바른고딕" panose="020B0603020101020101" pitchFamily="34" charset="-127"/>
+                        </a:rPr>
                         <a:t>작업 목표</a:t>
                       </a:r>
                     </a:p>
                   </a:txBody>
-                  <a:tcPr/>
+                  <a:tcPr anchor="ctr"/>
                 </a:tc>
                 <a:tc>
                   <a:txBody>
@@ -4581,16 +5129,19 @@
                     <a:p>
                       <a:pPr algn="ctr" latinLnBrk="1"/>
                       <a:r>
-                        <a:rPr lang="ko-KR" altLang="en-US" sz="2000" b="0" dirty="0"/>
+                        <a:rPr lang="ko-KR" altLang="en-US" sz="2000" b="0" dirty="0">
+                          <a:latin typeface="나눔바른고딕" panose="020B0603020101020101" pitchFamily="34" charset="-127"/>
+                          <a:ea typeface="나눔바른고딕" panose="020B0603020101020101" pitchFamily="34" charset="-127"/>
+                        </a:rPr>
                         <a:t>작업 세부 내용</a:t>
                       </a:r>
                     </a:p>
                   </a:txBody>
-                  <a:tcPr/>
+                  <a:tcPr anchor="ctr"/>
                 </a:tc>
                 <a:extLst>
                   <a:ext uri="{0D108BD9-81ED-4DB2-BD59-A6C34878D82A}">
-                    <a16:rowId xmlns:a16="http://schemas.microsoft.com/office/drawing/2014/main" val="10000"/>
+                    <a16:rowId xmlns="" xmlns:a16="http://schemas.microsoft.com/office/drawing/2014/main" val="10000"/>
                   </a:ext>
                 </a:extLst>
               </a:tr>
@@ -4602,13 +5153,19 @@
                     <a:p>
                       <a:pPr algn="ctr" latinLnBrk="1"/>
                       <a:r>
-                        <a:rPr lang="en-US" altLang="ko-KR" dirty="0"/>
+                        <a:rPr lang="en-US" altLang="ko-KR" dirty="0">
+                          <a:latin typeface="나눔바른고딕" panose="020B0603020101020101" pitchFamily="34" charset="-127"/>
+                          <a:ea typeface="나눔바른고딕" panose="020B0603020101020101" pitchFamily="34" charset="-127"/>
+                        </a:rPr>
                         <a:t>1</a:t>
                       </a:r>
-                      <a:endParaRPr lang="ko-KR" altLang="en-US" dirty="0"/>
+                      <a:endParaRPr lang="ko-KR" altLang="en-US" dirty="0">
+                        <a:latin typeface="나눔바른고딕" panose="020B0603020101020101" pitchFamily="34" charset="-127"/>
+                        <a:ea typeface="나눔바른고딕" panose="020B0603020101020101" pitchFamily="34" charset="-127"/>
+                      </a:endParaRPr>
                     </a:p>
                   </a:txBody>
-                  <a:tcPr/>
+                  <a:tcPr anchor="ctr"/>
                 </a:tc>
                 <a:tc>
                   <a:txBody>
@@ -4633,17 +5190,26 @@
                         <a:defRPr/>
                       </a:pPr>
                       <a:r>
-                        <a:rPr lang="ko-KR" altLang="en-US" sz="1600" dirty="0"/>
+                        <a:rPr lang="ko-KR" altLang="en-US" sz="1400" dirty="0">
+                          <a:latin typeface="나눔바른고딕" panose="020B0603020101020101" pitchFamily="34" charset="-127"/>
+                          <a:ea typeface="나눔바른고딕" panose="020B0603020101020101" pitchFamily="34" charset="-127"/>
+                        </a:rPr>
                         <a:t>미니엔진 구조 파악 및 기반 클래스</a:t>
                       </a:r>
                       <a:r>
-                        <a:rPr lang="ko-KR" altLang="en-US" sz="1600" baseline="0" dirty="0"/>
+                        <a:rPr lang="ko-KR" altLang="en-US" sz="1400" baseline="0" dirty="0">
+                          <a:latin typeface="나눔바른고딕" panose="020B0603020101020101" pitchFamily="34" charset="-127"/>
+                          <a:ea typeface="나눔바른고딕" panose="020B0603020101020101" pitchFamily="34" charset="-127"/>
+                        </a:rPr>
                         <a:t> 구성</a:t>
                       </a:r>
-                      <a:endParaRPr lang="en-US" altLang="ko-KR" sz="1600" dirty="0"/>
+                      <a:endParaRPr lang="en-US" altLang="ko-KR" sz="1400" dirty="0">
+                        <a:latin typeface="나눔바른고딕" panose="020B0603020101020101" pitchFamily="34" charset="-127"/>
+                        <a:ea typeface="나눔바른고딕" panose="020B0603020101020101" pitchFamily="34" charset="-127"/>
+                      </a:endParaRPr>
                     </a:p>
                   </a:txBody>
-                  <a:tcPr/>
+                  <a:tcPr anchor="ctr"/>
                 </a:tc>
                 <a:tc>
                   <a:txBody>
@@ -4655,64 +5221,106 @@
                         <a:buNone/>
                       </a:pPr>
                       <a:r>
-                        <a:rPr lang="ko-KR" altLang="en-US" sz="1600" dirty="0"/>
+                        <a:rPr lang="ko-KR" altLang="en-US" sz="1400" dirty="0">
+                          <a:latin typeface="나눔바른고딕" panose="020B0603020101020101" pitchFamily="34" charset="-127"/>
+                          <a:ea typeface="나눔바른고딕" panose="020B0603020101020101" pitchFamily="34" charset="-127"/>
+                        </a:rPr>
                         <a:t>미니엔진 파악</a:t>
                       </a:r>
                       <a:r>
-                        <a:rPr lang="en-US" altLang="ko-KR" sz="1600" dirty="0"/>
+                        <a:rPr lang="en-US" altLang="ko-KR" sz="1400" dirty="0">
+                          <a:latin typeface="나눔바른고딕" panose="020B0603020101020101" pitchFamily="34" charset="-127"/>
+                          <a:ea typeface="나눔바른고딕" panose="020B0603020101020101" pitchFamily="34" charset="-127"/>
+                        </a:rPr>
                         <a:t>, </a:t>
                       </a:r>
                       <a:r>
-                        <a:rPr lang="ko-KR" altLang="en-US" sz="1600" dirty="0"/>
+                        <a:rPr lang="ko-KR" altLang="en-US" sz="1400" dirty="0">
+                          <a:latin typeface="나눔바른고딕" panose="020B0603020101020101" pitchFamily="34" charset="-127"/>
+                          <a:ea typeface="나눔바른고딕" panose="020B0603020101020101" pitchFamily="34" charset="-127"/>
+                        </a:rPr>
                         <a:t>게임 기반 클래스 작성</a:t>
                       </a:r>
                       <a:r>
-                        <a:rPr lang="en-US" altLang="ko-KR" sz="1600" dirty="0"/>
+                        <a:rPr lang="en-US" altLang="ko-KR" sz="1400" dirty="0">
+                          <a:latin typeface="나눔바른고딕" panose="020B0603020101020101" pitchFamily="34" charset="-127"/>
+                          <a:ea typeface="나눔바른고딕" panose="020B0603020101020101" pitchFamily="34" charset="-127"/>
+                        </a:rPr>
                         <a:t>, </a:t>
                       </a:r>
                       <a:br>
-                        <a:rPr lang="en-US" altLang="ko-KR" sz="1600" dirty="0"/>
+                        <a:rPr lang="en-US" altLang="ko-KR" sz="1400" dirty="0">
+                          <a:latin typeface="나눔바른고딕" panose="020B0603020101020101" pitchFamily="34" charset="-127"/>
+                          <a:ea typeface="나눔바른고딕" panose="020B0603020101020101" pitchFamily="34" charset="-127"/>
+                        </a:rPr>
                       </a:br>
                       <a:r>
-                        <a:rPr lang="en-US" altLang="ko-KR" sz="1600" dirty="0" err="1"/>
+                        <a:rPr lang="en-US" altLang="ko-KR" sz="1400" dirty="0" err="1">
+                          <a:latin typeface="나눔바른고딕" panose="020B0603020101020101" pitchFamily="34" charset="-127"/>
+                          <a:ea typeface="나눔바른고딕" panose="020B0603020101020101" pitchFamily="34" charset="-127"/>
+                        </a:rPr>
                         <a:t>fbx</a:t>
                       </a:r>
                       <a:r>
-                        <a:rPr lang="en-US" altLang="ko-KR" sz="1600" dirty="0"/>
+                        <a:rPr lang="en-US" altLang="ko-KR" sz="1400" dirty="0">
+                          <a:latin typeface="나눔바른고딕" panose="020B0603020101020101" pitchFamily="34" charset="-127"/>
+                          <a:ea typeface="나눔바른고딕" panose="020B0603020101020101" pitchFamily="34" charset="-127"/>
+                        </a:rPr>
                         <a:t> </a:t>
                       </a:r>
                       <a:r>
-                        <a:rPr lang="ko-KR" altLang="en-US" sz="1600" dirty="0"/>
+                        <a:rPr lang="ko-KR" altLang="en-US" sz="1400" dirty="0">
+                          <a:latin typeface="나눔바른고딕" panose="020B0603020101020101" pitchFamily="34" charset="-127"/>
+                          <a:ea typeface="나눔바른고딕" panose="020B0603020101020101" pitchFamily="34" charset="-127"/>
+                        </a:rPr>
                         <a:t>파일 </a:t>
                       </a:r>
                       <a:r>
-                        <a:rPr lang="ko-KR" altLang="en-US" sz="1600" dirty="0" err="1"/>
+                        <a:rPr lang="ko-KR" altLang="en-US" sz="1400" dirty="0" err="1">
+                          <a:latin typeface="나눔바른고딕" panose="020B0603020101020101" pitchFamily="34" charset="-127"/>
+                          <a:ea typeface="나눔바른고딕" panose="020B0603020101020101" pitchFamily="34" charset="-127"/>
+                        </a:rPr>
                         <a:t>파싱</a:t>
                       </a:r>
                       <a:r>
-                        <a:rPr lang="en-US" altLang="ko-KR" sz="1600" baseline="0" dirty="0"/>
+                        <a:rPr lang="en-US" altLang="ko-KR" sz="1400" baseline="0" dirty="0">
+                          <a:latin typeface="나눔바른고딕" panose="020B0603020101020101" pitchFamily="34" charset="-127"/>
+                          <a:ea typeface="나눔바른고딕" panose="020B0603020101020101" pitchFamily="34" charset="-127"/>
+                        </a:rPr>
                         <a:t>, </a:t>
                       </a:r>
                       <a:r>
-                        <a:rPr lang="ko-KR" altLang="en-US" sz="1600" baseline="0" dirty="0"/>
+                        <a:rPr lang="ko-KR" altLang="en-US" sz="1400" baseline="0" dirty="0">
+                          <a:latin typeface="나눔바른고딕" panose="020B0603020101020101" pitchFamily="34" charset="-127"/>
+                          <a:ea typeface="나눔바른고딕" panose="020B0603020101020101" pitchFamily="34" charset="-127"/>
+                        </a:rPr>
                         <a:t>렌더링</a:t>
                       </a:r>
                       <a:r>
-                        <a:rPr lang="en-US" altLang="ko-KR" sz="1600" baseline="0" dirty="0"/>
+                        <a:rPr lang="en-US" altLang="ko-KR" sz="1400" baseline="0" dirty="0">
+                          <a:latin typeface="나눔바른고딕" panose="020B0603020101020101" pitchFamily="34" charset="-127"/>
+                          <a:ea typeface="나눔바른고딕" panose="020B0603020101020101" pitchFamily="34" charset="-127"/>
+                        </a:rPr>
                         <a:t>, </a:t>
                       </a:r>
                       <a:r>
-                        <a:rPr lang="ko-KR" altLang="en-US" sz="1600" baseline="0" dirty="0"/>
+                        <a:rPr lang="ko-KR" altLang="en-US" sz="1400" baseline="0" dirty="0">
+                          <a:latin typeface="나눔바른고딕" panose="020B0603020101020101" pitchFamily="34" charset="-127"/>
+                          <a:ea typeface="나눔바른고딕" panose="020B0603020101020101" pitchFamily="34" charset="-127"/>
+                        </a:rPr>
                         <a:t>애니메이션 재생</a:t>
                       </a:r>
-                      <a:endParaRPr lang="ko-KR" altLang="en-US" sz="1600" dirty="0"/>
+                      <a:endParaRPr lang="ko-KR" altLang="en-US" sz="1400" dirty="0">
+                        <a:latin typeface="나눔바른고딕" panose="020B0603020101020101" pitchFamily="34" charset="-127"/>
+                        <a:ea typeface="나눔바른고딕" panose="020B0603020101020101" pitchFamily="34" charset="-127"/>
+                      </a:endParaRPr>
                     </a:p>
                   </a:txBody>
-                  <a:tcPr/>
+                  <a:tcPr anchor="ctr"/>
                 </a:tc>
                 <a:extLst>
                   <a:ext uri="{0D108BD9-81ED-4DB2-BD59-A6C34878D82A}">
-                    <a16:rowId xmlns:a16="http://schemas.microsoft.com/office/drawing/2014/main" val="10001"/>
+                    <a16:rowId xmlns="" xmlns:a16="http://schemas.microsoft.com/office/drawing/2014/main" val="10001"/>
                   </a:ext>
                 </a:extLst>
               </a:tr>
@@ -4724,13 +5332,19 @@
                     <a:p>
                       <a:pPr algn="ctr" latinLnBrk="1"/>
                       <a:r>
-                        <a:rPr lang="en-US" altLang="ko-KR" dirty="0"/>
+                        <a:rPr lang="en-US" altLang="ko-KR" dirty="0">
+                          <a:latin typeface="나눔바른고딕" panose="020B0603020101020101" pitchFamily="34" charset="-127"/>
+                          <a:ea typeface="나눔바른고딕" panose="020B0603020101020101" pitchFamily="34" charset="-127"/>
+                        </a:rPr>
                         <a:t>2</a:t>
                       </a:r>
-                      <a:endParaRPr lang="ko-KR" altLang="en-US" dirty="0"/>
+                      <a:endParaRPr lang="ko-KR" altLang="en-US" dirty="0">
+                        <a:latin typeface="나눔바른고딕" panose="020B0603020101020101" pitchFamily="34" charset="-127"/>
+                        <a:ea typeface="나눔바른고딕" panose="020B0603020101020101" pitchFamily="34" charset="-127"/>
+                      </a:endParaRPr>
                     </a:p>
                   </a:txBody>
-                  <a:tcPr/>
+                  <a:tcPr anchor="ctr"/>
                 </a:tc>
                 <a:tc>
                   <a:txBody>
@@ -4739,31 +5353,46 @@
                     <a:p>
                       <a:pPr latinLnBrk="1"/>
                       <a:r>
-                        <a:rPr lang="ko-KR" altLang="en-US" sz="1600" dirty="0"/>
+                        <a:rPr lang="ko-KR" altLang="en-US" sz="1400" dirty="0">
+                          <a:latin typeface="나눔바른고딕" panose="020B0603020101020101" pitchFamily="34" charset="-127"/>
+                          <a:ea typeface="나눔바른고딕" panose="020B0603020101020101" pitchFamily="34" charset="-127"/>
+                        </a:rPr>
                         <a:t>애니메이션 시스템</a:t>
                       </a:r>
                       <a:r>
-                        <a:rPr lang="en-US" altLang="ko-KR" sz="1600" dirty="0"/>
+                        <a:rPr lang="en-US" altLang="ko-KR" sz="1400" dirty="0">
+                          <a:latin typeface="나눔바른고딕" panose="020B0603020101020101" pitchFamily="34" charset="-127"/>
+                          <a:ea typeface="나눔바른고딕" panose="020B0603020101020101" pitchFamily="34" charset="-127"/>
+                        </a:rPr>
                         <a:t>, </a:t>
                       </a:r>
                       <a:r>
-                        <a:rPr lang="ko-KR" altLang="en-US" sz="1600" dirty="0"/>
+                        <a:rPr lang="ko-KR" altLang="en-US" sz="1400" dirty="0">
+                          <a:latin typeface="나눔바른고딕" panose="020B0603020101020101" pitchFamily="34" charset="-127"/>
+                          <a:ea typeface="나눔바른고딕" panose="020B0603020101020101" pitchFamily="34" charset="-127"/>
+                        </a:rPr>
                         <a:t>물리엔진 적용</a:t>
                       </a:r>
                       <a:r>
-                        <a:rPr lang="en-US" altLang="ko-KR" sz="1600" dirty="0"/>
+                        <a:rPr lang="en-US" altLang="ko-KR" sz="1400" dirty="0">
+                          <a:latin typeface="나눔바른고딕" panose="020B0603020101020101" pitchFamily="34" charset="-127"/>
+                          <a:ea typeface="나눔바른고딕" panose="020B0603020101020101" pitchFamily="34" charset="-127"/>
+                        </a:rPr>
                         <a:t>,</a:t>
                       </a:r>
                     </a:p>
                     <a:p>
                       <a:pPr latinLnBrk="1"/>
                       <a:r>
-                        <a:rPr lang="ko-KR" altLang="en-US" sz="1600" dirty="0"/>
+                        <a:rPr lang="ko-KR" altLang="en-US" sz="1400" dirty="0">
+                          <a:latin typeface="나눔바른고딕" panose="020B0603020101020101" pitchFamily="34" charset="-127"/>
+                          <a:ea typeface="나눔바른고딕" panose="020B0603020101020101" pitchFamily="34" charset="-127"/>
+                        </a:rPr>
                         <a:t>입력 바인딩</a:t>
                       </a:r>
                     </a:p>
                   </a:txBody>
-                  <a:tcPr/>
+                  <a:tcPr anchor="ctr"/>
                 </a:tc>
                 <a:tc>
                   <a:txBody>
@@ -4772,75 +5401,120 @@
                     <a:p>
                       <a:pPr latinLnBrk="1"/>
                       <a:r>
-                        <a:rPr lang="ko-KR" altLang="en-US" sz="1600" dirty="0"/>
+                        <a:rPr lang="ko-KR" altLang="en-US" sz="1400" dirty="0">
+                          <a:latin typeface="나눔바른고딕" panose="020B0603020101020101" pitchFamily="34" charset="-127"/>
+                          <a:ea typeface="나눔바른고딕" panose="020B0603020101020101" pitchFamily="34" charset="-127"/>
+                        </a:rPr>
                         <a:t>캐릭터 애니메이션 </a:t>
                       </a:r>
                       <a:r>
-                        <a:rPr lang="ko-KR" altLang="en-US" sz="1600" dirty="0" err="1"/>
+                        <a:rPr lang="ko-KR" altLang="en-US" sz="1400" dirty="0" err="1">
+                          <a:latin typeface="나눔바른고딕" panose="020B0603020101020101" pitchFamily="34" charset="-127"/>
+                          <a:ea typeface="나눔바른고딕" panose="020B0603020101020101" pitchFamily="34" charset="-127"/>
+                        </a:rPr>
                         <a:t>블렌드</a:t>
                       </a:r>
                       <a:r>
-                        <a:rPr lang="en-US" altLang="ko-KR" sz="1600" dirty="0"/>
+                        <a:rPr lang="en-US" altLang="ko-KR" sz="1400" dirty="0">
+                          <a:latin typeface="나눔바른고딕" panose="020B0603020101020101" pitchFamily="34" charset="-127"/>
+                          <a:ea typeface="나눔바른고딕" panose="020B0603020101020101" pitchFamily="34" charset="-127"/>
+                        </a:rPr>
                         <a:t>, </a:t>
                       </a:r>
                       <a:r>
-                        <a:rPr lang="ko-KR" altLang="en-US" sz="1600" dirty="0"/>
+                        <a:rPr lang="ko-KR" altLang="en-US" sz="1400" dirty="0">
+                          <a:latin typeface="나눔바른고딕" panose="020B0603020101020101" pitchFamily="34" charset="-127"/>
+                          <a:ea typeface="나눔바른고딕" panose="020B0603020101020101" pitchFamily="34" charset="-127"/>
+                        </a:rPr>
                         <a:t>애니메이션 </a:t>
                       </a:r>
                       <a:r>
-                        <a:rPr lang="ko-KR" altLang="en-US" sz="1600" dirty="0" err="1"/>
+                        <a:rPr lang="ko-KR" altLang="en-US" sz="1400" dirty="0" err="1">
+                          <a:latin typeface="나눔바른고딕" panose="020B0603020101020101" pitchFamily="34" charset="-127"/>
+                          <a:ea typeface="나눔바른고딕" panose="020B0603020101020101" pitchFamily="34" charset="-127"/>
+                        </a:rPr>
                         <a:t>상태머신</a:t>
                       </a:r>
                       <a:r>
-                        <a:rPr lang="en-US" altLang="ko-KR" sz="1600" dirty="0"/>
+                        <a:rPr lang="en-US" altLang="ko-KR" sz="1400" dirty="0">
+                          <a:latin typeface="나눔바른고딕" panose="020B0603020101020101" pitchFamily="34" charset="-127"/>
+                          <a:ea typeface="나눔바른고딕" panose="020B0603020101020101" pitchFamily="34" charset="-127"/>
+                        </a:rPr>
                         <a:t>,</a:t>
                       </a:r>
                     </a:p>
                     <a:p>
                       <a:pPr latinLnBrk="1"/>
                       <a:r>
-                        <a:rPr lang="ko-KR" altLang="en-US" sz="1600" dirty="0"/>
+                        <a:rPr lang="ko-KR" altLang="en-US" sz="1400" dirty="0">
+                          <a:latin typeface="나눔바른고딕" panose="020B0603020101020101" pitchFamily="34" charset="-127"/>
+                          <a:ea typeface="나눔바른고딕" panose="020B0603020101020101" pitchFamily="34" charset="-127"/>
+                        </a:rPr>
                         <a:t>물리엔진</a:t>
                       </a:r>
                       <a:r>
-                        <a:rPr lang="en-US" altLang="ko-KR" sz="1600" dirty="0"/>
+                        <a:rPr lang="en-US" altLang="ko-KR" sz="1400" dirty="0">
+                          <a:latin typeface="나눔바른고딕" panose="020B0603020101020101" pitchFamily="34" charset="-127"/>
+                          <a:ea typeface="나눔바른고딕" panose="020B0603020101020101" pitchFamily="34" charset="-127"/>
+                        </a:rPr>
                         <a:t>(PhysX) </a:t>
                       </a:r>
                       <a:r>
-                        <a:rPr lang="ko-KR" altLang="en-US" sz="1600" dirty="0"/>
+                        <a:rPr lang="ko-KR" altLang="en-US" sz="1400" dirty="0">
+                          <a:latin typeface="나눔바른고딕" panose="020B0603020101020101" pitchFamily="34" charset="-127"/>
+                          <a:ea typeface="나눔바른고딕" panose="020B0603020101020101" pitchFamily="34" charset="-127"/>
+                        </a:rPr>
                         <a:t>적용</a:t>
                       </a:r>
                       <a:r>
-                        <a:rPr lang="en-US" altLang="ko-KR" sz="1600" dirty="0"/>
+                        <a:rPr lang="en-US" altLang="ko-KR" sz="1400" dirty="0">
+                          <a:latin typeface="나눔바른고딕" panose="020B0603020101020101" pitchFamily="34" charset="-127"/>
+                          <a:ea typeface="나눔바른고딕" panose="020B0603020101020101" pitchFamily="34" charset="-127"/>
+                        </a:rPr>
                         <a:t>, </a:t>
                       </a:r>
                       <a:r>
-                        <a:rPr lang="ko-KR" altLang="en-US" sz="1600" dirty="0"/>
+                        <a:rPr lang="ko-KR" altLang="en-US" sz="1400" dirty="0">
+                          <a:latin typeface="나눔바른고딕" panose="020B0603020101020101" pitchFamily="34" charset="-127"/>
+                          <a:ea typeface="나눔바른고딕" panose="020B0603020101020101" pitchFamily="34" charset="-127"/>
+                        </a:rPr>
                         <a:t>캐릭터 입력 바인딩</a:t>
                       </a:r>
                       <a:r>
-                        <a:rPr lang="en-US" altLang="ko-KR" sz="1600" dirty="0"/>
+                        <a:rPr lang="en-US" altLang="ko-KR" sz="1400" dirty="0">
+                          <a:latin typeface="나눔바른고딕" panose="020B0603020101020101" pitchFamily="34" charset="-127"/>
+                          <a:ea typeface="나눔바른고딕" panose="020B0603020101020101" pitchFamily="34" charset="-127"/>
+                        </a:rPr>
                         <a:t>, </a:t>
                       </a:r>
                       <a:r>
-                        <a:rPr lang="ko-KR" altLang="en-US" sz="1600" dirty="0"/>
+                        <a:rPr lang="ko-KR" altLang="en-US" sz="1400" dirty="0">
+                          <a:latin typeface="나눔바른고딕" panose="020B0603020101020101" pitchFamily="34" charset="-127"/>
+                          <a:ea typeface="나눔바른고딕" panose="020B0603020101020101" pitchFamily="34" charset="-127"/>
+                        </a:rPr>
                         <a:t>캐릭터 </a:t>
                       </a:r>
                       <a:r>
-                        <a:rPr lang="ko-KR" altLang="en-US" sz="1600" dirty="0" err="1"/>
+                        <a:rPr lang="ko-KR" altLang="en-US" sz="1400" dirty="0" err="1">
+                          <a:latin typeface="나눔바른고딕" panose="020B0603020101020101" pitchFamily="34" charset="-127"/>
+                          <a:ea typeface="나눔바른고딕" panose="020B0603020101020101" pitchFamily="34" charset="-127"/>
+                        </a:rPr>
                         <a:t>로코모션</a:t>
                       </a:r>
                       <a:r>
-                        <a:rPr lang="ko-KR" altLang="en-US" sz="1600" dirty="0"/>
+                        <a:rPr lang="ko-KR" altLang="en-US" sz="1400" dirty="0">
+                          <a:latin typeface="나눔바른고딕" panose="020B0603020101020101" pitchFamily="34" charset="-127"/>
+                          <a:ea typeface="나눔바른고딕" panose="020B0603020101020101" pitchFamily="34" charset="-127"/>
+                        </a:rPr>
                         <a:t> 적용</a:t>
                       </a:r>
                     </a:p>
                   </a:txBody>
-                  <a:tcPr/>
+                  <a:tcPr anchor="ctr"/>
                 </a:tc>
                 <a:extLst>
                   <a:ext uri="{0D108BD9-81ED-4DB2-BD59-A6C34878D82A}">
-                    <a16:rowId xmlns:a16="http://schemas.microsoft.com/office/drawing/2014/main" val="10002"/>
+                    <a16:rowId xmlns="" xmlns:a16="http://schemas.microsoft.com/office/drawing/2014/main" val="10002"/>
                   </a:ext>
                 </a:extLst>
               </a:tr>
@@ -4852,13 +5526,19 @@
                     <a:p>
                       <a:pPr algn="ctr" latinLnBrk="1"/>
                       <a:r>
-                        <a:rPr lang="en-US" altLang="ko-KR" dirty="0"/>
+                        <a:rPr lang="en-US" altLang="ko-KR" dirty="0">
+                          <a:latin typeface="나눔바른고딕" panose="020B0603020101020101" pitchFamily="34" charset="-127"/>
+                          <a:ea typeface="나눔바른고딕" panose="020B0603020101020101" pitchFamily="34" charset="-127"/>
+                        </a:rPr>
                         <a:t>3</a:t>
                       </a:r>
-                      <a:endParaRPr lang="ko-KR" altLang="en-US" dirty="0"/>
+                      <a:endParaRPr lang="ko-KR" altLang="en-US" dirty="0">
+                        <a:latin typeface="나눔바른고딕" panose="020B0603020101020101" pitchFamily="34" charset="-127"/>
+                        <a:ea typeface="나눔바른고딕" panose="020B0603020101020101" pitchFamily="34" charset="-127"/>
+                      </a:endParaRPr>
                     </a:p>
                   </a:txBody>
-                  <a:tcPr/>
+                  <a:tcPr anchor="ctr"/>
                 </a:tc>
                 <a:tc>
                   <a:txBody>
@@ -4867,24 +5547,50 @@
                     <a:p>
                       <a:pPr latinLnBrk="1"/>
                       <a:r>
-                        <a:rPr lang="ko-KR" altLang="en-US" sz="1600" dirty="0"/>
+                        <a:rPr lang="ko-KR" altLang="en-US" sz="1400" dirty="0">
+                          <a:latin typeface="나눔바른고딕" panose="020B0603020101020101" pitchFamily="34" charset="-127"/>
+                          <a:ea typeface="나눔바른고딕" panose="020B0603020101020101" pitchFamily="34" charset="-127"/>
+                        </a:rPr>
+                        <a:t>씬 배치</a:t>
+                      </a:r>
+                      <a:r>
+                        <a:rPr lang="en-US" altLang="ko-KR" sz="1400" dirty="0">
+                          <a:latin typeface="나눔바른고딕" panose="020B0603020101020101" pitchFamily="34" charset="-127"/>
+                          <a:ea typeface="나눔바른고딕" panose="020B0603020101020101" pitchFamily="34" charset="-127"/>
+                        </a:rPr>
+                        <a:t>, </a:t>
+                      </a:r>
+                      <a:r>
+                        <a:rPr lang="ko-KR" altLang="en-US" sz="1400" dirty="0">
+                          <a:latin typeface="나눔바른고딕" panose="020B0603020101020101" pitchFamily="34" charset="-127"/>
+                          <a:ea typeface="나눔바른고딕" panose="020B0603020101020101" pitchFamily="34" charset="-127"/>
+                        </a:rPr>
                         <a:t>캐릭터</a:t>
                       </a:r>
                       <a:r>
-                        <a:rPr lang="en-US" altLang="ko-KR" sz="1600" dirty="0"/>
+                        <a:rPr lang="en-US" altLang="ko-KR" sz="1400" dirty="0">
+                          <a:latin typeface="나눔바른고딕" panose="020B0603020101020101" pitchFamily="34" charset="-127"/>
+                          <a:ea typeface="나눔바른고딕" panose="020B0603020101020101" pitchFamily="34" charset="-127"/>
+                        </a:rPr>
                         <a:t> </a:t>
                       </a:r>
                       <a:r>
-                        <a:rPr lang="ko-KR" altLang="en-US" sz="1600" dirty="0" err="1"/>
+                        <a:rPr lang="ko-KR" altLang="en-US" sz="1400" dirty="0" err="1">
+                          <a:latin typeface="나눔바른고딕" panose="020B0603020101020101" pitchFamily="34" charset="-127"/>
+                          <a:ea typeface="나눔바른고딕" panose="020B0603020101020101" pitchFamily="34" charset="-127"/>
+                        </a:rPr>
                         <a:t>파쿠르</a:t>
                       </a:r>
                       <a:r>
-                        <a:rPr lang="ko-KR" altLang="en-US" sz="1600" dirty="0"/>
+                        <a:rPr lang="ko-KR" altLang="en-US" sz="1400" dirty="0">
+                          <a:latin typeface="나눔바른고딕" panose="020B0603020101020101" pitchFamily="34" charset="-127"/>
+                          <a:ea typeface="나눔바른고딕" panose="020B0603020101020101" pitchFamily="34" charset="-127"/>
+                        </a:rPr>
                         <a:t> 애니메이션 적용</a:t>
                       </a:r>
                     </a:p>
                   </a:txBody>
-                  <a:tcPr/>
+                  <a:tcPr anchor="ctr"/>
                 </a:tc>
                 <a:tc>
                   <a:txBody>
@@ -4893,68 +5599,113 @@
                     <a:p>
                       <a:pPr latinLnBrk="1"/>
                       <a:r>
-                        <a:rPr lang="ko-KR" altLang="en-US" sz="1600" dirty="0"/>
+                        <a:rPr lang="ko-KR" altLang="en-US" sz="1400" dirty="0">
+                          <a:latin typeface="나눔바른고딕" panose="020B0603020101020101" pitchFamily="34" charset="-127"/>
+                          <a:ea typeface="나눔바른고딕" panose="020B0603020101020101" pitchFamily="34" charset="-127"/>
+                        </a:rPr>
                         <a:t>씬</a:t>
                       </a:r>
                       <a:r>
-                        <a:rPr lang="en-US" altLang="ko-KR" sz="1600" baseline="0" dirty="0"/>
+                        <a:rPr lang="en-US" altLang="ko-KR" sz="1400" baseline="0" dirty="0">
+                          <a:latin typeface="나눔바른고딕" panose="020B0603020101020101" pitchFamily="34" charset="-127"/>
+                          <a:ea typeface="나눔바른고딕" panose="020B0603020101020101" pitchFamily="34" charset="-127"/>
+                        </a:rPr>
                         <a:t> </a:t>
                       </a:r>
                       <a:r>
-                        <a:rPr lang="ko-KR" altLang="en-US" sz="1600" baseline="0" dirty="0"/>
+                        <a:rPr lang="ko-KR" altLang="en-US" sz="1400" baseline="0" dirty="0">
+                          <a:latin typeface="나눔바른고딕" panose="020B0603020101020101" pitchFamily="34" charset="-127"/>
+                          <a:ea typeface="나눔바른고딕" panose="020B0603020101020101" pitchFamily="34" charset="-127"/>
+                        </a:rPr>
                         <a:t>데이터 직렬화 </a:t>
                       </a:r>
                       <a:r>
-                        <a:rPr lang="en-US" altLang="ko-KR" sz="1600" baseline="0" dirty="0"/>
+                        <a:rPr lang="en-US" altLang="ko-KR" sz="1400" baseline="0" dirty="0">
+                          <a:latin typeface="나눔바른고딕" panose="020B0603020101020101" pitchFamily="34" charset="-127"/>
+                          <a:ea typeface="나눔바른고딕" panose="020B0603020101020101" pitchFamily="34" charset="-127"/>
+                        </a:rPr>
                         <a:t>(</a:t>
                       </a:r>
                       <a:r>
-                        <a:rPr lang="ko-KR" altLang="en-US" sz="1600" baseline="0" dirty="0"/>
+                        <a:rPr lang="ko-KR" altLang="en-US" sz="1400" baseline="0" dirty="0">
+                          <a:latin typeface="나눔바른고딕" panose="020B0603020101020101" pitchFamily="34" charset="-127"/>
+                          <a:ea typeface="나눔바른고딕" panose="020B0603020101020101" pitchFamily="34" charset="-127"/>
+                        </a:rPr>
                         <a:t>장애물 배치 정보</a:t>
                       </a:r>
                       <a:r>
-                        <a:rPr lang="en-US" altLang="ko-KR" sz="1600" baseline="0" dirty="0"/>
+                        <a:rPr lang="en-US" altLang="ko-KR" sz="1400" baseline="0" dirty="0">
+                          <a:latin typeface="나눔바른고딕" panose="020B0603020101020101" pitchFamily="34" charset="-127"/>
+                          <a:ea typeface="나눔바른고딕" panose="020B0603020101020101" pitchFamily="34" charset="-127"/>
+                        </a:rPr>
                         <a:t>), </a:t>
                       </a:r>
                       <a:r>
-                        <a:rPr lang="ko-KR" altLang="en-US" sz="1600" baseline="0" dirty="0"/>
+                        <a:rPr lang="ko-KR" altLang="en-US" sz="1400" baseline="0" dirty="0">
+                          <a:latin typeface="나눔바른고딕" panose="020B0603020101020101" pitchFamily="34" charset="-127"/>
+                          <a:ea typeface="나눔바른고딕" panose="020B0603020101020101" pitchFamily="34" charset="-127"/>
+                        </a:rPr>
                         <a:t>장애물 높이 인식</a:t>
                       </a:r>
                       <a:r>
-                        <a:rPr lang="en-US" altLang="ko-KR" sz="1600" baseline="0" dirty="0"/>
+                        <a:rPr lang="en-US" altLang="ko-KR" sz="1400" baseline="0" dirty="0">
+                          <a:latin typeface="나눔바른고딕" panose="020B0603020101020101" pitchFamily="34" charset="-127"/>
+                          <a:ea typeface="나눔바른고딕" panose="020B0603020101020101" pitchFamily="34" charset="-127"/>
+                        </a:rPr>
                         <a:t>, </a:t>
                       </a:r>
                       <a:br>
-                        <a:rPr lang="en-US" altLang="ko-KR" sz="1600" baseline="0" dirty="0"/>
+                        <a:rPr lang="en-US" altLang="ko-KR" sz="1400" baseline="0" dirty="0">
+                          <a:latin typeface="나눔바른고딕" panose="020B0603020101020101" pitchFamily="34" charset="-127"/>
+                          <a:ea typeface="나눔바른고딕" panose="020B0603020101020101" pitchFamily="34" charset="-127"/>
+                        </a:rPr>
                       </a:br>
                       <a:r>
-                        <a:rPr lang="ko-KR" altLang="en-US" sz="1600" baseline="0" dirty="0"/>
+                        <a:rPr lang="ko-KR" altLang="en-US" sz="1400" baseline="0" dirty="0">
+                          <a:latin typeface="나눔바른고딕" panose="020B0603020101020101" pitchFamily="34" charset="-127"/>
+                          <a:ea typeface="나눔바른고딕" panose="020B0603020101020101" pitchFamily="34" charset="-127"/>
+                        </a:rPr>
                         <a:t>인식한 장애물에 대한 </a:t>
                       </a:r>
                       <a:r>
-                        <a:rPr lang="ko-KR" altLang="en-US" sz="1600" baseline="0" dirty="0" err="1"/>
+                        <a:rPr lang="ko-KR" altLang="en-US" sz="1400" baseline="0" dirty="0" err="1">
+                          <a:latin typeface="나눔바른고딕" panose="020B0603020101020101" pitchFamily="34" charset="-127"/>
+                          <a:ea typeface="나눔바른고딕" panose="020B0603020101020101" pitchFamily="34" charset="-127"/>
+                        </a:rPr>
                         <a:t>파쿠르</a:t>
                       </a:r>
                       <a:r>
-                        <a:rPr lang="ko-KR" altLang="en-US" sz="1600" baseline="0" dirty="0"/>
+                        <a:rPr lang="ko-KR" altLang="en-US" sz="1400" baseline="0" dirty="0">
+                          <a:latin typeface="나눔바른고딕" panose="020B0603020101020101" pitchFamily="34" charset="-127"/>
+                          <a:ea typeface="나눔바른고딕" panose="020B0603020101020101" pitchFamily="34" charset="-127"/>
+                        </a:rPr>
                         <a:t> 애니메이션 선택</a:t>
                       </a:r>
                       <a:r>
-                        <a:rPr lang="en-US" altLang="ko-KR" sz="1600" baseline="0" dirty="0"/>
+                        <a:rPr lang="en-US" altLang="ko-KR" sz="1400" baseline="0" dirty="0">
+                          <a:latin typeface="나눔바른고딕" panose="020B0603020101020101" pitchFamily="34" charset="-127"/>
+                          <a:ea typeface="나눔바른고딕" panose="020B0603020101020101" pitchFamily="34" charset="-127"/>
+                        </a:rPr>
                         <a:t> </a:t>
                       </a:r>
                       <a:r>
-                        <a:rPr lang="ko-KR" altLang="en-US" sz="1600" baseline="0" dirty="0"/>
+                        <a:rPr lang="ko-KR" altLang="en-US" sz="1400" baseline="0" dirty="0">
+                          <a:latin typeface="나눔바른고딕" panose="020B0603020101020101" pitchFamily="34" charset="-127"/>
+                          <a:ea typeface="나눔바른고딕" panose="020B0603020101020101" pitchFamily="34" charset="-127"/>
+                        </a:rPr>
                         <a:t>및 출력</a:t>
                       </a:r>
-                      <a:endParaRPr lang="ko-KR" altLang="en-US" sz="1600" dirty="0"/>
+                      <a:endParaRPr lang="ko-KR" altLang="en-US" sz="1400" dirty="0">
+                        <a:latin typeface="나눔바른고딕" panose="020B0603020101020101" pitchFamily="34" charset="-127"/>
+                        <a:ea typeface="나눔바른고딕" panose="020B0603020101020101" pitchFamily="34" charset="-127"/>
+                      </a:endParaRPr>
                     </a:p>
                   </a:txBody>
-                  <a:tcPr/>
+                  <a:tcPr anchor="ctr"/>
                 </a:tc>
                 <a:extLst>
                   <a:ext uri="{0D108BD9-81ED-4DB2-BD59-A6C34878D82A}">
-                    <a16:rowId xmlns:a16="http://schemas.microsoft.com/office/drawing/2014/main" val="10003"/>
+                    <a16:rowId xmlns="" xmlns:a16="http://schemas.microsoft.com/office/drawing/2014/main" val="10003"/>
                   </a:ext>
                 </a:extLst>
               </a:tr>
@@ -4966,13 +5717,19 @@
                     <a:p>
                       <a:pPr algn="ctr" latinLnBrk="1"/>
                       <a:r>
-                        <a:rPr lang="en-US" altLang="ko-KR" dirty="0"/>
+                        <a:rPr lang="en-US" altLang="ko-KR" dirty="0">
+                          <a:latin typeface="나눔바른고딕" panose="020B0603020101020101" pitchFamily="34" charset="-127"/>
+                          <a:ea typeface="나눔바른고딕" panose="020B0603020101020101" pitchFamily="34" charset="-127"/>
+                        </a:rPr>
                         <a:t>4</a:t>
                       </a:r>
-                      <a:endParaRPr lang="ko-KR" altLang="en-US" dirty="0"/>
+                      <a:endParaRPr lang="ko-KR" altLang="en-US" dirty="0">
+                        <a:latin typeface="나눔바른고딕" panose="020B0603020101020101" pitchFamily="34" charset="-127"/>
+                        <a:ea typeface="나눔바른고딕" panose="020B0603020101020101" pitchFamily="34" charset="-127"/>
+                      </a:endParaRPr>
                     </a:p>
                   </a:txBody>
-                  <a:tcPr/>
+                  <a:tcPr anchor="ctr"/>
                 </a:tc>
                 <a:tc>
                   <a:txBody>
@@ -4981,21 +5738,33 @@
                     <a:p>
                       <a:pPr latinLnBrk="1"/>
                       <a:r>
-                        <a:rPr lang="ko-KR" altLang="en-US" sz="1600" dirty="0" err="1"/>
+                        <a:rPr lang="ko-KR" altLang="en-US" sz="1400" dirty="0" err="1">
+                          <a:latin typeface="나눔바른고딕" panose="020B0603020101020101" pitchFamily="34" charset="-127"/>
+                          <a:ea typeface="나눔바른고딕" panose="020B0603020101020101" pitchFamily="34" charset="-127"/>
+                        </a:rPr>
                         <a:t>파쿠르</a:t>
                       </a:r>
                       <a:r>
-                        <a:rPr lang="ko-KR" altLang="en-US" sz="1600" dirty="0"/>
+                        <a:rPr lang="ko-KR" altLang="en-US" sz="1400" dirty="0">
+                          <a:latin typeface="나눔바른고딕" panose="020B0603020101020101" pitchFamily="34" charset="-127"/>
+                          <a:ea typeface="나눔바른고딕" panose="020B0603020101020101" pitchFamily="34" charset="-127"/>
+                        </a:rPr>
                         <a:t> </a:t>
                       </a:r>
                       <a:r>
-                        <a:rPr lang="ko-KR" altLang="en-US" sz="1600" dirty="0" err="1"/>
+                        <a:rPr lang="ko-KR" altLang="en-US" sz="1400" dirty="0" err="1">
+                          <a:latin typeface="나눔바른고딕" panose="020B0603020101020101" pitchFamily="34" charset="-127"/>
+                          <a:ea typeface="나눔바른고딕" panose="020B0603020101020101" pitchFamily="34" charset="-127"/>
+                        </a:rPr>
                         <a:t>프로토타입</a:t>
                       </a:r>
-                      <a:endParaRPr lang="ko-KR" altLang="en-US" sz="1600" dirty="0"/>
+                      <a:endParaRPr lang="ko-KR" altLang="en-US" sz="1400" dirty="0">
+                        <a:latin typeface="나눔바른고딕" panose="020B0603020101020101" pitchFamily="34" charset="-127"/>
+                        <a:ea typeface="나눔바른고딕" panose="020B0603020101020101" pitchFamily="34" charset="-127"/>
+                      </a:endParaRPr>
                     </a:p>
                   </a:txBody>
-                  <a:tcPr/>
+                  <a:tcPr anchor="ctr"/>
                 </a:tc>
                 <a:tc>
                   <a:txBody>
@@ -5004,73 +5773,121 @@
                     <a:p>
                       <a:pPr latinLnBrk="1"/>
                       <a:r>
-                        <a:rPr lang="ko-KR" altLang="en-US" sz="1600" dirty="0"/>
+                        <a:rPr lang="ko-KR" altLang="en-US" sz="1400" dirty="0">
+                          <a:latin typeface="나눔바른고딕" panose="020B0603020101020101" pitchFamily="34" charset="-127"/>
+                          <a:ea typeface="나눔바른고딕" panose="020B0603020101020101" pitchFamily="34" charset="-127"/>
+                        </a:rPr>
                         <a:t>높이에 따른 장애물</a:t>
                       </a:r>
                       <a:r>
-                        <a:rPr lang="ko-KR" altLang="en-US" sz="1600" baseline="0" dirty="0"/>
+                        <a:rPr lang="ko-KR" altLang="en-US" sz="1400" baseline="0" dirty="0">
+                          <a:latin typeface="나눔바른고딕" panose="020B0603020101020101" pitchFamily="34" charset="-127"/>
+                          <a:ea typeface="나눔바른고딕" panose="020B0603020101020101" pitchFamily="34" charset="-127"/>
+                        </a:rPr>
                         <a:t> </a:t>
                       </a:r>
                       <a:r>
-                        <a:rPr lang="ko-KR" altLang="en-US" sz="1600" baseline="0" dirty="0" err="1"/>
+                        <a:rPr lang="ko-KR" altLang="en-US" sz="1400" baseline="0" dirty="0" err="1">
+                          <a:latin typeface="나눔바른고딕" panose="020B0603020101020101" pitchFamily="34" charset="-127"/>
+                          <a:ea typeface="나눔바른고딕" panose="020B0603020101020101" pitchFamily="34" charset="-127"/>
+                        </a:rPr>
                         <a:t>파쿠르</a:t>
                       </a:r>
                       <a:r>
-                        <a:rPr lang="ko-KR" altLang="en-US" sz="1600" baseline="0" dirty="0"/>
+                        <a:rPr lang="ko-KR" altLang="en-US" sz="1400" baseline="0" dirty="0">
+                          <a:latin typeface="나눔바른고딕" panose="020B0603020101020101" pitchFamily="34" charset="-127"/>
+                          <a:ea typeface="나눔바른고딕" panose="020B0603020101020101" pitchFamily="34" charset="-127"/>
+                        </a:rPr>
                         <a:t> 처리</a:t>
                       </a:r>
                       <a:r>
-                        <a:rPr lang="en-US" altLang="ko-KR" sz="1600" baseline="0" dirty="0"/>
+                        <a:rPr lang="en-US" altLang="ko-KR" sz="1400" baseline="0" dirty="0">
+                          <a:latin typeface="나눔바른고딕" panose="020B0603020101020101" pitchFamily="34" charset="-127"/>
+                          <a:ea typeface="나눔바른고딕" panose="020B0603020101020101" pitchFamily="34" charset="-127"/>
+                        </a:rPr>
                         <a:t>, </a:t>
                       </a:r>
                       <a:r>
-                        <a:rPr lang="ko-KR" altLang="en-US" sz="1600" dirty="0"/>
+                        <a:rPr lang="ko-KR" altLang="en-US" sz="1400" dirty="0">
+                          <a:latin typeface="나눔바른고딕" panose="020B0603020101020101" pitchFamily="34" charset="-127"/>
+                          <a:ea typeface="나눔바른고딕" panose="020B0603020101020101" pitchFamily="34" charset="-127"/>
+                        </a:rPr>
                         <a:t>평지</a:t>
                       </a:r>
                       <a:r>
-                        <a:rPr lang="en-US" altLang="ko-KR" sz="1600" dirty="0"/>
+                        <a:rPr lang="en-US" altLang="ko-KR" sz="1400" dirty="0">
+                          <a:latin typeface="나눔바른고딕" panose="020B0603020101020101" pitchFamily="34" charset="-127"/>
+                          <a:ea typeface="나눔바른고딕" panose="020B0603020101020101" pitchFamily="34" charset="-127"/>
+                        </a:rPr>
                         <a:t>-</a:t>
                       </a:r>
                       <a:r>
-                        <a:rPr lang="ko-KR" altLang="en-US" sz="1600" dirty="0"/>
+                        <a:rPr lang="ko-KR" altLang="en-US" sz="1400" dirty="0">
+                          <a:latin typeface="나눔바른고딕" panose="020B0603020101020101" pitchFamily="34" charset="-127"/>
+                          <a:ea typeface="나눔바른고딕" panose="020B0603020101020101" pitchFamily="34" charset="-127"/>
+                        </a:rPr>
                         <a:t>벽면 간 애니메이션</a:t>
                       </a:r>
                       <a:r>
-                        <a:rPr lang="ko-KR" altLang="en-US" sz="1600" baseline="0" dirty="0"/>
+                        <a:rPr lang="ko-KR" altLang="en-US" sz="1400" baseline="0" dirty="0">
+                          <a:latin typeface="나눔바른고딕" panose="020B0603020101020101" pitchFamily="34" charset="-127"/>
+                          <a:ea typeface="나눔바른고딕" panose="020B0603020101020101" pitchFamily="34" charset="-127"/>
+                        </a:rPr>
                         <a:t> 상태</a:t>
                       </a:r>
                       <a:r>
-                        <a:rPr lang="ko-KR" altLang="en-US" sz="1600" dirty="0"/>
+                        <a:rPr lang="ko-KR" altLang="en-US" sz="1400" dirty="0">
+                          <a:latin typeface="나눔바른고딕" panose="020B0603020101020101" pitchFamily="34" charset="-127"/>
+                          <a:ea typeface="나눔바른고딕" panose="020B0603020101020101" pitchFamily="34" charset="-127"/>
+                        </a:rPr>
                         <a:t> 전환</a:t>
                       </a:r>
                       <a:r>
-                        <a:rPr lang="en-US" altLang="ko-KR" sz="1600" baseline="0" dirty="0"/>
+                        <a:rPr lang="en-US" altLang="ko-KR" sz="1400" baseline="0" dirty="0">
+                          <a:latin typeface="나눔바른고딕" panose="020B0603020101020101" pitchFamily="34" charset="-127"/>
+                          <a:ea typeface="나눔바른고딕" panose="020B0603020101020101" pitchFamily="34" charset="-127"/>
+                        </a:rPr>
                         <a:t> (</a:t>
                       </a:r>
                       <a:r>
-                        <a:rPr lang="ko-KR" altLang="en-US" sz="1600" baseline="0" dirty="0"/>
+                        <a:rPr lang="ko-KR" altLang="en-US" sz="1400" baseline="0" dirty="0">
+                          <a:latin typeface="나눔바른고딕" panose="020B0603020101020101" pitchFamily="34" charset="-127"/>
+                          <a:ea typeface="나눔바른고딕" panose="020B0603020101020101" pitchFamily="34" charset="-127"/>
+                        </a:rPr>
                         <a:t>벽면을 올라 평지에 도달</a:t>
                       </a:r>
                       <a:r>
-                        <a:rPr lang="en-US" altLang="ko-KR" sz="1600" baseline="0" dirty="0"/>
+                        <a:rPr lang="en-US" altLang="ko-KR" sz="1400" baseline="0" dirty="0">
+                          <a:latin typeface="나눔바른고딕" panose="020B0603020101020101" pitchFamily="34" charset="-127"/>
+                          <a:ea typeface="나눔바른고딕" panose="020B0603020101020101" pitchFamily="34" charset="-127"/>
+                        </a:rPr>
                         <a:t>, </a:t>
                       </a:r>
                       <a:r>
-                        <a:rPr lang="ko-KR" altLang="en-US" sz="1600" baseline="0" dirty="0"/>
+                        <a:rPr lang="ko-KR" altLang="en-US" sz="1400" baseline="0" dirty="0">
+                          <a:latin typeface="나눔바른고딕" panose="020B0603020101020101" pitchFamily="34" charset="-127"/>
+                          <a:ea typeface="나눔바른고딕" panose="020B0603020101020101" pitchFamily="34" charset="-127"/>
+                        </a:rPr>
                         <a:t>벽면에서 내려와 평지에 도달 등</a:t>
                       </a:r>
                       <a:r>
-                        <a:rPr lang="en-US" altLang="ko-KR" sz="1600" baseline="0" dirty="0"/>
+                        <a:rPr lang="en-US" altLang="ko-KR" sz="1400" baseline="0" dirty="0">
+                          <a:latin typeface="나눔바른고딕" panose="020B0603020101020101" pitchFamily="34" charset="-127"/>
+                          <a:ea typeface="나눔바른고딕" panose="020B0603020101020101" pitchFamily="34" charset="-127"/>
+                        </a:rPr>
                         <a:t>)</a:t>
                       </a:r>
-                      <a:endParaRPr lang="en-US" altLang="ko-KR" sz="1600" dirty="0"/>
+                      <a:endParaRPr lang="en-US" altLang="ko-KR" sz="1400" dirty="0">
+                        <a:latin typeface="나눔바른고딕" panose="020B0603020101020101" pitchFamily="34" charset="-127"/>
+                        <a:ea typeface="나눔바른고딕" panose="020B0603020101020101" pitchFamily="34" charset="-127"/>
+                      </a:endParaRPr>
                     </a:p>
                   </a:txBody>
-                  <a:tcPr/>
+                  <a:tcPr anchor="ctr"/>
                 </a:tc>
                 <a:extLst>
                   <a:ext uri="{0D108BD9-81ED-4DB2-BD59-A6C34878D82A}">
-                    <a16:rowId xmlns:a16="http://schemas.microsoft.com/office/drawing/2014/main" val="10004"/>
+                    <a16:rowId xmlns="" xmlns:a16="http://schemas.microsoft.com/office/drawing/2014/main" val="10004"/>
                   </a:ext>
                 </a:extLst>
               </a:tr>
@@ -5082,13 +5899,19 @@
                     <a:p>
                       <a:pPr algn="ctr" latinLnBrk="1"/>
                       <a:r>
-                        <a:rPr lang="en-US" altLang="ko-KR" dirty="0"/>
+                        <a:rPr lang="en-US" altLang="ko-KR" dirty="0">
+                          <a:latin typeface="나눔바른고딕" panose="020B0603020101020101" pitchFamily="34" charset="-127"/>
+                          <a:ea typeface="나눔바른고딕" panose="020B0603020101020101" pitchFamily="34" charset="-127"/>
+                        </a:rPr>
                         <a:t>5</a:t>
                       </a:r>
-                      <a:endParaRPr lang="ko-KR" altLang="en-US" dirty="0"/>
+                      <a:endParaRPr lang="ko-KR" altLang="en-US" dirty="0">
+                        <a:latin typeface="나눔바른고딕" panose="020B0603020101020101" pitchFamily="34" charset="-127"/>
+                        <a:ea typeface="나눔바른고딕" panose="020B0603020101020101" pitchFamily="34" charset="-127"/>
+                      </a:endParaRPr>
                     </a:p>
                   </a:txBody>
-                  <a:tcPr/>
+                  <a:tcPr anchor="ctr"/>
                 </a:tc>
                 <a:tc>
                   <a:txBody>
@@ -5097,16 +5920,22 @@
                     <a:p>
                       <a:pPr latinLnBrk="1"/>
                       <a:r>
-                        <a:rPr lang="ko-KR" altLang="en-US" sz="1600" dirty="0" err="1"/>
+                        <a:rPr lang="ko-KR" altLang="en-US" sz="1400" dirty="0" err="1">
+                          <a:latin typeface="나눔바른고딕" panose="020B0603020101020101" pitchFamily="34" charset="-127"/>
+                          <a:ea typeface="나눔바른고딕" panose="020B0603020101020101" pitchFamily="34" charset="-127"/>
+                        </a:rPr>
                         <a:t>파쿠르</a:t>
                       </a:r>
                       <a:r>
-                        <a:rPr lang="ko-KR" altLang="en-US" sz="1600" dirty="0"/>
+                        <a:rPr lang="ko-KR" altLang="en-US" sz="1400" dirty="0">
+                          <a:latin typeface="나눔바른고딕" panose="020B0603020101020101" pitchFamily="34" charset="-127"/>
+                          <a:ea typeface="나눔바른고딕" panose="020B0603020101020101" pitchFamily="34" charset="-127"/>
+                        </a:rPr>
                         <a:t> 시스템 보완</a:t>
                       </a:r>
                     </a:p>
                   </a:txBody>
-                  <a:tcPr/>
+                  <a:tcPr anchor="ctr"/>
                 </a:tc>
                 <a:tc>
                   <a:txBody>
@@ -5115,53 +5944,86 @@
                     <a:p>
                       <a:pPr latinLnBrk="1"/>
                       <a:r>
-                        <a:rPr lang="ko-KR" altLang="en-US" sz="1600" dirty="0"/>
+                        <a:rPr lang="ko-KR" altLang="en-US" sz="1400" dirty="0">
+                          <a:latin typeface="나눔바른고딕" panose="020B0603020101020101" pitchFamily="34" charset="-127"/>
+                          <a:ea typeface="나눔바른고딕" panose="020B0603020101020101" pitchFamily="34" charset="-127"/>
+                        </a:rPr>
                         <a:t>애니메이션 </a:t>
                       </a:r>
                       <a:r>
-                        <a:rPr lang="en-US" altLang="ko-KR" sz="1600" dirty="0"/>
+                        <a:rPr lang="en-US" altLang="ko-KR" sz="1400" dirty="0">
+                          <a:latin typeface="나눔바른고딕" panose="020B0603020101020101" pitchFamily="34" charset="-127"/>
+                          <a:ea typeface="나눔바른고딕" panose="020B0603020101020101" pitchFamily="34" charset="-127"/>
+                        </a:rPr>
                         <a:t>IK </a:t>
                       </a:r>
                       <a:r>
-                        <a:rPr lang="ko-KR" altLang="en-US" sz="1600" dirty="0"/>
+                        <a:rPr lang="ko-KR" altLang="en-US" sz="1400" dirty="0">
+                          <a:latin typeface="나눔바른고딕" panose="020B0603020101020101" pitchFamily="34" charset="-127"/>
+                          <a:ea typeface="나눔바른고딕" panose="020B0603020101020101" pitchFamily="34" charset="-127"/>
+                        </a:rPr>
                         <a:t>적용</a:t>
                       </a:r>
                       <a:r>
-                        <a:rPr lang="en-US" altLang="ko-KR" sz="1600" dirty="0"/>
+                        <a:rPr lang="en-US" altLang="ko-KR" sz="1400" dirty="0">
+                          <a:latin typeface="나눔바른고딕" panose="020B0603020101020101" pitchFamily="34" charset="-127"/>
+                          <a:ea typeface="나눔바른고딕" panose="020B0603020101020101" pitchFamily="34" charset="-127"/>
+                        </a:rPr>
                         <a:t>, </a:t>
                       </a:r>
                       <a:r>
-                        <a:rPr lang="ko-KR" altLang="en-US" sz="1600" dirty="0" err="1"/>
+                        <a:rPr lang="ko-KR" altLang="en-US" sz="1400" dirty="0" err="1">
+                          <a:latin typeface="나눔바른고딕" panose="020B0603020101020101" pitchFamily="34" charset="-127"/>
+                          <a:ea typeface="나눔바른고딕" panose="020B0603020101020101" pitchFamily="34" charset="-127"/>
+                        </a:rPr>
                         <a:t>파쿠르</a:t>
                       </a:r>
                       <a:r>
-                        <a:rPr lang="ko-KR" altLang="en-US" sz="1600" dirty="0"/>
+                        <a:rPr lang="ko-KR" altLang="en-US" sz="1400" dirty="0">
+                          <a:latin typeface="나눔바른고딕" panose="020B0603020101020101" pitchFamily="34" charset="-127"/>
+                          <a:ea typeface="나눔바른고딕" panose="020B0603020101020101" pitchFamily="34" charset="-127"/>
+                        </a:rPr>
                         <a:t> 시</a:t>
                       </a:r>
                       <a:r>
-                        <a:rPr lang="en-US" altLang="ko-KR" sz="1600" dirty="0"/>
+                        <a:rPr lang="en-US" altLang="ko-KR" sz="1400" dirty="0">
+                          <a:latin typeface="나눔바른고딕" panose="020B0603020101020101" pitchFamily="34" charset="-127"/>
+                          <a:ea typeface="나눔바른고딕" panose="020B0603020101020101" pitchFamily="34" charset="-127"/>
+                        </a:rPr>
                         <a:t> </a:t>
                       </a:r>
                       <a:r>
-                        <a:rPr lang="ko-KR" altLang="en-US" sz="1600" dirty="0"/>
+                        <a:rPr lang="ko-KR" altLang="en-US" sz="1400" dirty="0">
+                          <a:latin typeface="나눔바른고딕" panose="020B0603020101020101" pitchFamily="34" charset="-127"/>
+                          <a:ea typeface="나눔바른고딕" panose="020B0603020101020101" pitchFamily="34" charset="-127"/>
+                        </a:rPr>
                         <a:t>캐릭터 손 위치 </a:t>
                       </a:r>
                       <a:r>
-                        <a:rPr lang="en-US" altLang="ko-KR" sz="1600" dirty="0"/>
+                        <a:rPr lang="en-US" altLang="ko-KR" sz="1400" dirty="0">
+                          <a:latin typeface="나눔바른고딕" panose="020B0603020101020101" pitchFamily="34" charset="-127"/>
+                          <a:ea typeface="나눔바른고딕" panose="020B0603020101020101" pitchFamily="34" charset="-127"/>
+                        </a:rPr>
                         <a:t>IK</a:t>
                       </a:r>
                       <a:r>
-                        <a:rPr lang="ko-KR" altLang="en-US" sz="1600" dirty="0"/>
+                        <a:rPr lang="ko-KR" altLang="en-US" sz="1400" dirty="0">
+                          <a:latin typeface="나눔바른고딕" panose="020B0603020101020101" pitchFamily="34" charset="-127"/>
+                          <a:ea typeface="나눔바른고딕" panose="020B0603020101020101" pitchFamily="34" charset="-127"/>
+                        </a:rPr>
                         <a:t>를 통해 보정</a:t>
                       </a:r>
-                      <a:endParaRPr lang="en-US" altLang="ko-KR" sz="1600" dirty="0"/>
+                      <a:endParaRPr lang="en-US" altLang="ko-KR" sz="1400" dirty="0">
+                        <a:latin typeface="나눔바른고딕" panose="020B0603020101020101" pitchFamily="34" charset="-127"/>
+                        <a:ea typeface="나눔바른고딕" panose="020B0603020101020101" pitchFamily="34" charset="-127"/>
+                      </a:endParaRPr>
                     </a:p>
                   </a:txBody>
-                  <a:tcPr/>
+                  <a:tcPr anchor="ctr"/>
                 </a:tc>
                 <a:extLst>
                   <a:ext uri="{0D108BD9-81ED-4DB2-BD59-A6C34878D82A}">
-                    <a16:rowId xmlns:a16="http://schemas.microsoft.com/office/drawing/2014/main" val="10005"/>
+                    <a16:rowId xmlns="" xmlns:a16="http://schemas.microsoft.com/office/drawing/2014/main" val="10005"/>
                   </a:ext>
                 </a:extLst>
               </a:tr>
@@ -5173,13 +6035,19 @@
                     <a:p>
                       <a:pPr algn="ctr" latinLnBrk="1"/>
                       <a:r>
-                        <a:rPr lang="en-US" altLang="ko-KR" dirty="0"/>
+                        <a:rPr lang="en-US" altLang="ko-KR" dirty="0">
+                          <a:latin typeface="나눔바른고딕" panose="020B0603020101020101" pitchFamily="34" charset="-127"/>
+                          <a:ea typeface="나눔바른고딕" panose="020B0603020101020101" pitchFamily="34" charset="-127"/>
+                        </a:rPr>
                         <a:t>6</a:t>
                       </a:r>
-                      <a:endParaRPr lang="ko-KR" altLang="en-US" dirty="0"/>
+                      <a:endParaRPr lang="ko-KR" altLang="en-US" dirty="0">
+                        <a:latin typeface="나눔바른고딕" panose="020B0603020101020101" pitchFamily="34" charset="-127"/>
+                        <a:ea typeface="나눔바른고딕" panose="020B0603020101020101" pitchFamily="34" charset="-127"/>
+                      </a:endParaRPr>
                     </a:p>
                   </a:txBody>
-                  <a:tcPr/>
+                  <a:tcPr anchor="ctr"/>
                 </a:tc>
                 <a:tc>
                   <a:txBody>
@@ -5188,17 +6056,26 @@
                     <a:p>
                       <a:pPr latinLnBrk="1"/>
                       <a:r>
-                        <a:rPr lang="ko-KR" altLang="en-US" sz="1600" dirty="0"/>
+                        <a:rPr lang="ko-KR" altLang="en-US" sz="1400" dirty="0">
+                          <a:latin typeface="나눔바른고딕" panose="020B0603020101020101" pitchFamily="34" charset="-127"/>
+                          <a:ea typeface="나눔바른고딕" panose="020B0603020101020101" pitchFamily="34" charset="-127"/>
+                        </a:rPr>
                         <a:t>복잡한 지형 애니메이션 처리 </a:t>
                       </a:r>
                       <a:r>
-                        <a:rPr lang="en-US" altLang="ko-KR" sz="1600" dirty="0"/>
+                        <a:rPr lang="en-US" altLang="ko-KR" sz="1400" dirty="0">
+                          <a:latin typeface="나눔바른고딕" panose="020B0603020101020101" pitchFamily="34" charset="-127"/>
+                          <a:ea typeface="나눔바른고딕" panose="020B0603020101020101" pitchFamily="34" charset="-127"/>
+                        </a:rPr>
                         <a:t>1</a:t>
                       </a:r>
-                      <a:endParaRPr lang="ko-KR" altLang="en-US" sz="1600" dirty="0"/>
+                      <a:endParaRPr lang="ko-KR" altLang="en-US" sz="1400" dirty="0">
+                        <a:latin typeface="나눔바른고딕" panose="020B0603020101020101" pitchFamily="34" charset="-127"/>
+                        <a:ea typeface="나눔바른고딕" panose="020B0603020101020101" pitchFamily="34" charset="-127"/>
+                      </a:endParaRPr>
                     </a:p>
                   </a:txBody>
-                  <a:tcPr/>
+                  <a:tcPr anchor="ctr"/>
                 </a:tc>
                 <a:tc>
                   <a:txBody>
@@ -5207,44 +6084,78 @@
                     <a:p>
                       <a:pPr latinLnBrk="1"/>
                       <a:r>
-                        <a:rPr lang="ko-KR" altLang="en-US" sz="1600" baseline="0" dirty="0"/>
+                        <a:rPr lang="ko-KR" altLang="en-US" sz="1400" baseline="0" dirty="0">
+                          <a:latin typeface="나눔바른고딕" panose="020B0603020101020101" pitchFamily="34" charset="-127"/>
+                          <a:ea typeface="나눔바른고딕" panose="020B0603020101020101" pitchFamily="34" charset="-127"/>
+                        </a:rPr>
                         <a:t>벽면 중간에 지붕</a:t>
                       </a:r>
                       <a:r>
-                        <a:rPr lang="en-US" altLang="ko-KR" sz="1600" baseline="0" dirty="0"/>
+                        <a:rPr lang="en-US" altLang="ko-KR" sz="1400" baseline="0" dirty="0">
+                          <a:latin typeface="나눔바른고딕" panose="020B0603020101020101" pitchFamily="34" charset="-127"/>
+                          <a:ea typeface="나눔바른고딕" panose="020B0603020101020101" pitchFamily="34" charset="-127"/>
+                        </a:rPr>
                         <a:t>, </a:t>
                       </a:r>
                       <a:r>
-                        <a:rPr lang="ko-KR" altLang="en-US" sz="1600" baseline="0" dirty="0"/>
+                        <a:rPr lang="ko-KR" altLang="en-US" sz="1400" baseline="0" dirty="0">
+                          <a:latin typeface="나눔바른고딕" panose="020B0603020101020101" pitchFamily="34" charset="-127"/>
+                          <a:ea typeface="나눔바른고딕" panose="020B0603020101020101" pitchFamily="34" charset="-127"/>
+                        </a:rPr>
                         <a:t>경사로</a:t>
                       </a:r>
                       <a:r>
-                        <a:rPr lang="en-US" altLang="ko-KR" sz="1600" baseline="0" dirty="0"/>
+                        <a:rPr lang="en-US" altLang="ko-KR" sz="1400" baseline="0" dirty="0">
+                          <a:latin typeface="나눔바른고딕" panose="020B0603020101020101" pitchFamily="34" charset="-127"/>
+                          <a:ea typeface="나눔바른고딕" panose="020B0603020101020101" pitchFamily="34" charset="-127"/>
+                        </a:rPr>
                         <a:t>, </a:t>
                       </a:r>
                       <a:r>
-                        <a:rPr lang="ko-KR" altLang="en-US" sz="1600" baseline="0" dirty="0"/>
+                        <a:rPr lang="ko-KR" altLang="en-US" sz="1400" baseline="0" dirty="0">
+                          <a:latin typeface="나눔바른고딕" panose="020B0603020101020101" pitchFamily="34" charset="-127"/>
+                          <a:ea typeface="나눔바른고딕" panose="020B0603020101020101" pitchFamily="34" charset="-127"/>
+                        </a:rPr>
                         <a:t>철봉 나열된 환경</a:t>
                       </a:r>
+                      <a:r>
+                        <a:rPr lang="en-US" altLang="ko-KR" sz="1400" baseline="0" dirty="0">
+                          <a:latin typeface="나눔바른고딕" panose="020B0603020101020101" pitchFamily="34" charset="-127"/>
+                          <a:ea typeface="나눔바른고딕" panose="020B0603020101020101" pitchFamily="34" charset="-127"/>
+                        </a:rPr>
+                        <a:t/>
+                      </a:r>
                       <a:br>
-                        <a:rPr lang="en-US" altLang="ko-KR" sz="1600" baseline="0" dirty="0"/>
+                        <a:rPr lang="en-US" altLang="ko-KR" sz="1400" baseline="0" dirty="0">
+                          <a:latin typeface="나눔바른고딕" panose="020B0603020101020101" pitchFamily="34" charset="-127"/>
+                          <a:ea typeface="나눔바른고딕" panose="020B0603020101020101" pitchFamily="34" charset="-127"/>
+                        </a:rPr>
                       </a:br>
                       <a:r>
-                        <a:rPr lang="ko-KR" altLang="en-US" sz="1600" baseline="0" dirty="0" err="1"/>
+                        <a:rPr lang="ko-KR" altLang="en-US" sz="1400" baseline="0" dirty="0" err="1">
+                          <a:latin typeface="나눔바른고딕" panose="020B0603020101020101" pitchFamily="34" charset="-127"/>
+                          <a:ea typeface="나눔바른고딕" panose="020B0603020101020101" pitchFamily="34" charset="-127"/>
+                        </a:rPr>
                         <a:t>파쿠르</a:t>
                       </a:r>
                       <a:r>
-                        <a:rPr lang="ko-KR" altLang="en-US" sz="1600" baseline="0" dirty="0"/>
+                        <a:rPr lang="ko-KR" altLang="en-US" sz="1400" baseline="0" dirty="0">
+                          <a:latin typeface="나눔바른고딕" panose="020B0603020101020101" pitchFamily="34" charset="-127"/>
+                          <a:ea typeface="나눔바른고딕" panose="020B0603020101020101" pitchFamily="34" charset="-127"/>
+                        </a:rPr>
                         <a:t> 애니메이션 처리</a:t>
                       </a:r>
-                      <a:endParaRPr lang="ko-KR" altLang="en-US" sz="1600" dirty="0"/>
+                      <a:endParaRPr lang="ko-KR" altLang="en-US" sz="1400" dirty="0">
+                        <a:latin typeface="나눔바른고딕" panose="020B0603020101020101" pitchFamily="34" charset="-127"/>
+                        <a:ea typeface="나눔바른고딕" panose="020B0603020101020101" pitchFamily="34" charset="-127"/>
+                      </a:endParaRPr>
                     </a:p>
                   </a:txBody>
-                  <a:tcPr/>
+                  <a:tcPr anchor="ctr"/>
                 </a:tc>
                 <a:extLst>
                   <a:ext uri="{0D108BD9-81ED-4DB2-BD59-A6C34878D82A}">
-                    <a16:rowId xmlns:a16="http://schemas.microsoft.com/office/drawing/2014/main" val="10006"/>
+                    <a16:rowId xmlns="" xmlns:a16="http://schemas.microsoft.com/office/drawing/2014/main" val="10006"/>
                   </a:ext>
                 </a:extLst>
               </a:tr>
@@ -5256,13 +6167,19 @@
                     <a:p>
                       <a:pPr algn="ctr" latinLnBrk="1"/>
                       <a:r>
-                        <a:rPr lang="en-US" altLang="ko-KR" dirty="0"/>
+                        <a:rPr lang="en-US" altLang="ko-KR" dirty="0">
+                          <a:latin typeface="나눔바른고딕" panose="020B0603020101020101" pitchFamily="34" charset="-127"/>
+                          <a:ea typeface="나눔바른고딕" panose="020B0603020101020101" pitchFamily="34" charset="-127"/>
+                        </a:rPr>
                         <a:t>7</a:t>
                       </a:r>
-                      <a:endParaRPr lang="ko-KR" altLang="en-US" dirty="0"/>
+                      <a:endParaRPr lang="ko-KR" altLang="en-US" dirty="0">
+                        <a:latin typeface="나눔바른고딕" panose="020B0603020101020101" pitchFamily="34" charset="-127"/>
+                        <a:ea typeface="나눔바른고딕" panose="020B0603020101020101" pitchFamily="34" charset="-127"/>
+                      </a:endParaRPr>
                     </a:p>
                   </a:txBody>
-                  <a:tcPr/>
+                  <a:tcPr anchor="ctr"/>
                 </a:tc>
                 <a:tc>
                   <a:txBody>
@@ -5287,21 +6204,33 @@
                         <a:defRPr/>
                       </a:pPr>
                       <a:r>
-                        <a:rPr lang="ko-KR" altLang="en-US" sz="1600" dirty="0"/>
+                        <a:rPr lang="ko-KR" altLang="en-US" sz="1400" dirty="0">
+                          <a:latin typeface="나눔바른고딕" panose="020B0603020101020101" pitchFamily="34" charset="-127"/>
+                          <a:ea typeface="나눔바른고딕" panose="020B0603020101020101" pitchFamily="34" charset="-127"/>
+                        </a:rPr>
                         <a:t>복잡한 지형 애니메이션 처리 </a:t>
                       </a:r>
                       <a:r>
-                        <a:rPr lang="en-US" altLang="ko-KR" sz="1600" dirty="0"/>
+                        <a:rPr lang="en-US" altLang="ko-KR" sz="1400" dirty="0">
+                          <a:latin typeface="나눔바른고딕" panose="020B0603020101020101" pitchFamily="34" charset="-127"/>
+                          <a:ea typeface="나눔바른고딕" panose="020B0603020101020101" pitchFamily="34" charset="-127"/>
+                        </a:rPr>
                         <a:t>2</a:t>
                       </a:r>
-                      <a:endParaRPr lang="ko-KR" altLang="en-US" sz="1600" dirty="0"/>
+                      <a:endParaRPr lang="ko-KR" altLang="en-US" sz="1400" dirty="0">
+                        <a:latin typeface="나눔바른고딕" panose="020B0603020101020101" pitchFamily="34" charset="-127"/>
+                        <a:ea typeface="나눔바른고딕" panose="020B0603020101020101" pitchFamily="34" charset="-127"/>
+                      </a:endParaRPr>
                     </a:p>
                     <a:p>
                       <a:pPr latinLnBrk="1"/>
-                      <a:endParaRPr lang="ko-KR" altLang="en-US" sz="1600" dirty="0"/>
+                      <a:endParaRPr lang="ko-KR" altLang="en-US" sz="1400" dirty="0">
+                        <a:latin typeface="나눔바른고딕" panose="020B0603020101020101" pitchFamily="34" charset="-127"/>
+                        <a:ea typeface="나눔바른고딕" panose="020B0603020101020101" pitchFamily="34" charset="-127"/>
+                      </a:endParaRPr>
                     </a:p>
                   </a:txBody>
-                  <a:tcPr/>
+                  <a:tcPr anchor="ctr"/>
                 </a:tc>
                 <a:tc>
                   <a:txBody>
@@ -5310,37 +6239,58 @@
                     <a:p>
                       <a:pPr latinLnBrk="1"/>
                       <a:r>
-                        <a:rPr lang="ko-KR" altLang="en-US" sz="1600" dirty="0"/>
+                        <a:rPr lang="ko-KR" altLang="en-US" sz="1400" dirty="0">
+                          <a:latin typeface="나눔바른고딕" panose="020B0603020101020101" pitchFamily="34" charset="-127"/>
+                          <a:ea typeface="나눔바른고딕" panose="020B0603020101020101" pitchFamily="34" charset="-127"/>
+                        </a:rPr>
                         <a:t>직각으로 만나는 벽면 간 이동 처리</a:t>
                       </a:r>
                       <a:r>
-                        <a:rPr lang="en-US" altLang="ko-KR" sz="1600" dirty="0"/>
+                        <a:rPr lang="en-US" altLang="ko-KR" sz="1400" dirty="0">
+                          <a:latin typeface="나눔바른고딕" panose="020B0603020101020101" pitchFamily="34" charset="-127"/>
+                          <a:ea typeface="나눔바른고딕" panose="020B0603020101020101" pitchFamily="34" charset="-127"/>
+                        </a:rPr>
                         <a:t>, </a:t>
                       </a:r>
                       <a:r>
-                        <a:rPr lang="ko-KR" altLang="en-US" sz="1600" dirty="0"/>
+                        <a:rPr lang="ko-KR" altLang="en-US" sz="1400" dirty="0">
+                          <a:latin typeface="나눔바른고딕" panose="020B0603020101020101" pitchFamily="34" charset="-127"/>
+                          <a:ea typeface="나눔바른고딕" panose="020B0603020101020101" pitchFamily="34" charset="-127"/>
+                        </a:rPr>
                         <a:t>벽면에 뻗어 나온 줄 또는 기둥</a:t>
                       </a:r>
                       <a:r>
-                        <a:rPr lang="ko-KR" altLang="en-US" sz="1600" baseline="0" dirty="0"/>
+                        <a:rPr lang="ko-KR" altLang="en-US" sz="1400" baseline="0" dirty="0">
+                          <a:latin typeface="나눔바른고딕" panose="020B0603020101020101" pitchFamily="34" charset="-127"/>
+                          <a:ea typeface="나눔바른고딕" panose="020B0603020101020101" pitchFamily="34" charset="-127"/>
+                        </a:rPr>
                         <a:t> 환경 </a:t>
                       </a:r>
                       <a:r>
-                        <a:rPr lang="ko-KR" altLang="en-US" sz="1600" baseline="0" dirty="0" err="1"/>
+                        <a:rPr lang="ko-KR" altLang="en-US" sz="1400" baseline="0" dirty="0" err="1">
+                          <a:latin typeface="나눔바른고딕" panose="020B0603020101020101" pitchFamily="34" charset="-127"/>
+                          <a:ea typeface="나눔바른고딕" panose="020B0603020101020101" pitchFamily="34" charset="-127"/>
+                        </a:rPr>
                         <a:t>파쿠르</a:t>
                       </a:r>
                       <a:r>
-                        <a:rPr lang="ko-KR" altLang="en-US" sz="1600" baseline="0" dirty="0"/>
+                        <a:rPr lang="ko-KR" altLang="en-US" sz="1400" baseline="0" dirty="0">
+                          <a:latin typeface="나눔바른고딕" panose="020B0603020101020101" pitchFamily="34" charset="-127"/>
+                          <a:ea typeface="나눔바른고딕" panose="020B0603020101020101" pitchFamily="34" charset="-127"/>
+                        </a:rPr>
                         <a:t> 애니메이션 처리</a:t>
                       </a:r>
-                      <a:endParaRPr lang="ko-KR" altLang="en-US" sz="1600" dirty="0"/>
+                      <a:endParaRPr lang="ko-KR" altLang="en-US" sz="1400" dirty="0">
+                        <a:latin typeface="나눔바른고딕" panose="020B0603020101020101" pitchFamily="34" charset="-127"/>
+                        <a:ea typeface="나눔바른고딕" panose="020B0603020101020101" pitchFamily="34" charset="-127"/>
+                      </a:endParaRPr>
                     </a:p>
                   </a:txBody>
-                  <a:tcPr/>
+                  <a:tcPr anchor="ctr"/>
                 </a:tc>
                 <a:extLst>
                   <a:ext uri="{0D108BD9-81ED-4DB2-BD59-A6C34878D82A}">
-                    <a16:rowId xmlns:a16="http://schemas.microsoft.com/office/drawing/2014/main" val="10007"/>
+                    <a16:rowId xmlns="" xmlns:a16="http://schemas.microsoft.com/office/drawing/2014/main" val="10007"/>
                   </a:ext>
                 </a:extLst>
               </a:tr>
@@ -5352,13 +6302,19 @@
                     <a:p>
                       <a:pPr algn="ctr" latinLnBrk="1"/>
                       <a:r>
-                        <a:rPr lang="en-US" altLang="ko-KR" dirty="0"/>
+                        <a:rPr lang="en-US" altLang="ko-KR" dirty="0">
+                          <a:latin typeface="나눔바른고딕" panose="020B0603020101020101" pitchFamily="34" charset="-127"/>
+                          <a:ea typeface="나눔바른고딕" panose="020B0603020101020101" pitchFamily="34" charset="-127"/>
+                        </a:rPr>
                         <a:t>8</a:t>
                       </a:r>
-                      <a:endParaRPr lang="ko-KR" altLang="en-US" dirty="0"/>
+                      <a:endParaRPr lang="ko-KR" altLang="en-US" dirty="0">
+                        <a:latin typeface="나눔바른고딕" panose="020B0603020101020101" pitchFamily="34" charset="-127"/>
+                        <a:ea typeface="나눔바른고딕" panose="020B0603020101020101" pitchFamily="34" charset="-127"/>
+                      </a:endParaRPr>
                     </a:p>
                   </a:txBody>
-                  <a:tcPr/>
+                  <a:tcPr anchor="ctr"/>
                 </a:tc>
                 <a:tc>
                   <a:txBody>
@@ -5367,12 +6323,15 @@
                     <a:p>
                       <a:pPr latinLnBrk="1"/>
                       <a:r>
-                        <a:rPr lang="ko-KR" altLang="en-US" sz="1600" dirty="0"/>
+                        <a:rPr lang="ko-KR" altLang="en-US" sz="1400" dirty="0">
+                          <a:latin typeface="나눔바른고딕" panose="020B0603020101020101" pitchFamily="34" charset="-127"/>
+                          <a:ea typeface="나눔바른고딕" panose="020B0603020101020101" pitchFamily="34" charset="-127"/>
+                        </a:rPr>
                         <a:t>마무리 및 보완</a:t>
                       </a:r>
                     </a:p>
                   </a:txBody>
-                  <a:tcPr/>
+                  <a:tcPr anchor="ctr"/>
                 </a:tc>
                 <a:tc>
                   <a:txBody>
@@ -5381,16 +6340,19 @@
                     <a:p>
                       <a:pPr latinLnBrk="1"/>
                       <a:r>
-                        <a:rPr lang="ko-KR" altLang="en-US" sz="1600" dirty="0"/>
+                        <a:rPr lang="ko-KR" altLang="en-US" sz="1400" dirty="0">
+                          <a:latin typeface="나눔바른고딕" panose="020B0603020101020101" pitchFamily="34" charset="-127"/>
+                          <a:ea typeface="나눔바른고딕" panose="020B0603020101020101" pitchFamily="34" charset="-127"/>
+                        </a:rPr>
                         <a:t>미흡사항 보완</a:t>
                       </a:r>
                     </a:p>
                   </a:txBody>
-                  <a:tcPr/>
+                  <a:tcPr anchor="ctr"/>
                 </a:tc>
                 <a:extLst>
                   <a:ext uri="{0D108BD9-81ED-4DB2-BD59-A6C34878D82A}">
-                    <a16:rowId xmlns:a16="http://schemas.microsoft.com/office/drawing/2014/main" val="10008"/>
+                    <a16:rowId xmlns="" xmlns:a16="http://schemas.microsoft.com/office/drawing/2014/main" val="10008"/>
                   </a:ext>
                 </a:extLst>
               </a:tr>
@@ -5401,7 +6363,7 @@
     </p:spTree>
     <p:extLst>
       <p:ext uri="{BB962C8B-B14F-4D97-AF65-F5344CB8AC3E}">
-        <p14:creationId xmlns:p14="http://schemas.microsoft.com/office/powerpoint/2010/main" val="3121267552"/>
+        <p14:creationId xmlns:p14="http://schemas.microsoft.com/office/powerpoint/2010/main" val="2156804411"/>
       </p:ext>
     </p:extLst>
   </p:cSld>

--- a/PPT/week2.pptx
+++ b/PPT/week2.pptx
@@ -5,14 +5,15 @@
     <p:sldMasterId id="2147483648" r:id="rId1"/>
   </p:sldMasterIdLst>
   <p:notesMasterIdLst>
-    <p:notesMasterId r:id="rId7"/>
+    <p:notesMasterId r:id="rId8"/>
   </p:notesMasterIdLst>
   <p:sldIdLst>
     <p:sldId id="262" r:id="rId2"/>
     <p:sldId id="257" r:id="rId3"/>
-    <p:sldId id="260" r:id="rId4"/>
-    <p:sldId id="261" r:id="rId5"/>
-    <p:sldId id="265" r:id="rId6"/>
+    <p:sldId id="266" r:id="rId4"/>
+    <p:sldId id="260" r:id="rId5"/>
+    <p:sldId id="261" r:id="rId6"/>
+    <p:sldId id="265" r:id="rId7"/>
   </p:sldIdLst>
   <p:sldSz cx="12192000" cy="6858000"/>
   <p:notesSz cx="6858000" cy="9144000"/>
@@ -201,7 +202,7 @@
           <a:p>
             <a:fld id="{79FA7D5B-B91B-48D9-9BBD-A861B53BECFD}" type="datetimeFigureOut">
               <a:rPr lang="ko-KR" altLang="en-US" smtClean="0"/>
-              <a:t>2026-07-09</a:t>
+              <a:t>2026-07-10</a:t>
             </a:fld>
             <a:endParaRPr lang="ko-KR" altLang="en-US"/>
           </a:p>
@@ -626,7 +627,7 @@
           <a:p>
             <a:fld id="{0F03AB99-662C-46EC-B86C-F2E227D3EFAD}" type="slidenum">
               <a:rPr lang="ko-KR" altLang="en-US" smtClean="0"/>
-              <a:t>5</a:t>
+              <a:t>6</a:t>
             </a:fld>
             <a:endParaRPr lang="ko-KR" altLang="en-US"/>
           </a:p>
@@ -667,7 +668,7 @@
           <p:cNvPr id="2" name="제목 1">
             <a:extLst>
               <a:ext uri="{FF2B5EF4-FFF2-40B4-BE49-F238E27FC236}">
-                <a16:creationId xmlns:a16="http://schemas.microsoft.com/office/drawing/2014/main" xmlns="" id="{47C6A88D-EDAF-CEC2-712F-FA6A7E4FF53C}"/>
+                <a16:creationId xmlns="" xmlns:a16="http://schemas.microsoft.com/office/drawing/2014/main" id="{47C6A88D-EDAF-CEC2-712F-FA6A7E4FF53C}"/>
               </a:ext>
             </a:extLst>
           </p:cNvPr>
@@ -704,7 +705,7 @@
           <p:cNvPr id="3" name="부제목 2">
             <a:extLst>
               <a:ext uri="{FF2B5EF4-FFF2-40B4-BE49-F238E27FC236}">
-                <a16:creationId xmlns:a16="http://schemas.microsoft.com/office/drawing/2014/main" xmlns="" id="{1F7A10E8-4E5D-A611-E577-EBA5676A507E}"/>
+                <a16:creationId xmlns="" xmlns:a16="http://schemas.microsoft.com/office/drawing/2014/main" id="{1F7A10E8-4E5D-A611-E577-EBA5676A507E}"/>
               </a:ext>
             </a:extLst>
           </p:cNvPr>
@@ -774,7 +775,7 @@
           <p:cNvPr id="4" name="날짜 개체 틀 3">
             <a:extLst>
               <a:ext uri="{FF2B5EF4-FFF2-40B4-BE49-F238E27FC236}">
-                <a16:creationId xmlns:a16="http://schemas.microsoft.com/office/drawing/2014/main" xmlns="" id="{FA4EF1CD-FA03-944B-0EC0-2AABE3B0C471}"/>
+                <a16:creationId xmlns="" xmlns:a16="http://schemas.microsoft.com/office/drawing/2014/main" id="{FA4EF1CD-FA03-944B-0EC0-2AABE3B0C471}"/>
               </a:ext>
             </a:extLst>
           </p:cNvPr>
@@ -792,7 +793,7 @@
           <a:p>
             <a:fld id="{5850A429-5607-4C3C-9BC0-4142A9E07459}" type="datetimeFigureOut">
               <a:rPr lang="ko-KR" altLang="en-US" smtClean="0"/>
-              <a:t>2026-07-09</a:t>
+              <a:t>2026-07-10</a:t>
             </a:fld>
             <a:endParaRPr lang="ko-KR" altLang="en-US"/>
           </a:p>
@@ -803,7 +804,7 @@
           <p:cNvPr id="5" name="바닥글 개체 틀 4">
             <a:extLst>
               <a:ext uri="{FF2B5EF4-FFF2-40B4-BE49-F238E27FC236}">
-                <a16:creationId xmlns:a16="http://schemas.microsoft.com/office/drawing/2014/main" xmlns="" id="{D7E1904F-F41F-7809-481D-7E79FCD2132E}"/>
+                <a16:creationId xmlns="" xmlns:a16="http://schemas.microsoft.com/office/drawing/2014/main" id="{D7E1904F-F41F-7809-481D-7E79FCD2132E}"/>
               </a:ext>
             </a:extLst>
           </p:cNvPr>
@@ -828,7 +829,7 @@
           <p:cNvPr id="6" name="슬라이드 번호 개체 틀 5">
             <a:extLst>
               <a:ext uri="{FF2B5EF4-FFF2-40B4-BE49-F238E27FC236}">
-                <a16:creationId xmlns:a16="http://schemas.microsoft.com/office/drawing/2014/main" xmlns="" id="{46C721DE-9DEE-BACB-B354-8E260F43215D}"/>
+                <a16:creationId xmlns="" xmlns:a16="http://schemas.microsoft.com/office/drawing/2014/main" id="{46C721DE-9DEE-BACB-B354-8E260F43215D}"/>
               </a:ext>
             </a:extLst>
           </p:cNvPr>
@@ -887,7 +888,7 @@
           <p:cNvPr id="2" name="제목 1">
             <a:extLst>
               <a:ext uri="{FF2B5EF4-FFF2-40B4-BE49-F238E27FC236}">
-                <a16:creationId xmlns:a16="http://schemas.microsoft.com/office/drawing/2014/main" xmlns="" id="{8EC6E50E-2954-B290-1563-C4936B9E8431}"/>
+                <a16:creationId xmlns="" xmlns:a16="http://schemas.microsoft.com/office/drawing/2014/main" id="{8EC6E50E-2954-B290-1563-C4936B9E8431}"/>
               </a:ext>
             </a:extLst>
           </p:cNvPr>
@@ -915,7 +916,7 @@
           <p:cNvPr id="3" name="세로 텍스트 개체 틀 2">
             <a:extLst>
               <a:ext uri="{FF2B5EF4-FFF2-40B4-BE49-F238E27FC236}">
-                <a16:creationId xmlns:a16="http://schemas.microsoft.com/office/drawing/2014/main" xmlns="" id="{5B6A99E4-1414-E268-7B72-A4C896708AE3}"/>
+                <a16:creationId xmlns="" xmlns:a16="http://schemas.microsoft.com/office/drawing/2014/main" id="{5B6A99E4-1414-E268-7B72-A4C896708AE3}"/>
               </a:ext>
             </a:extLst>
           </p:cNvPr>
@@ -972,7 +973,7 @@
           <p:cNvPr id="4" name="날짜 개체 틀 3">
             <a:extLst>
               <a:ext uri="{FF2B5EF4-FFF2-40B4-BE49-F238E27FC236}">
-                <a16:creationId xmlns:a16="http://schemas.microsoft.com/office/drawing/2014/main" xmlns="" id="{3A9BB3C2-1FA4-4151-9ADB-996284F1BDE2}"/>
+                <a16:creationId xmlns="" xmlns:a16="http://schemas.microsoft.com/office/drawing/2014/main" id="{3A9BB3C2-1FA4-4151-9ADB-996284F1BDE2}"/>
               </a:ext>
             </a:extLst>
           </p:cNvPr>
@@ -990,7 +991,7 @@
           <a:p>
             <a:fld id="{5850A429-5607-4C3C-9BC0-4142A9E07459}" type="datetimeFigureOut">
               <a:rPr lang="ko-KR" altLang="en-US" smtClean="0"/>
-              <a:t>2026-07-09</a:t>
+              <a:t>2026-07-10</a:t>
             </a:fld>
             <a:endParaRPr lang="ko-KR" altLang="en-US"/>
           </a:p>
@@ -1001,7 +1002,7 @@
           <p:cNvPr id="5" name="바닥글 개체 틀 4">
             <a:extLst>
               <a:ext uri="{FF2B5EF4-FFF2-40B4-BE49-F238E27FC236}">
-                <a16:creationId xmlns:a16="http://schemas.microsoft.com/office/drawing/2014/main" xmlns="" id="{8A27C81A-BE4E-27CE-6CE4-0AE5876D470A}"/>
+                <a16:creationId xmlns="" xmlns:a16="http://schemas.microsoft.com/office/drawing/2014/main" id="{8A27C81A-BE4E-27CE-6CE4-0AE5876D470A}"/>
               </a:ext>
             </a:extLst>
           </p:cNvPr>
@@ -1026,7 +1027,7 @@
           <p:cNvPr id="6" name="슬라이드 번호 개체 틀 5">
             <a:extLst>
               <a:ext uri="{FF2B5EF4-FFF2-40B4-BE49-F238E27FC236}">
-                <a16:creationId xmlns:a16="http://schemas.microsoft.com/office/drawing/2014/main" xmlns="" id="{B4E3C814-C417-2E3F-F02B-1B9ED6941FBD}"/>
+                <a16:creationId xmlns="" xmlns:a16="http://schemas.microsoft.com/office/drawing/2014/main" id="{B4E3C814-C417-2E3F-F02B-1B9ED6941FBD}"/>
               </a:ext>
             </a:extLst>
           </p:cNvPr>
@@ -1085,7 +1086,7 @@
           <p:cNvPr id="2" name="세로 제목 1">
             <a:extLst>
               <a:ext uri="{FF2B5EF4-FFF2-40B4-BE49-F238E27FC236}">
-                <a16:creationId xmlns:a16="http://schemas.microsoft.com/office/drawing/2014/main" xmlns="" id="{AC1D687F-54E9-57A3-FDA2-5A8060E79A80}"/>
+                <a16:creationId xmlns="" xmlns:a16="http://schemas.microsoft.com/office/drawing/2014/main" id="{AC1D687F-54E9-57A3-FDA2-5A8060E79A80}"/>
               </a:ext>
             </a:extLst>
           </p:cNvPr>
@@ -1118,7 +1119,7 @@
           <p:cNvPr id="3" name="세로 텍스트 개체 틀 2">
             <a:extLst>
               <a:ext uri="{FF2B5EF4-FFF2-40B4-BE49-F238E27FC236}">
-                <a16:creationId xmlns:a16="http://schemas.microsoft.com/office/drawing/2014/main" xmlns="" id="{BC846A14-940B-8FE8-A769-3DABAE11AD25}"/>
+                <a16:creationId xmlns="" xmlns:a16="http://schemas.microsoft.com/office/drawing/2014/main" id="{BC846A14-940B-8FE8-A769-3DABAE11AD25}"/>
               </a:ext>
             </a:extLst>
           </p:cNvPr>
@@ -1180,7 +1181,7 @@
           <p:cNvPr id="4" name="날짜 개체 틀 3">
             <a:extLst>
               <a:ext uri="{FF2B5EF4-FFF2-40B4-BE49-F238E27FC236}">
-                <a16:creationId xmlns:a16="http://schemas.microsoft.com/office/drawing/2014/main" xmlns="" id="{393732A3-4427-5A76-3A9C-DBE87A4364DD}"/>
+                <a16:creationId xmlns="" xmlns:a16="http://schemas.microsoft.com/office/drawing/2014/main" id="{393732A3-4427-5A76-3A9C-DBE87A4364DD}"/>
               </a:ext>
             </a:extLst>
           </p:cNvPr>
@@ -1198,7 +1199,7 @@
           <a:p>
             <a:fld id="{5850A429-5607-4C3C-9BC0-4142A9E07459}" type="datetimeFigureOut">
               <a:rPr lang="ko-KR" altLang="en-US" smtClean="0"/>
-              <a:t>2026-07-09</a:t>
+              <a:t>2026-07-10</a:t>
             </a:fld>
             <a:endParaRPr lang="ko-KR" altLang="en-US"/>
           </a:p>
@@ -1209,7 +1210,7 @@
           <p:cNvPr id="5" name="바닥글 개체 틀 4">
             <a:extLst>
               <a:ext uri="{FF2B5EF4-FFF2-40B4-BE49-F238E27FC236}">
-                <a16:creationId xmlns:a16="http://schemas.microsoft.com/office/drawing/2014/main" xmlns="" id="{16A5B672-F383-0FF5-2D72-72E1E7F0F0D3}"/>
+                <a16:creationId xmlns="" xmlns:a16="http://schemas.microsoft.com/office/drawing/2014/main" id="{16A5B672-F383-0FF5-2D72-72E1E7F0F0D3}"/>
               </a:ext>
             </a:extLst>
           </p:cNvPr>
@@ -1234,7 +1235,7 @@
           <p:cNvPr id="6" name="슬라이드 번호 개체 틀 5">
             <a:extLst>
               <a:ext uri="{FF2B5EF4-FFF2-40B4-BE49-F238E27FC236}">
-                <a16:creationId xmlns:a16="http://schemas.microsoft.com/office/drawing/2014/main" xmlns="" id="{DE28928A-9906-D889-A8B7-B97D729CDB76}"/>
+                <a16:creationId xmlns="" xmlns:a16="http://schemas.microsoft.com/office/drawing/2014/main" id="{DE28928A-9906-D889-A8B7-B97D729CDB76}"/>
               </a:ext>
             </a:extLst>
           </p:cNvPr>
@@ -1293,7 +1294,7 @@
           <p:cNvPr id="2" name="제목 1">
             <a:extLst>
               <a:ext uri="{FF2B5EF4-FFF2-40B4-BE49-F238E27FC236}">
-                <a16:creationId xmlns:a16="http://schemas.microsoft.com/office/drawing/2014/main" xmlns="" id="{54F5793F-94FE-56B0-E0CB-A317DA7FB4BC}"/>
+                <a16:creationId xmlns="" xmlns:a16="http://schemas.microsoft.com/office/drawing/2014/main" id="{54F5793F-94FE-56B0-E0CB-A317DA7FB4BC}"/>
               </a:ext>
             </a:extLst>
           </p:cNvPr>
@@ -1321,7 +1322,7 @@
           <p:cNvPr id="3" name="내용 개체 틀 2">
             <a:extLst>
               <a:ext uri="{FF2B5EF4-FFF2-40B4-BE49-F238E27FC236}">
-                <a16:creationId xmlns:a16="http://schemas.microsoft.com/office/drawing/2014/main" xmlns="" id="{BFAF79B8-2AD1-69C6-D4D5-21827C6802F8}"/>
+                <a16:creationId xmlns="" xmlns:a16="http://schemas.microsoft.com/office/drawing/2014/main" id="{BFAF79B8-2AD1-69C6-D4D5-21827C6802F8}"/>
               </a:ext>
             </a:extLst>
           </p:cNvPr>
@@ -1378,7 +1379,7 @@
           <p:cNvPr id="4" name="날짜 개체 틀 3">
             <a:extLst>
               <a:ext uri="{FF2B5EF4-FFF2-40B4-BE49-F238E27FC236}">
-                <a16:creationId xmlns:a16="http://schemas.microsoft.com/office/drawing/2014/main" xmlns="" id="{6718AF63-4F49-82B6-24FC-BB457FC964FC}"/>
+                <a16:creationId xmlns="" xmlns:a16="http://schemas.microsoft.com/office/drawing/2014/main" id="{6718AF63-4F49-82B6-24FC-BB457FC964FC}"/>
               </a:ext>
             </a:extLst>
           </p:cNvPr>
@@ -1396,7 +1397,7 @@
           <a:p>
             <a:fld id="{5850A429-5607-4C3C-9BC0-4142A9E07459}" type="datetimeFigureOut">
               <a:rPr lang="ko-KR" altLang="en-US" smtClean="0"/>
-              <a:t>2026-07-09</a:t>
+              <a:t>2026-07-10</a:t>
             </a:fld>
             <a:endParaRPr lang="ko-KR" altLang="en-US"/>
           </a:p>
@@ -1407,7 +1408,7 @@
           <p:cNvPr id="5" name="바닥글 개체 틀 4">
             <a:extLst>
               <a:ext uri="{FF2B5EF4-FFF2-40B4-BE49-F238E27FC236}">
-                <a16:creationId xmlns:a16="http://schemas.microsoft.com/office/drawing/2014/main" xmlns="" id="{AA45FF19-25D7-1FF3-E311-2C2E07B26764}"/>
+                <a16:creationId xmlns="" xmlns:a16="http://schemas.microsoft.com/office/drawing/2014/main" id="{AA45FF19-25D7-1FF3-E311-2C2E07B26764}"/>
               </a:ext>
             </a:extLst>
           </p:cNvPr>
@@ -1432,7 +1433,7 @@
           <p:cNvPr id="6" name="슬라이드 번호 개체 틀 5">
             <a:extLst>
               <a:ext uri="{FF2B5EF4-FFF2-40B4-BE49-F238E27FC236}">
-                <a16:creationId xmlns:a16="http://schemas.microsoft.com/office/drawing/2014/main" xmlns="" id="{6F43D8BF-52A4-97EB-612B-F9899664EFD5}"/>
+                <a16:creationId xmlns="" xmlns:a16="http://schemas.microsoft.com/office/drawing/2014/main" id="{6F43D8BF-52A4-97EB-612B-F9899664EFD5}"/>
               </a:ext>
             </a:extLst>
           </p:cNvPr>
@@ -1491,7 +1492,7 @@
           <p:cNvPr id="2" name="제목 1">
             <a:extLst>
               <a:ext uri="{FF2B5EF4-FFF2-40B4-BE49-F238E27FC236}">
-                <a16:creationId xmlns:a16="http://schemas.microsoft.com/office/drawing/2014/main" xmlns="" id="{1EB95909-78E9-5BAC-68EA-7DCA2A1271F7}"/>
+                <a16:creationId xmlns="" xmlns:a16="http://schemas.microsoft.com/office/drawing/2014/main" id="{1EB95909-78E9-5BAC-68EA-7DCA2A1271F7}"/>
               </a:ext>
             </a:extLst>
           </p:cNvPr>
@@ -1528,7 +1529,7 @@
           <p:cNvPr id="3" name="텍스트 개체 틀 2">
             <a:extLst>
               <a:ext uri="{FF2B5EF4-FFF2-40B4-BE49-F238E27FC236}">
-                <a16:creationId xmlns:a16="http://schemas.microsoft.com/office/drawing/2014/main" xmlns="" id="{D6B98DAF-2A47-3ECD-807C-96FB70CF9854}"/>
+                <a16:creationId xmlns="" xmlns:a16="http://schemas.microsoft.com/office/drawing/2014/main" id="{D6B98DAF-2A47-3ECD-807C-96FB70CF9854}"/>
               </a:ext>
             </a:extLst>
           </p:cNvPr>
@@ -1653,7 +1654,7 @@
           <p:cNvPr id="4" name="날짜 개체 틀 3">
             <a:extLst>
               <a:ext uri="{FF2B5EF4-FFF2-40B4-BE49-F238E27FC236}">
-                <a16:creationId xmlns:a16="http://schemas.microsoft.com/office/drawing/2014/main" xmlns="" id="{A3AD9670-C268-56FC-281A-FE1F59541EB9}"/>
+                <a16:creationId xmlns="" xmlns:a16="http://schemas.microsoft.com/office/drawing/2014/main" id="{A3AD9670-C268-56FC-281A-FE1F59541EB9}"/>
               </a:ext>
             </a:extLst>
           </p:cNvPr>
@@ -1671,7 +1672,7 @@
           <a:p>
             <a:fld id="{5850A429-5607-4C3C-9BC0-4142A9E07459}" type="datetimeFigureOut">
               <a:rPr lang="ko-KR" altLang="en-US" smtClean="0"/>
-              <a:t>2026-07-09</a:t>
+              <a:t>2026-07-10</a:t>
             </a:fld>
             <a:endParaRPr lang="ko-KR" altLang="en-US"/>
           </a:p>
@@ -1682,7 +1683,7 @@
           <p:cNvPr id="5" name="바닥글 개체 틀 4">
             <a:extLst>
               <a:ext uri="{FF2B5EF4-FFF2-40B4-BE49-F238E27FC236}">
-                <a16:creationId xmlns:a16="http://schemas.microsoft.com/office/drawing/2014/main" xmlns="" id="{A4946F37-FE38-E38E-7339-DC6E4EFA5B3B}"/>
+                <a16:creationId xmlns="" xmlns:a16="http://schemas.microsoft.com/office/drawing/2014/main" id="{A4946F37-FE38-E38E-7339-DC6E4EFA5B3B}"/>
               </a:ext>
             </a:extLst>
           </p:cNvPr>
@@ -1707,7 +1708,7 @@
           <p:cNvPr id="6" name="슬라이드 번호 개체 틀 5">
             <a:extLst>
               <a:ext uri="{FF2B5EF4-FFF2-40B4-BE49-F238E27FC236}">
-                <a16:creationId xmlns:a16="http://schemas.microsoft.com/office/drawing/2014/main" xmlns="" id="{7C17C39B-6348-28CC-59AF-B1A65BE2F149}"/>
+                <a16:creationId xmlns="" xmlns:a16="http://schemas.microsoft.com/office/drawing/2014/main" id="{7C17C39B-6348-28CC-59AF-B1A65BE2F149}"/>
               </a:ext>
             </a:extLst>
           </p:cNvPr>
@@ -1766,7 +1767,7 @@
           <p:cNvPr id="2" name="제목 1">
             <a:extLst>
               <a:ext uri="{FF2B5EF4-FFF2-40B4-BE49-F238E27FC236}">
-                <a16:creationId xmlns:a16="http://schemas.microsoft.com/office/drawing/2014/main" xmlns="" id="{0D0EFA0F-10D7-865F-1370-4EA34C786709}"/>
+                <a16:creationId xmlns="" xmlns:a16="http://schemas.microsoft.com/office/drawing/2014/main" id="{0D0EFA0F-10D7-865F-1370-4EA34C786709}"/>
               </a:ext>
             </a:extLst>
           </p:cNvPr>
@@ -1794,7 +1795,7 @@
           <p:cNvPr id="3" name="내용 개체 틀 2">
             <a:extLst>
               <a:ext uri="{FF2B5EF4-FFF2-40B4-BE49-F238E27FC236}">
-                <a16:creationId xmlns:a16="http://schemas.microsoft.com/office/drawing/2014/main" xmlns="" id="{0498CDB5-9D2B-5F68-9DD8-ED20454B1044}"/>
+                <a16:creationId xmlns="" xmlns:a16="http://schemas.microsoft.com/office/drawing/2014/main" id="{0498CDB5-9D2B-5F68-9DD8-ED20454B1044}"/>
               </a:ext>
             </a:extLst>
           </p:cNvPr>
@@ -1856,7 +1857,7 @@
           <p:cNvPr id="4" name="내용 개체 틀 3">
             <a:extLst>
               <a:ext uri="{FF2B5EF4-FFF2-40B4-BE49-F238E27FC236}">
-                <a16:creationId xmlns:a16="http://schemas.microsoft.com/office/drawing/2014/main" xmlns="" id="{570EB1B7-8EDE-2794-EA53-E0C1972FAF1A}"/>
+                <a16:creationId xmlns="" xmlns:a16="http://schemas.microsoft.com/office/drawing/2014/main" id="{570EB1B7-8EDE-2794-EA53-E0C1972FAF1A}"/>
               </a:ext>
             </a:extLst>
           </p:cNvPr>
@@ -1918,7 +1919,7 @@
           <p:cNvPr id="5" name="날짜 개체 틀 4">
             <a:extLst>
               <a:ext uri="{FF2B5EF4-FFF2-40B4-BE49-F238E27FC236}">
-                <a16:creationId xmlns:a16="http://schemas.microsoft.com/office/drawing/2014/main" xmlns="" id="{31FBCFA4-CF51-706E-F9F0-8B66CA1A0E1B}"/>
+                <a16:creationId xmlns="" xmlns:a16="http://schemas.microsoft.com/office/drawing/2014/main" id="{31FBCFA4-CF51-706E-F9F0-8B66CA1A0E1B}"/>
               </a:ext>
             </a:extLst>
           </p:cNvPr>
@@ -1936,7 +1937,7 @@
           <a:p>
             <a:fld id="{5850A429-5607-4C3C-9BC0-4142A9E07459}" type="datetimeFigureOut">
               <a:rPr lang="ko-KR" altLang="en-US" smtClean="0"/>
-              <a:t>2026-07-09</a:t>
+              <a:t>2026-07-10</a:t>
             </a:fld>
             <a:endParaRPr lang="ko-KR" altLang="en-US"/>
           </a:p>
@@ -1947,7 +1948,7 @@
           <p:cNvPr id="6" name="바닥글 개체 틀 5">
             <a:extLst>
               <a:ext uri="{FF2B5EF4-FFF2-40B4-BE49-F238E27FC236}">
-                <a16:creationId xmlns:a16="http://schemas.microsoft.com/office/drawing/2014/main" xmlns="" id="{FD56636A-469F-7FE9-480E-955BCC0E6D70}"/>
+                <a16:creationId xmlns="" xmlns:a16="http://schemas.microsoft.com/office/drawing/2014/main" id="{FD56636A-469F-7FE9-480E-955BCC0E6D70}"/>
               </a:ext>
             </a:extLst>
           </p:cNvPr>
@@ -1972,7 +1973,7 @@
           <p:cNvPr id="7" name="슬라이드 번호 개체 틀 6">
             <a:extLst>
               <a:ext uri="{FF2B5EF4-FFF2-40B4-BE49-F238E27FC236}">
-                <a16:creationId xmlns:a16="http://schemas.microsoft.com/office/drawing/2014/main" xmlns="" id="{3971D272-167D-EE36-E685-CD8BFE8CC9A6}"/>
+                <a16:creationId xmlns="" xmlns:a16="http://schemas.microsoft.com/office/drawing/2014/main" id="{3971D272-167D-EE36-E685-CD8BFE8CC9A6}"/>
               </a:ext>
             </a:extLst>
           </p:cNvPr>
@@ -2031,7 +2032,7 @@
           <p:cNvPr id="2" name="제목 1">
             <a:extLst>
               <a:ext uri="{FF2B5EF4-FFF2-40B4-BE49-F238E27FC236}">
-                <a16:creationId xmlns:a16="http://schemas.microsoft.com/office/drawing/2014/main" xmlns="" id="{9AC7230E-A2F3-4027-B6F6-9C5C289B1314}"/>
+                <a16:creationId xmlns="" xmlns:a16="http://schemas.microsoft.com/office/drawing/2014/main" id="{9AC7230E-A2F3-4027-B6F6-9C5C289B1314}"/>
               </a:ext>
             </a:extLst>
           </p:cNvPr>
@@ -2064,7 +2065,7 @@
           <p:cNvPr id="3" name="텍스트 개체 틀 2">
             <a:extLst>
               <a:ext uri="{FF2B5EF4-FFF2-40B4-BE49-F238E27FC236}">
-                <a16:creationId xmlns:a16="http://schemas.microsoft.com/office/drawing/2014/main" xmlns="" id="{0C685356-7419-AD93-377A-8D9A0293423E}"/>
+                <a16:creationId xmlns="" xmlns:a16="http://schemas.microsoft.com/office/drawing/2014/main" id="{0C685356-7419-AD93-377A-8D9A0293423E}"/>
               </a:ext>
             </a:extLst>
           </p:cNvPr>
@@ -2135,7 +2136,7 @@
           <p:cNvPr id="4" name="내용 개체 틀 3">
             <a:extLst>
               <a:ext uri="{FF2B5EF4-FFF2-40B4-BE49-F238E27FC236}">
-                <a16:creationId xmlns:a16="http://schemas.microsoft.com/office/drawing/2014/main" xmlns="" id="{CC36E6CA-94A6-3223-C91A-F6E9648C8EAD}"/>
+                <a16:creationId xmlns="" xmlns:a16="http://schemas.microsoft.com/office/drawing/2014/main" id="{CC36E6CA-94A6-3223-C91A-F6E9648C8EAD}"/>
               </a:ext>
             </a:extLst>
           </p:cNvPr>
@@ -2197,7 +2198,7 @@
           <p:cNvPr id="5" name="텍스트 개체 틀 4">
             <a:extLst>
               <a:ext uri="{FF2B5EF4-FFF2-40B4-BE49-F238E27FC236}">
-                <a16:creationId xmlns:a16="http://schemas.microsoft.com/office/drawing/2014/main" xmlns="" id="{F4DFD790-787A-88A3-300F-C173DAD2E1AF}"/>
+                <a16:creationId xmlns="" xmlns:a16="http://schemas.microsoft.com/office/drawing/2014/main" id="{F4DFD790-787A-88A3-300F-C173DAD2E1AF}"/>
               </a:ext>
             </a:extLst>
           </p:cNvPr>
@@ -2268,7 +2269,7 @@
           <p:cNvPr id="6" name="내용 개체 틀 5">
             <a:extLst>
               <a:ext uri="{FF2B5EF4-FFF2-40B4-BE49-F238E27FC236}">
-                <a16:creationId xmlns:a16="http://schemas.microsoft.com/office/drawing/2014/main" xmlns="" id="{012AE83D-2990-A6E4-CC9C-06D342A67C09}"/>
+                <a16:creationId xmlns="" xmlns:a16="http://schemas.microsoft.com/office/drawing/2014/main" id="{012AE83D-2990-A6E4-CC9C-06D342A67C09}"/>
               </a:ext>
             </a:extLst>
           </p:cNvPr>
@@ -2330,7 +2331,7 @@
           <p:cNvPr id="7" name="날짜 개체 틀 6">
             <a:extLst>
               <a:ext uri="{FF2B5EF4-FFF2-40B4-BE49-F238E27FC236}">
-                <a16:creationId xmlns:a16="http://schemas.microsoft.com/office/drawing/2014/main" xmlns="" id="{3C11F8C3-5AD3-730B-8ADB-304185DAA67E}"/>
+                <a16:creationId xmlns="" xmlns:a16="http://schemas.microsoft.com/office/drawing/2014/main" id="{3C11F8C3-5AD3-730B-8ADB-304185DAA67E}"/>
               </a:ext>
             </a:extLst>
           </p:cNvPr>
@@ -2348,7 +2349,7 @@
           <a:p>
             <a:fld id="{5850A429-5607-4C3C-9BC0-4142A9E07459}" type="datetimeFigureOut">
               <a:rPr lang="ko-KR" altLang="en-US" smtClean="0"/>
-              <a:t>2026-07-09</a:t>
+              <a:t>2026-07-10</a:t>
             </a:fld>
             <a:endParaRPr lang="ko-KR" altLang="en-US"/>
           </a:p>
@@ -2359,7 +2360,7 @@
           <p:cNvPr id="8" name="바닥글 개체 틀 7">
             <a:extLst>
               <a:ext uri="{FF2B5EF4-FFF2-40B4-BE49-F238E27FC236}">
-                <a16:creationId xmlns:a16="http://schemas.microsoft.com/office/drawing/2014/main" xmlns="" id="{EF36ABA7-53C4-C11E-CC9D-F5E59BDBBD9B}"/>
+                <a16:creationId xmlns="" xmlns:a16="http://schemas.microsoft.com/office/drawing/2014/main" id="{EF36ABA7-53C4-C11E-CC9D-F5E59BDBBD9B}"/>
               </a:ext>
             </a:extLst>
           </p:cNvPr>
@@ -2384,7 +2385,7 @@
           <p:cNvPr id="9" name="슬라이드 번호 개체 틀 8">
             <a:extLst>
               <a:ext uri="{FF2B5EF4-FFF2-40B4-BE49-F238E27FC236}">
-                <a16:creationId xmlns:a16="http://schemas.microsoft.com/office/drawing/2014/main" xmlns="" id="{5E29E145-D4AE-F9FB-A218-47B323C43E03}"/>
+                <a16:creationId xmlns="" xmlns:a16="http://schemas.microsoft.com/office/drawing/2014/main" id="{5E29E145-D4AE-F9FB-A218-47B323C43E03}"/>
               </a:ext>
             </a:extLst>
           </p:cNvPr>
@@ -2443,7 +2444,7 @@
           <p:cNvPr id="2" name="제목 1">
             <a:extLst>
               <a:ext uri="{FF2B5EF4-FFF2-40B4-BE49-F238E27FC236}">
-                <a16:creationId xmlns:a16="http://schemas.microsoft.com/office/drawing/2014/main" xmlns="" id="{13D855E6-5AD7-B657-346A-38D87715A5E7}"/>
+                <a16:creationId xmlns="" xmlns:a16="http://schemas.microsoft.com/office/drawing/2014/main" id="{13D855E6-5AD7-B657-346A-38D87715A5E7}"/>
               </a:ext>
             </a:extLst>
           </p:cNvPr>
@@ -2471,7 +2472,7 @@
           <p:cNvPr id="3" name="날짜 개체 틀 2">
             <a:extLst>
               <a:ext uri="{FF2B5EF4-FFF2-40B4-BE49-F238E27FC236}">
-                <a16:creationId xmlns:a16="http://schemas.microsoft.com/office/drawing/2014/main" xmlns="" id="{F3052B06-09E1-1CD0-A032-AEB30F69A0E7}"/>
+                <a16:creationId xmlns="" xmlns:a16="http://schemas.microsoft.com/office/drawing/2014/main" id="{F3052B06-09E1-1CD0-A032-AEB30F69A0E7}"/>
               </a:ext>
             </a:extLst>
           </p:cNvPr>
@@ -2489,7 +2490,7 @@
           <a:p>
             <a:fld id="{5850A429-5607-4C3C-9BC0-4142A9E07459}" type="datetimeFigureOut">
               <a:rPr lang="ko-KR" altLang="en-US" smtClean="0"/>
-              <a:t>2026-07-09</a:t>
+              <a:t>2026-07-10</a:t>
             </a:fld>
             <a:endParaRPr lang="ko-KR" altLang="en-US"/>
           </a:p>
@@ -2500,7 +2501,7 @@
           <p:cNvPr id="4" name="바닥글 개체 틀 3">
             <a:extLst>
               <a:ext uri="{FF2B5EF4-FFF2-40B4-BE49-F238E27FC236}">
-                <a16:creationId xmlns:a16="http://schemas.microsoft.com/office/drawing/2014/main" xmlns="" id="{DE18691A-8582-987D-DF06-E6D8B618E7BB}"/>
+                <a16:creationId xmlns="" xmlns:a16="http://schemas.microsoft.com/office/drawing/2014/main" id="{DE18691A-8582-987D-DF06-E6D8B618E7BB}"/>
               </a:ext>
             </a:extLst>
           </p:cNvPr>
@@ -2525,7 +2526,7 @@
           <p:cNvPr id="5" name="슬라이드 번호 개체 틀 4">
             <a:extLst>
               <a:ext uri="{FF2B5EF4-FFF2-40B4-BE49-F238E27FC236}">
-                <a16:creationId xmlns:a16="http://schemas.microsoft.com/office/drawing/2014/main" xmlns="" id="{6F997ACE-7D00-7B35-1F16-F56C5450EF85}"/>
+                <a16:creationId xmlns="" xmlns:a16="http://schemas.microsoft.com/office/drawing/2014/main" id="{6F997ACE-7D00-7B35-1F16-F56C5450EF85}"/>
               </a:ext>
             </a:extLst>
           </p:cNvPr>
@@ -2584,7 +2585,7 @@
           <p:cNvPr id="2" name="날짜 개체 틀 1">
             <a:extLst>
               <a:ext uri="{FF2B5EF4-FFF2-40B4-BE49-F238E27FC236}">
-                <a16:creationId xmlns:a16="http://schemas.microsoft.com/office/drawing/2014/main" xmlns="" id="{2703D88F-9D50-1761-731E-68DD1FC6B740}"/>
+                <a16:creationId xmlns="" xmlns:a16="http://schemas.microsoft.com/office/drawing/2014/main" id="{2703D88F-9D50-1761-731E-68DD1FC6B740}"/>
               </a:ext>
             </a:extLst>
           </p:cNvPr>
@@ -2602,7 +2603,7 @@
           <a:p>
             <a:fld id="{5850A429-5607-4C3C-9BC0-4142A9E07459}" type="datetimeFigureOut">
               <a:rPr lang="ko-KR" altLang="en-US" smtClean="0"/>
-              <a:t>2026-07-09</a:t>
+              <a:t>2026-07-10</a:t>
             </a:fld>
             <a:endParaRPr lang="ko-KR" altLang="en-US"/>
           </a:p>
@@ -2613,7 +2614,7 @@
           <p:cNvPr id="3" name="바닥글 개체 틀 2">
             <a:extLst>
               <a:ext uri="{FF2B5EF4-FFF2-40B4-BE49-F238E27FC236}">
-                <a16:creationId xmlns:a16="http://schemas.microsoft.com/office/drawing/2014/main" xmlns="" id="{70793086-842E-7906-6019-4284A9E469F4}"/>
+                <a16:creationId xmlns="" xmlns:a16="http://schemas.microsoft.com/office/drawing/2014/main" id="{70793086-842E-7906-6019-4284A9E469F4}"/>
               </a:ext>
             </a:extLst>
           </p:cNvPr>
@@ -2638,7 +2639,7 @@
           <p:cNvPr id="4" name="슬라이드 번호 개체 틀 3">
             <a:extLst>
               <a:ext uri="{FF2B5EF4-FFF2-40B4-BE49-F238E27FC236}">
-                <a16:creationId xmlns:a16="http://schemas.microsoft.com/office/drawing/2014/main" xmlns="" id="{6D4FE3DE-7F26-4352-74EE-A720C7AF5564}"/>
+                <a16:creationId xmlns="" xmlns:a16="http://schemas.microsoft.com/office/drawing/2014/main" id="{6D4FE3DE-7F26-4352-74EE-A720C7AF5564}"/>
               </a:ext>
             </a:extLst>
           </p:cNvPr>
@@ -2697,7 +2698,7 @@
           <p:cNvPr id="2" name="제목 1">
             <a:extLst>
               <a:ext uri="{FF2B5EF4-FFF2-40B4-BE49-F238E27FC236}">
-                <a16:creationId xmlns:a16="http://schemas.microsoft.com/office/drawing/2014/main" xmlns="" id="{0AFB6F63-D5C7-EB4A-A651-8DA5561AD0DC}"/>
+                <a16:creationId xmlns="" xmlns:a16="http://schemas.microsoft.com/office/drawing/2014/main" id="{0AFB6F63-D5C7-EB4A-A651-8DA5561AD0DC}"/>
               </a:ext>
             </a:extLst>
           </p:cNvPr>
@@ -2734,7 +2735,7 @@
           <p:cNvPr id="3" name="내용 개체 틀 2">
             <a:extLst>
               <a:ext uri="{FF2B5EF4-FFF2-40B4-BE49-F238E27FC236}">
-                <a16:creationId xmlns:a16="http://schemas.microsoft.com/office/drawing/2014/main" xmlns="" id="{2000FB2D-0CF3-1A3C-E704-F8CA96C2D5D5}"/>
+                <a16:creationId xmlns="" xmlns:a16="http://schemas.microsoft.com/office/drawing/2014/main" id="{2000FB2D-0CF3-1A3C-E704-F8CA96C2D5D5}"/>
               </a:ext>
             </a:extLst>
           </p:cNvPr>
@@ -2824,7 +2825,7 @@
           <p:cNvPr id="4" name="텍스트 개체 틀 3">
             <a:extLst>
               <a:ext uri="{FF2B5EF4-FFF2-40B4-BE49-F238E27FC236}">
-                <a16:creationId xmlns:a16="http://schemas.microsoft.com/office/drawing/2014/main" xmlns="" id="{88C3C47D-E633-BB5D-0FA3-41A5E3C28A6A}"/>
+                <a16:creationId xmlns="" xmlns:a16="http://schemas.microsoft.com/office/drawing/2014/main" id="{88C3C47D-E633-BB5D-0FA3-41A5E3C28A6A}"/>
               </a:ext>
             </a:extLst>
           </p:cNvPr>
@@ -2895,7 +2896,7 @@
           <p:cNvPr id="5" name="날짜 개체 틀 4">
             <a:extLst>
               <a:ext uri="{FF2B5EF4-FFF2-40B4-BE49-F238E27FC236}">
-                <a16:creationId xmlns:a16="http://schemas.microsoft.com/office/drawing/2014/main" xmlns="" id="{603DA118-0D2F-73A1-6311-85E95462C569}"/>
+                <a16:creationId xmlns="" xmlns:a16="http://schemas.microsoft.com/office/drawing/2014/main" id="{603DA118-0D2F-73A1-6311-85E95462C569}"/>
               </a:ext>
             </a:extLst>
           </p:cNvPr>
@@ -2913,7 +2914,7 @@
           <a:p>
             <a:fld id="{5850A429-5607-4C3C-9BC0-4142A9E07459}" type="datetimeFigureOut">
               <a:rPr lang="ko-KR" altLang="en-US" smtClean="0"/>
-              <a:t>2026-07-09</a:t>
+              <a:t>2026-07-10</a:t>
             </a:fld>
             <a:endParaRPr lang="ko-KR" altLang="en-US"/>
           </a:p>
@@ -2924,7 +2925,7 @@
           <p:cNvPr id="6" name="바닥글 개체 틀 5">
             <a:extLst>
               <a:ext uri="{FF2B5EF4-FFF2-40B4-BE49-F238E27FC236}">
-                <a16:creationId xmlns:a16="http://schemas.microsoft.com/office/drawing/2014/main" xmlns="" id="{DE46749A-348F-886F-32BD-A562F1A2A3B9}"/>
+                <a16:creationId xmlns="" xmlns:a16="http://schemas.microsoft.com/office/drawing/2014/main" id="{DE46749A-348F-886F-32BD-A562F1A2A3B9}"/>
               </a:ext>
             </a:extLst>
           </p:cNvPr>
@@ -2949,7 +2950,7 @@
           <p:cNvPr id="7" name="슬라이드 번호 개체 틀 6">
             <a:extLst>
               <a:ext uri="{FF2B5EF4-FFF2-40B4-BE49-F238E27FC236}">
-                <a16:creationId xmlns:a16="http://schemas.microsoft.com/office/drawing/2014/main" xmlns="" id="{0BF22D09-FBE9-294C-014E-9A808723A1A7}"/>
+                <a16:creationId xmlns="" xmlns:a16="http://schemas.microsoft.com/office/drawing/2014/main" id="{0BF22D09-FBE9-294C-014E-9A808723A1A7}"/>
               </a:ext>
             </a:extLst>
           </p:cNvPr>
@@ -3008,7 +3009,7 @@
           <p:cNvPr id="2" name="제목 1">
             <a:extLst>
               <a:ext uri="{FF2B5EF4-FFF2-40B4-BE49-F238E27FC236}">
-                <a16:creationId xmlns:a16="http://schemas.microsoft.com/office/drawing/2014/main" xmlns="" id="{DA50C132-3A30-7E9C-0BBB-1CD1A789CE68}"/>
+                <a16:creationId xmlns="" xmlns:a16="http://schemas.microsoft.com/office/drawing/2014/main" id="{DA50C132-3A30-7E9C-0BBB-1CD1A789CE68}"/>
               </a:ext>
             </a:extLst>
           </p:cNvPr>
@@ -3045,7 +3046,7 @@
           <p:cNvPr id="3" name="그림 개체 틀 2">
             <a:extLst>
               <a:ext uri="{FF2B5EF4-FFF2-40B4-BE49-F238E27FC236}">
-                <a16:creationId xmlns:a16="http://schemas.microsoft.com/office/drawing/2014/main" xmlns="" id="{2F31776A-D32D-34F5-8A99-A26F4F6535B9}"/>
+                <a16:creationId xmlns="" xmlns:a16="http://schemas.microsoft.com/office/drawing/2014/main" id="{2F31776A-D32D-34F5-8A99-A26F4F6535B9}"/>
               </a:ext>
             </a:extLst>
           </p:cNvPr>
@@ -3112,7 +3113,7 @@
           <p:cNvPr id="4" name="텍스트 개체 틀 3">
             <a:extLst>
               <a:ext uri="{FF2B5EF4-FFF2-40B4-BE49-F238E27FC236}">
-                <a16:creationId xmlns:a16="http://schemas.microsoft.com/office/drawing/2014/main" xmlns="" id="{3E500BF3-C366-20F6-6257-8233A0794521}"/>
+                <a16:creationId xmlns="" xmlns:a16="http://schemas.microsoft.com/office/drawing/2014/main" id="{3E500BF3-C366-20F6-6257-8233A0794521}"/>
               </a:ext>
             </a:extLst>
           </p:cNvPr>
@@ -3183,7 +3184,7 @@
           <p:cNvPr id="5" name="날짜 개체 틀 4">
             <a:extLst>
               <a:ext uri="{FF2B5EF4-FFF2-40B4-BE49-F238E27FC236}">
-                <a16:creationId xmlns:a16="http://schemas.microsoft.com/office/drawing/2014/main" xmlns="" id="{DB1C119C-B590-D055-6B10-AAE861F0D2B1}"/>
+                <a16:creationId xmlns="" xmlns:a16="http://schemas.microsoft.com/office/drawing/2014/main" id="{DB1C119C-B590-D055-6B10-AAE861F0D2B1}"/>
               </a:ext>
             </a:extLst>
           </p:cNvPr>
@@ -3201,7 +3202,7 @@
           <a:p>
             <a:fld id="{5850A429-5607-4C3C-9BC0-4142A9E07459}" type="datetimeFigureOut">
               <a:rPr lang="ko-KR" altLang="en-US" smtClean="0"/>
-              <a:t>2026-07-09</a:t>
+              <a:t>2026-07-10</a:t>
             </a:fld>
             <a:endParaRPr lang="ko-KR" altLang="en-US"/>
           </a:p>
@@ -3212,7 +3213,7 @@
           <p:cNvPr id="6" name="바닥글 개체 틀 5">
             <a:extLst>
               <a:ext uri="{FF2B5EF4-FFF2-40B4-BE49-F238E27FC236}">
-                <a16:creationId xmlns:a16="http://schemas.microsoft.com/office/drawing/2014/main" xmlns="" id="{00064F92-4550-973E-464E-89CA3E7EED4F}"/>
+                <a16:creationId xmlns="" xmlns:a16="http://schemas.microsoft.com/office/drawing/2014/main" id="{00064F92-4550-973E-464E-89CA3E7EED4F}"/>
               </a:ext>
             </a:extLst>
           </p:cNvPr>
@@ -3237,7 +3238,7 @@
           <p:cNvPr id="7" name="슬라이드 번호 개체 틀 6">
             <a:extLst>
               <a:ext uri="{FF2B5EF4-FFF2-40B4-BE49-F238E27FC236}">
-                <a16:creationId xmlns:a16="http://schemas.microsoft.com/office/drawing/2014/main" xmlns="" id="{708384D1-792D-8EA8-718E-F756CEE623A7}"/>
+                <a16:creationId xmlns="" xmlns:a16="http://schemas.microsoft.com/office/drawing/2014/main" id="{708384D1-792D-8EA8-718E-F756CEE623A7}"/>
               </a:ext>
             </a:extLst>
           </p:cNvPr>
@@ -3301,7 +3302,7 @@
           <p:cNvPr id="2" name="제목 개체 틀 1">
             <a:extLst>
               <a:ext uri="{FF2B5EF4-FFF2-40B4-BE49-F238E27FC236}">
-                <a16:creationId xmlns:a16="http://schemas.microsoft.com/office/drawing/2014/main" xmlns="" id="{C0AC0570-6E75-D8C0-582D-3A448969CF8B}"/>
+                <a16:creationId xmlns="" xmlns:a16="http://schemas.microsoft.com/office/drawing/2014/main" id="{C0AC0570-6E75-D8C0-582D-3A448969CF8B}"/>
               </a:ext>
             </a:extLst>
           </p:cNvPr>
@@ -3339,7 +3340,7 @@
           <p:cNvPr id="3" name="텍스트 개체 틀 2">
             <a:extLst>
               <a:ext uri="{FF2B5EF4-FFF2-40B4-BE49-F238E27FC236}">
-                <a16:creationId xmlns:a16="http://schemas.microsoft.com/office/drawing/2014/main" xmlns="" id="{79ADFDDF-DF3C-19FA-0ED8-5D640C08DB4B}"/>
+                <a16:creationId xmlns="" xmlns:a16="http://schemas.microsoft.com/office/drawing/2014/main" id="{79ADFDDF-DF3C-19FA-0ED8-5D640C08DB4B}"/>
               </a:ext>
             </a:extLst>
           </p:cNvPr>
@@ -3406,7 +3407,7 @@
           <p:cNvPr id="4" name="날짜 개체 틀 3">
             <a:extLst>
               <a:ext uri="{FF2B5EF4-FFF2-40B4-BE49-F238E27FC236}">
-                <a16:creationId xmlns:a16="http://schemas.microsoft.com/office/drawing/2014/main" xmlns="" id="{AB9AC677-7913-29B2-30F7-969771FA5D05}"/>
+                <a16:creationId xmlns="" xmlns:a16="http://schemas.microsoft.com/office/drawing/2014/main" id="{AB9AC677-7913-29B2-30F7-969771FA5D05}"/>
               </a:ext>
             </a:extLst>
           </p:cNvPr>
@@ -3442,7 +3443,7 @@
           <a:p>
             <a:fld id="{5850A429-5607-4C3C-9BC0-4142A9E07459}" type="datetimeFigureOut">
               <a:rPr lang="ko-KR" altLang="en-US" smtClean="0"/>
-              <a:t>2026-07-09</a:t>
+              <a:t>2026-07-10</a:t>
             </a:fld>
             <a:endParaRPr lang="ko-KR" altLang="en-US"/>
           </a:p>
@@ -3453,7 +3454,7 @@
           <p:cNvPr id="5" name="바닥글 개체 틀 4">
             <a:extLst>
               <a:ext uri="{FF2B5EF4-FFF2-40B4-BE49-F238E27FC236}">
-                <a16:creationId xmlns:a16="http://schemas.microsoft.com/office/drawing/2014/main" xmlns="" id="{3A6836E4-21B2-245A-8933-7F64F64AC382}"/>
+                <a16:creationId xmlns="" xmlns:a16="http://schemas.microsoft.com/office/drawing/2014/main" id="{3A6836E4-21B2-245A-8933-7F64F64AC382}"/>
               </a:ext>
             </a:extLst>
           </p:cNvPr>
@@ -3496,7 +3497,7 @@
           <p:cNvPr id="6" name="슬라이드 번호 개체 틀 5">
             <a:extLst>
               <a:ext uri="{FF2B5EF4-FFF2-40B4-BE49-F238E27FC236}">
-                <a16:creationId xmlns:a16="http://schemas.microsoft.com/office/drawing/2014/main" xmlns="" id="{6F2D0B4E-8F0D-F1B8-2A71-9862FC9749C5}"/>
+                <a16:creationId xmlns="" xmlns:a16="http://schemas.microsoft.com/office/drawing/2014/main" id="{6F2D0B4E-8F0D-F1B8-2A71-9862FC9749C5}"/>
               </a:ext>
             </a:extLst>
           </p:cNvPr>
@@ -4002,7 +4003,7 @@
         <p:cNvPr id="1" name="">
           <a:extLst>
             <a:ext uri="{FF2B5EF4-FFF2-40B4-BE49-F238E27FC236}">
-              <a16:creationId xmlns:a16="http://schemas.microsoft.com/office/drawing/2014/main" xmlns="" id="{49DA7EAA-204E-2F90-E52A-6C83B9013025}"/>
+              <a16:creationId xmlns="" xmlns:a16="http://schemas.microsoft.com/office/drawing/2014/main" id="{49DA7EAA-204E-2F90-E52A-6C83B9013025}"/>
             </a:ext>
           </a:extLst>
         </p:cNvPr>
@@ -4022,7 +4023,7 @@
           <p:cNvPr id="8" name="TextBox 7">
             <a:extLst>
               <a:ext uri="{FF2B5EF4-FFF2-40B4-BE49-F238E27FC236}">
-                <a16:creationId xmlns:a16="http://schemas.microsoft.com/office/drawing/2014/main" xmlns="" id="{701093AF-254C-83D7-8032-465A5FB513FB}"/>
+                <a16:creationId xmlns="" xmlns:a16="http://schemas.microsoft.com/office/drawing/2014/main" id="{701093AF-254C-83D7-8032-465A5FB513FB}"/>
               </a:ext>
             </a:extLst>
           </p:cNvPr>
@@ -4064,7 +4065,7 @@
           <p:cNvPr id="10" name="TextBox 9">
             <a:extLst>
               <a:ext uri="{FF2B5EF4-FFF2-40B4-BE49-F238E27FC236}">
-                <a16:creationId xmlns:a16="http://schemas.microsoft.com/office/drawing/2014/main" xmlns="" id="{2D538815-CBEF-E37B-5659-B5091F86B485}"/>
+                <a16:creationId xmlns="" xmlns:a16="http://schemas.microsoft.com/office/drawing/2014/main" id="{2D538815-CBEF-E37B-5659-B5091F86B485}"/>
               </a:ext>
             </a:extLst>
           </p:cNvPr>
@@ -4073,8 +4074,8 @@
         </p:nvSpPr>
         <p:spPr>
           <a:xfrm>
-            <a:off x="302451" y="758852"/>
-            <a:ext cx="8118068" cy="830997"/>
+            <a:off x="302451" y="684785"/>
+            <a:ext cx="8118068" cy="2308324"/>
           </a:xfrm>
           <a:prstGeom prst="rect">
             <a:avLst/>
@@ -4092,7 +4093,14 @@
                 <a:latin typeface="나눔바른고딕" panose="020B0603020101020101" pitchFamily="34" charset="-127"/>
                 <a:ea typeface="나눔바른고딕" panose="020B0603020101020101" pitchFamily="34" charset="-127"/>
               </a:rPr>
-              <a:t>애니메이션 시스템</a:t>
+              <a:t>애니메이션 </a:t>
+            </a:r>
+            <a:r>
+              <a:rPr lang="ko-KR" altLang="en-US" sz="1600" dirty="0" smtClean="0">
+                <a:latin typeface="나눔바른고딕" panose="020B0603020101020101" pitchFamily="34" charset="-127"/>
+                <a:ea typeface="나눔바른고딕" panose="020B0603020101020101" pitchFamily="34" charset="-127"/>
+              </a:rPr>
+              <a:t>시스템</a:t>
             </a:r>
             <a:endParaRPr lang="en-US" altLang="ko-KR" sz="1600" dirty="0">
               <a:latin typeface="나눔바른고딕" panose="020B0603020101020101" pitchFamily="34" charset="-127"/>
@@ -4100,58 +4108,119 @@
             </a:endParaRPr>
           </a:p>
           <a:p>
-            <a:pPr marL="742950" lvl="1" indent="-285750">
+            <a:pPr marL="285750" lvl="1" indent="-285750">
               <a:buFont typeface="Arial" panose="020B0604020202020204" pitchFamily="34" charset="0"/>
               <a:buChar char="•"/>
             </a:pPr>
             <a:r>
+              <a:rPr lang="ko-KR" altLang="en-US" sz="1600" dirty="0" err="1" smtClean="0">
+                <a:latin typeface="나눔바른고딕" panose="020B0603020101020101" pitchFamily="34" charset="-127"/>
+                <a:ea typeface="나눔바른고딕" panose="020B0603020101020101" pitchFamily="34" charset="-127"/>
+              </a:rPr>
+              <a:t>애니메이터</a:t>
+            </a:r>
+            <a:r>
+              <a:rPr lang="ko-KR" altLang="en-US" sz="1600" dirty="0" smtClean="0">
+                <a:latin typeface="나눔바른고딕" panose="020B0603020101020101" pitchFamily="34" charset="-127"/>
+                <a:ea typeface="나눔바른고딕" panose="020B0603020101020101" pitchFamily="34" charset="-127"/>
+              </a:rPr>
+              <a:t> </a:t>
+            </a:r>
+            <a:r>
+              <a:rPr lang="en-US" altLang="ko-KR" sz="1600" dirty="0" smtClean="0">
+                <a:latin typeface="나눔바른고딕" panose="020B0603020101020101" pitchFamily="34" charset="-127"/>
+                <a:ea typeface="나눔바른고딕" panose="020B0603020101020101" pitchFamily="34" charset="-127"/>
+              </a:rPr>
+              <a:t>: </a:t>
+            </a:r>
+            <a:r>
+              <a:rPr lang="ko-KR" altLang="en-US" sz="1600" dirty="0" smtClean="0">
+                <a:latin typeface="나눔바른고딕" panose="020B0603020101020101" pitchFamily="34" charset="-127"/>
+                <a:ea typeface="나눔바른고딕" panose="020B0603020101020101" pitchFamily="34" charset="-127"/>
+              </a:rPr>
+              <a:t>애니메이션 재생 제어</a:t>
+            </a:r>
+            <a:endParaRPr lang="en-US" altLang="ko-KR" sz="1600" dirty="0" smtClean="0">
+              <a:latin typeface="나눔바른고딕" panose="020B0603020101020101" pitchFamily="34" charset="-127"/>
+              <a:ea typeface="나눔바른고딕" panose="020B0603020101020101" pitchFamily="34" charset="-127"/>
+            </a:endParaRPr>
+          </a:p>
+          <a:p>
+            <a:pPr marL="285750" lvl="1" indent="-285750">
+              <a:buFont typeface="Arial" panose="020B0604020202020204" pitchFamily="34" charset="0"/>
+              <a:buChar char="•"/>
+            </a:pPr>
+            <a:r>
+              <a:rPr lang="ko-KR" altLang="en-US" sz="1600" dirty="0" err="1" smtClean="0">
+                <a:latin typeface="나눔바른고딕" panose="020B0603020101020101" pitchFamily="34" charset="-127"/>
+                <a:ea typeface="나눔바른고딕" panose="020B0603020101020101" pitchFamily="34" charset="-127"/>
+              </a:rPr>
+              <a:t>블렌드</a:t>
+            </a:r>
+            <a:r>
+              <a:rPr lang="ko-KR" altLang="en-US" sz="1600" dirty="0" smtClean="0">
+                <a:latin typeface="나눔바른고딕" panose="020B0603020101020101" pitchFamily="34" charset="-127"/>
+                <a:ea typeface="나눔바른고딕" panose="020B0603020101020101" pitchFamily="34" charset="-127"/>
+              </a:rPr>
+              <a:t> 클립 </a:t>
+            </a:r>
+            <a:r>
+              <a:rPr lang="en-US" altLang="ko-KR" sz="1600" dirty="0">
+                <a:latin typeface="나눔바른고딕" panose="020B0603020101020101" pitchFamily="34" charset="-127"/>
+                <a:ea typeface="나눔바른고딕" panose="020B0603020101020101" pitchFamily="34" charset="-127"/>
+              </a:rPr>
+              <a:t>(2D</a:t>
+            </a:r>
+            <a:r>
+              <a:rPr lang="en-US" altLang="ko-KR" sz="1600" dirty="0" smtClean="0">
+                <a:latin typeface="나눔바른고딕" panose="020B0603020101020101" pitchFamily="34" charset="-127"/>
+                <a:ea typeface="나눔바른고딕" panose="020B0603020101020101" pitchFamily="34" charset="-127"/>
+              </a:rPr>
+              <a:t>) : </a:t>
+            </a:r>
+          </a:p>
+          <a:p>
+            <a:pPr marL="742950" lvl="2" indent="-285750">
+              <a:buFont typeface="Arial" panose="020B0604020202020204" pitchFamily="34" charset="0"/>
+              <a:buChar char="•"/>
+            </a:pPr>
+            <a:r>
+              <a:rPr lang="en-US" altLang="ko-KR" sz="1600" dirty="0" smtClean="0">
+                <a:latin typeface="나눔바른고딕" panose="020B0603020101020101" pitchFamily="34" charset="-127"/>
+                <a:ea typeface="나눔바른고딕" panose="020B0603020101020101" pitchFamily="34" charset="-127"/>
+              </a:rPr>
+              <a:t>2D </a:t>
+            </a:r>
+            <a:r>
               <a:rPr lang="ko-KR" altLang="en-US" sz="1600" dirty="0">
                 <a:latin typeface="나눔바른고딕" panose="020B0603020101020101" pitchFamily="34" charset="-127"/>
                 <a:ea typeface="나눔바른고딕" panose="020B0603020101020101" pitchFamily="34" charset="-127"/>
               </a:rPr>
-              <a:t>애니메이션 </a:t>
-            </a:r>
-            <a:r>
-              <a:rPr lang="ko-KR" altLang="en-US" sz="1600" dirty="0" err="1">
-                <a:latin typeface="나눔바른고딕" panose="020B0603020101020101" pitchFamily="34" charset="-127"/>
-                <a:ea typeface="나눔바른고딕" panose="020B0603020101020101" pitchFamily="34" charset="-127"/>
-              </a:rPr>
-              <a:t>블렌드</a:t>
-            </a:r>
-            <a:r>
-              <a:rPr lang="ko-KR" altLang="en-US" sz="1600" dirty="0">
-                <a:latin typeface="나눔바른고딕" panose="020B0603020101020101" pitchFamily="34" charset="-127"/>
-                <a:ea typeface="나눔바른고딕" panose="020B0603020101020101" pitchFamily="34" charset="-127"/>
-              </a:rPr>
-              <a:t> </a:t>
-            </a:r>
-            <a:r>
-              <a:rPr lang="en-US" altLang="ko-KR" sz="1600" dirty="0">
-                <a:latin typeface="나눔바른고딕" panose="020B0603020101020101" pitchFamily="34" charset="-127"/>
-                <a:ea typeface="나눔바른고딕" panose="020B0603020101020101" pitchFamily="34" charset="-127"/>
-              </a:rPr>
-              <a:t>(2D</a:t>
-            </a:r>
-            <a:r>
-              <a:rPr lang="en-US" altLang="ko-KR" sz="1600" dirty="0" smtClean="0">
-                <a:latin typeface="나눔바른고딕" panose="020B0603020101020101" pitchFamily="34" charset="-127"/>
-                <a:ea typeface="나눔바른고딕" panose="020B0603020101020101" pitchFamily="34" charset="-127"/>
-              </a:rPr>
-              <a:t>) – 4</a:t>
+              <a:t>평면에서 입력한 좌표를 </a:t>
             </a:r>
             <a:r>
               <a:rPr lang="ko-KR" altLang="en-US" sz="1600" dirty="0" smtClean="0">
                 <a:latin typeface="나눔바른고딕" panose="020B0603020101020101" pitchFamily="34" charset="-127"/>
                 <a:ea typeface="나눔바른고딕" panose="020B0603020101020101" pitchFamily="34" charset="-127"/>
               </a:rPr>
-              <a:t>방향 애니메이션을 가중치에 따라 </a:t>
-            </a:r>
-            <a:r>
-              <a:rPr lang="ko-KR" altLang="en-US" sz="1600" dirty="0" err="1" smtClean="0">
-                <a:latin typeface="나눔바른고딕" panose="020B0603020101020101" pitchFamily="34" charset="-127"/>
-                <a:ea typeface="나눔바른고딕" panose="020B0603020101020101" pitchFamily="34" charset="-127"/>
-              </a:rPr>
-              <a:t>블렌드</a:t>
+              <a:t>이용해 사전에 배치된 애니메이션 간 거리를 계산</a:t>
+            </a:r>
+            <a:endParaRPr lang="en-US" altLang="ko-KR" sz="1600" dirty="0" smtClean="0">
+              <a:latin typeface="나눔바른고딕" panose="020B0603020101020101" pitchFamily="34" charset="-127"/>
+              <a:ea typeface="나눔바른고딕" panose="020B0603020101020101" pitchFamily="34" charset="-127"/>
+            </a:endParaRPr>
+          </a:p>
+          <a:p>
+            <a:pPr marL="742950" lvl="2" indent="-285750">
+              <a:buFont typeface="Arial" panose="020B0604020202020204" pitchFamily="34" charset="0"/>
+              <a:buChar char="•"/>
+            </a:pPr>
+            <a:r>
+              <a:rPr lang="ko-KR" altLang="en-US" sz="1600" dirty="0" smtClean="0">
+                <a:latin typeface="나눔바른고딕" panose="020B0603020101020101" pitchFamily="34" charset="-127"/>
+                <a:ea typeface="나눔바른고딕" panose="020B0603020101020101" pitchFamily="34" charset="-127"/>
+              </a:rPr>
+              <a:t>좌표에 가까운 애니메이션을 가중치를 높게 주어 재생</a:t>
             </a:r>
             <a:endParaRPr lang="en-US" altLang="ko-KR" sz="1600" dirty="0">
               <a:latin typeface="나눔바른고딕" panose="020B0603020101020101" pitchFamily="34" charset="-127"/>
@@ -4159,44 +4228,91 @@
             </a:endParaRPr>
           </a:p>
           <a:p>
-            <a:pPr marL="742950" lvl="1" indent="-285750">
+            <a:pPr marL="742950" lvl="2" indent="-285750">
               <a:buFont typeface="Arial" panose="020B0604020202020204" pitchFamily="34" charset="0"/>
               <a:buChar char="•"/>
             </a:pPr>
             <a:r>
-              <a:rPr lang="ko-KR" altLang="en-US" sz="1600" dirty="0">
-                <a:latin typeface="나눔바른고딕" panose="020B0603020101020101" pitchFamily="34" charset="-127"/>
-                <a:ea typeface="나눔바른고딕" panose="020B0603020101020101" pitchFamily="34" charset="-127"/>
-              </a:rPr>
-              <a:t>애니메이션 </a:t>
+              <a:rPr lang="ko-KR" altLang="en-US" sz="1600" dirty="0" err="1" smtClean="0">
+                <a:latin typeface="나눔바른고딕" panose="020B0603020101020101" pitchFamily="34" charset="-127"/>
+                <a:ea typeface="나눔바른고딕" panose="020B0603020101020101" pitchFamily="34" charset="-127"/>
+              </a:rPr>
+              <a:t>로코모션</a:t>
             </a:r>
             <a:r>
               <a:rPr lang="ko-KR" altLang="en-US" sz="1600" dirty="0" smtClean="0">
                 <a:latin typeface="나눔바른고딕" panose="020B0603020101020101" pitchFamily="34" charset="-127"/>
                 <a:ea typeface="나눔바른고딕" panose="020B0603020101020101" pitchFamily="34" charset="-127"/>
               </a:rPr>
-              <a:t>몽타주</a:t>
-            </a:r>
-            <a:r>
-              <a:rPr lang="en-US" altLang="ko-KR" sz="1600" dirty="0">
-                <a:latin typeface="나눔바른고딕" panose="020B0603020101020101" pitchFamily="34" charset="-127"/>
-                <a:ea typeface="나눔바른고딕" panose="020B0603020101020101" pitchFamily="34" charset="-127"/>
-              </a:rPr>
-              <a:t> </a:t>
+              <a:t> 형태의 애니메이션의 축 입력을 자연스럽게 처리하고자 구현</a:t>
+            </a:r>
+            <a:endParaRPr lang="en-US" altLang="ko-KR" sz="1600" dirty="0" smtClean="0">
+              <a:latin typeface="나눔바른고딕" panose="020B0603020101020101" pitchFamily="34" charset="-127"/>
+              <a:ea typeface="나눔바른고딕" panose="020B0603020101020101" pitchFamily="34" charset="-127"/>
+            </a:endParaRPr>
+          </a:p>
+          <a:p>
+            <a:pPr marL="285750" lvl="1" indent="-285750">
+              <a:buFont typeface="Arial" panose="020B0604020202020204" pitchFamily="34" charset="0"/>
+              <a:buChar char="•"/>
+            </a:pPr>
+            <a:r>
+              <a:rPr lang="ko-KR" altLang="en-US" sz="1600" dirty="0" smtClean="0">
+                <a:latin typeface="나눔바른고딕" panose="020B0603020101020101" pitchFamily="34" charset="-127"/>
+                <a:ea typeface="나눔바른고딕" panose="020B0603020101020101" pitchFamily="34" charset="-127"/>
+              </a:rPr>
+              <a:t>액션 클립 </a:t>
             </a:r>
             <a:r>
               <a:rPr lang="en-US" altLang="ko-KR" sz="1600" dirty="0" smtClean="0">
                 <a:latin typeface="나눔바른고딕" panose="020B0603020101020101" pitchFamily="34" charset="-127"/>
                 <a:ea typeface="나눔바른고딕" panose="020B0603020101020101" pitchFamily="34" charset="-127"/>
               </a:rPr>
-              <a:t>– </a:t>
-            </a:r>
-            <a:r>
-              <a:rPr lang="ko-KR" altLang="en-US" sz="1600" smtClean="0">
+              <a:t>: </a:t>
+            </a:r>
+          </a:p>
+          <a:p>
+            <a:pPr marL="742950" lvl="2" indent="-285750">
+              <a:buFont typeface="Arial" panose="020B0604020202020204" pitchFamily="34" charset="0"/>
+              <a:buChar char="•"/>
+            </a:pPr>
+            <a:r>
+              <a:rPr lang="ko-KR" altLang="en-US" sz="1600" dirty="0" smtClean="0">
                 <a:latin typeface="나눔바른고딕" panose="020B0603020101020101" pitchFamily="34" charset="-127"/>
                 <a:ea typeface="나눔바른고딕" panose="020B0603020101020101" pitchFamily="34" charset="-127"/>
               </a:rPr>
               <a:t>단발성 재생을 위한 애니메이션 처리</a:t>
+            </a:r>
+            <a:endParaRPr lang="en-US" altLang="ko-KR" sz="1600" dirty="0" smtClean="0">
+              <a:latin typeface="나눔바른고딕" panose="020B0603020101020101" pitchFamily="34" charset="-127"/>
+              <a:ea typeface="나눔바른고딕" panose="020B0603020101020101" pitchFamily="34" charset="-127"/>
+            </a:endParaRPr>
+          </a:p>
+          <a:p>
+            <a:pPr marL="742950" lvl="2" indent="-285750">
+              <a:buFont typeface="Arial" panose="020B0604020202020204" pitchFamily="34" charset="0"/>
+              <a:buChar char="•"/>
+            </a:pPr>
+            <a:r>
+              <a:rPr lang="ko-KR" altLang="en-US" sz="1600" dirty="0" smtClean="0">
+                <a:latin typeface="나눔바른고딕" panose="020B0603020101020101" pitchFamily="34" charset="-127"/>
+                <a:ea typeface="나눔바른고딕" panose="020B0603020101020101" pitchFamily="34" charset="-127"/>
+              </a:rPr>
+              <a:t>점프</a:t>
+            </a:r>
+            <a:r>
+              <a:rPr lang="en-US" altLang="ko-KR" sz="1600" dirty="0" smtClean="0">
+                <a:latin typeface="나눔바른고딕" panose="020B0603020101020101" pitchFamily="34" charset="-127"/>
+                <a:ea typeface="나눔바른고딕" panose="020B0603020101020101" pitchFamily="34" charset="-127"/>
+              </a:rPr>
+              <a:t>, </a:t>
+            </a:r>
+            <a:r>
+              <a:rPr lang="ko-KR" altLang="en-US" sz="1600" dirty="0" smtClean="0">
+                <a:latin typeface="나눔바른고딕" panose="020B0603020101020101" pitchFamily="34" charset="-127"/>
+                <a:ea typeface="나눔바른고딕" panose="020B0603020101020101" pitchFamily="34" charset="-127"/>
+              </a:rPr>
+              <a:t>장애물 넘기 등 단발성으로 재생하는 애니메이션</a:t>
             </a:r>
             <a:endParaRPr lang="en-US" altLang="ko-KR" sz="1600" dirty="0">
               <a:latin typeface="나눔바른고딕" panose="020B0603020101020101" pitchFamily="34" charset="-127"/>
@@ -4207,208 +4323,79 @@
       </p:sp>
       <p:sp>
         <p:nvSpPr>
-          <p:cNvPr id="12" name="TextBox 11">
-            <a:extLst>
-              <a:ext uri="{FF2B5EF4-FFF2-40B4-BE49-F238E27FC236}">
-                <a16:creationId xmlns:a16="http://schemas.microsoft.com/office/drawing/2014/main" xmlns="" id="{8E37654D-B1C1-B17B-2A32-BB0F324B7AC3}"/>
-              </a:ext>
-            </a:extLst>
-          </p:cNvPr>
-          <p:cNvSpPr txBox="1"/>
+          <p:cNvPr id="2" name="직사각형 1"/>
+          <p:cNvSpPr/>
           <p:nvPr/>
         </p:nvSpPr>
         <p:spPr>
           <a:xfrm>
-            <a:off x="302451" y="3075030"/>
-            <a:ext cx="8118068" cy="1323439"/>
+            <a:off x="5246591" y="3362441"/>
+            <a:ext cx="806631" cy="276999"/>
           </a:xfrm>
           <a:prstGeom prst="rect">
             <a:avLst/>
           </a:prstGeom>
-          <a:noFill/>
         </p:spPr>
         <p:txBody>
-          <a:bodyPr wrap="square" rtlCol="0">
+          <a:bodyPr wrap="none">
             <a:spAutoFit/>
           </a:bodyPr>
           <a:lstStyle/>
           <a:p>
             <a:r>
-              <a:rPr lang="ko-KR" altLang="en-US" sz="1600" dirty="0" smtClean="0">
-                <a:latin typeface="나눔바른고딕" panose="020B0603020101020101" pitchFamily="34" charset="-127"/>
-                <a:ea typeface="나눔바른고딕" panose="020B0603020101020101" pitchFamily="34" charset="-127"/>
-              </a:rPr>
-              <a:t>향후 구현 방향  </a:t>
-            </a:r>
-            <a:endParaRPr lang="en-US" altLang="ko-KR" sz="1600" dirty="0" smtClean="0">
-              <a:latin typeface="나눔바른고딕" panose="020B0603020101020101" pitchFamily="34" charset="-127"/>
-              <a:ea typeface="나눔바른고딕" panose="020B0603020101020101" pitchFamily="34" charset="-127"/>
-            </a:endParaRPr>
-          </a:p>
-          <a:p>
-            <a:pPr marL="742950" lvl="1" indent="-285750">
-              <a:buFont typeface="Arial" panose="020B0604020202020204" pitchFamily="34" charset="0"/>
-              <a:buChar char="•"/>
-            </a:pPr>
-            <a:r>
-              <a:rPr lang="ko-KR" altLang="en-US" sz="1600" dirty="0" smtClean="0">
-                <a:latin typeface="나눔바른고딕" panose="020B0603020101020101" pitchFamily="34" charset="-127"/>
-                <a:ea typeface="나눔바른고딕" panose="020B0603020101020101" pitchFamily="34" charset="-127"/>
-              </a:rPr>
-              <a:t>지속적인 재생 필요 </a:t>
-            </a:r>
-            <a:r>
-              <a:rPr lang="en-US" altLang="ko-KR" sz="1600" dirty="0">
+              <a:rPr lang="ko-KR" altLang="en-US" sz="1200" dirty="0">
+                <a:latin typeface="나눔바른고딕" panose="020B0603020101020101" pitchFamily="34" charset="-127"/>
+                <a:ea typeface="나눔바른고딕" panose="020B0603020101020101" pitchFamily="34" charset="-127"/>
+              </a:rPr>
+              <a:t>액션 클립 </a:t>
+            </a:r>
+            <a:endParaRPr lang="ko-KR" altLang="en-US" sz="1200" dirty="0"/>
+          </a:p>
+        </p:txBody>
+      </p:sp>
+      <p:sp>
+        <p:nvSpPr>
+          <p:cNvPr id="6" name="직사각형 5"/>
+          <p:cNvSpPr/>
+          <p:nvPr/>
+        </p:nvSpPr>
+        <p:spPr>
+          <a:xfrm>
+            <a:off x="302451" y="3362440"/>
+            <a:ext cx="944489" cy="276999"/>
+          </a:xfrm>
+          <a:prstGeom prst="rect">
+            <a:avLst/>
+          </a:prstGeom>
+        </p:spPr>
+        <p:txBody>
+          <a:bodyPr wrap="none">
+            <a:spAutoFit/>
+          </a:bodyPr>
+          <a:lstStyle/>
+          <a:p>
+            <a:r>
+              <a:rPr lang="ko-KR" altLang="en-US" sz="1200" dirty="0" err="1" smtClean="0">
+                <a:latin typeface="나눔바른고딕" panose="020B0603020101020101" pitchFamily="34" charset="-127"/>
+                <a:ea typeface="나눔바른고딕" panose="020B0603020101020101" pitchFamily="34" charset="-127"/>
+              </a:rPr>
+              <a:t>블렌드</a:t>
+            </a:r>
+            <a:r>
+              <a:rPr lang="ko-KR" altLang="en-US" sz="1200" dirty="0" smtClean="0">
                 <a:latin typeface="나눔바른고딕" panose="020B0603020101020101" pitchFamily="34" charset="-127"/>
                 <a:ea typeface="나눔바른고딕" panose="020B0603020101020101" pitchFamily="34" charset="-127"/>
               </a:rPr>
               <a:t> </a:t>
             </a:r>
             <a:r>
-              <a:rPr lang="en-US" altLang="ko-KR" sz="1600" dirty="0" smtClean="0">
-                <a:latin typeface="나눔바른고딕" panose="020B0603020101020101" pitchFamily="34" charset="-127"/>
-                <a:ea typeface="나눔바른고딕" panose="020B0603020101020101" pitchFamily="34" charset="-127"/>
-              </a:rPr>
-              <a:t>-&gt; Base Layer (</a:t>
-            </a:r>
-            <a:r>
-              <a:rPr lang="en-US" altLang="ko-KR" sz="1600" dirty="0" err="1" smtClean="0">
-                <a:latin typeface="나눔바른고딕" panose="020B0603020101020101" pitchFamily="34" charset="-127"/>
-                <a:ea typeface="나눔바른고딕" panose="020B0603020101020101" pitchFamily="34" charset="-127"/>
-              </a:rPr>
-              <a:t>BlendClip</a:t>
-            </a:r>
-            <a:r>
-              <a:rPr lang="en-US" altLang="ko-KR" sz="1600" dirty="0" smtClean="0">
-                <a:latin typeface="나눔바른고딕" panose="020B0603020101020101" pitchFamily="34" charset="-127"/>
-                <a:ea typeface="나눔바른고딕" panose="020B0603020101020101" pitchFamily="34" charset="-127"/>
-              </a:rPr>
-              <a:t>)</a:t>
-            </a:r>
-          </a:p>
-          <a:p>
-            <a:pPr marL="1200150" lvl="2" indent="-285750">
-              <a:buFont typeface="Arial" panose="020B0604020202020204" pitchFamily="34" charset="0"/>
-              <a:buChar char="•"/>
-            </a:pPr>
-            <a:r>
-              <a:rPr lang="ko-KR" altLang="en-US" sz="1600" dirty="0" smtClean="0">
-                <a:latin typeface="나눔바른고딕" panose="020B0603020101020101" pitchFamily="34" charset="-127"/>
-                <a:ea typeface="나눔바른고딕" panose="020B0603020101020101" pitchFamily="34" charset="-127"/>
-              </a:rPr>
-              <a:t>평지</a:t>
-            </a:r>
-            <a:r>
-              <a:rPr lang="en-US" altLang="ko-KR" sz="1600" dirty="0" smtClean="0">
-                <a:latin typeface="나눔바른고딕" panose="020B0603020101020101" pitchFamily="34" charset="-127"/>
-                <a:ea typeface="나눔바른고딕" panose="020B0603020101020101" pitchFamily="34" charset="-127"/>
-              </a:rPr>
-              <a:t>, </a:t>
-            </a:r>
-            <a:r>
-              <a:rPr lang="ko-KR" altLang="en-US" sz="1600" dirty="0" smtClean="0">
-                <a:latin typeface="나눔바른고딕" panose="020B0603020101020101" pitchFamily="34" charset="-127"/>
-                <a:ea typeface="나눔바른고딕" panose="020B0603020101020101" pitchFamily="34" charset="-127"/>
-              </a:rPr>
-              <a:t>벽면 매달린 상태</a:t>
-            </a:r>
-            <a:r>
-              <a:rPr lang="en-US" altLang="ko-KR" sz="1600" dirty="0" smtClean="0">
-                <a:latin typeface="나눔바른고딕" panose="020B0603020101020101" pitchFamily="34" charset="-127"/>
-                <a:ea typeface="나눔바른고딕" panose="020B0603020101020101" pitchFamily="34" charset="-127"/>
-              </a:rPr>
-              <a:t>, </a:t>
-            </a:r>
-            <a:r>
-              <a:rPr lang="ko-KR" altLang="en-US" sz="1600" dirty="0" smtClean="0">
-                <a:latin typeface="나눔바른고딕" panose="020B0603020101020101" pitchFamily="34" charset="-127"/>
-                <a:ea typeface="나눔바른고딕" panose="020B0603020101020101" pitchFamily="34" charset="-127"/>
-              </a:rPr>
-              <a:t>벽 오르기 등 상태 머신 구현</a:t>
-            </a:r>
-            <a:endParaRPr lang="en-US" altLang="ko-KR" sz="1600" dirty="0" smtClean="0">
-              <a:latin typeface="나눔바른고딕" panose="020B0603020101020101" pitchFamily="34" charset="-127"/>
-              <a:ea typeface="나눔바른고딕" panose="020B0603020101020101" pitchFamily="34" charset="-127"/>
-            </a:endParaRPr>
-          </a:p>
-          <a:p>
-            <a:pPr marL="742950" lvl="1" indent="-285750">
-              <a:buFont typeface="Arial" panose="020B0604020202020204" pitchFamily="34" charset="0"/>
-              <a:buChar char="•"/>
-            </a:pPr>
-            <a:r>
-              <a:rPr lang="ko-KR" altLang="en-US" sz="1600" dirty="0" smtClean="0">
-                <a:latin typeface="나눔바른고딕" panose="020B0603020101020101" pitchFamily="34" charset="-127"/>
-                <a:ea typeface="나눔바른고딕" panose="020B0603020101020101" pitchFamily="34" charset="-127"/>
-              </a:rPr>
-              <a:t>한 차례 재생 필요 </a:t>
-            </a:r>
-            <a:r>
-              <a:rPr lang="en-US" altLang="ko-KR" sz="1600" dirty="0" smtClean="0">
-                <a:latin typeface="나눔바른고딕" panose="020B0603020101020101" pitchFamily="34" charset="-127"/>
-                <a:ea typeface="나눔바른고딕" panose="020B0603020101020101" pitchFamily="34" charset="-127"/>
-              </a:rPr>
-              <a:t>-&gt; Override Layer (</a:t>
-            </a:r>
-            <a:r>
-              <a:rPr lang="en-US" altLang="ko-KR" sz="1600" dirty="0" err="1" smtClean="0">
-                <a:latin typeface="나눔바른고딕" panose="020B0603020101020101" pitchFamily="34" charset="-127"/>
-                <a:ea typeface="나눔바른고딕" panose="020B0603020101020101" pitchFamily="34" charset="-127"/>
-              </a:rPr>
-              <a:t>ActionClip</a:t>
-            </a:r>
-            <a:r>
-              <a:rPr lang="en-US" altLang="ko-KR" sz="1600" dirty="0" smtClean="0">
-                <a:latin typeface="나눔바른고딕" panose="020B0603020101020101" pitchFamily="34" charset="-127"/>
-                <a:ea typeface="나눔바른고딕" panose="020B0603020101020101" pitchFamily="34" charset="-127"/>
-              </a:rPr>
-              <a:t>)</a:t>
-            </a:r>
-          </a:p>
-          <a:p>
-            <a:pPr marL="1200150" lvl="2" indent="-285750">
-              <a:buFont typeface="Arial" panose="020B0604020202020204" pitchFamily="34" charset="0"/>
-              <a:buChar char="•"/>
-            </a:pPr>
-            <a:r>
-              <a:rPr lang="ko-KR" altLang="en-US" sz="1600" dirty="0" smtClean="0">
-                <a:latin typeface="나눔바른고딕" panose="020B0603020101020101" pitchFamily="34" charset="-127"/>
-                <a:ea typeface="나눔바른고딕" panose="020B0603020101020101" pitchFamily="34" charset="-127"/>
-              </a:rPr>
-              <a:t>점프</a:t>
-            </a:r>
-            <a:r>
-              <a:rPr lang="en-US" altLang="ko-KR" sz="1600" dirty="0" smtClean="0">
-                <a:latin typeface="나눔바른고딕" panose="020B0603020101020101" pitchFamily="34" charset="-127"/>
-                <a:ea typeface="나눔바른고딕" panose="020B0603020101020101" pitchFamily="34" charset="-127"/>
-              </a:rPr>
-              <a:t>, </a:t>
-            </a:r>
-            <a:r>
-              <a:rPr lang="ko-KR" altLang="en-US" sz="1600" dirty="0" smtClean="0">
-                <a:latin typeface="나눔바른고딕" panose="020B0603020101020101" pitchFamily="34" charset="-127"/>
-                <a:ea typeface="나눔바른고딕" panose="020B0603020101020101" pitchFamily="34" charset="-127"/>
-              </a:rPr>
-              <a:t>담 넘기</a:t>
-            </a:r>
-            <a:r>
-              <a:rPr lang="en-US" altLang="ko-KR" sz="1600" dirty="0">
-                <a:latin typeface="나눔바른고딕" panose="020B0603020101020101" pitchFamily="34" charset="-127"/>
-                <a:ea typeface="나눔바른고딕" panose="020B0603020101020101" pitchFamily="34" charset="-127"/>
-              </a:rPr>
-              <a:t> </a:t>
-            </a:r>
-            <a:r>
-              <a:rPr lang="ko-KR" altLang="en-US" sz="1600" dirty="0" smtClean="0">
-                <a:latin typeface="나눔바른고딕" panose="020B0603020101020101" pitchFamily="34" charset="-127"/>
-                <a:ea typeface="나눔바른고딕" panose="020B0603020101020101" pitchFamily="34" charset="-127"/>
-              </a:rPr>
-              <a:t>등 </a:t>
-            </a:r>
-            <a:endParaRPr lang="en-US" altLang="ko-KR" sz="1600" dirty="0" smtClean="0">
-              <a:latin typeface="나눔바른고딕" panose="020B0603020101020101" pitchFamily="34" charset="-127"/>
-              <a:ea typeface="나눔바른고딕" panose="020B0603020101020101" pitchFamily="34" charset="-127"/>
-            </a:endParaRPr>
+              <a:rPr lang="ko-KR" altLang="en-US" sz="1200" dirty="0">
+                <a:latin typeface="나눔바른고딕" panose="020B0603020101020101" pitchFamily="34" charset="-127"/>
+                <a:ea typeface="나눔바른고딕" panose="020B0603020101020101" pitchFamily="34" charset="-127"/>
+              </a:rPr>
+              <a:t>클립 </a:t>
+            </a:r>
+            <a:endParaRPr lang="ko-KR" altLang="en-US" sz="1200" dirty="0"/>
           </a:p>
         </p:txBody>
       </p:sp>
@@ -4426,539 +4413,6 @@
 </file>
 
 <file path=ppt/slides/slide3.xml><?xml version="1.0" encoding="utf-8"?>
-<p:sld xmlns:a="http://schemas.openxmlformats.org/drawingml/2006/main" xmlns:r="http://schemas.openxmlformats.org/officeDocument/2006/relationships" xmlns:p="http://schemas.openxmlformats.org/presentationml/2006/main">
-  <p:cSld>
-    <p:spTree>
-      <p:nvGrpSpPr>
-        <p:cNvPr id="1" name="">
-          <a:extLst>
-            <a:ext uri="{FF2B5EF4-FFF2-40B4-BE49-F238E27FC236}">
-              <a16:creationId xmlns:a16="http://schemas.microsoft.com/office/drawing/2014/main" xmlns="" id="{A8A918DD-265C-DDB9-B7FC-A9D58086B7F3}"/>
-            </a:ext>
-          </a:extLst>
-        </p:cNvPr>
-        <p:cNvGrpSpPr/>
-        <p:nvPr/>
-      </p:nvGrpSpPr>
-      <p:grpSpPr>
-        <a:xfrm>
-          <a:off x="0" y="0"/>
-          <a:ext cx="0" cy="0"/>
-          <a:chOff x="0" y="0"/>
-          <a:chExt cx="0" cy="0"/>
-        </a:xfrm>
-      </p:grpSpPr>
-      <p:sp>
-        <p:nvSpPr>
-          <p:cNvPr id="8" name="TextBox 7">
-            <a:extLst>
-              <a:ext uri="{FF2B5EF4-FFF2-40B4-BE49-F238E27FC236}">
-                <a16:creationId xmlns:a16="http://schemas.microsoft.com/office/drawing/2014/main" xmlns="" id="{38DA243F-1ACF-A8F6-3DE3-D3DB1A8A7D80}"/>
-              </a:ext>
-            </a:extLst>
-          </p:cNvPr>
-          <p:cNvSpPr txBox="1"/>
-          <p:nvPr/>
-        </p:nvSpPr>
-        <p:spPr>
-          <a:xfrm>
-            <a:off x="302451" y="315453"/>
-            <a:ext cx="4944140" cy="369332"/>
-          </a:xfrm>
-          <a:prstGeom prst="rect">
-            <a:avLst/>
-          </a:prstGeom>
-          <a:noFill/>
-        </p:spPr>
-        <p:txBody>
-          <a:bodyPr wrap="square" rtlCol="0">
-            <a:spAutoFit/>
-          </a:bodyPr>
-          <a:lstStyle/>
-          <a:p>
-            <a:r>
-              <a:rPr lang="ko-KR" altLang="en-US" dirty="0">
-                <a:latin typeface="나눔바른고딕" panose="020B0603020101020101" pitchFamily="34" charset="-127"/>
-                <a:ea typeface="나눔바른고딕" panose="020B0603020101020101" pitchFamily="34" charset="-127"/>
-              </a:rPr>
-              <a:t>이번 주 작업 내역</a:t>
-            </a:r>
-            <a:endParaRPr lang="en-US" altLang="ko-KR" dirty="0">
-              <a:latin typeface="나눔바른고딕" panose="020B0603020101020101" pitchFamily="34" charset="-127"/>
-              <a:ea typeface="나눔바른고딕" panose="020B0603020101020101" pitchFamily="34" charset="-127"/>
-            </a:endParaRPr>
-          </a:p>
-        </p:txBody>
-      </p:sp>
-      <p:sp>
-        <p:nvSpPr>
-          <p:cNvPr id="10" name="TextBox 9">
-            <a:extLst>
-              <a:ext uri="{FF2B5EF4-FFF2-40B4-BE49-F238E27FC236}">
-                <a16:creationId xmlns:a16="http://schemas.microsoft.com/office/drawing/2014/main" xmlns="" id="{75DAA775-31E2-50BB-2BF3-4EF90C8083FC}"/>
-              </a:ext>
-            </a:extLst>
-          </p:cNvPr>
-          <p:cNvSpPr txBox="1"/>
-          <p:nvPr/>
-        </p:nvSpPr>
-        <p:spPr>
-          <a:xfrm>
-            <a:off x="302451" y="758852"/>
-            <a:ext cx="8118068" cy="830997"/>
-          </a:xfrm>
-          <a:prstGeom prst="rect">
-            <a:avLst/>
-          </a:prstGeom>
-          <a:noFill/>
-        </p:spPr>
-        <p:txBody>
-          <a:bodyPr wrap="square" rtlCol="0">
-            <a:spAutoFit/>
-          </a:bodyPr>
-          <a:lstStyle/>
-          <a:p>
-            <a:pPr marL="285750" indent="-285750">
-              <a:buFont typeface="Arial" panose="020B0604020202020204" pitchFamily="34" charset="0"/>
-              <a:buChar char="•"/>
-            </a:pPr>
-            <a:r>
-              <a:rPr lang="en-US" altLang="ko-KR" sz="1600" dirty="0">
-                <a:latin typeface="나눔바른고딕" panose="020B0603020101020101" pitchFamily="34" charset="-127"/>
-                <a:ea typeface="나눔바른고딕" panose="020B0603020101020101" pitchFamily="34" charset="-127"/>
-              </a:rPr>
-              <a:t>PhysX</a:t>
-            </a:r>
-            <a:r>
-              <a:rPr lang="ko-KR" altLang="en-US" sz="1600" dirty="0">
-                <a:latin typeface="나눔바른고딕" panose="020B0603020101020101" pitchFamily="34" charset="-127"/>
-                <a:ea typeface="나눔바른고딕" panose="020B0603020101020101" pitchFamily="34" charset="-127"/>
-              </a:rPr>
-              <a:t> </a:t>
-            </a:r>
-            <a:r>
-              <a:rPr lang="ko-KR" altLang="en-US" sz="1600" dirty="0" smtClean="0">
-                <a:latin typeface="나눔바른고딕" panose="020B0603020101020101" pitchFamily="34" charset="-127"/>
-                <a:ea typeface="나눔바른고딕" panose="020B0603020101020101" pitchFamily="34" charset="-127"/>
-              </a:rPr>
-              <a:t>적용</a:t>
-            </a:r>
-            <a:endParaRPr lang="en-US" altLang="ko-KR" sz="1600" dirty="0" smtClean="0">
-              <a:latin typeface="나눔바른고딕" panose="020B0603020101020101" pitchFamily="34" charset="-127"/>
-              <a:ea typeface="나눔바른고딕" panose="020B0603020101020101" pitchFamily="34" charset="-127"/>
-            </a:endParaRPr>
-          </a:p>
-          <a:p>
-            <a:pPr marL="742950" lvl="1" indent="-285750">
-              <a:buFont typeface="Arial" panose="020B0604020202020204" pitchFamily="34" charset="0"/>
-              <a:buChar char="•"/>
-            </a:pPr>
-            <a:r>
-              <a:rPr lang="ko-KR" altLang="en-US" sz="1600" dirty="0" smtClean="0">
-                <a:latin typeface="나눔바른고딕" panose="020B0603020101020101" pitchFamily="34" charset="-127"/>
-                <a:ea typeface="나눔바른고딕" panose="020B0603020101020101" pitchFamily="34" charset="-127"/>
-              </a:rPr>
-              <a:t>지형지물 충돌</a:t>
-            </a:r>
-            <a:endParaRPr lang="en-US" altLang="ko-KR" sz="1600" dirty="0">
-              <a:latin typeface="나눔바른고딕" panose="020B0603020101020101" pitchFamily="34" charset="-127"/>
-              <a:ea typeface="나눔바른고딕" panose="020B0603020101020101" pitchFamily="34" charset="-127"/>
-            </a:endParaRPr>
-          </a:p>
-          <a:p>
-            <a:pPr marL="742950" lvl="1" indent="-285750">
-              <a:buFont typeface="Arial" panose="020B0604020202020204" pitchFamily="34" charset="0"/>
-              <a:buChar char="•"/>
-            </a:pPr>
-            <a:r>
-              <a:rPr lang="ko-KR" altLang="en-US" sz="1600" dirty="0" smtClean="0">
-                <a:latin typeface="나눔바른고딕" panose="020B0603020101020101" pitchFamily="34" charset="-127"/>
-                <a:ea typeface="나눔바른고딕" panose="020B0603020101020101" pitchFamily="34" charset="-127"/>
-              </a:rPr>
-              <a:t>장애물을 향해 </a:t>
-            </a:r>
-            <a:r>
-              <a:rPr lang="ko-KR" altLang="en-US" sz="1600" dirty="0" err="1" smtClean="0">
-                <a:latin typeface="나눔바른고딕" panose="020B0603020101020101" pitchFamily="34" charset="-127"/>
-                <a:ea typeface="나눔바른고딕" panose="020B0603020101020101" pitchFamily="34" charset="-127"/>
-              </a:rPr>
-              <a:t>레이캐스트로</a:t>
-            </a:r>
-            <a:r>
-              <a:rPr lang="ko-KR" altLang="en-US" sz="1600" dirty="0" smtClean="0">
-                <a:latin typeface="나눔바른고딕" panose="020B0603020101020101" pitchFamily="34" charset="-127"/>
-                <a:ea typeface="나눔바른고딕" panose="020B0603020101020101" pitchFamily="34" charset="-127"/>
-              </a:rPr>
-              <a:t> 환경 탐색</a:t>
-            </a:r>
-            <a:endParaRPr lang="en-US" altLang="ko-KR" sz="1600" dirty="0" smtClean="0">
-              <a:latin typeface="나눔바른고딕" panose="020B0603020101020101" pitchFamily="34" charset="-127"/>
-              <a:ea typeface="나눔바른고딕" panose="020B0603020101020101" pitchFamily="34" charset="-127"/>
-            </a:endParaRPr>
-          </a:p>
-        </p:txBody>
-      </p:sp>
-      <p:sp>
-        <p:nvSpPr>
-          <p:cNvPr id="4" name="TextBox 3">
-            <a:extLst>
-              <a:ext uri="{FF2B5EF4-FFF2-40B4-BE49-F238E27FC236}">
-                <a16:creationId xmlns:a16="http://schemas.microsoft.com/office/drawing/2014/main" xmlns="" id="{75DAA775-31E2-50BB-2BF3-4EF90C8083FC}"/>
-              </a:ext>
-            </a:extLst>
-          </p:cNvPr>
-          <p:cNvSpPr txBox="1"/>
-          <p:nvPr/>
-        </p:nvSpPr>
-        <p:spPr>
-          <a:xfrm>
-            <a:off x="302451" y="3654452"/>
-            <a:ext cx="8118068" cy="830997"/>
-          </a:xfrm>
-          <a:prstGeom prst="rect">
-            <a:avLst/>
-          </a:prstGeom>
-          <a:noFill/>
-        </p:spPr>
-        <p:txBody>
-          <a:bodyPr wrap="square" rtlCol="0">
-            <a:spAutoFit/>
-          </a:bodyPr>
-          <a:lstStyle/>
-          <a:p>
-            <a:pPr marL="285750" indent="-285750">
-              <a:buFont typeface="Arial" panose="020B0604020202020204" pitchFamily="34" charset="0"/>
-              <a:buChar char="•"/>
-            </a:pPr>
-            <a:r>
-              <a:rPr lang="ko-KR" altLang="en-US" sz="1600" dirty="0" smtClean="0">
-                <a:latin typeface="나눔바른고딕" panose="020B0603020101020101" pitchFamily="34" charset="-127"/>
-                <a:ea typeface="나눔바른고딕" panose="020B0603020101020101" pitchFamily="34" charset="-127"/>
-              </a:rPr>
-              <a:t>객체 식별 </a:t>
-            </a:r>
-            <a:r>
-              <a:rPr lang="en-US" altLang="ko-KR" sz="1600" dirty="0" smtClean="0">
-                <a:latin typeface="나눔바른고딕" panose="020B0603020101020101" pitchFamily="34" charset="-127"/>
-                <a:ea typeface="나눔바른고딕" panose="020B0603020101020101" pitchFamily="34" charset="-127"/>
-              </a:rPr>
-              <a:t>:</a:t>
-            </a:r>
-            <a:r>
-              <a:rPr lang="ko-KR" altLang="en-US" sz="1600" dirty="0" smtClean="0">
-                <a:latin typeface="나눔바른고딕" panose="020B0603020101020101" pitchFamily="34" charset="-127"/>
-                <a:ea typeface="나눔바른고딕" panose="020B0603020101020101" pitchFamily="34" charset="-127"/>
-              </a:rPr>
-              <a:t> 태그</a:t>
-            </a:r>
-            <a:endParaRPr lang="en-US" altLang="ko-KR" sz="1600" dirty="0" smtClean="0">
-              <a:latin typeface="나눔바른고딕" panose="020B0603020101020101" pitchFamily="34" charset="-127"/>
-              <a:ea typeface="나눔바른고딕" panose="020B0603020101020101" pitchFamily="34" charset="-127"/>
-            </a:endParaRPr>
-          </a:p>
-          <a:p>
-            <a:pPr marL="742950" lvl="1" indent="-285750">
-              <a:buFont typeface="Arial" panose="020B0604020202020204" pitchFamily="34" charset="0"/>
-              <a:buChar char="•"/>
-            </a:pPr>
-            <a:r>
-              <a:rPr lang="ko-KR" altLang="en-US" sz="1600" dirty="0" smtClean="0">
-                <a:latin typeface="나눔바른고딕" panose="020B0603020101020101" pitchFamily="34" charset="-127"/>
-                <a:ea typeface="나눔바른고딕" panose="020B0603020101020101" pitchFamily="34" charset="-127"/>
-              </a:rPr>
-              <a:t>부여한 태그를 기반으로 캐릭터의 행위를 결정</a:t>
-            </a:r>
-            <a:endParaRPr lang="en-US" altLang="ko-KR" sz="1600" dirty="0" smtClean="0">
-              <a:latin typeface="나눔바른고딕" panose="020B0603020101020101" pitchFamily="34" charset="-127"/>
-              <a:ea typeface="나눔바른고딕" panose="020B0603020101020101" pitchFamily="34" charset="-127"/>
-            </a:endParaRPr>
-          </a:p>
-          <a:p>
-            <a:pPr marL="742950" lvl="1" indent="-285750">
-              <a:buFont typeface="Arial" panose="020B0604020202020204" pitchFamily="34" charset="0"/>
-              <a:buChar char="•"/>
-            </a:pPr>
-            <a:r>
-              <a:rPr lang="ko-KR" altLang="en-US" sz="1600" dirty="0" smtClean="0">
-                <a:latin typeface="나눔바른고딕" panose="020B0603020101020101" pitchFamily="34" charset="-127"/>
-                <a:ea typeface="나눔바른고딕" panose="020B0603020101020101" pitchFamily="34" charset="-127"/>
-              </a:rPr>
-              <a:t>객체 종류 </a:t>
-            </a:r>
-            <a:r>
-              <a:rPr lang="en-US" altLang="ko-KR" sz="1600" dirty="0" smtClean="0">
-                <a:latin typeface="나눔바른고딕" panose="020B0603020101020101" pitchFamily="34" charset="-127"/>
-                <a:ea typeface="나눔바른고딕" panose="020B0603020101020101" pitchFamily="34" charset="-127"/>
-              </a:rPr>
-              <a:t>– </a:t>
-            </a:r>
-            <a:r>
-              <a:rPr lang="ko-KR" altLang="en-US" sz="1600" dirty="0" smtClean="0">
-                <a:latin typeface="나눔바른고딕" panose="020B0603020101020101" pitchFamily="34" charset="-127"/>
-                <a:ea typeface="나눔바른고딕" panose="020B0603020101020101" pitchFamily="34" charset="-127"/>
-              </a:rPr>
-              <a:t>행동 양식 </a:t>
-            </a:r>
-            <a:r>
-              <a:rPr lang="en-US" altLang="ko-KR" sz="1600" dirty="0" smtClean="0">
-                <a:latin typeface="나눔바른고딕" panose="020B0603020101020101" pitchFamily="34" charset="-127"/>
-                <a:ea typeface="나눔바른고딕" panose="020B0603020101020101" pitchFamily="34" charset="-127"/>
-              </a:rPr>
-              <a:t>– </a:t>
-            </a:r>
-            <a:r>
-              <a:rPr lang="ko-KR" altLang="en-US" sz="1600" dirty="0" smtClean="0">
-                <a:latin typeface="나눔바른고딕" panose="020B0603020101020101" pitchFamily="34" charset="-127"/>
-                <a:ea typeface="나눔바른고딕" panose="020B0603020101020101" pitchFamily="34" charset="-127"/>
-              </a:rPr>
-              <a:t>높낮이 유형</a:t>
-            </a:r>
-            <a:endParaRPr lang="en-US" altLang="ko-KR" sz="1600" dirty="0" smtClean="0">
-              <a:latin typeface="나눔바른고딕" panose="020B0603020101020101" pitchFamily="34" charset="-127"/>
-              <a:ea typeface="나눔바른고딕" panose="020B0603020101020101" pitchFamily="34" charset="-127"/>
-            </a:endParaRPr>
-          </a:p>
-        </p:txBody>
-      </p:sp>
-    </p:spTree>
-    <p:extLst>
-      <p:ext uri="{BB962C8B-B14F-4D97-AF65-F5344CB8AC3E}">
-        <p14:creationId xmlns:p14="http://schemas.microsoft.com/office/powerpoint/2010/main" val="1245471679"/>
-      </p:ext>
-    </p:extLst>
-  </p:cSld>
-  <p:clrMapOvr>
-    <a:masterClrMapping/>
-  </p:clrMapOvr>
-</p:sld>
-</file>
-
-<file path=ppt/slides/slide4.xml><?xml version="1.0" encoding="utf-8"?>
-<p:sld xmlns:a="http://schemas.openxmlformats.org/drawingml/2006/main" xmlns:r="http://schemas.openxmlformats.org/officeDocument/2006/relationships" xmlns:p="http://schemas.openxmlformats.org/presentationml/2006/main">
-  <p:cSld>
-    <p:spTree>
-      <p:nvGrpSpPr>
-        <p:cNvPr id="1" name="">
-          <a:extLst>
-            <a:ext uri="{FF2B5EF4-FFF2-40B4-BE49-F238E27FC236}">
-              <a16:creationId xmlns:a16="http://schemas.microsoft.com/office/drawing/2014/main" xmlns="" id="{960F3801-1345-73B1-BC4D-455683B38EDD}"/>
-            </a:ext>
-          </a:extLst>
-        </p:cNvPr>
-        <p:cNvGrpSpPr/>
-        <p:nvPr/>
-      </p:nvGrpSpPr>
-      <p:grpSpPr>
-        <a:xfrm>
-          <a:off x="0" y="0"/>
-          <a:ext cx="0" cy="0"/>
-          <a:chOff x="0" y="0"/>
-          <a:chExt cx="0" cy="0"/>
-        </a:xfrm>
-      </p:grpSpPr>
-      <p:sp>
-        <p:nvSpPr>
-          <p:cNvPr id="8" name="TextBox 7">
-            <a:extLst>
-              <a:ext uri="{FF2B5EF4-FFF2-40B4-BE49-F238E27FC236}">
-                <a16:creationId xmlns:a16="http://schemas.microsoft.com/office/drawing/2014/main" xmlns="" id="{953A2C19-7BB6-4B8F-B088-53F2041DCA07}"/>
-              </a:ext>
-            </a:extLst>
-          </p:cNvPr>
-          <p:cNvSpPr txBox="1"/>
-          <p:nvPr/>
-        </p:nvSpPr>
-        <p:spPr>
-          <a:xfrm>
-            <a:off x="302451" y="315453"/>
-            <a:ext cx="4944140" cy="369332"/>
-          </a:xfrm>
-          <a:prstGeom prst="rect">
-            <a:avLst/>
-          </a:prstGeom>
-          <a:noFill/>
-        </p:spPr>
-        <p:txBody>
-          <a:bodyPr wrap="square" rtlCol="0">
-            <a:spAutoFit/>
-          </a:bodyPr>
-          <a:lstStyle/>
-          <a:p>
-            <a:r>
-              <a:rPr lang="ko-KR" altLang="en-US" dirty="0">
-                <a:latin typeface="나눔바른고딕" panose="020B0603020101020101" pitchFamily="34" charset="-127"/>
-                <a:ea typeface="나눔바른고딕" panose="020B0603020101020101" pitchFamily="34" charset="-127"/>
-              </a:rPr>
-              <a:t>이번 주 작업 내역</a:t>
-            </a:r>
-            <a:endParaRPr lang="en-US" altLang="ko-KR" dirty="0">
-              <a:latin typeface="나눔바른고딕" panose="020B0603020101020101" pitchFamily="34" charset="-127"/>
-              <a:ea typeface="나눔바른고딕" panose="020B0603020101020101" pitchFamily="34" charset="-127"/>
-            </a:endParaRPr>
-          </a:p>
-        </p:txBody>
-      </p:sp>
-      <p:sp>
-        <p:nvSpPr>
-          <p:cNvPr id="10" name="TextBox 9">
-            <a:extLst>
-              <a:ext uri="{FF2B5EF4-FFF2-40B4-BE49-F238E27FC236}">
-                <a16:creationId xmlns:a16="http://schemas.microsoft.com/office/drawing/2014/main" xmlns="" id="{1C05991D-1DDC-77AC-5E76-B990175DF25D}"/>
-              </a:ext>
-            </a:extLst>
-          </p:cNvPr>
-          <p:cNvSpPr txBox="1"/>
-          <p:nvPr/>
-        </p:nvSpPr>
-        <p:spPr>
-          <a:xfrm>
-            <a:off x="302450" y="758852"/>
-            <a:ext cx="10298209" cy="584775"/>
-          </a:xfrm>
-          <a:prstGeom prst="rect">
-            <a:avLst/>
-          </a:prstGeom>
-          <a:noFill/>
-        </p:spPr>
-        <p:txBody>
-          <a:bodyPr wrap="square" rtlCol="0">
-            <a:spAutoFit/>
-          </a:bodyPr>
-          <a:lstStyle/>
-          <a:p>
-            <a:pPr marL="285750" indent="-285750">
-              <a:buFont typeface="Arial" panose="020B0604020202020204" pitchFamily="34" charset="0"/>
-              <a:buChar char="•"/>
-            </a:pPr>
-            <a:r>
-              <a:rPr lang="ko-KR" altLang="en-US" sz="1600" dirty="0">
-                <a:latin typeface="나눔바른고딕" panose="020B0603020101020101" pitchFamily="34" charset="-127"/>
-                <a:ea typeface="나눔바른고딕" panose="020B0603020101020101" pitchFamily="34" charset="-127"/>
-              </a:rPr>
-              <a:t>애니메이션 재생 결과</a:t>
-            </a:r>
-            <a:endParaRPr lang="en-US" altLang="ko-KR" sz="1600" dirty="0">
-              <a:latin typeface="나눔바른고딕" panose="020B0603020101020101" pitchFamily="34" charset="-127"/>
-              <a:ea typeface="나눔바른고딕" panose="020B0603020101020101" pitchFamily="34" charset="-127"/>
-            </a:endParaRPr>
-          </a:p>
-          <a:p>
-            <a:pPr marL="742950" lvl="1" indent="-285750">
-              <a:buFont typeface="Arial" panose="020B0604020202020204" pitchFamily="34" charset="0"/>
-              <a:buChar char="•"/>
-            </a:pPr>
-            <a:r>
-              <a:rPr lang="ko-KR" altLang="en-US" sz="1600" dirty="0">
-                <a:latin typeface="나눔바른고딕" panose="020B0603020101020101" pitchFamily="34" charset="-127"/>
-                <a:ea typeface="나눔바른고딕" panose="020B0603020101020101" pitchFamily="34" charset="-127"/>
-              </a:rPr>
-              <a:t>평지 </a:t>
-            </a:r>
-            <a:r>
-              <a:rPr lang="ko-KR" altLang="en-US" sz="1600" dirty="0" err="1">
-                <a:latin typeface="나눔바른고딕" panose="020B0603020101020101" pitchFamily="34" charset="-127"/>
-                <a:ea typeface="나눔바른고딕" panose="020B0603020101020101" pitchFamily="34" charset="-127"/>
-              </a:rPr>
-              <a:t>로코모션</a:t>
-            </a:r>
-            <a:r>
-              <a:rPr lang="ko-KR" altLang="en-US" sz="1600" dirty="0">
-                <a:latin typeface="나눔바른고딕" panose="020B0603020101020101" pitchFamily="34" charset="-127"/>
-                <a:ea typeface="나눔바른고딕" panose="020B0603020101020101" pitchFamily="34" charset="-127"/>
-              </a:rPr>
-              <a:t> </a:t>
-            </a:r>
-            <a:r>
-              <a:rPr lang="en-US" altLang="ko-KR" sz="1600" dirty="0">
-                <a:latin typeface="나눔바른고딕" panose="020B0603020101020101" pitchFamily="34" charset="-127"/>
-                <a:ea typeface="나눔바른고딕" panose="020B0603020101020101" pitchFamily="34" charset="-127"/>
-              </a:rPr>
-              <a:t>-&gt; </a:t>
-            </a:r>
-            <a:r>
-              <a:rPr lang="en-US" altLang="ko-KR" sz="1600" dirty="0" err="1">
-                <a:latin typeface="나눔바른고딕" panose="020B0603020101020101" pitchFamily="34" charset="-127"/>
-                <a:ea typeface="나눔바른고딕" panose="020B0603020101020101" pitchFamily="34" charset="-127"/>
-              </a:rPr>
-              <a:t>Lshift</a:t>
-            </a:r>
-            <a:r>
-              <a:rPr lang="en-US" altLang="ko-KR" sz="1600" dirty="0">
-                <a:latin typeface="나눔바른고딕" panose="020B0603020101020101" pitchFamily="34" charset="-127"/>
-                <a:ea typeface="나눔바른고딕" panose="020B0603020101020101" pitchFamily="34" charset="-127"/>
-              </a:rPr>
-              <a:t> </a:t>
-            </a:r>
-            <a:r>
-              <a:rPr lang="ko-KR" altLang="en-US" sz="1600" dirty="0" err="1">
-                <a:latin typeface="나눔바른고딕" panose="020B0603020101020101" pitchFamily="34" charset="-127"/>
-                <a:ea typeface="나눔바른고딕" panose="020B0603020101020101" pitchFamily="34" charset="-127"/>
-              </a:rPr>
-              <a:t>레이캐스트</a:t>
-            </a:r>
-            <a:r>
-              <a:rPr lang="ko-KR" altLang="en-US" sz="1600" dirty="0">
-                <a:latin typeface="나눔바른고딕" panose="020B0603020101020101" pitchFamily="34" charset="-127"/>
-                <a:ea typeface="나눔바른고딕" panose="020B0603020101020101" pitchFamily="34" charset="-127"/>
-              </a:rPr>
-              <a:t> 장애물 식별 </a:t>
-            </a:r>
-            <a:r>
-              <a:rPr lang="en-US" altLang="ko-KR" sz="1600" dirty="0">
-                <a:latin typeface="나눔바른고딕" panose="020B0603020101020101" pitchFamily="34" charset="-127"/>
-                <a:ea typeface="나눔바른고딕" panose="020B0603020101020101" pitchFamily="34" charset="-127"/>
-              </a:rPr>
-              <a:t>-&gt; </a:t>
-            </a:r>
-            <a:r>
-              <a:rPr lang="ko-KR" altLang="en-US" sz="1600" dirty="0">
-                <a:latin typeface="나눔바른고딕" panose="020B0603020101020101" pitchFamily="34" charset="-127"/>
-                <a:ea typeface="나눔바른고딕" panose="020B0603020101020101" pitchFamily="34" charset="-127"/>
-              </a:rPr>
-              <a:t>담 넘기 </a:t>
-            </a:r>
-            <a:r>
-              <a:rPr lang="en-US" altLang="ko-KR" sz="1600" dirty="0">
-                <a:latin typeface="나눔바른고딕" panose="020B0603020101020101" pitchFamily="34" charset="-127"/>
-                <a:ea typeface="나눔바른고딕" panose="020B0603020101020101" pitchFamily="34" charset="-127"/>
-              </a:rPr>
-              <a:t>-&gt; </a:t>
-            </a:r>
-            <a:r>
-              <a:rPr lang="ko-KR" altLang="en-US" sz="1600" dirty="0">
-                <a:latin typeface="나눔바른고딕" panose="020B0603020101020101" pitchFamily="34" charset="-127"/>
-                <a:ea typeface="나눔바른고딕" panose="020B0603020101020101" pitchFamily="34" charset="-127"/>
-              </a:rPr>
-              <a:t>평지 </a:t>
-            </a:r>
-            <a:r>
-              <a:rPr lang="ko-KR" altLang="en-US" sz="1600" dirty="0" err="1">
-                <a:latin typeface="나눔바른고딕" panose="020B0603020101020101" pitchFamily="34" charset="-127"/>
-                <a:ea typeface="나눔바른고딕" panose="020B0603020101020101" pitchFamily="34" charset="-127"/>
-              </a:rPr>
-              <a:t>로코모션</a:t>
-            </a:r>
-            <a:endParaRPr lang="en-US" altLang="ko-KR" sz="1600" dirty="0">
-              <a:latin typeface="나눔바른고딕" panose="020B0603020101020101" pitchFamily="34" charset="-127"/>
-              <a:ea typeface="나눔바른고딕" panose="020B0603020101020101" pitchFamily="34" charset="-127"/>
-            </a:endParaRPr>
-          </a:p>
-        </p:txBody>
-      </p:sp>
-    </p:spTree>
-    <p:extLst>
-      <p:ext uri="{BB962C8B-B14F-4D97-AF65-F5344CB8AC3E}">
-        <p14:creationId xmlns:p14="http://schemas.microsoft.com/office/powerpoint/2010/main" val="756431288"/>
-      </p:ext>
-    </p:extLst>
-  </p:cSld>
-  <p:clrMapOvr>
-    <a:masterClrMapping/>
-  </p:clrMapOvr>
-</p:sld>
-</file>
-
-<file path=ppt/slides/slide5.xml><?xml version="1.0" encoding="utf-8"?>
 <p:sld xmlns:a="http://schemas.openxmlformats.org/drawingml/2006/main" xmlns:r="http://schemas.openxmlformats.org/officeDocument/2006/relationships" xmlns:p="http://schemas.openxmlformats.org/presentationml/2006/main">
   <p:cSld>
     <p:spTree>
@@ -4983,10 +4437,960 @@
       </p:grpSpPr>
       <p:sp>
         <p:nvSpPr>
+          <p:cNvPr id="8" name="TextBox 7">
+            <a:extLst>
+              <a:ext uri="{FF2B5EF4-FFF2-40B4-BE49-F238E27FC236}">
+                <a16:creationId xmlns="" xmlns:a16="http://schemas.microsoft.com/office/drawing/2014/main" id="{701093AF-254C-83D7-8032-465A5FB513FB}"/>
+              </a:ext>
+            </a:extLst>
+          </p:cNvPr>
+          <p:cNvSpPr txBox="1"/>
+          <p:nvPr/>
+        </p:nvSpPr>
+        <p:spPr>
+          <a:xfrm>
+            <a:off x="302451" y="315453"/>
+            <a:ext cx="4944140" cy="369332"/>
+          </a:xfrm>
+          <a:prstGeom prst="rect">
+            <a:avLst/>
+          </a:prstGeom>
+          <a:noFill/>
+        </p:spPr>
+        <p:txBody>
+          <a:bodyPr wrap="square" rtlCol="0">
+            <a:spAutoFit/>
+          </a:bodyPr>
+          <a:lstStyle/>
+          <a:p>
+            <a:r>
+              <a:rPr lang="ko-KR" altLang="en-US" dirty="0">
+                <a:latin typeface="나눔바른고딕" panose="020B0603020101020101" pitchFamily="34" charset="-127"/>
+                <a:ea typeface="나눔바른고딕" panose="020B0603020101020101" pitchFamily="34" charset="-127"/>
+              </a:rPr>
+              <a:t>이번 주 작업 내역</a:t>
+            </a:r>
+            <a:endParaRPr lang="en-US" altLang="ko-KR" dirty="0">
+              <a:latin typeface="나눔바른고딕" panose="020B0603020101020101" pitchFamily="34" charset="-127"/>
+              <a:ea typeface="나눔바른고딕" panose="020B0603020101020101" pitchFamily="34" charset="-127"/>
+            </a:endParaRPr>
+          </a:p>
+        </p:txBody>
+      </p:sp>
+      <p:sp>
+        <p:nvSpPr>
+          <p:cNvPr id="12" name="TextBox 11">
+            <a:extLst>
+              <a:ext uri="{FF2B5EF4-FFF2-40B4-BE49-F238E27FC236}">
+                <a16:creationId xmlns="" xmlns:a16="http://schemas.microsoft.com/office/drawing/2014/main" id="{8E37654D-B1C1-B17B-2A32-BB0F324B7AC3}"/>
+              </a:ext>
+            </a:extLst>
+          </p:cNvPr>
+          <p:cNvSpPr txBox="1"/>
+          <p:nvPr/>
+        </p:nvSpPr>
+        <p:spPr>
+          <a:xfrm>
+            <a:off x="302451" y="684785"/>
+            <a:ext cx="8118068" cy="1323439"/>
+          </a:xfrm>
+          <a:prstGeom prst="rect">
+            <a:avLst/>
+          </a:prstGeom>
+          <a:noFill/>
+        </p:spPr>
+        <p:txBody>
+          <a:bodyPr wrap="square" rtlCol="0">
+            <a:spAutoFit/>
+          </a:bodyPr>
+          <a:lstStyle/>
+          <a:p>
+            <a:r>
+              <a:rPr lang="ko-KR" altLang="en-US" sz="1600" dirty="0" err="1" smtClean="0">
+                <a:latin typeface="나눔바른고딕" panose="020B0603020101020101" pitchFamily="34" charset="-127"/>
+                <a:ea typeface="나눔바른고딕" panose="020B0603020101020101" pitchFamily="34" charset="-127"/>
+              </a:rPr>
+              <a:t>애니메이터</a:t>
+            </a:r>
+            <a:r>
+              <a:rPr lang="ko-KR" altLang="en-US" sz="1600" dirty="0" smtClean="0">
+                <a:latin typeface="나눔바른고딕" panose="020B0603020101020101" pitchFamily="34" charset="-127"/>
+                <a:ea typeface="나눔바른고딕" panose="020B0603020101020101" pitchFamily="34" charset="-127"/>
+              </a:rPr>
+              <a:t> </a:t>
+            </a:r>
+            <a:r>
+              <a:rPr lang="ko-KR" altLang="en-US" sz="1600" dirty="0" err="1" smtClean="0">
+                <a:latin typeface="나눔바른고딕" panose="020B0603020101020101" pitchFamily="34" charset="-127"/>
+                <a:ea typeface="나눔바른고딕" panose="020B0603020101020101" pitchFamily="34" charset="-127"/>
+              </a:rPr>
+              <a:t>레이어</a:t>
+            </a:r>
+            <a:endParaRPr lang="en-US" altLang="ko-KR" sz="1600" dirty="0" smtClean="0">
+              <a:latin typeface="나눔바른고딕" panose="020B0603020101020101" pitchFamily="34" charset="-127"/>
+              <a:ea typeface="나눔바른고딕" panose="020B0603020101020101" pitchFamily="34" charset="-127"/>
+            </a:endParaRPr>
+          </a:p>
+          <a:p>
+            <a:pPr marL="285750" indent="-285750">
+              <a:buFont typeface="Arial" panose="020B0604020202020204" pitchFamily="34" charset="0"/>
+              <a:buChar char="•"/>
+            </a:pPr>
+            <a:r>
+              <a:rPr lang="en-US" altLang="ko-KR" sz="1600" dirty="0" smtClean="0">
+                <a:latin typeface="나눔바른고딕" panose="020B0603020101020101" pitchFamily="34" charset="-127"/>
+                <a:ea typeface="나눔바른고딕" panose="020B0603020101020101" pitchFamily="34" charset="-127"/>
+              </a:rPr>
+              <a:t>Base </a:t>
+            </a:r>
+            <a:r>
+              <a:rPr lang="en-US" altLang="ko-KR" sz="1600" dirty="0" smtClean="0">
+                <a:latin typeface="나눔바른고딕" panose="020B0603020101020101" pitchFamily="34" charset="-127"/>
+                <a:ea typeface="나눔바른고딕" panose="020B0603020101020101" pitchFamily="34" charset="-127"/>
+              </a:rPr>
+              <a:t>Layer </a:t>
+            </a:r>
+            <a:r>
+              <a:rPr lang="en-US" altLang="ko-KR" sz="1600" dirty="0" smtClean="0">
+                <a:latin typeface="나눔바른고딕" panose="020B0603020101020101" pitchFamily="34" charset="-127"/>
+                <a:ea typeface="나눔바른고딕" panose="020B0603020101020101" pitchFamily="34" charset="-127"/>
+              </a:rPr>
+              <a:t>: </a:t>
+            </a:r>
+            <a:r>
+              <a:rPr lang="ko-KR" altLang="en-US" sz="1600" dirty="0">
+                <a:latin typeface="나눔바른고딕" panose="020B0603020101020101" pitchFamily="34" charset="-127"/>
+                <a:ea typeface="나눔바른고딕" panose="020B0603020101020101" pitchFamily="34" charset="-127"/>
+              </a:rPr>
+              <a:t>지속적인 재생 </a:t>
+            </a:r>
+            <a:r>
+              <a:rPr lang="ko-KR" altLang="en-US" sz="1600" dirty="0" smtClean="0">
+                <a:latin typeface="나눔바른고딕" panose="020B0603020101020101" pitchFamily="34" charset="-127"/>
+                <a:ea typeface="나눔바른고딕" panose="020B0603020101020101" pitchFamily="34" charset="-127"/>
+              </a:rPr>
+              <a:t>필요한 경우</a:t>
+            </a:r>
+            <a:endParaRPr lang="en-US" altLang="ko-KR" sz="1600" dirty="0" smtClean="0">
+              <a:latin typeface="나눔바른고딕" panose="020B0603020101020101" pitchFamily="34" charset="-127"/>
+              <a:ea typeface="나눔바른고딕" panose="020B0603020101020101" pitchFamily="34" charset="-127"/>
+            </a:endParaRPr>
+          </a:p>
+          <a:p>
+            <a:pPr marL="742950" lvl="1" indent="-285750">
+              <a:buFont typeface="Arial" panose="020B0604020202020204" pitchFamily="34" charset="0"/>
+              <a:buChar char="•"/>
+            </a:pPr>
+            <a:r>
+              <a:rPr lang="ko-KR" altLang="en-US" sz="1600" dirty="0" smtClean="0">
+                <a:latin typeface="나눔바른고딕" panose="020B0603020101020101" pitchFamily="34" charset="-127"/>
+                <a:ea typeface="나눔바른고딕" panose="020B0603020101020101" pitchFamily="34" charset="-127"/>
+              </a:rPr>
+              <a:t>평지</a:t>
+            </a:r>
+            <a:r>
+              <a:rPr lang="en-US" altLang="ko-KR" sz="1600" dirty="0" smtClean="0">
+                <a:latin typeface="나눔바른고딕" panose="020B0603020101020101" pitchFamily="34" charset="-127"/>
+                <a:ea typeface="나눔바른고딕" panose="020B0603020101020101" pitchFamily="34" charset="-127"/>
+              </a:rPr>
+              <a:t>, </a:t>
+            </a:r>
+            <a:r>
+              <a:rPr lang="ko-KR" altLang="en-US" sz="1600" dirty="0" smtClean="0">
+                <a:latin typeface="나눔바른고딕" panose="020B0603020101020101" pitchFamily="34" charset="-127"/>
+                <a:ea typeface="나눔바른고딕" panose="020B0603020101020101" pitchFamily="34" charset="-127"/>
+              </a:rPr>
+              <a:t>벽면 매달린 상태</a:t>
+            </a:r>
+            <a:r>
+              <a:rPr lang="en-US" altLang="ko-KR" sz="1600" dirty="0" smtClean="0">
+                <a:latin typeface="나눔바른고딕" panose="020B0603020101020101" pitchFamily="34" charset="-127"/>
+                <a:ea typeface="나눔바른고딕" panose="020B0603020101020101" pitchFamily="34" charset="-127"/>
+              </a:rPr>
+              <a:t>, </a:t>
+            </a:r>
+            <a:r>
+              <a:rPr lang="ko-KR" altLang="en-US" sz="1600" dirty="0" smtClean="0">
+                <a:latin typeface="나눔바른고딕" panose="020B0603020101020101" pitchFamily="34" charset="-127"/>
+                <a:ea typeface="나눔바른고딕" panose="020B0603020101020101" pitchFamily="34" charset="-127"/>
+              </a:rPr>
+              <a:t>벽 오르기 등 </a:t>
+            </a:r>
+            <a:r>
+              <a:rPr lang="ko-KR" altLang="en-US" sz="1600" dirty="0" err="1" smtClean="0">
+                <a:latin typeface="나눔바른고딕" panose="020B0603020101020101" pitchFamily="34" charset="-127"/>
+                <a:ea typeface="나눔바른고딕" panose="020B0603020101020101" pitchFamily="34" charset="-127"/>
+              </a:rPr>
+              <a:t>상태머신</a:t>
+            </a:r>
+            <a:r>
+              <a:rPr lang="ko-KR" altLang="en-US" sz="1600" dirty="0" smtClean="0">
+                <a:latin typeface="나눔바른고딕" panose="020B0603020101020101" pitchFamily="34" charset="-127"/>
+                <a:ea typeface="나눔바른고딕" panose="020B0603020101020101" pitchFamily="34" charset="-127"/>
+              </a:rPr>
+              <a:t> 형태로 구현</a:t>
+            </a:r>
+            <a:endParaRPr lang="en-US" altLang="ko-KR" sz="1600" dirty="0" smtClean="0">
+              <a:latin typeface="나눔바른고딕" panose="020B0603020101020101" pitchFamily="34" charset="-127"/>
+              <a:ea typeface="나눔바른고딕" panose="020B0603020101020101" pitchFamily="34" charset="-127"/>
+            </a:endParaRPr>
+          </a:p>
+          <a:p>
+            <a:pPr marL="285750" indent="-285750">
+              <a:buFont typeface="Arial" panose="020B0604020202020204" pitchFamily="34" charset="0"/>
+              <a:buChar char="•"/>
+            </a:pPr>
+            <a:r>
+              <a:rPr lang="en-US" altLang="ko-KR" sz="1600" dirty="0">
+                <a:latin typeface="나눔바른고딕" panose="020B0603020101020101" pitchFamily="34" charset="-127"/>
+                <a:ea typeface="나눔바른고딕" panose="020B0603020101020101" pitchFamily="34" charset="-127"/>
+              </a:rPr>
+              <a:t>Override Layer </a:t>
+            </a:r>
+            <a:r>
+              <a:rPr lang="en-US" altLang="ko-KR" sz="1600" dirty="0" smtClean="0">
+                <a:latin typeface="나눔바른고딕" panose="020B0603020101020101" pitchFamily="34" charset="-127"/>
+                <a:ea typeface="나눔바른고딕" panose="020B0603020101020101" pitchFamily="34" charset="-127"/>
+              </a:rPr>
+              <a:t>: </a:t>
+            </a:r>
+            <a:r>
+              <a:rPr lang="ko-KR" altLang="en-US" sz="1600" dirty="0" smtClean="0">
+                <a:latin typeface="나눔바른고딕" panose="020B0603020101020101" pitchFamily="34" charset="-127"/>
+                <a:ea typeface="나눔바른고딕" panose="020B0603020101020101" pitchFamily="34" charset="-127"/>
+              </a:rPr>
+              <a:t>필요한 시점에</a:t>
+            </a:r>
+            <a:r>
+              <a:rPr lang="en-US" altLang="ko-KR" sz="1600" dirty="0" smtClean="0">
+                <a:latin typeface="나눔바른고딕" panose="020B0603020101020101" pitchFamily="34" charset="-127"/>
+                <a:ea typeface="나눔바른고딕" panose="020B0603020101020101" pitchFamily="34" charset="-127"/>
+              </a:rPr>
+              <a:t> </a:t>
+            </a:r>
+            <a:r>
+              <a:rPr lang="ko-KR" altLang="en-US" sz="1600" dirty="0" smtClean="0">
+                <a:latin typeface="나눔바른고딕" panose="020B0603020101020101" pitchFamily="34" charset="-127"/>
+                <a:ea typeface="나눔바른고딕" panose="020B0603020101020101" pitchFamily="34" charset="-127"/>
+              </a:rPr>
+              <a:t>한 </a:t>
+            </a:r>
+            <a:r>
+              <a:rPr lang="ko-KR" altLang="en-US" sz="1600" dirty="0" smtClean="0">
+                <a:latin typeface="나눔바른고딕" panose="020B0603020101020101" pitchFamily="34" charset="-127"/>
+                <a:ea typeface="나눔바른고딕" panose="020B0603020101020101" pitchFamily="34" charset="-127"/>
+              </a:rPr>
+              <a:t>차례 재생 </a:t>
+            </a:r>
+            <a:r>
+              <a:rPr lang="ko-KR" altLang="en-US" sz="1600" dirty="0" smtClean="0">
+                <a:latin typeface="나눔바른고딕" panose="020B0603020101020101" pitchFamily="34" charset="-127"/>
+                <a:ea typeface="나눔바른고딕" panose="020B0603020101020101" pitchFamily="34" charset="-127"/>
+              </a:rPr>
+              <a:t>필요</a:t>
+            </a:r>
+            <a:endParaRPr lang="en-US" altLang="ko-KR" sz="1600" dirty="0" smtClean="0">
+              <a:latin typeface="나눔바른고딕" panose="020B0603020101020101" pitchFamily="34" charset="-127"/>
+              <a:ea typeface="나눔바른고딕" panose="020B0603020101020101" pitchFamily="34" charset="-127"/>
+            </a:endParaRPr>
+          </a:p>
+          <a:p>
+            <a:pPr marL="742950" lvl="1" indent="-285750">
+              <a:buFont typeface="Arial" panose="020B0604020202020204" pitchFamily="34" charset="0"/>
+              <a:buChar char="•"/>
+            </a:pPr>
+            <a:r>
+              <a:rPr lang="ko-KR" altLang="en-US" sz="1600" dirty="0" smtClean="0">
+                <a:latin typeface="나눔바른고딕" panose="020B0603020101020101" pitchFamily="34" charset="-127"/>
+                <a:ea typeface="나눔바른고딕" panose="020B0603020101020101" pitchFamily="34" charset="-127"/>
+              </a:rPr>
+              <a:t>점프</a:t>
+            </a:r>
+            <a:r>
+              <a:rPr lang="en-US" altLang="ko-KR" sz="1600" dirty="0" smtClean="0">
+                <a:latin typeface="나눔바른고딕" panose="020B0603020101020101" pitchFamily="34" charset="-127"/>
+                <a:ea typeface="나눔바른고딕" panose="020B0603020101020101" pitchFamily="34" charset="-127"/>
+              </a:rPr>
+              <a:t>, </a:t>
+            </a:r>
+            <a:r>
+              <a:rPr lang="ko-KR" altLang="en-US" sz="1600" dirty="0" smtClean="0">
+                <a:latin typeface="나눔바른고딕" panose="020B0603020101020101" pitchFamily="34" charset="-127"/>
+                <a:ea typeface="나눔바른고딕" panose="020B0603020101020101" pitchFamily="34" charset="-127"/>
+              </a:rPr>
+              <a:t>담 넘기</a:t>
+            </a:r>
+            <a:r>
+              <a:rPr lang="en-US" altLang="ko-KR" sz="1600" dirty="0">
+                <a:latin typeface="나눔바른고딕" panose="020B0603020101020101" pitchFamily="34" charset="-127"/>
+                <a:ea typeface="나눔바른고딕" panose="020B0603020101020101" pitchFamily="34" charset="-127"/>
+              </a:rPr>
+              <a:t> </a:t>
+            </a:r>
+            <a:r>
+              <a:rPr lang="ko-KR" altLang="en-US" sz="1600" dirty="0" smtClean="0">
+                <a:latin typeface="나눔바른고딕" panose="020B0603020101020101" pitchFamily="34" charset="-127"/>
+                <a:ea typeface="나눔바른고딕" panose="020B0603020101020101" pitchFamily="34" charset="-127"/>
+              </a:rPr>
+              <a:t>등 </a:t>
+            </a:r>
+            <a:endParaRPr lang="en-US" altLang="ko-KR" sz="1600" dirty="0" smtClean="0">
+              <a:latin typeface="나눔바른고딕" panose="020B0603020101020101" pitchFamily="34" charset="-127"/>
+              <a:ea typeface="나눔바른고딕" panose="020B0603020101020101" pitchFamily="34" charset="-127"/>
+            </a:endParaRPr>
+          </a:p>
+        </p:txBody>
+      </p:sp>
+      <p:pic>
+        <p:nvPicPr>
+          <p:cNvPr id="2" name="그림 1"/>
+          <p:cNvPicPr>
+            <a:picLocks noChangeAspect="1"/>
+          </p:cNvPicPr>
+          <p:nvPr/>
+        </p:nvPicPr>
+        <p:blipFill>
+          <a:blip r:embed="rId2"/>
+          <a:stretch>
+            <a:fillRect/>
+          </a:stretch>
+        </p:blipFill>
+        <p:spPr>
+          <a:xfrm>
+            <a:off x="3217666" y="2377556"/>
+            <a:ext cx="7952668" cy="3484161"/>
+          </a:xfrm>
+          <a:prstGeom prst="rect">
+            <a:avLst/>
+          </a:prstGeom>
+        </p:spPr>
+      </p:pic>
+    </p:spTree>
+    <p:extLst>
+      <p:ext uri="{BB962C8B-B14F-4D97-AF65-F5344CB8AC3E}">
+        <p14:creationId xmlns:p14="http://schemas.microsoft.com/office/powerpoint/2010/main" val="3748579845"/>
+      </p:ext>
+    </p:extLst>
+  </p:cSld>
+  <p:clrMapOvr>
+    <a:masterClrMapping/>
+  </p:clrMapOvr>
+</p:sld>
+</file>
+
+<file path=ppt/slides/slide4.xml><?xml version="1.0" encoding="utf-8"?>
+<p:sld xmlns:a="http://schemas.openxmlformats.org/drawingml/2006/main" xmlns:r="http://schemas.openxmlformats.org/officeDocument/2006/relationships" xmlns:p="http://schemas.openxmlformats.org/presentationml/2006/main">
+  <p:cSld>
+    <p:spTree>
+      <p:nvGrpSpPr>
+        <p:cNvPr id="1" name="">
+          <a:extLst>
+            <a:ext uri="{FF2B5EF4-FFF2-40B4-BE49-F238E27FC236}">
+              <a16:creationId xmlns="" xmlns:a16="http://schemas.microsoft.com/office/drawing/2014/main" id="{A8A918DD-265C-DDB9-B7FC-A9D58086B7F3}"/>
+            </a:ext>
+          </a:extLst>
+        </p:cNvPr>
+        <p:cNvGrpSpPr/>
+        <p:nvPr/>
+      </p:nvGrpSpPr>
+      <p:grpSpPr>
+        <a:xfrm>
+          <a:off x="0" y="0"/>
+          <a:ext cx="0" cy="0"/>
+          <a:chOff x="0" y="0"/>
+          <a:chExt cx="0" cy="0"/>
+        </a:xfrm>
+      </p:grpSpPr>
+      <p:sp>
+        <p:nvSpPr>
+          <p:cNvPr id="8" name="TextBox 7">
+            <a:extLst>
+              <a:ext uri="{FF2B5EF4-FFF2-40B4-BE49-F238E27FC236}">
+                <a16:creationId xmlns="" xmlns:a16="http://schemas.microsoft.com/office/drawing/2014/main" id="{38DA243F-1ACF-A8F6-3DE3-D3DB1A8A7D80}"/>
+              </a:ext>
+            </a:extLst>
+          </p:cNvPr>
+          <p:cNvSpPr txBox="1"/>
+          <p:nvPr/>
+        </p:nvSpPr>
+        <p:spPr>
+          <a:xfrm>
+            <a:off x="302451" y="315453"/>
+            <a:ext cx="4944140" cy="369332"/>
+          </a:xfrm>
+          <a:prstGeom prst="rect">
+            <a:avLst/>
+          </a:prstGeom>
+          <a:noFill/>
+        </p:spPr>
+        <p:txBody>
+          <a:bodyPr wrap="square" rtlCol="0">
+            <a:spAutoFit/>
+          </a:bodyPr>
+          <a:lstStyle/>
+          <a:p>
+            <a:r>
+              <a:rPr lang="ko-KR" altLang="en-US" dirty="0">
+                <a:latin typeface="나눔바른고딕" panose="020B0603020101020101" pitchFamily="34" charset="-127"/>
+                <a:ea typeface="나눔바른고딕" panose="020B0603020101020101" pitchFamily="34" charset="-127"/>
+              </a:rPr>
+              <a:t>이번 주 작업 내역</a:t>
+            </a:r>
+            <a:endParaRPr lang="en-US" altLang="ko-KR" dirty="0">
+              <a:latin typeface="나눔바른고딕" panose="020B0603020101020101" pitchFamily="34" charset="-127"/>
+              <a:ea typeface="나눔바른고딕" panose="020B0603020101020101" pitchFamily="34" charset="-127"/>
+            </a:endParaRPr>
+          </a:p>
+        </p:txBody>
+      </p:sp>
+      <p:sp>
+        <p:nvSpPr>
+          <p:cNvPr id="10" name="TextBox 9">
+            <a:extLst>
+              <a:ext uri="{FF2B5EF4-FFF2-40B4-BE49-F238E27FC236}">
+                <a16:creationId xmlns="" xmlns:a16="http://schemas.microsoft.com/office/drawing/2014/main" id="{75DAA775-31E2-50BB-2BF3-4EF90C8083FC}"/>
+              </a:ext>
+            </a:extLst>
+          </p:cNvPr>
+          <p:cNvSpPr txBox="1"/>
+          <p:nvPr/>
+        </p:nvSpPr>
+        <p:spPr>
+          <a:xfrm>
+            <a:off x="302451" y="758852"/>
+            <a:ext cx="5211109" cy="830997"/>
+          </a:xfrm>
+          <a:prstGeom prst="rect">
+            <a:avLst/>
+          </a:prstGeom>
+          <a:noFill/>
+        </p:spPr>
+        <p:txBody>
+          <a:bodyPr wrap="square" rtlCol="0">
+            <a:spAutoFit/>
+          </a:bodyPr>
+          <a:lstStyle/>
+          <a:p>
+            <a:r>
+              <a:rPr lang="en-US" altLang="ko-KR" sz="1600" dirty="0">
+                <a:latin typeface="나눔바른고딕" panose="020B0603020101020101" pitchFamily="34" charset="-127"/>
+                <a:ea typeface="나눔바른고딕" panose="020B0603020101020101" pitchFamily="34" charset="-127"/>
+              </a:rPr>
+              <a:t>PhysX</a:t>
+            </a:r>
+            <a:r>
+              <a:rPr lang="ko-KR" altLang="en-US" sz="1600" dirty="0">
+                <a:latin typeface="나눔바른고딕" panose="020B0603020101020101" pitchFamily="34" charset="-127"/>
+                <a:ea typeface="나눔바른고딕" panose="020B0603020101020101" pitchFamily="34" charset="-127"/>
+              </a:rPr>
+              <a:t> </a:t>
+            </a:r>
+            <a:r>
+              <a:rPr lang="ko-KR" altLang="en-US" sz="1600" dirty="0" smtClean="0">
+                <a:latin typeface="나눔바른고딕" panose="020B0603020101020101" pitchFamily="34" charset="-127"/>
+                <a:ea typeface="나눔바른고딕" panose="020B0603020101020101" pitchFamily="34" charset="-127"/>
+              </a:rPr>
+              <a:t>적용</a:t>
+            </a:r>
+            <a:endParaRPr lang="en-US" altLang="ko-KR" sz="1600" dirty="0" smtClean="0">
+              <a:latin typeface="나눔바른고딕" panose="020B0603020101020101" pitchFamily="34" charset="-127"/>
+              <a:ea typeface="나눔바른고딕" panose="020B0603020101020101" pitchFamily="34" charset="-127"/>
+            </a:endParaRPr>
+          </a:p>
+          <a:p>
+            <a:pPr marL="285750" indent="-285750">
+              <a:buFont typeface="Arial" panose="020B0604020202020204" pitchFamily="34" charset="0"/>
+              <a:buChar char="•"/>
+            </a:pPr>
+            <a:r>
+              <a:rPr lang="ko-KR" altLang="en-US" sz="1600" dirty="0" smtClean="0">
+                <a:latin typeface="나눔바른고딕" panose="020B0603020101020101" pitchFamily="34" charset="-127"/>
+                <a:ea typeface="나눔바른고딕" panose="020B0603020101020101" pitchFamily="34" charset="-127"/>
+              </a:rPr>
+              <a:t>지형지물 충돌</a:t>
+            </a:r>
+            <a:endParaRPr lang="en-US" altLang="ko-KR" sz="1600" dirty="0">
+              <a:latin typeface="나눔바른고딕" panose="020B0603020101020101" pitchFamily="34" charset="-127"/>
+              <a:ea typeface="나눔바른고딕" panose="020B0603020101020101" pitchFamily="34" charset="-127"/>
+            </a:endParaRPr>
+          </a:p>
+          <a:p>
+            <a:pPr marL="285750" indent="-285750">
+              <a:buFont typeface="Arial" panose="020B0604020202020204" pitchFamily="34" charset="0"/>
+              <a:buChar char="•"/>
+            </a:pPr>
+            <a:r>
+              <a:rPr lang="ko-KR" altLang="en-US" sz="1600" dirty="0" smtClean="0">
+                <a:latin typeface="나눔바른고딕" panose="020B0603020101020101" pitchFamily="34" charset="-127"/>
+                <a:ea typeface="나눔바른고딕" panose="020B0603020101020101" pitchFamily="34" charset="-127"/>
+              </a:rPr>
+              <a:t>장애물을 향해 </a:t>
+            </a:r>
+            <a:r>
+              <a:rPr lang="ko-KR" altLang="en-US" sz="1600" dirty="0" err="1" smtClean="0">
+                <a:latin typeface="나눔바른고딕" panose="020B0603020101020101" pitchFamily="34" charset="-127"/>
+                <a:ea typeface="나눔바른고딕" panose="020B0603020101020101" pitchFamily="34" charset="-127"/>
+              </a:rPr>
+              <a:t>레이캐스트로</a:t>
+            </a:r>
+            <a:r>
+              <a:rPr lang="ko-KR" altLang="en-US" sz="1600" dirty="0" smtClean="0">
+                <a:latin typeface="나눔바른고딕" panose="020B0603020101020101" pitchFamily="34" charset="-127"/>
+                <a:ea typeface="나눔바른고딕" panose="020B0603020101020101" pitchFamily="34" charset="-127"/>
+              </a:rPr>
+              <a:t> 환경 탐색</a:t>
+            </a:r>
+            <a:endParaRPr lang="en-US" altLang="ko-KR" sz="1600" dirty="0" smtClean="0">
+              <a:latin typeface="나눔바른고딕" panose="020B0603020101020101" pitchFamily="34" charset="-127"/>
+              <a:ea typeface="나눔바른고딕" panose="020B0603020101020101" pitchFamily="34" charset="-127"/>
+            </a:endParaRPr>
+          </a:p>
+        </p:txBody>
+      </p:sp>
+      <p:sp>
+        <p:nvSpPr>
+          <p:cNvPr id="4" name="TextBox 3">
+            <a:extLst>
+              <a:ext uri="{FF2B5EF4-FFF2-40B4-BE49-F238E27FC236}">
+                <a16:creationId xmlns="" xmlns:a16="http://schemas.microsoft.com/office/drawing/2014/main" id="{75DAA775-31E2-50BB-2BF3-4EF90C8083FC}"/>
+              </a:ext>
+            </a:extLst>
+          </p:cNvPr>
+          <p:cNvSpPr txBox="1"/>
+          <p:nvPr/>
+        </p:nvSpPr>
+        <p:spPr>
+          <a:xfrm>
+            <a:off x="5930021" y="758851"/>
+            <a:ext cx="5785163" cy="830997"/>
+          </a:xfrm>
+          <a:prstGeom prst="rect">
+            <a:avLst/>
+          </a:prstGeom>
+          <a:noFill/>
+        </p:spPr>
+        <p:txBody>
+          <a:bodyPr wrap="square" rtlCol="0">
+            <a:spAutoFit/>
+          </a:bodyPr>
+          <a:lstStyle/>
+          <a:p>
+            <a:r>
+              <a:rPr lang="ko-KR" altLang="en-US" sz="1600" dirty="0" smtClean="0">
+                <a:latin typeface="나눔바른고딕" panose="020B0603020101020101" pitchFamily="34" charset="-127"/>
+                <a:ea typeface="나눔바른고딕" panose="020B0603020101020101" pitchFamily="34" charset="-127"/>
+              </a:rPr>
+              <a:t>객체 식별 </a:t>
+            </a:r>
+            <a:r>
+              <a:rPr lang="en-US" altLang="ko-KR" sz="1600" dirty="0" smtClean="0">
+                <a:latin typeface="나눔바른고딕" panose="020B0603020101020101" pitchFamily="34" charset="-127"/>
+                <a:ea typeface="나눔바른고딕" panose="020B0603020101020101" pitchFamily="34" charset="-127"/>
+              </a:rPr>
+              <a:t>:</a:t>
+            </a:r>
+            <a:r>
+              <a:rPr lang="ko-KR" altLang="en-US" sz="1600" dirty="0" smtClean="0">
+                <a:latin typeface="나눔바른고딕" panose="020B0603020101020101" pitchFamily="34" charset="-127"/>
+                <a:ea typeface="나눔바른고딕" panose="020B0603020101020101" pitchFamily="34" charset="-127"/>
+              </a:rPr>
+              <a:t> 태그</a:t>
+            </a:r>
+            <a:endParaRPr lang="en-US" altLang="ko-KR" sz="1600" dirty="0" smtClean="0">
+              <a:latin typeface="나눔바른고딕" panose="020B0603020101020101" pitchFamily="34" charset="-127"/>
+              <a:ea typeface="나눔바른고딕" panose="020B0603020101020101" pitchFamily="34" charset="-127"/>
+            </a:endParaRPr>
+          </a:p>
+          <a:p>
+            <a:pPr marL="285750" indent="-285750">
+              <a:buFont typeface="Arial" panose="020B0604020202020204" pitchFamily="34" charset="0"/>
+              <a:buChar char="•"/>
+            </a:pPr>
+            <a:r>
+              <a:rPr lang="ko-KR" altLang="en-US" sz="1600" dirty="0" smtClean="0">
+                <a:latin typeface="나눔바른고딕" panose="020B0603020101020101" pitchFamily="34" charset="-127"/>
+                <a:ea typeface="나눔바른고딕" panose="020B0603020101020101" pitchFamily="34" charset="-127"/>
+              </a:rPr>
+              <a:t>부여한 태그를 기반으로 캐릭터의 행위를 </a:t>
+            </a:r>
+            <a:r>
+              <a:rPr lang="ko-KR" altLang="en-US" sz="1600" dirty="0" smtClean="0">
+                <a:latin typeface="나눔바른고딕" panose="020B0603020101020101" pitchFamily="34" charset="-127"/>
+                <a:ea typeface="나눔바른고딕" panose="020B0603020101020101" pitchFamily="34" charset="-127"/>
+              </a:rPr>
+              <a:t>결정</a:t>
+            </a:r>
+            <a:endParaRPr lang="en-US" altLang="ko-KR" sz="1600" dirty="0" smtClean="0">
+              <a:latin typeface="나눔바른고딕" panose="020B0603020101020101" pitchFamily="34" charset="-127"/>
+              <a:ea typeface="나눔바른고딕" panose="020B0603020101020101" pitchFamily="34" charset="-127"/>
+            </a:endParaRPr>
+          </a:p>
+          <a:p>
+            <a:pPr marL="285750" indent="-285750">
+              <a:buFont typeface="Arial" panose="020B0604020202020204" pitchFamily="34" charset="0"/>
+              <a:buChar char="•"/>
+            </a:pPr>
+            <a:r>
+              <a:rPr lang="ko-KR" altLang="en-US" sz="1600" dirty="0" smtClean="0">
+                <a:latin typeface="나눔바른고딕" panose="020B0603020101020101" pitchFamily="34" charset="-127"/>
+                <a:ea typeface="나눔바른고딕" panose="020B0603020101020101" pitchFamily="34" charset="-127"/>
+              </a:rPr>
+              <a:t>객체 종류 </a:t>
+            </a:r>
+            <a:r>
+              <a:rPr lang="en-US" altLang="ko-KR" sz="1600" dirty="0" smtClean="0">
+                <a:latin typeface="나눔바른고딕" panose="020B0603020101020101" pitchFamily="34" charset="-127"/>
+                <a:ea typeface="나눔바른고딕" panose="020B0603020101020101" pitchFamily="34" charset="-127"/>
+              </a:rPr>
+              <a:t>– </a:t>
+            </a:r>
+            <a:r>
+              <a:rPr lang="ko-KR" altLang="en-US" sz="1600" dirty="0" smtClean="0">
+                <a:latin typeface="나눔바른고딕" panose="020B0603020101020101" pitchFamily="34" charset="-127"/>
+                <a:ea typeface="나눔바른고딕" panose="020B0603020101020101" pitchFamily="34" charset="-127"/>
+              </a:rPr>
+              <a:t>행동 양식 </a:t>
+            </a:r>
+            <a:r>
+              <a:rPr lang="en-US" altLang="ko-KR" sz="1600" dirty="0" smtClean="0">
+                <a:latin typeface="나눔바른고딕" panose="020B0603020101020101" pitchFamily="34" charset="-127"/>
+                <a:ea typeface="나눔바른고딕" panose="020B0603020101020101" pitchFamily="34" charset="-127"/>
+              </a:rPr>
+              <a:t>– </a:t>
+            </a:r>
+            <a:r>
+              <a:rPr lang="ko-KR" altLang="en-US" sz="1600" dirty="0" smtClean="0">
+                <a:latin typeface="나눔바른고딕" panose="020B0603020101020101" pitchFamily="34" charset="-127"/>
+                <a:ea typeface="나눔바른고딕" panose="020B0603020101020101" pitchFamily="34" charset="-127"/>
+              </a:rPr>
+              <a:t>높낮이 </a:t>
+            </a:r>
+            <a:r>
+              <a:rPr lang="ko-KR" altLang="en-US" sz="1600" dirty="0" smtClean="0">
+                <a:latin typeface="나눔바른고딕" panose="020B0603020101020101" pitchFamily="34" charset="-127"/>
+                <a:ea typeface="나눔바른고딕" panose="020B0603020101020101" pitchFamily="34" charset="-127"/>
+              </a:rPr>
+              <a:t>유형 등 </a:t>
+            </a:r>
+            <a:r>
+              <a:rPr lang="en-US" altLang="ko-KR" sz="1600" dirty="0" smtClean="0">
+                <a:latin typeface="나눔바른고딕" panose="020B0603020101020101" pitchFamily="34" charset="-127"/>
+                <a:ea typeface="나눔바른고딕" panose="020B0603020101020101" pitchFamily="34" charset="-127"/>
+              </a:rPr>
+              <a:t>(</a:t>
+            </a:r>
+            <a:r>
+              <a:rPr lang="ko-KR" altLang="en-US" sz="1600" dirty="0" smtClean="0">
+                <a:latin typeface="나눔바른고딕" panose="020B0603020101020101" pitchFamily="34" charset="-127"/>
+                <a:ea typeface="나눔바른고딕" panose="020B0603020101020101" pitchFamily="34" charset="-127"/>
+              </a:rPr>
+              <a:t>구성 변경 가능</a:t>
+            </a:r>
+            <a:r>
+              <a:rPr lang="en-US" altLang="ko-KR" sz="1600" dirty="0" smtClean="0">
+                <a:latin typeface="나눔바른고딕" panose="020B0603020101020101" pitchFamily="34" charset="-127"/>
+                <a:ea typeface="나눔바른고딕" panose="020B0603020101020101" pitchFamily="34" charset="-127"/>
+              </a:rPr>
+              <a:t>)</a:t>
+            </a:r>
+            <a:endParaRPr lang="en-US" altLang="ko-KR" sz="1600" dirty="0" smtClean="0">
+              <a:latin typeface="나눔바른고딕" panose="020B0603020101020101" pitchFamily="34" charset="-127"/>
+              <a:ea typeface="나눔바른고딕" panose="020B0603020101020101" pitchFamily="34" charset="-127"/>
+            </a:endParaRPr>
+          </a:p>
+        </p:txBody>
+      </p:sp>
+      <p:pic>
+        <p:nvPicPr>
+          <p:cNvPr id="2" name="그림 1"/>
+          <p:cNvPicPr>
+            <a:picLocks noChangeAspect="1"/>
+          </p:cNvPicPr>
+          <p:nvPr/>
+        </p:nvPicPr>
+        <p:blipFill>
+          <a:blip r:embed="rId2"/>
+          <a:stretch>
+            <a:fillRect/>
+          </a:stretch>
+        </p:blipFill>
+        <p:spPr>
+          <a:xfrm>
+            <a:off x="5832496" y="1747320"/>
+            <a:ext cx="6033579" cy="4818234"/>
+          </a:xfrm>
+          <a:prstGeom prst="rect">
+            <a:avLst/>
+          </a:prstGeom>
+        </p:spPr>
+      </p:pic>
+    </p:spTree>
+    <p:extLst>
+      <p:ext uri="{BB962C8B-B14F-4D97-AF65-F5344CB8AC3E}">
+        <p14:creationId xmlns:p14="http://schemas.microsoft.com/office/powerpoint/2010/main" val="1245471679"/>
+      </p:ext>
+    </p:extLst>
+  </p:cSld>
+  <p:clrMapOvr>
+    <a:masterClrMapping/>
+  </p:clrMapOvr>
+</p:sld>
+</file>
+
+<file path=ppt/slides/slide5.xml><?xml version="1.0" encoding="utf-8"?>
+<p:sld xmlns:a="http://schemas.openxmlformats.org/drawingml/2006/main" xmlns:r="http://schemas.openxmlformats.org/officeDocument/2006/relationships" xmlns:p="http://schemas.openxmlformats.org/presentationml/2006/main">
+  <p:cSld>
+    <p:spTree>
+      <p:nvGrpSpPr>
+        <p:cNvPr id="1" name="">
+          <a:extLst>
+            <a:ext uri="{FF2B5EF4-FFF2-40B4-BE49-F238E27FC236}">
+              <a16:creationId xmlns="" xmlns:a16="http://schemas.microsoft.com/office/drawing/2014/main" id="{960F3801-1345-73B1-BC4D-455683B38EDD}"/>
+            </a:ext>
+          </a:extLst>
+        </p:cNvPr>
+        <p:cNvGrpSpPr/>
+        <p:nvPr/>
+      </p:nvGrpSpPr>
+      <p:grpSpPr>
+        <a:xfrm>
+          <a:off x="0" y="0"/>
+          <a:ext cx="0" cy="0"/>
+          <a:chOff x="0" y="0"/>
+          <a:chExt cx="0" cy="0"/>
+        </a:xfrm>
+      </p:grpSpPr>
+      <p:sp>
+        <p:nvSpPr>
+          <p:cNvPr id="8" name="TextBox 7">
+            <a:extLst>
+              <a:ext uri="{FF2B5EF4-FFF2-40B4-BE49-F238E27FC236}">
+                <a16:creationId xmlns="" xmlns:a16="http://schemas.microsoft.com/office/drawing/2014/main" id="{953A2C19-7BB6-4B8F-B088-53F2041DCA07}"/>
+              </a:ext>
+            </a:extLst>
+          </p:cNvPr>
+          <p:cNvSpPr txBox="1"/>
+          <p:nvPr/>
+        </p:nvSpPr>
+        <p:spPr>
+          <a:xfrm>
+            <a:off x="302451" y="315453"/>
+            <a:ext cx="4944140" cy="369332"/>
+          </a:xfrm>
+          <a:prstGeom prst="rect">
+            <a:avLst/>
+          </a:prstGeom>
+          <a:noFill/>
+        </p:spPr>
+        <p:txBody>
+          <a:bodyPr wrap="square" rtlCol="0">
+            <a:spAutoFit/>
+          </a:bodyPr>
+          <a:lstStyle/>
+          <a:p>
+            <a:r>
+              <a:rPr lang="ko-KR" altLang="en-US" dirty="0">
+                <a:latin typeface="나눔바른고딕" panose="020B0603020101020101" pitchFamily="34" charset="-127"/>
+                <a:ea typeface="나눔바른고딕" panose="020B0603020101020101" pitchFamily="34" charset="-127"/>
+              </a:rPr>
+              <a:t>이번 주 작업 내역</a:t>
+            </a:r>
+            <a:endParaRPr lang="en-US" altLang="ko-KR" dirty="0">
+              <a:latin typeface="나눔바른고딕" panose="020B0603020101020101" pitchFamily="34" charset="-127"/>
+              <a:ea typeface="나눔바른고딕" panose="020B0603020101020101" pitchFamily="34" charset="-127"/>
+            </a:endParaRPr>
+          </a:p>
+        </p:txBody>
+      </p:sp>
+      <p:sp>
+        <p:nvSpPr>
+          <p:cNvPr id="10" name="TextBox 9">
+            <a:extLst>
+              <a:ext uri="{FF2B5EF4-FFF2-40B4-BE49-F238E27FC236}">
+                <a16:creationId xmlns="" xmlns:a16="http://schemas.microsoft.com/office/drawing/2014/main" id="{1C05991D-1DDC-77AC-5E76-B990175DF25D}"/>
+              </a:ext>
+            </a:extLst>
+          </p:cNvPr>
+          <p:cNvSpPr txBox="1"/>
+          <p:nvPr/>
+        </p:nvSpPr>
+        <p:spPr>
+          <a:xfrm>
+            <a:off x="302450" y="758852"/>
+            <a:ext cx="10298209" cy="584775"/>
+          </a:xfrm>
+          <a:prstGeom prst="rect">
+            <a:avLst/>
+          </a:prstGeom>
+          <a:noFill/>
+        </p:spPr>
+        <p:txBody>
+          <a:bodyPr wrap="square" rtlCol="0">
+            <a:spAutoFit/>
+          </a:bodyPr>
+          <a:lstStyle/>
+          <a:p>
+            <a:pPr marL="285750" indent="-285750">
+              <a:buFont typeface="Arial" panose="020B0604020202020204" pitchFamily="34" charset="0"/>
+              <a:buChar char="•"/>
+            </a:pPr>
+            <a:r>
+              <a:rPr lang="ko-KR" altLang="en-US" sz="1600" dirty="0">
+                <a:latin typeface="나눔바른고딕" panose="020B0603020101020101" pitchFamily="34" charset="-127"/>
+                <a:ea typeface="나눔바른고딕" panose="020B0603020101020101" pitchFamily="34" charset="-127"/>
+              </a:rPr>
+              <a:t>애니메이션 재생 결과</a:t>
+            </a:r>
+            <a:endParaRPr lang="en-US" altLang="ko-KR" sz="1600" dirty="0">
+              <a:latin typeface="나눔바른고딕" panose="020B0603020101020101" pitchFamily="34" charset="-127"/>
+              <a:ea typeface="나눔바른고딕" panose="020B0603020101020101" pitchFamily="34" charset="-127"/>
+            </a:endParaRPr>
+          </a:p>
+          <a:p>
+            <a:pPr marL="742950" lvl="1" indent="-285750">
+              <a:buFont typeface="Arial" panose="020B0604020202020204" pitchFamily="34" charset="0"/>
+              <a:buChar char="•"/>
+            </a:pPr>
+            <a:r>
+              <a:rPr lang="ko-KR" altLang="en-US" sz="1600" dirty="0">
+                <a:latin typeface="나눔바른고딕" panose="020B0603020101020101" pitchFamily="34" charset="-127"/>
+                <a:ea typeface="나눔바른고딕" panose="020B0603020101020101" pitchFamily="34" charset="-127"/>
+              </a:rPr>
+              <a:t>평지 </a:t>
+            </a:r>
+            <a:r>
+              <a:rPr lang="ko-KR" altLang="en-US" sz="1600" dirty="0" err="1">
+                <a:latin typeface="나눔바른고딕" panose="020B0603020101020101" pitchFamily="34" charset="-127"/>
+                <a:ea typeface="나눔바른고딕" panose="020B0603020101020101" pitchFamily="34" charset="-127"/>
+              </a:rPr>
+              <a:t>로코모션</a:t>
+            </a:r>
+            <a:r>
+              <a:rPr lang="ko-KR" altLang="en-US" sz="1600" dirty="0">
+                <a:latin typeface="나눔바른고딕" panose="020B0603020101020101" pitchFamily="34" charset="-127"/>
+                <a:ea typeface="나눔바른고딕" panose="020B0603020101020101" pitchFamily="34" charset="-127"/>
+              </a:rPr>
+              <a:t> </a:t>
+            </a:r>
+            <a:r>
+              <a:rPr lang="en-US" altLang="ko-KR" sz="1600" dirty="0">
+                <a:latin typeface="나눔바른고딕" panose="020B0603020101020101" pitchFamily="34" charset="-127"/>
+                <a:ea typeface="나눔바른고딕" panose="020B0603020101020101" pitchFamily="34" charset="-127"/>
+              </a:rPr>
+              <a:t>-&gt; </a:t>
+            </a:r>
+            <a:r>
+              <a:rPr lang="en-US" altLang="ko-KR" sz="1600" dirty="0" err="1">
+                <a:latin typeface="나눔바른고딕" panose="020B0603020101020101" pitchFamily="34" charset="-127"/>
+                <a:ea typeface="나눔바른고딕" panose="020B0603020101020101" pitchFamily="34" charset="-127"/>
+              </a:rPr>
+              <a:t>Lshift</a:t>
+            </a:r>
+            <a:r>
+              <a:rPr lang="en-US" altLang="ko-KR" sz="1600" dirty="0">
+                <a:latin typeface="나눔바른고딕" panose="020B0603020101020101" pitchFamily="34" charset="-127"/>
+                <a:ea typeface="나눔바른고딕" panose="020B0603020101020101" pitchFamily="34" charset="-127"/>
+              </a:rPr>
+              <a:t> </a:t>
+            </a:r>
+            <a:r>
+              <a:rPr lang="ko-KR" altLang="en-US" sz="1600" dirty="0" err="1">
+                <a:latin typeface="나눔바른고딕" panose="020B0603020101020101" pitchFamily="34" charset="-127"/>
+                <a:ea typeface="나눔바른고딕" panose="020B0603020101020101" pitchFamily="34" charset="-127"/>
+              </a:rPr>
+              <a:t>레이캐스트</a:t>
+            </a:r>
+            <a:r>
+              <a:rPr lang="ko-KR" altLang="en-US" sz="1600" dirty="0">
+                <a:latin typeface="나눔바른고딕" panose="020B0603020101020101" pitchFamily="34" charset="-127"/>
+                <a:ea typeface="나눔바른고딕" panose="020B0603020101020101" pitchFamily="34" charset="-127"/>
+              </a:rPr>
+              <a:t> 장애물 식별 </a:t>
+            </a:r>
+            <a:r>
+              <a:rPr lang="en-US" altLang="ko-KR" sz="1600" dirty="0">
+                <a:latin typeface="나눔바른고딕" panose="020B0603020101020101" pitchFamily="34" charset="-127"/>
+                <a:ea typeface="나눔바른고딕" panose="020B0603020101020101" pitchFamily="34" charset="-127"/>
+              </a:rPr>
+              <a:t>-&gt; </a:t>
+            </a:r>
+            <a:r>
+              <a:rPr lang="ko-KR" altLang="en-US" sz="1600" dirty="0">
+                <a:latin typeface="나눔바른고딕" panose="020B0603020101020101" pitchFamily="34" charset="-127"/>
+                <a:ea typeface="나눔바른고딕" panose="020B0603020101020101" pitchFamily="34" charset="-127"/>
+              </a:rPr>
+              <a:t>담 넘기 </a:t>
+            </a:r>
+            <a:r>
+              <a:rPr lang="en-US" altLang="ko-KR" sz="1600" dirty="0">
+                <a:latin typeface="나눔바른고딕" panose="020B0603020101020101" pitchFamily="34" charset="-127"/>
+                <a:ea typeface="나눔바른고딕" panose="020B0603020101020101" pitchFamily="34" charset="-127"/>
+              </a:rPr>
+              <a:t>-&gt; </a:t>
+            </a:r>
+            <a:r>
+              <a:rPr lang="ko-KR" altLang="en-US" sz="1600" dirty="0">
+                <a:latin typeface="나눔바른고딕" panose="020B0603020101020101" pitchFamily="34" charset="-127"/>
+                <a:ea typeface="나눔바른고딕" panose="020B0603020101020101" pitchFamily="34" charset="-127"/>
+              </a:rPr>
+              <a:t>평지 </a:t>
+            </a:r>
+            <a:r>
+              <a:rPr lang="ko-KR" altLang="en-US" sz="1600" dirty="0" err="1">
+                <a:latin typeface="나눔바른고딕" panose="020B0603020101020101" pitchFamily="34" charset="-127"/>
+                <a:ea typeface="나눔바른고딕" panose="020B0603020101020101" pitchFamily="34" charset="-127"/>
+              </a:rPr>
+              <a:t>로코모션</a:t>
+            </a:r>
+            <a:endParaRPr lang="en-US" altLang="ko-KR" sz="1600" dirty="0">
+              <a:latin typeface="나눔바른고딕" panose="020B0603020101020101" pitchFamily="34" charset="-127"/>
+              <a:ea typeface="나눔바른고딕" panose="020B0603020101020101" pitchFamily="34" charset="-127"/>
+            </a:endParaRPr>
+          </a:p>
+        </p:txBody>
+      </p:sp>
+    </p:spTree>
+    <p:extLst>
+      <p:ext uri="{BB962C8B-B14F-4D97-AF65-F5344CB8AC3E}">
+        <p14:creationId xmlns:p14="http://schemas.microsoft.com/office/powerpoint/2010/main" val="756431288"/>
+      </p:ext>
+    </p:extLst>
+  </p:cSld>
+  <p:clrMapOvr>
+    <a:masterClrMapping/>
+  </p:clrMapOvr>
+</p:sld>
+</file>
+
+<file path=ppt/slides/slide6.xml><?xml version="1.0" encoding="utf-8"?>
+<p:sld xmlns:a="http://schemas.openxmlformats.org/drawingml/2006/main" xmlns:r="http://schemas.openxmlformats.org/officeDocument/2006/relationships" xmlns:p="http://schemas.openxmlformats.org/presentationml/2006/main">
+  <p:cSld>
+    <p:spTree>
+      <p:nvGrpSpPr>
+        <p:cNvPr id="1" name="">
+          <a:extLst>
+            <a:ext uri="{FF2B5EF4-FFF2-40B4-BE49-F238E27FC236}">
+              <a16:creationId xmlns:a16="http://schemas.microsoft.com/office/drawing/2014/main" xmlns="" id="{49DA7EAA-204E-2F90-E52A-6C83B9013025}"/>
+            </a:ext>
+          </a:extLst>
+        </p:cNvPr>
+        <p:cNvGrpSpPr/>
+        <p:nvPr/>
+      </p:nvGrpSpPr>
+      <p:grpSpPr>
+        <a:xfrm>
+          <a:off x="0" y="0"/>
+          <a:ext cx="0" cy="0"/>
+          <a:chOff x="0" y="0"/>
+          <a:chExt cx="0" cy="0"/>
+        </a:xfrm>
+      </p:grpSpPr>
+      <p:sp>
+        <p:nvSpPr>
           <p:cNvPr id="5" name="TextBox 4">
             <a:extLst>
               <a:ext uri="{FF2B5EF4-FFF2-40B4-BE49-F238E27FC236}">
-                <a16:creationId xmlns="" xmlns:a16="http://schemas.microsoft.com/office/drawing/2014/main" id="{4715F932-2F2C-4A3F-7F16-1B13D352985A}"/>
+                <a16:creationId xmlns:a16="http://schemas.microsoft.com/office/drawing/2014/main" xmlns="" id="{4715F932-2F2C-4A3F-7F16-1B13D352985A}"/>
               </a:ext>
             </a:extLst>
           </p:cNvPr>
@@ -5054,7 +5458,11 @@
             <a:graphicFrameLocks noGrp="1"/>
           </p:cNvGraphicFramePr>
           <p:nvPr>
-            <p:extLst/>
+            <p:extLst>
+              <p:ext uri="{D42A27DB-BD31-4B8C-83A1-F6EECF244321}">
+                <p14:modId xmlns:p14="http://schemas.microsoft.com/office/powerpoint/2010/main" val="2513765672"/>
+              </p:ext>
+            </p:extLst>
           </p:nvPr>
         </p:nvGraphicFramePr>
         <p:xfrm>
@@ -5071,21 +5479,21 @@
                 <a:gridCol w="791436">
                   <a:extLst>
                     <a:ext uri="{9D8B030D-6E8A-4147-A177-3AD203B41FA5}">
-                      <a16:colId xmlns="" xmlns:a16="http://schemas.microsoft.com/office/drawing/2014/main" val="20000"/>
+                      <a16:colId xmlns:a16="http://schemas.microsoft.com/office/drawing/2014/main" xmlns="" val="20000"/>
                     </a:ext>
                   </a:extLst>
                 </a:gridCol>
                 <a:gridCol w="4207281">
                   <a:extLst>
                     <a:ext uri="{9D8B030D-6E8A-4147-A177-3AD203B41FA5}">
-                      <a16:colId xmlns="" xmlns:a16="http://schemas.microsoft.com/office/drawing/2014/main" val="20001"/>
+                      <a16:colId xmlns:a16="http://schemas.microsoft.com/office/drawing/2014/main" xmlns="" val="20001"/>
                     </a:ext>
                   </a:extLst>
                 </a:gridCol>
                 <a:gridCol w="6320143">
                   <a:extLst>
                     <a:ext uri="{9D8B030D-6E8A-4147-A177-3AD203B41FA5}">
-                      <a16:colId xmlns="" xmlns:a16="http://schemas.microsoft.com/office/drawing/2014/main" val="20002"/>
+                      <a16:colId xmlns:a16="http://schemas.microsoft.com/office/drawing/2014/main" xmlns="" val="20002"/>
                     </a:ext>
                   </a:extLst>
                 </a:gridCol>
@@ -5141,7 +5549,7 @@
                 </a:tc>
                 <a:extLst>
                   <a:ext uri="{0D108BD9-81ED-4DB2-BD59-A6C34878D82A}">
-                    <a16:rowId xmlns="" xmlns:a16="http://schemas.microsoft.com/office/drawing/2014/main" val="10000"/>
+                    <a16:rowId xmlns:a16="http://schemas.microsoft.com/office/drawing/2014/main" xmlns="" val="10000"/>
                   </a:ext>
                 </a:extLst>
               </a:tr>
@@ -5320,7 +5728,7 @@
                 </a:tc>
                 <a:extLst>
                   <a:ext uri="{0D108BD9-81ED-4DB2-BD59-A6C34878D82A}">
-                    <a16:rowId xmlns="" xmlns:a16="http://schemas.microsoft.com/office/drawing/2014/main" val="10001"/>
+                    <a16:rowId xmlns:a16="http://schemas.microsoft.com/office/drawing/2014/main" xmlns="" val="10001"/>
                   </a:ext>
                 </a:extLst>
               </a:tr>
@@ -5337,6 +5745,221 @@
                           <a:ea typeface="나눔바른고딕" panose="020B0603020101020101" pitchFamily="34" charset="-127"/>
                         </a:rPr>
                         <a:t>2</a:t>
+                      </a:r>
+                      <a:endParaRPr lang="ko-KR" altLang="en-US" dirty="0">
+                        <a:latin typeface="나눔바른고딕" panose="020B0603020101020101" pitchFamily="34" charset="-127"/>
+                        <a:ea typeface="나눔바른고딕" panose="020B0603020101020101" pitchFamily="34" charset="-127"/>
+                      </a:endParaRPr>
+                    </a:p>
+                  </a:txBody>
+                  <a:tcPr anchor="ctr">
+                    <a:solidFill>
+                      <a:schemeClr val="accent1">
+                        <a:lumMod val="20000"/>
+                        <a:lumOff val="80000"/>
+                      </a:schemeClr>
+                    </a:solidFill>
+                  </a:tcPr>
+                </a:tc>
+                <a:tc>
+                  <a:txBody>
+                    <a:bodyPr/>
+                    <a:lstStyle/>
+                    <a:p>
+                      <a:pPr latinLnBrk="1"/>
+                      <a:r>
+                        <a:rPr lang="ko-KR" altLang="en-US" sz="1400" dirty="0">
+                          <a:latin typeface="나눔바른고딕" panose="020B0603020101020101" pitchFamily="34" charset="-127"/>
+                          <a:ea typeface="나눔바른고딕" panose="020B0603020101020101" pitchFamily="34" charset="-127"/>
+                        </a:rPr>
+                        <a:t>애니메이션 시스템</a:t>
+                      </a:r>
+                      <a:r>
+                        <a:rPr lang="en-US" altLang="ko-KR" sz="1400" dirty="0">
+                          <a:latin typeface="나눔바른고딕" panose="020B0603020101020101" pitchFamily="34" charset="-127"/>
+                          <a:ea typeface="나눔바른고딕" panose="020B0603020101020101" pitchFamily="34" charset="-127"/>
+                        </a:rPr>
+                        <a:t>, </a:t>
+                      </a:r>
+                      <a:r>
+                        <a:rPr lang="ko-KR" altLang="en-US" sz="1400" dirty="0">
+                          <a:latin typeface="나눔바른고딕" panose="020B0603020101020101" pitchFamily="34" charset="-127"/>
+                          <a:ea typeface="나눔바른고딕" panose="020B0603020101020101" pitchFamily="34" charset="-127"/>
+                        </a:rPr>
+                        <a:t>물리엔진 적용</a:t>
+                      </a:r>
+                      <a:r>
+                        <a:rPr lang="en-US" altLang="ko-KR" sz="1400" dirty="0">
+                          <a:latin typeface="나눔바른고딕" panose="020B0603020101020101" pitchFamily="34" charset="-127"/>
+                          <a:ea typeface="나눔바른고딕" panose="020B0603020101020101" pitchFamily="34" charset="-127"/>
+                        </a:rPr>
+                        <a:t>,</a:t>
+                      </a:r>
+                    </a:p>
+                    <a:p>
+                      <a:pPr latinLnBrk="1"/>
+                      <a:r>
+                        <a:rPr lang="ko-KR" altLang="en-US" sz="1400" dirty="0">
+                          <a:latin typeface="나눔바른고딕" panose="020B0603020101020101" pitchFamily="34" charset="-127"/>
+                          <a:ea typeface="나눔바른고딕" panose="020B0603020101020101" pitchFamily="34" charset="-127"/>
+                        </a:rPr>
+                        <a:t>입력 바인딩</a:t>
+                      </a:r>
+                    </a:p>
+                  </a:txBody>
+                  <a:tcPr anchor="ctr">
+                    <a:solidFill>
+                      <a:schemeClr val="accent1">
+                        <a:lumMod val="20000"/>
+                        <a:lumOff val="80000"/>
+                      </a:schemeClr>
+                    </a:solidFill>
+                  </a:tcPr>
+                </a:tc>
+                <a:tc>
+                  <a:txBody>
+                    <a:bodyPr/>
+                    <a:lstStyle/>
+                    <a:p>
+                      <a:pPr latinLnBrk="1"/>
+                      <a:r>
+                        <a:rPr lang="ko-KR" altLang="en-US" sz="1400" dirty="0">
+                          <a:latin typeface="나눔바른고딕" panose="020B0603020101020101" pitchFamily="34" charset="-127"/>
+                          <a:ea typeface="나눔바른고딕" panose="020B0603020101020101" pitchFamily="34" charset="-127"/>
+                        </a:rPr>
+                        <a:t>캐릭터 애니메이션 </a:t>
+                      </a:r>
+                      <a:r>
+                        <a:rPr lang="ko-KR" altLang="en-US" sz="1400" dirty="0" err="1">
+                          <a:latin typeface="나눔바른고딕" panose="020B0603020101020101" pitchFamily="34" charset="-127"/>
+                          <a:ea typeface="나눔바른고딕" panose="020B0603020101020101" pitchFamily="34" charset="-127"/>
+                        </a:rPr>
+                        <a:t>블렌드</a:t>
+                      </a:r>
+                      <a:r>
+                        <a:rPr lang="en-US" altLang="ko-KR" sz="1400" dirty="0">
+                          <a:latin typeface="나눔바른고딕" panose="020B0603020101020101" pitchFamily="34" charset="-127"/>
+                          <a:ea typeface="나눔바른고딕" panose="020B0603020101020101" pitchFamily="34" charset="-127"/>
+                        </a:rPr>
+                        <a:t>, </a:t>
+                      </a:r>
+                      <a:r>
+                        <a:rPr lang="ko-KR" altLang="en-US" sz="1400" dirty="0">
+                          <a:latin typeface="나눔바른고딕" panose="020B0603020101020101" pitchFamily="34" charset="-127"/>
+                          <a:ea typeface="나눔바른고딕" panose="020B0603020101020101" pitchFamily="34" charset="-127"/>
+                        </a:rPr>
+                        <a:t>애니메이션 </a:t>
+                      </a:r>
+                      <a:r>
+                        <a:rPr lang="ko-KR" altLang="en-US" sz="1400" dirty="0" err="1">
+                          <a:latin typeface="나눔바른고딕" panose="020B0603020101020101" pitchFamily="34" charset="-127"/>
+                          <a:ea typeface="나눔바른고딕" panose="020B0603020101020101" pitchFamily="34" charset="-127"/>
+                        </a:rPr>
+                        <a:t>상태머신</a:t>
+                      </a:r>
+                      <a:r>
+                        <a:rPr lang="en-US" altLang="ko-KR" sz="1400" dirty="0">
+                          <a:latin typeface="나눔바른고딕" panose="020B0603020101020101" pitchFamily="34" charset="-127"/>
+                          <a:ea typeface="나눔바른고딕" panose="020B0603020101020101" pitchFamily="34" charset="-127"/>
+                        </a:rPr>
+                        <a:t>,</a:t>
+                      </a:r>
+                    </a:p>
+                    <a:p>
+                      <a:pPr latinLnBrk="1"/>
+                      <a:r>
+                        <a:rPr lang="ko-KR" altLang="en-US" sz="1400" dirty="0">
+                          <a:latin typeface="나눔바른고딕" panose="020B0603020101020101" pitchFamily="34" charset="-127"/>
+                          <a:ea typeface="나눔바른고딕" panose="020B0603020101020101" pitchFamily="34" charset="-127"/>
+                        </a:rPr>
+                        <a:t>물리엔진</a:t>
+                      </a:r>
+                      <a:r>
+                        <a:rPr lang="en-US" altLang="ko-KR" sz="1400" dirty="0">
+                          <a:latin typeface="나눔바른고딕" panose="020B0603020101020101" pitchFamily="34" charset="-127"/>
+                          <a:ea typeface="나눔바른고딕" panose="020B0603020101020101" pitchFamily="34" charset="-127"/>
+                        </a:rPr>
+                        <a:t>(PhysX) </a:t>
+                      </a:r>
+                      <a:r>
+                        <a:rPr lang="ko-KR" altLang="en-US" sz="1400" dirty="0">
+                          <a:latin typeface="나눔바른고딕" panose="020B0603020101020101" pitchFamily="34" charset="-127"/>
+                          <a:ea typeface="나눔바른고딕" panose="020B0603020101020101" pitchFamily="34" charset="-127"/>
+                        </a:rPr>
+                        <a:t>적용</a:t>
+                      </a:r>
+                      <a:r>
+                        <a:rPr lang="en-US" altLang="ko-KR" sz="1400" dirty="0">
+                          <a:latin typeface="나눔바른고딕" panose="020B0603020101020101" pitchFamily="34" charset="-127"/>
+                          <a:ea typeface="나눔바른고딕" panose="020B0603020101020101" pitchFamily="34" charset="-127"/>
+                        </a:rPr>
+                        <a:t>, </a:t>
+                      </a:r>
+                      <a:r>
+                        <a:rPr lang="ko-KR" altLang="en-US" sz="1400" dirty="0">
+                          <a:latin typeface="나눔바른고딕" panose="020B0603020101020101" pitchFamily="34" charset="-127"/>
+                          <a:ea typeface="나눔바른고딕" panose="020B0603020101020101" pitchFamily="34" charset="-127"/>
+                        </a:rPr>
+                        <a:t>캐릭터 입력 바인딩</a:t>
+                      </a:r>
+                      <a:r>
+                        <a:rPr lang="en-US" altLang="ko-KR" sz="1400" dirty="0">
+                          <a:latin typeface="나눔바른고딕" panose="020B0603020101020101" pitchFamily="34" charset="-127"/>
+                          <a:ea typeface="나눔바른고딕" panose="020B0603020101020101" pitchFamily="34" charset="-127"/>
+                        </a:rPr>
+                        <a:t>, </a:t>
+                      </a:r>
+                      <a:r>
+                        <a:rPr lang="ko-KR" altLang="en-US" sz="1400" dirty="0">
+                          <a:latin typeface="나눔바른고딕" panose="020B0603020101020101" pitchFamily="34" charset="-127"/>
+                          <a:ea typeface="나눔바른고딕" panose="020B0603020101020101" pitchFamily="34" charset="-127"/>
+                        </a:rPr>
+                        <a:t>캐릭터 </a:t>
+                      </a:r>
+                      <a:r>
+                        <a:rPr lang="ko-KR" altLang="en-US" sz="1400" dirty="0" err="1">
+                          <a:latin typeface="나눔바른고딕" panose="020B0603020101020101" pitchFamily="34" charset="-127"/>
+                          <a:ea typeface="나눔바른고딕" panose="020B0603020101020101" pitchFamily="34" charset="-127"/>
+                        </a:rPr>
+                        <a:t>로코모션</a:t>
+                      </a:r>
+                      <a:r>
+                        <a:rPr lang="ko-KR" altLang="en-US" sz="1400" dirty="0">
+                          <a:latin typeface="나눔바른고딕" panose="020B0603020101020101" pitchFamily="34" charset="-127"/>
+                          <a:ea typeface="나눔바른고딕" panose="020B0603020101020101" pitchFamily="34" charset="-127"/>
+                        </a:rPr>
+                        <a:t> 적용</a:t>
+                      </a:r>
+                    </a:p>
+                  </a:txBody>
+                  <a:tcPr anchor="ctr">
+                    <a:solidFill>
+                      <a:schemeClr val="accent1">
+                        <a:lumMod val="20000"/>
+                        <a:lumOff val="80000"/>
+                      </a:schemeClr>
+                    </a:solidFill>
+                  </a:tcPr>
+                </a:tc>
+                <a:extLst>
+                  <a:ext uri="{0D108BD9-81ED-4DB2-BD59-A6C34878D82A}">
+                    <a16:rowId xmlns:a16="http://schemas.microsoft.com/office/drawing/2014/main" xmlns="" val="10002"/>
+                  </a:ext>
+                </a:extLst>
+              </a:tr>
+              <a:tr h="627956">
+                <a:tc>
+                  <a:txBody>
+                    <a:bodyPr/>
+                    <a:lstStyle/>
+                    <a:p>
+                      <a:pPr algn="ctr" latinLnBrk="1"/>
+                      <a:r>
+                        <a:rPr lang="en-US" altLang="ko-KR" dirty="0">
+                          <a:latin typeface="나눔바른고딕" panose="020B0603020101020101" pitchFamily="34" charset="-127"/>
+                          <a:ea typeface="나눔바른고딕" panose="020B0603020101020101" pitchFamily="34" charset="-127"/>
+                        </a:rPr>
+                        <a:t>3</a:t>
                       </a:r>
                       <a:endParaRPr lang="ko-KR" altLang="en-US" dirty="0">
                         <a:latin typeface="나눔바른고딕" panose="020B0603020101020101" pitchFamily="34" charset="-127"/>
@@ -5357,7 +5980,7 @@
                           <a:latin typeface="나눔바른고딕" panose="020B0603020101020101" pitchFamily="34" charset="-127"/>
                           <a:ea typeface="나눔바른고딕" panose="020B0603020101020101" pitchFamily="34" charset="-127"/>
                         </a:rPr>
-                        <a:t>애니메이션 시스템</a:t>
+                        <a:t>씬 배치</a:t>
                       </a:r>
                       <a:r>
                         <a:rPr lang="en-US" altLang="ko-KR" sz="1400" dirty="0">
@@ -5371,24 +5994,28 @@
                           <a:latin typeface="나눔바른고딕" panose="020B0603020101020101" pitchFamily="34" charset="-127"/>
                           <a:ea typeface="나눔바른고딕" panose="020B0603020101020101" pitchFamily="34" charset="-127"/>
                         </a:rPr>
-                        <a:t>물리엔진 적용</a:t>
+                        <a:t>캐릭터</a:t>
                       </a:r>
                       <a:r>
                         <a:rPr lang="en-US" altLang="ko-KR" sz="1400" dirty="0">
                           <a:latin typeface="나눔바른고딕" panose="020B0603020101020101" pitchFamily="34" charset="-127"/>
                           <a:ea typeface="나눔바른고딕" panose="020B0603020101020101" pitchFamily="34" charset="-127"/>
                         </a:rPr>
-                        <a:t>,</a:t>
-                      </a:r>
-                    </a:p>
-                    <a:p>
-                      <a:pPr latinLnBrk="1"/>
+                        <a:t> </a:t>
+                      </a:r>
+                      <a:r>
+                        <a:rPr lang="ko-KR" altLang="en-US" sz="1400" dirty="0" err="1">
+                          <a:latin typeface="나눔바른고딕" panose="020B0603020101020101" pitchFamily="34" charset="-127"/>
+                          <a:ea typeface="나눔바른고딕" panose="020B0603020101020101" pitchFamily="34" charset="-127"/>
+                        </a:rPr>
+                        <a:t>파쿠르</a:t>
+                      </a:r>
                       <a:r>
                         <a:rPr lang="ko-KR" altLang="en-US" sz="1400" dirty="0">
                           <a:latin typeface="나눔바른고딕" panose="020B0603020101020101" pitchFamily="34" charset="-127"/>
                           <a:ea typeface="나눔바른고딕" panose="020B0603020101020101" pitchFamily="34" charset="-127"/>
                         </a:rPr>
-                        <a:t>입력 바인딩</a:t>
+                        <a:t> 애니메이션 적용</a:t>
                       </a:r>
                     </a:p>
                   </a:txBody>
@@ -5405,116 +6032,109 @@
                           <a:latin typeface="나눔바른고딕" panose="020B0603020101020101" pitchFamily="34" charset="-127"/>
                           <a:ea typeface="나눔바른고딕" panose="020B0603020101020101" pitchFamily="34" charset="-127"/>
                         </a:rPr>
-                        <a:t>캐릭터 애니메이션 </a:t>
-                      </a:r>
-                      <a:r>
-                        <a:rPr lang="ko-KR" altLang="en-US" sz="1400" dirty="0" err="1">
-                          <a:latin typeface="나눔바른고딕" panose="020B0603020101020101" pitchFamily="34" charset="-127"/>
-                          <a:ea typeface="나눔바른고딕" panose="020B0603020101020101" pitchFamily="34" charset="-127"/>
-                        </a:rPr>
-                        <a:t>블렌드</a:t>
-                      </a:r>
-                      <a:r>
-                        <a:rPr lang="en-US" altLang="ko-KR" sz="1400" dirty="0">
+                        <a:t>씬</a:t>
+                      </a:r>
+                      <a:r>
+                        <a:rPr lang="en-US" altLang="ko-KR" sz="1400" baseline="0" dirty="0">
+                          <a:latin typeface="나눔바른고딕" panose="020B0603020101020101" pitchFamily="34" charset="-127"/>
+                          <a:ea typeface="나눔바른고딕" panose="020B0603020101020101" pitchFamily="34" charset="-127"/>
+                        </a:rPr>
+                        <a:t> </a:t>
+                      </a:r>
+                      <a:r>
+                        <a:rPr lang="ko-KR" altLang="en-US" sz="1400" baseline="0" dirty="0">
+                          <a:latin typeface="나눔바른고딕" panose="020B0603020101020101" pitchFamily="34" charset="-127"/>
+                          <a:ea typeface="나눔바른고딕" panose="020B0603020101020101" pitchFamily="34" charset="-127"/>
+                        </a:rPr>
+                        <a:t>데이터 직렬화 </a:t>
+                      </a:r>
+                      <a:r>
+                        <a:rPr lang="en-US" altLang="ko-KR" sz="1400" baseline="0" dirty="0">
+                          <a:latin typeface="나눔바른고딕" panose="020B0603020101020101" pitchFamily="34" charset="-127"/>
+                          <a:ea typeface="나눔바른고딕" panose="020B0603020101020101" pitchFamily="34" charset="-127"/>
+                        </a:rPr>
+                        <a:t>(</a:t>
+                      </a:r>
+                      <a:r>
+                        <a:rPr lang="ko-KR" altLang="en-US" sz="1400" baseline="0" dirty="0">
+                          <a:latin typeface="나눔바른고딕" panose="020B0603020101020101" pitchFamily="34" charset="-127"/>
+                          <a:ea typeface="나눔바른고딕" panose="020B0603020101020101" pitchFamily="34" charset="-127"/>
+                        </a:rPr>
+                        <a:t>장애물 배치 정보</a:t>
+                      </a:r>
+                      <a:r>
+                        <a:rPr lang="en-US" altLang="ko-KR" sz="1400" baseline="0" dirty="0">
+                          <a:latin typeface="나눔바른고딕" panose="020B0603020101020101" pitchFamily="34" charset="-127"/>
+                          <a:ea typeface="나눔바른고딕" panose="020B0603020101020101" pitchFamily="34" charset="-127"/>
+                        </a:rPr>
+                        <a:t>), </a:t>
+                      </a:r>
+                      <a:r>
+                        <a:rPr lang="ko-KR" altLang="en-US" sz="1400" baseline="0" dirty="0">
+                          <a:latin typeface="나눔바른고딕" panose="020B0603020101020101" pitchFamily="34" charset="-127"/>
+                          <a:ea typeface="나눔바른고딕" panose="020B0603020101020101" pitchFamily="34" charset="-127"/>
+                        </a:rPr>
+                        <a:t>장애물 높이 인식</a:t>
+                      </a:r>
+                      <a:r>
+                        <a:rPr lang="en-US" altLang="ko-KR" sz="1400" baseline="0" dirty="0">
                           <a:latin typeface="나눔바른고딕" panose="020B0603020101020101" pitchFamily="34" charset="-127"/>
                           <a:ea typeface="나눔바른고딕" panose="020B0603020101020101" pitchFamily="34" charset="-127"/>
                         </a:rPr>
                         <a:t>, </a:t>
                       </a:r>
-                      <a:r>
-                        <a:rPr lang="ko-KR" altLang="en-US" sz="1400" dirty="0">
-                          <a:latin typeface="나눔바른고딕" panose="020B0603020101020101" pitchFamily="34" charset="-127"/>
-                          <a:ea typeface="나눔바른고딕" panose="020B0603020101020101" pitchFamily="34" charset="-127"/>
-                        </a:rPr>
-                        <a:t>애니메이션 </a:t>
-                      </a:r>
-                      <a:r>
-                        <a:rPr lang="ko-KR" altLang="en-US" sz="1400" dirty="0" err="1">
-                          <a:latin typeface="나눔바른고딕" panose="020B0603020101020101" pitchFamily="34" charset="-127"/>
-                          <a:ea typeface="나눔바른고딕" panose="020B0603020101020101" pitchFamily="34" charset="-127"/>
-                        </a:rPr>
-                        <a:t>상태머신</a:t>
-                      </a:r>
-                      <a:r>
-                        <a:rPr lang="en-US" altLang="ko-KR" sz="1400" dirty="0">
-                          <a:latin typeface="나눔바른고딕" panose="020B0603020101020101" pitchFamily="34" charset="-127"/>
-                          <a:ea typeface="나눔바른고딕" panose="020B0603020101020101" pitchFamily="34" charset="-127"/>
-                        </a:rPr>
-                        <a:t>,</a:t>
-                      </a:r>
-                    </a:p>
-                    <a:p>
-                      <a:pPr latinLnBrk="1"/>
-                      <a:r>
-                        <a:rPr lang="ko-KR" altLang="en-US" sz="1400" dirty="0">
-                          <a:latin typeface="나눔바른고딕" panose="020B0603020101020101" pitchFamily="34" charset="-127"/>
-                          <a:ea typeface="나눔바른고딕" panose="020B0603020101020101" pitchFamily="34" charset="-127"/>
-                        </a:rPr>
-                        <a:t>물리엔진</a:t>
-                      </a:r>
-                      <a:r>
-                        <a:rPr lang="en-US" altLang="ko-KR" sz="1400" dirty="0">
-                          <a:latin typeface="나눔바른고딕" panose="020B0603020101020101" pitchFamily="34" charset="-127"/>
-                          <a:ea typeface="나눔바른고딕" panose="020B0603020101020101" pitchFamily="34" charset="-127"/>
-                        </a:rPr>
-                        <a:t>(PhysX) </a:t>
-                      </a:r>
-                      <a:r>
-                        <a:rPr lang="ko-KR" altLang="en-US" sz="1400" dirty="0">
-                          <a:latin typeface="나눔바른고딕" panose="020B0603020101020101" pitchFamily="34" charset="-127"/>
-                          <a:ea typeface="나눔바른고딕" panose="020B0603020101020101" pitchFamily="34" charset="-127"/>
-                        </a:rPr>
-                        <a:t>적용</a:t>
-                      </a:r>
-                      <a:r>
-                        <a:rPr lang="en-US" altLang="ko-KR" sz="1400" dirty="0">
-                          <a:latin typeface="나눔바른고딕" panose="020B0603020101020101" pitchFamily="34" charset="-127"/>
-                          <a:ea typeface="나눔바른고딕" panose="020B0603020101020101" pitchFamily="34" charset="-127"/>
-                        </a:rPr>
-                        <a:t>, </a:t>
-                      </a:r>
-                      <a:r>
-                        <a:rPr lang="ko-KR" altLang="en-US" sz="1400" dirty="0">
-                          <a:latin typeface="나눔바른고딕" panose="020B0603020101020101" pitchFamily="34" charset="-127"/>
-                          <a:ea typeface="나눔바른고딕" panose="020B0603020101020101" pitchFamily="34" charset="-127"/>
-                        </a:rPr>
-                        <a:t>캐릭터 입력 바인딩</a:t>
-                      </a:r>
-                      <a:r>
-                        <a:rPr lang="en-US" altLang="ko-KR" sz="1400" dirty="0">
-                          <a:latin typeface="나눔바른고딕" panose="020B0603020101020101" pitchFamily="34" charset="-127"/>
-                          <a:ea typeface="나눔바른고딕" panose="020B0603020101020101" pitchFamily="34" charset="-127"/>
-                        </a:rPr>
-                        <a:t>, </a:t>
-                      </a:r>
-                      <a:r>
-                        <a:rPr lang="ko-KR" altLang="en-US" sz="1400" dirty="0">
-                          <a:latin typeface="나눔바른고딕" panose="020B0603020101020101" pitchFamily="34" charset="-127"/>
-                          <a:ea typeface="나눔바른고딕" panose="020B0603020101020101" pitchFamily="34" charset="-127"/>
-                        </a:rPr>
-                        <a:t>캐릭터 </a:t>
-                      </a:r>
-                      <a:r>
-                        <a:rPr lang="ko-KR" altLang="en-US" sz="1400" dirty="0" err="1">
-                          <a:latin typeface="나눔바른고딕" panose="020B0603020101020101" pitchFamily="34" charset="-127"/>
-                          <a:ea typeface="나눔바른고딕" panose="020B0603020101020101" pitchFamily="34" charset="-127"/>
-                        </a:rPr>
-                        <a:t>로코모션</a:t>
-                      </a:r>
-                      <a:r>
-                        <a:rPr lang="ko-KR" altLang="en-US" sz="1400" dirty="0">
-                          <a:latin typeface="나눔바른고딕" panose="020B0603020101020101" pitchFamily="34" charset="-127"/>
-                          <a:ea typeface="나눔바른고딕" panose="020B0603020101020101" pitchFamily="34" charset="-127"/>
-                        </a:rPr>
-                        <a:t> 적용</a:t>
-                      </a:r>
+                      <a:br>
+                        <a:rPr lang="en-US" altLang="ko-KR" sz="1400" baseline="0" dirty="0">
+                          <a:latin typeface="나눔바른고딕" panose="020B0603020101020101" pitchFamily="34" charset="-127"/>
+                          <a:ea typeface="나눔바른고딕" panose="020B0603020101020101" pitchFamily="34" charset="-127"/>
+                        </a:rPr>
+                      </a:br>
+                      <a:r>
+                        <a:rPr lang="ko-KR" altLang="en-US" sz="1400" baseline="0" dirty="0">
+                          <a:latin typeface="나눔바른고딕" panose="020B0603020101020101" pitchFamily="34" charset="-127"/>
+                          <a:ea typeface="나눔바른고딕" panose="020B0603020101020101" pitchFamily="34" charset="-127"/>
+                        </a:rPr>
+                        <a:t>인식한 장애물에 대한 </a:t>
+                      </a:r>
+                      <a:r>
+                        <a:rPr lang="ko-KR" altLang="en-US" sz="1400" baseline="0" dirty="0" err="1">
+                          <a:latin typeface="나눔바른고딕" panose="020B0603020101020101" pitchFamily="34" charset="-127"/>
+                          <a:ea typeface="나눔바른고딕" panose="020B0603020101020101" pitchFamily="34" charset="-127"/>
+                        </a:rPr>
+                        <a:t>파쿠르</a:t>
+                      </a:r>
+                      <a:r>
+                        <a:rPr lang="ko-KR" altLang="en-US" sz="1400" baseline="0" dirty="0">
+                          <a:latin typeface="나눔바른고딕" panose="020B0603020101020101" pitchFamily="34" charset="-127"/>
+                          <a:ea typeface="나눔바른고딕" panose="020B0603020101020101" pitchFamily="34" charset="-127"/>
+                        </a:rPr>
+                        <a:t> 애니메이션 선택</a:t>
+                      </a:r>
+                      <a:r>
+                        <a:rPr lang="en-US" altLang="ko-KR" sz="1400" baseline="0" dirty="0">
+                          <a:latin typeface="나눔바른고딕" panose="020B0603020101020101" pitchFamily="34" charset="-127"/>
+                          <a:ea typeface="나눔바른고딕" panose="020B0603020101020101" pitchFamily="34" charset="-127"/>
+                        </a:rPr>
+                        <a:t> </a:t>
+                      </a:r>
+                      <a:r>
+                        <a:rPr lang="ko-KR" altLang="en-US" sz="1400" baseline="0" dirty="0">
+                          <a:latin typeface="나눔바른고딕" panose="020B0603020101020101" pitchFamily="34" charset="-127"/>
+                          <a:ea typeface="나눔바른고딕" panose="020B0603020101020101" pitchFamily="34" charset="-127"/>
+                        </a:rPr>
+                        <a:t>및 출력</a:t>
+                      </a:r>
+                      <a:endParaRPr lang="ko-KR" altLang="en-US" sz="1400" dirty="0">
+                        <a:latin typeface="나눔바른고딕" panose="020B0603020101020101" pitchFamily="34" charset="-127"/>
+                        <a:ea typeface="나눔바른고딕" panose="020B0603020101020101" pitchFamily="34" charset="-127"/>
+                      </a:endParaRPr>
                     </a:p>
                   </a:txBody>
                   <a:tcPr anchor="ctr"/>
                 </a:tc>
                 <a:extLst>
                   <a:ext uri="{0D108BD9-81ED-4DB2-BD59-A6C34878D82A}">
-                    <a16:rowId xmlns="" xmlns:a16="http://schemas.microsoft.com/office/drawing/2014/main" val="10002"/>
+                    <a16:rowId xmlns:a16="http://schemas.microsoft.com/office/drawing/2014/main" xmlns="" val="10003"/>
                   </a:ext>
                 </a:extLst>
               </a:tr>
@@ -5530,7 +6150,7 @@
                           <a:latin typeface="나눔바른고딕" panose="020B0603020101020101" pitchFamily="34" charset="-127"/>
                           <a:ea typeface="나눔바른고딕" panose="020B0603020101020101" pitchFamily="34" charset="-127"/>
                         </a:rPr>
-                        <a:t>3</a:t>
+                        <a:t>4</a:t>
                       </a:r>
                       <a:endParaRPr lang="ko-KR" altLang="en-US" dirty="0">
                         <a:latin typeface="나눔바른고딕" panose="020B0603020101020101" pitchFamily="34" charset="-127"/>
@@ -5547,31 +6167,17 @@
                     <a:p>
                       <a:pPr latinLnBrk="1"/>
                       <a:r>
+                        <a:rPr lang="ko-KR" altLang="en-US" sz="1400" dirty="0" err="1">
+                          <a:latin typeface="나눔바른고딕" panose="020B0603020101020101" pitchFamily="34" charset="-127"/>
+                          <a:ea typeface="나눔바른고딕" panose="020B0603020101020101" pitchFamily="34" charset="-127"/>
+                        </a:rPr>
+                        <a:t>파쿠르</a:t>
+                      </a:r>
+                      <a:r>
                         <a:rPr lang="ko-KR" altLang="en-US" sz="1400" dirty="0">
                           <a:latin typeface="나눔바른고딕" panose="020B0603020101020101" pitchFamily="34" charset="-127"/>
                           <a:ea typeface="나눔바른고딕" panose="020B0603020101020101" pitchFamily="34" charset="-127"/>
                         </a:rPr>
-                        <a:t>씬 배치</a:t>
-                      </a:r>
-                      <a:r>
-                        <a:rPr lang="en-US" altLang="ko-KR" sz="1400" dirty="0">
-                          <a:latin typeface="나눔바른고딕" panose="020B0603020101020101" pitchFamily="34" charset="-127"/>
-                          <a:ea typeface="나눔바른고딕" panose="020B0603020101020101" pitchFamily="34" charset="-127"/>
-                        </a:rPr>
-                        <a:t>, </a:t>
-                      </a:r>
-                      <a:r>
-                        <a:rPr lang="ko-KR" altLang="en-US" sz="1400" dirty="0">
-                          <a:latin typeface="나눔바른고딕" panose="020B0603020101020101" pitchFamily="34" charset="-127"/>
-                          <a:ea typeface="나눔바른고딕" panose="020B0603020101020101" pitchFamily="34" charset="-127"/>
-                        </a:rPr>
-                        <a:t>캐릭터</a:t>
-                      </a:r>
-                      <a:r>
-                        <a:rPr lang="en-US" altLang="ko-KR" sz="1400" dirty="0">
-                          <a:latin typeface="나눔바른고딕" panose="020B0603020101020101" pitchFamily="34" charset="-127"/>
-                          <a:ea typeface="나눔바른고딕" panose="020B0603020101020101" pitchFamily="34" charset="-127"/>
-                        </a:rPr>
                         <a:t> </a:t>
                       </a:r>
                       <a:r>
@@ -5579,15 +6185,12 @@
                           <a:latin typeface="나눔바른고딕" panose="020B0603020101020101" pitchFamily="34" charset="-127"/>
                           <a:ea typeface="나눔바른고딕" panose="020B0603020101020101" pitchFamily="34" charset="-127"/>
                         </a:rPr>
-                        <a:t>파쿠르</a:t>
-                      </a:r>
-                      <a:r>
-                        <a:rPr lang="ko-KR" altLang="en-US" sz="1400" dirty="0">
-                          <a:latin typeface="나눔바른고딕" panose="020B0603020101020101" pitchFamily="34" charset="-127"/>
-                          <a:ea typeface="나눔바른고딕" panose="020B0603020101020101" pitchFamily="34" charset="-127"/>
-                        </a:rPr>
-                        <a:t> 애니메이션 적용</a:t>
-                      </a:r>
+                        <a:t>프로토타입</a:t>
+                      </a:r>
+                      <a:endParaRPr lang="ko-KR" altLang="en-US" sz="1400" dirty="0">
+                        <a:latin typeface="나눔바른고딕" panose="020B0603020101020101" pitchFamily="34" charset="-127"/>
+                        <a:ea typeface="나눔바른고딕" panose="020B0603020101020101" pitchFamily="34" charset="-127"/>
+                      </a:endParaRPr>
                     </a:p>
                   </a:txBody>
                   <a:tcPr anchor="ctr"/>
@@ -5603,99 +6206,107 @@
                           <a:latin typeface="나눔바른고딕" panose="020B0603020101020101" pitchFamily="34" charset="-127"/>
                           <a:ea typeface="나눔바른고딕" panose="020B0603020101020101" pitchFamily="34" charset="-127"/>
                         </a:rPr>
-                        <a:t>씬</a:t>
+                        <a:t>높이에 따른 장애물</a:t>
+                      </a:r>
+                      <a:r>
+                        <a:rPr lang="ko-KR" altLang="en-US" sz="1400" baseline="0" dirty="0">
+                          <a:latin typeface="나눔바른고딕" panose="020B0603020101020101" pitchFamily="34" charset="-127"/>
+                          <a:ea typeface="나눔바른고딕" panose="020B0603020101020101" pitchFamily="34" charset="-127"/>
+                        </a:rPr>
+                        <a:t> </a:t>
+                      </a:r>
+                      <a:r>
+                        <a:rPr lang="ko-KR" altLang="en-US" sz="1400" baseline="0" dirty="0" err="1">
+                          <a:latin typeface="나눔바른고딕" panose="020B0603020101020101" pitchFamily="34" charset="-127"/>
+                          <a:ea typeface="나눔바른고딕" panose="020B0603020101020101" pitchFamily="34" charset="-127"/>
+                        </a:rPr>
+                        <a:t>파쿠르</a:t>
+                      </a:r>
+                      <a:r>
+                        <a:rPr lang="ko-KR" altLang="en-US" sz="1400" baseline="0" dirty="0">
+                          <a:latin typeface="나눔바른고딕" panose="020B0603020101020101" pitchFamily="34" charset="-127"/>
+                          <a:ea typeface="나눔바른고딕" panose="020B0603020101020101" pitchFamily="34" charset="-127"/>
+                        </a:rPr>
+                        <a:t> 처리</a:t>
                       </a:r>
                       <a:r>
                         <a:rPr lang="en-US" altLang="ko-KR" sz="1400" baseline="0" dirty="0">
                           <a:latin typeface="나눔바른고딕" panose="020B0603020101020101" pitchFamily="34" charset="-127"/>
                           <a:ea typeface="나눔바른고딕" panose="020B0603020101020101" pitchFamily="34" charset="-127"/>
                         </a:rPr>
-                        <a:t> </a:t>
+                        <a:t>, </a:t>
+                      </a:r>
+                      <a:r>
+                        <a:rPr lang="ko-KR" altLang="en-US" sz="1400" dirty="0">
+                          <a:latin typeface="나눔바른고딕" panose="020B0603020101020101" pitchFamily="34" charset="-127"/>
+                          <a:ea typeface="나눔바른고딕" panose="020B0603020101020101" pitchFamily="34" charset="-127"/>
+                        </a:rPr>
+                        <a:t>평지</a:t>
+                      </a:r>
+                      <a:r>
+                        <a:rPr lang="en-US" altLang="ko-KR" sz="1400" dirty="0">
+                          <a:latin typeface="나눔바른고딕" panose="020B0603020101020101" pitchFamily="34" charset="-127"/>
+                          <a:ea typeface="나눔바른고딕" panose="020B0603020101020101" pitchFamily="34" charset="-127"/>
+                        </a:rPr>
+                        <a:t>-</a:t>
+                      </a:r>
+                      <a:r>
+                        <a:rPr lang="ko-KR" altLang="en-US" sz="1400" dirty="0">
+                          <a:latin typeface="나눔바른고딕" panose="020B0603020101020101" pitchFamily="34" charset="-127"/>
+                          <a:ea typeface="나눔바른고딕" panose="020B0603020101020101" pitchFamily="34" charset="-127"/>
+                        </a:rPr>
+                        <a:t>벽면 간 애니메이션</a:t>
                       </a:r>
                       <a:r>
                         <a:rPr lang="ko-KR" altLang="en-US" sz="1400" baseline="0" dirty="0">
                           <a:latin typeface="나눔바른고딕" panose="020B0603020101020101" pitchFamily="34" charset="-127"/>
                           <a:ea typeface="나눔바른고딕" panose="020B0603020101020101" pitchFamily="34" charset="-127"/>
                         </a:rPr>
-                        <a:t>데이터 직렬화 </a:t>
+                        <a:t> 상태</a:t>
+                      </a:r>
+                      <a:r>
+                        <a:rPr lang="ko-KR" altLang="en-US" sz="1400" dirty="0">
+                          <a:latin typeface="나눔바른고딕" panose="020B0603020101020101" pitchFamily="34" charset="-127"/>
+                          <a:ea typeface="나눔바른고딕" panose="020B0603020101020101" pitchFamily="34" charset="-127"/>
+                        </a:rPr>
+                        <a:t> 전환</a:t>
                       </a:r>
                       <a:r>
                         <a:rPr lang="en-US" altLang="ko-KR" sz="1400" baseline="0" dirty="0">
                           <a:latin typeface="나눔바른고딕" panose="020B0603020101020101" pitchFamily="34" charset="-127"/>
                           <a:ea typeface="나눔바른고딕" panose="020B0603020101020101" pitchFamily="34" charset="-127"/>
                         </a:rPr>
-                        <a:t>(</a:t>
+                        <a:t> (</a:t>
                       </a:r>
                       <a:r>
                         <a:rPr lang="ko-KR" altLang="en-US" sz="1400" baseline="0" dirty="0">
                           <a:latin typeface="나눔바른고딕" panose="020B0603020101020101" pitchFamily="34" charset="-127"/>
                           <a:ea typeface="나눔바른고딕" panose="020B0603020101020101" pitchFamily="34" charset="-127"/>
                         </a:rPr>
-                        <a:t>장애물 배치 정보</a:t>
+                        <a:t>벽면을 올라 평지에 도달</a:t>
                       </a:r>
                       <a:r>
                         <a:rPr lang="en-US" altLang="ko-KR" sz="1400" baseline="0" dirty="0">
                           <a:latin typeface="나눔바른고딕" panose="020B0603020101020101" pitchFamily="34" charset="-127"/>
                           <a:ea typeface="나눔바른고딕" panose="020B0603020101020101" pitchFamily="34" charset="-127"/>
                         </a:rPr>
-                        <a:t>), </a:t>
+                        <a:t>, </a:t>
                       </a:r>
                       <a:r>
                         <a:rPr lang="ko-KR" altLang="en-US" sz="1400" baseline="0" dirty="0">
                           <a:latin typeface="나눔바른고딕" panose="020B0603020101020101" pitchFamily="34" charset="-127"/>
                           <a:ea typeface="나눔바른고딕" panose="020B0603020101020101" pitchFamily="34" charset="-127"/>
                         </a:rPr>
-                        <a:t>장애물 높이 인식</a:t>
+                        <a:t>벽면에서 내려와 평지에 도달 등</a:t>
                       </a:r>
                       <a:r>
                         <a:rPr lang="en-US" altLang="ko-KR" sz="1400" baseline="0" dirty="0">
                           <a:latin typeface="나눔바른고딕" panose="020B0603020101020101" pitchFamily="34" charset="-127"/>
                           <a:ea typeface="나눔바른고딕" panose="020B0603020101020101" pitchFamily="34" charset="-127"/>
                         </a:rPr>
-                        <a:t>, </a:t>
-                      </a:r>
-                      <a:br>
-                        <a:rPr lang="en-US" altLang="ko-KR" sz="1400" baseline="0" dirty="0">
-                          <a:latin typeface="나눔바른고딕" panose="020B0603020101020101" pitchFamily="34" charset="-127"/>
-                          <a:ea typeface="나눔바른고딕" panose="020B0603020101020101" pitchFamily="34" charset="-127"/>
-                        </a:rPr>
-                      </a:br>
-                      <a:r>
-                        <a:rPr lang="ko-KR" altLang="en-US" sz="1400" baseline="0" dirty="0">
-                          <a:latin typeface="나눔바른고딕" panose="020B0603020101020101" pitchFamily="34" charset="-127"/>
-                          <a:ea typeface="나눔바른고딕" panose="020B0603020101020101" pitchFamily="34" charset="-127"/>
-                        </a:rPr>
-                        <a:t>인식한 장애물에 대한 </a:t>
-                      </a:r>
-                      <a:r>
-                        <a:rPr lang="ko-KR" altLang="en-US" sz="1400" baseline="0" dirty="0" err="1">
-                          <a:latin typeface="나눔바른고딕" panose="020B0603020101020101" pitchFamily="34" charset="-127"/>
-                          <a:ea typeface="나눔바른고딕" panose="020B0603020101020101" pitchFamily="34" charset="-127"/>
-                        </a:rPr>
-                        <a:t>파쿠르</a:t>
-                      </a:r>
-                      <a:r>
-                        <a:rPr lang="ko-KR" altLang="en-US" sz="1400" baseline="0" dirty="0">
-                          <a:latin typeface="나눔바른고딕" panose="020B0603020101020101" pitchFamily="34" charset="-127"/>
-                          <a:ea typeface="나눔바른고딕" panose="020B0603020101020101" pitchFamily="34" charset="-127"/>
-                        </a:rPr>
-                        <a:t> 애니메이션 선택</a:t>
-                      </a:r>
-                      <a:r>
-                        <a:rPr lang="en-US" altLang="ko-KR" sz="1400" baseline="0" dirty="0">
-                          <a:latin typeface="나눔바른고딕" panose="020B0603020101020101" pitchFamily="34" charset="-127"/>
-                          <a:ea typeface="나눔바른고딕" panose="020B0603020101020101" pitchFamily="34" charset="-127"/>
-                        </a:rPr>
-                        <a:t> </a:t>
-                      </a:r>
-                      <a:r>
-                        <a:rPr lang="ko-KR" altLang="en-US" sz="1400" baseline="0" dirty="0">
-                          <a:latin typeface="나눔바른고딕" panose="020B0603020101020101" pitchFamily="34" charset="-127"/>
-                          <a:ea typeface="나눔바른고딕" panose="020B0603020101020101" pitchFamily="34" charset="-127"/>
-                        </a:rPr>
-                        <a:t>및 출력</a:t>
-                      </a:r>
-                      <a:endParaRPr lang="ko-KR" altLang="en-US" sz="1400" dirty="0">
+                        <a:t>)</a:t>
+                      </a:r>
+                      <a:endParaRPr lang="en-US" altLang="ko-KR" sz="1400" dirty="0">
                         <a:latin typeface="나눔바른고딕" panose="020B0603020101020101" pitchFamily="34" charset="-127"/>
                         <a:ea typeface="나눔바른고딕" panose="020B0603020101020101" pitchFamily="34" charset="-127"/>
                       </a:endParaRPr>
@@ -5705,7 +6316,7 @@
                 </a:tc>
                 <a:extLst>
                   <a:ext uri="{0D108BD9-81ED-4DB2-BD59-A6C34878D82A}">
-                    <a16:rowId xmlns="" xmlns:a16="http://schemas.microsoft.com/office/drawing/2014/main" val="10003"/>
+                    <a16:rowId xmlns:a16="http://schemas.microsoft.com/office/drawing/2014/main" xmlns="" val="10004"/>
                   </a:ext>
                 </a:extLst>
               </a:tr>
@@ -5721,7 +6332,7 @@
                           <a:latin typeface="나눔바른고딕" panose="020B0603020101020101" pitchFamily="34" charset="-127"/>
                           <a:ea typeface="나눔바른고딕" panose="020B0603020101020101" pitchFamily="34" charset="-127"/>
                         </a:rPr>
-                        <a:t>4</a:t>
+                        <a:t>5</a:t>
                       </a:r>
                       <a:endParaRPr lang="ko-KR" altLang="en-US" dirty="0">
                         <a:latin typeface="나눔바른고딕" panose="020B0603020101020101" pitchFamily="34" charset="-127"/>
@@ -5749,14 +6360,143 @@
                           <a:latin typeface="나눔바른고딕" panose="020B0603020101020101" pitchFamily="34" charset="-127"/>
                           <a:ea typeface="나눔바른고딕" panose="020B0603020101020101" pitchFamily="34" charset="-127"/>
                         </a:rPr>
+                        <a:t> 시스템 보완</a:t>
+                      </a:r>
+                    </a:p>
+                  </a:txBody>
+                  <a:tcPr anchor="ctr"/>
+                </a:tc>
+                <a:tc>
+                  <a:txBody>
+                    <a:bodyPr/>
+                    <a:lstStyle/>
+                    <a:p>
+                      <a:pPr latinLnBrk="1"/>
+                      <a:r>
+                        <a:rPr lang="ko-KR" altLang="en-US" sz="1400" dirty="0">
+                          <a:latin typeface="나눔바른고딕" panose="020B0603020101020101" pitchFamily="34" charset="-127"/>
+                          <a:ea typeface="나눔바른고딕" panose="020B0603020101020101" pitchFamily="34" charset="-127"/>
+                        </a:rPr>
+                        <a:t>애니메이션 </a:t>
+                      </a:r>
+                      <a:r>
+                        <a:rPr lang="en-US" altLang="ko-KR" sz="1400" dirty="0">
+                          <a:latin typeface="나눔바른고딕" panose="020B0603020101020101" pitchFamily="34" charset="-127"/>
+                          <a:ea typeface="나눔바른고딕" panose="020B0603020101020101" pitchFamily="34" charset="-127"/>
+                        </a:rPr>
+                        <a:t>IK </a:t>
+                      </a:r>
+                      <a:r>
+                        <a:rPr lang="ko-KR" altLang="en-US" sz="1400" dirty="0">
+                          <a:latin typeface="나눔바른고딕" panose="020B0603020101020101" pitchFamily="34" charset="-127"/>
+                          <a:ea typeface="나눔바른고딕" panose="020B0603020101020101" pitchFamily="34" charset="-127"/>
+                        </a:rPr>
+                        <a:t>적용</a:t>
+                      </a:r>
+                      <a:r>
+                        <a:rPr lang="en-US" altLang="ko-KR" sz="1400" dirty="0">
+                          <a:latin typeface="나눔바른고딕" panose="020B0603020101020101" pitchFamily="34" charset="-127"/>
+                          <a:ea typeface="나눔바른고딕" panose="020B0603020101020101" pitchFamily="34" charset="-127"/>
+                        </a:rPr>
+                        <a:t>, </a:t>
+                      </a:r>
+                      <a:r>
+                        <a:rPr lang="ko-KR" altLang="en-US" sz="1400" dirty="0" err="1">
+                          <a:latin typeface="나눔바른고딕" panose="020B0603020101020101" pitchFamily="34" charset="-127"/>
+                          <a:ea typeface="나눔바른고딕" panose="020B0603020101020101" pitchFamily="34" charset="-127"/>
+                        </a:rPr>
+                        <a:t>파쿠르</a:t>
+                      </a:r>
+                      <a:r>
+                        <a:rPr lang="ko-KR" altLang="en-US" sz="1400" dirty="0">
+                          <a:latin typeface="나눔바른고딕" panose="020B0603020101020101" pitchFamily="34" charset="-127"/>
+                          <a:ea typeface="나눔바른고딕" panose="020B0603020101020101" pitchFamily="34" charset="-127"/>
+                        </a:rPr>
+                        <a:t> 시</a:t>
+                      </a:r>
+                      <a:r>
+                        <a:rPr lang="en-US" altLang="ko-KR" sz="1400" dirty="0">
+                          <a:latin typeface="나눔바른고딕" panose="020B0603020101020101" pitchFamily="34" charset="-127"/>
+                          <a:ea typeface="나눔바른고딕" panose="020B0603020101020101" pitchFamily="34" charset="-127"/>
+                        </a:rPr>
                         <a:t> </a:t>
                       </a:r>
                       <a:r>
-                        <a:rPr lang="ko-KR" altLang="en-US" sz="1400" dirty="0" err="1">
-                          <a:latin typeface="나눔바른고딕" panose="020B0603020101020101" pitchFamily="34" charset="-127"/>
-                          <a:ea typeface="나눔바른고딕" panose="020B0603020101020101" pitchFamily="34" charset="-127"/>
-                        </a:rPr>
-                        <a:t>프로토타입</a:t>
+                        <a:rPr lang="ko-KR" altLang="en-US" sz="1400" dirty="0">
+                          <a:latin typeface="나눔바른고딕" panose="020B0603020101020101" pitchFamily="34" charset="-127"/>
+                          <a:ea typeface="나눔바른고딕" panose="020B0603020101020101" pitchFamily="34" charset="-127"/>
+                        </a:rPr>
+                        <a:t>캐릭터 손 위치 </a:t>
+                      </a:r>
+                      <a:r>
+                        <a:rPr lang="en-US" altLang="ko-KR" sz="1400" dirty="0">
+                          <a:latin typeface="나눔바른고딕" panose="020B0603020101020101" pitchFamily="34" charset="-127"/>
+                          <a:ea typeface="나눔바른고딕" panose="020B0603020101020101" pitchFamily="34" charset="-127"/>
+                        </a:rPr>
+                        <a:t>IK</a:t>
+                      </a:r>
+                      <a:r>
+                        <a:rPr lang="ko-KR" altLang="en-US" sz="1400" dirty="0">
+                          <a:latin typeface="나눔바른고딕" panose="020B0603020101020101" pitchFamily="34" charset="-127"/>
+                          <a:ea typeface="나눔바른고딕" panose="020B0603020101020101" pitchFamily="34" charset="-127"/>
+                        </a:rPr>
+                        <a:t>를 통해 보정</a:t>
+                      </a:r>
+                      <a:endParaRPr lang="en-US" altLang="ko-KR" sz="1400" dirty="0">
+                        <a:latin typeface="나눔바른고딕" panose="020B0603020101020101" pitchFamily="34" charset="-127"/>
+                        <a:ea typeface="나눔바른고딕" panose="020B0603020101020101" pitchFamily="34" charset="-127"/>
+                      </a:endParaRPr>
+                    </a:p>
+                  </a:txBody>
+                  <a:tcPr anchor="ctr"/>
+                </a:tc>
+                <a:extLst>
+                  <a:ext uri="{0D108BD9-81ED-4DB2-BD59-A6C34878D82A}">
+                    <a16:rowId xmlns:a16="http://schemas.microsoft.com/office/drawing/2014/main" xmlns="" val="10005"/>
+                  </a:ext>
+                </a:extLst>
+              </a:tr>
+              <a:tr h="627956">
+                <a:tc>
+                  <a:txBody>
+                    <a:bodyPr/>
+                    <a:lstStyle/>
+                    <a:p>
+                      <a:pPr algn="ctr" latinLnBrk="1"/>
+                      <a:r>
+                        <a:rPr lang="en-US" altLang="ko-KR" dirty="0">
+                          <a:latin typeface="나눔바른고딕" panose="020B0603020101020101" pitchFamily="34" charset="-127"/>
+                          <a:ea typeface="나눔바른고딕" panose="020B0603020101020101" pitchFamily="34" charset="-127"/>
+                        </a:rPr>
+                        <a:t>6</a:t>
+                      </a:r>
+                      <a:endParaRPr lang="ko-KR" altLang="en-US" dirty="0">
+                        <a:latin typeface="나눔바른고딕" panose="020B0603020101020101" pitchFamily="34" charset="-127"/>
+                        <a:ea typeface="나눔바른고딕" panose="020B0603020101020101" pitchFamily="34" charset="-127"/>
+                      </a:endParaRPr>
+                    </a:p>
+                  </a:txBody>
+                  <a:tcPr anchor="ctr"/>
+                </a:tc>
+                <a:tc>
+                  <a:txBody>
+                    <a:bodyPr/>
+                    <a:lstStyle/>
+                    <a:p>
+                      <a:pPr latinLnBrk="1"/>
+                      <a:r>
+                        <a:rPr lang="ko-KR" altLang="en-US" sz="1400" dirty="0">
+                          <a:latin typeface="나눔바른고딕" panose="020B0603020101020101" pitchFamily="34" charset="-127"/>
+                          <a:ea typeface="나눔바른고딕" panose="020B0603020101020101" pitchFamily="34" charset="-127"/>
+                        </a:rPr>
+                        <a:t>복잡한 지형 애니메이션 처리 </a:t>
+                      </a:r>
+                      <a:r>
+                        <a:rPr lang="en-US" altLang="ko-KR" sz="1400" dirty="0">
+                          <a:latin typeface="나눔바른고딕" panose="020B0603020101020101" pitchFamily="34" charset="-127"/>
+                          <a:ea typeface="나눔바른고딕" panose="020B0603020101020101" pitchFamily="34" charset="-127"/>
+                        </a:rPr>
+                        <a:t>1</a:t>
                       </a:r>
                       <a:endParaRPr lang="ko-KR" altLang="en-US" sz="1400" dirty="0">
                         <a:latin typeface="나눔바른고딕" panose="020B0603020101020101" pitchFamily="34" charset="-127"/>
@@ -5773,317 +6513,6 @@
                     <a:p>
                       <a:pPr latinLnBrk="1"/>
                       <a:r>
-                        <a:rPr lang="ko-KR" altLang="en-US" sz="1400" dirty="0">
-                          <a:latin typeface="나눔바른고딕" panose="020B0603020101020101" pitchFamily="34" charset="-127"/>
-                          <a:ea typeface="나눔바른고딕" panose="020B0603020101020101" pitchFamily="34" charset="-127"/>
-                        </a:rPr>
-                        <a:t>높이에 따른 장애물</a:t>
-                      </a:r>
-                      <a:r>
-                        <a:rPr lang="ko-KR" altLang="en-US" sz="1400" baseline="0" dirty="0">
-                          <a:latin typeface="나눔바른고딕" panose="020B0603020101020101" pitchFamily="34" charset="-127"/>
-                          <a:ea typeface="나눔바른고딕" panose="020B0603020101020101" pitchFamily="34" charset="-127"/>
-                        </a:rPr>
-                        <a:t> </a:t>
-                      </a:r>
-                      <a:r>
-                        <a:rPr lang="ko-KR" altLang="en-US" sz="1400" baseline="0" dirty="0" err="1">
-                          <a:latin typeface="나눔바른고딕" panose="020B0603020101020101" pitchFamily="34" charset="-127"/>
-                          <a:ea typeface="나눔바른고딕" panose="020B0603020101020101" pitchFamily="34" charset="-127"/>
-                        </a:rPr>
-                        <a:t>파쿠르</a:t>
-                      </a:r>
-                      <a:r>
-                        <a:rPr lang="ko-KR" altLang="en-US" sz="1400" baseline="0" dirty="0">
-                          <a:latin typeface="나눔바른고딕" panose="020B0603020101020101" pitchFamily="34" charset="-127"/>
-                          <a:ea typeface="나눔바른고딕" panose="020B0603020101020101" pitchFamily="34" charset="-127"/>
-                        </a:rPr>
-                        <a:t> 처리</a:t>
-                      </a:r>
-                      <a:r>
-                        <a:rPr lang="en-US" altLang="ko-KR" sz="1400" baseline="0" dirty="0">
-                          <a:latin typeface="나눔바른고딕" panose="020B0603020101020101" pitchFamily="34" charset="-127"/>
-                          <a:ea typeface="나눔바른고딕" panose="020B0603020101020101" pitchFamily="34" charset="-127"/>
-                        </a:rPr>
-                        <a:t>, </a:t>
-                      </a:r>
-                      <a:r>
-                        <a:rPr lang="ko-KR" altLang="en-US" sz="1400" dirty="0">
-                          <a:latin typeface="나눔바른고딕" panose="020B0603020101020101" pitchFamily="34" charset="-127"/>
-                          <a:ea typeface="나눔바른고딕" panose="020B0603020101020101" pitchFamily="34" charset="-127"/>
-                        </a:rPr>
-                        <a:t>평지</a:t>
-                      </a:r>
-                      <a:r>
-                        <a:rPr lang="en-US" altLang="ko-KR" sz="1400" dirty="0">
-                          <a:latin typeface="나눔바른고딕" panose="020B0603020101020101" pitchFamily="34" charset="-127"/>
-                          <a:ea typeface="나눔바른고딕" panose="020B0603020101020101" pitchFamily="34" charset="-127"/>
-                        </a:rPr>
-                        <a:t>-</a:t>
-                      </a:r>
-                      <a:r>
-                        <a:rPr lang="ko-KR" altLang="en-US" sz="1400" dirty="0">
-                          <a:latin typeface="나눔바른고딕" panose="020B0603020101020101" pitchFamily="34" charset="-127"/>
-                          <a:ea typeface="나눔바른고딕" panose="020B0603020101020101" pitchFamily="34" charset="-127"/>
-                        </a:rPr>
-                        <a:t>벽면 간 애니메이션</a:t>
-                      </a:r>
-                      <a:r>
-                        <a:rPr lang="ko-KR" altLang="en-US" sz="1400" baseline="0" dirty="0">
-                          <a:latin typeface="나눔바른고딕" panose="020B0603020101020101" pitchFamily="34" charset="-127"/>
-                          <a:ea typeface="나눔바른고딕" panose="020B0603020101020101" pitchFamily="34" charset="-127"/>
-                        </a:rPr>
-                        <a:t> 상태</a:t>
-                      </a:r>
-                      <a:r>
-                        <a:rPr lang="ko-KR" altLang="en-US" sz="1400" dirty="0">
-                          <a:latin typeface="나눔바른고딕" panose="020B0603020101020101" pitchFamily="34" charset="-127"/>
-                          <a:ea typeface="나눔바른고딕" panose="020B0603020101020101" pitchFamily="34" charset="-127"/>
-                        </a:rPr>
-                        <a:t> 전환</a:t>
-                      </a:r>
-                      <a:r>
-                        <a:rPr lang="en-US" altLang="ko-KR" sz="1400" baseline="0" dirty="0">
-                          <a:latin typeface="나눔바른고딕" panose="020B0603020101020101" pitchFamily="34" charset="-127"/>
-                          <a:ea typeface="나눔바른고딕" panose="020B0603020101020101" pitchFamily="34" charset="-127"/>
-                        </a:rPr>
-                        <a:t> (</a:t>
-                      </a:r>
-                      <a:r>
-                        <a:rPr lang="ko-KR" altLang="en-US" sz="1400" baseline="0" dirty="0">
-                          <a:latin typeface="나눔바른고딕" panose="020B0603020101020101" pitchFamily="34" charset="-127"/>
-                          <a:ea typeface="나눔바른고딕" panose="020B0603020101020101" pitchFamily="34" charset="-127"/>
-                        </a:rPr>
-                        <a:t>벽면을 올라 평지에 도달</a:t>
-                      </a:r>
-                      <a:r>
-                        <a:rPr lang="en-US" altLang="ko-KR" sz="1400" baseline="0" dirty="0">
-                          <a:latin typeface="나눔바른고딕" panose="020B0603020101020101" pitchFamily="34" charset="-127"/>
-                          <a:ea typeface="나눔바른고딕" panose="020B0603020101020101" pitchFamily="34" charset="-127"/>
-                        </a:rPr>
-                        <a:t>, </a:t>
-                      </a:r>
-                      <a:r>
-                        <a:rPr lang="ko-KR" altLang="en-US" sz="1400" baseline="0" dirty="0">
-                          <a:latin typeface="나눔바른고딕" panose="020B0603020101020101" pitchFamily="34" charset="-127"/>
-                          <a:ea typeface="나눔바른고딕" panose="020B0603020101020101" pitchFamily="34" charset="-127"/>
-                        </a:rPr>
-                        <a:t>벽면에서 내려와 평지에 도달 등</a:t>
-                      </a:r>
-                      <a:r>
-                        <a:rPr lang="en-US" altLang="ko-KR" sz="1400" baseline="0" dirty="0">
-                          <a:latin typeface="나눔바른고딕" panose="020B0603020101020101" pitchFamily="34" charset="-127"/>
-                          <a:ea typeface="나눔바른고딕" panose="020B0603020101020101" pitchFamily="34" charset="-127"/>
-                        </a:rPr>
-                        <a:t>)</a:t>
-                      </a:r>
-                      <a:endParaRPr lang="en-US" altLang="ko-KR" sz="1400" dirty="0">
-                        <a:latin typeface="나눔바른고딕" panose="020B0603020101020101" pitchFamily="34" charset="-127"/>
-                        <a:ea typeface="나눔바른고딕" panose="020B0603020101020101" pitchFamily="34" charset="-127"/>
-                      </a:endParaRPr>
-                    </a:p>
-                  </a:txBody>
-                  <a:tcPr anchor="ctr"/>
-                </a:tc>
-                <a:extLst>
-                  <a:ext uri="{0D108BD9-81ED-4DB2-BD59-A6C34878D82A}">
-                    <a16:rowId xmlns="" xmlns:a16="http://schemas.microsoft.com/office/drawing/2014/main" val="10004"/>
-                  </a:ext>
-                </a:extLst>
-              </a:tr>
-              <a:tr h="627956">
-                <a:tc>
-                  <a:txBody>
-                    <a:bodyPr/>
-                    <a:lstStyle/>
-                    <a:p>
-                      <a:pPr algn="ctr" latinLnBrk="1"/>
-                      <a:r>
-                        <a:rPr lang="en-US" altLang="ko-KR" dirty="0">
-                          <a:latin typeface="나눔바른고딕" panose="020B0603020101020101" pitchFamily="34" charset="-127"/>
-                          <a:ea typeface="나눔바른고딕" panose="020B0603020101020101" pitchFamily="34" charset="-127"/>
-                        </a:rPr>
-                        <a:t>5</a:t>
-                      </a:r>
-                      <a:endParaRPr lang="ko-KR" altLang="en-US" dirty="0">
-                        <a:latin typeface="나눔바른고딕" panose="020B0603020101020101" pitchFamily="34" charset="-127"/>
-                        <a:ea typeface="나눔바른고딕" panose="020B0603020101020101" pitchFamily="34" charset="-127"/>
-                      </a:endParaRPr>
-                    </a:p>
-                  </a:txBody>
-                  <a:tcPr anchor="ctr"/>
-                </a:tc>
-                <a:tc>
-                  <a:txBody>
-                    <a:bodyPr/>
-                    <a:lstStyle/>
-                    <a:p>
-                      <a:pPr latinLnBrk="1"/>
-                      <a:r>
-                        <a:rPr lang="ko-KR" altLang="en-US" sz="1400" dirty="0" err="1">
-                          <a:latin typeface="나눔바른고딕" panose="020B0603020101020101" pitchFamily="34" charset="-127"/>
-                          <a:ea typeface="나눔바른고딕" panose="020B0603020101020101" pitchFamily="34" charset="-127"/>
-                        </a:rPr>
-                        <a:t>파쿠르</a:t>
-                      </a:r>
-                      <a:r>
-                        <a:rPr lang="ko-KR" altLang="en-US" sz="1400" dirty="0">
-                          <a:latin typeface="나눔바른고딕" panose="020B0603020101020101" pitchFamily="34" charset="-127"/>
-                          <a:ea typeface="나눔바른고딕" panose="020B0603020101020101" pitchFamily="34" charset="-127"/>
-                        </a:rPr>
-                        <a:t> 시스템 보완</a:t>
-                      </a:r>
-                    </a:p>
-                  </a:txBody>
-                  <a:tcPr anchor="ctr"/>
-                </a:tc>
-                <a:tc>
-                  <a:txBody>
-                    <a:bodyPr/>
-                    <a:lstStyle/>
-                    <a:p>
-                      <a:pPr latinLnBrk="1"/>
-                      <a:r>
-                        <a:rPr lang="ko-KR" altLang="en-US" sz="1400" dirty="0">
-                          <a:latin typeface="나눔바른고딕" panose="020B0603020101020101" pitchFamily="34" charset="-127"/>
-                          <a:ea typeface="나눔바른고딕" panose="020B0603020101020101" pitchFamily="34" charset="-127"/>
-                        </a:rPr>
-                        <a:t>애니메이션 </a:t>
-                      </a:r>
-                      <a:r>
-                        <a:rPr lang="en-US" altLang="ko-KR" sz="1400" dirty="0">
-                          <a:latin typeface="나눔바른고딕" panose="020B0603020101020101" pitchFamily="34" charset="-127"/>
-                          <a:ea typeface="나눔바른고딕" panose="020B0603020101020101" pitchFamily="34" charset="-127"/>
-                        </a:rPr>
-                        <a:t>IK </a:t>
-                      </a:r>
-                      <a:r>
-                        <a:rPr lang="ko-KR" altLang="en-US" sz="1400" dirty="0">
-                          <a:latin typeface="나눔바른고딕" panose="020B0603020101020101" pitchFamily="34" charset="-127"/>
-                          <a:ea typeface="나눔바른고딕" panose="020B0603020101020101" pitchFamily="34" charset="-127"/>
-                        </a:rPr>
-                        <a:t>적용</a:t>
-                      </a:r>
-                      <a:r>
-                        <a:rPr lang="en-US" altLang="ko-KR" sz="1400" dirty="0">
-                          <a:latin typeface="나눔바른고딕" panose="020B0603020101020101" pitchFamily="34" charset="-127"/>
-                          <a:ea typeface="나눔바른고딕" panose="020B0603020101020101" pitchFamily="34" charset="-127"/>
-                        </a:rPr>
-                        <a:t>, </a:t>
-                      </a:r>
-                      <a:r>
-                        <a:rPr lang="ko-KR" altLang="en-US" sz="1400" dirty="0" err="1">
-                          <a:latin typeface="나눔바른고딕" panose="020B0603020101020101" pitchFamily="34" charset="-127"/>
-                          <a:ea typeface="나눔바른고딕" panose="020B0603020101020101" pitchFamily="34" charset="-127"/>
-                        </a:rPr>
-                        <a:t>파쿠르</a:t>
-                      </a:r>
-                      <a:r>
-                        <a:rPr lang="ko-KR" altLang="en-US" sz="1400" dirty="0">
-                          <a:latin typeface="나눔바른고딕" panose="020B0603020101020101" pitchFamily="34" charset="-127"/>
-                          <a:ea typeface="나눔바른고딕" panose="020B0603020101020101" pitchFamily="34" charset="-127"/>
-                        </a:rPr>
-                        <a:t> 시</a:t>
-                      </a:r>
-                      <a:r>
-                        <a:rPr lang="en-US" altLang="ko-KR" sz="1400" dirty="0">
-                          <a:latin typeface="나눔바른고딕" panose="020B0603020101020101" pitchFamily="34" charset="-127"/>
-                          <a:ea typeface="나눔바른고딕" panose="020B0603020101020101" pitchFamily="34" charset="-127"/>
-                        </a:rPr>
-                        <a:t> </a:t>
-                      </a:r>
-                      <a:r>
-                        <a:rPr lang="ko-KR" altLang="en-US" sz="1400" dirty="0">
-                          <a:latin typeface="나눔바른고딕" panose="020B0603020101020101" pitchFamily="34" charset="-127"/>
-                          <a:ea typeface="나눔바른고딕" panose="020B0603020101020101" pitchFamily="34" charset="-127"/>
-                        </a:rPr>
-                        <a:t>캐릭터 손 위치 </a:t>
-                      </a:r>
-                      <a:r>
-                        <a:rPr lang="en-US" altLang="ko-KR" sz="1400" dirty="0">
-                          <a:latin typeface="나눔바른고딕" panose="020B0603020101020101" pitchFamily="34" charset="-127"/>
-                          <a:ea typeface="나눔바른고딕" panose="020B0603020101020101" pitchFamily="34" charset="-127"/>
-                        </a:rPr>
-                        <a:t>IK</a:t>
-                      </a:r>
-                      <a:r>
-                        <a:rPr lang="ko-KR" altLang="en-US" sz="1400" dirty="0">
-                          <a:latin typeface="나눔바른고딕" panose="020B0603020101020101" pitchFamily="34" charset="-127"/>
-                          <a:ea typeface="나눔바른고딕" panose="020B0603020101020101" pitchFamily="34" charset="-127"/>
-                        </a:rPr>
-                        <a:t>를 통해 보정</a:t>
-                      </a:r>
-                      <a:endParaRPr lang="en-US" altLang="ko-KR" sz="1400" dirty="0">
-                        <a:latin typeface="나눔바른고딕" panose="020B0603020101020101" pitchFamily="34" charset="-127"/>
-                        <a:ea typeface="나눔바른고딕" panose="020B0603020101020101" pitchFamily="34" charset="-127"/>
-                      </a:endParaRPr>
-                    </a:p>
-                  </a:txBody>
-                  <a:tcPr anchor="ctr"/>
-                </a:tc>
-                <a:extLst>
-                  <a:ext uri="{0D108BD9-81ED-4DB2-BD59-A6C34878D82A}">
-                    <a16:rowId xmlns="" xmlns:a16="http://schemas.microsoft.com/office/drawing/2014/main" val="10005"/>
-                  </a:ext>
-                </a:extLst>
-              </a:tr>
-              <a:tr h="627956">
-                <a:tc>
-                  <a:txBody>
-                    <a:bodyPr/>
-                    <a:lstStyle/>
-                    <a:p>
-                      <a:pPr algn="ctr" latinLnBrk="1"/>
-                      <a:r>
-                        <a:rPr lang="en-US" altLang="ko-KR" dirty="0">
-                          <a:latin typeface="나눔바른고딕" panose="020B0603020101020101" pitchFamily="34" charset="-127"/>
-                          <a:ea typeface="나눔바른고딕" panose="020B0603020101020101" pitchFamily="34" charset="-127"/>
-                        </a:rPr>
-                        <a:t>6</a:t>
-                      </a:r>
-                      <a:endParaRPr lang="ko-KR" altLang="en-US" dirty="0">
-                        <a:latin typeface="나눔바른고딕" panose="020B0603020101020101" pitchFamily="34" charset="-127"/>
-                        <a:ea typeface="나눔바른고딕" panose="020B0603020101020101" pitchFamily="34" charset="-127"/>
-                      </a:endParaRPr>
-                    </a:p>
-                  </a:txBody>
-                  <a:tcPr anchor="ctr"/>
-                </a:tc>
-                <a:tc>
-                  <a:txBody>
-                    <a:bodyPr/>
-                    <a:lstStyle/>
-                    <a:p>
-                      <a:pPr latinLnBrk="1"/>
-                      <a:r>
-                        <a:rPr lang="ko-KR" altLang="en-US" sz="1400" dirty="0">
-                          <a:latin typeface="나눔바른고딕" panose="020B0603020101020101" pitchFamily="34" charset="-127"/>
-                          <a:ea typeface="나눔바른고딕" panose="020B0603020101020101" pitchFamily="34" charset="-127"/>
-                        </a:rPr>
-                        <a:t>복잡한 지형 애니메이션 처리 </a:t>
-                      </a:r>
-                      <a:r>
-                        <a:rPr lang="en-US" altLang="ko-KR" sz="1400" dirty="0">
-                          <a:latin typeface="나눔바른고딕" panose="020B0603020101020101" pitchFamily="34" charset="-127"/>
-                          <a:ea typeface="나눔바른고딕" panose="020B0603020101020101" pitchFamily="34" charset="-127"/>
-                        </a:rPr>
-                        <a:t>1</a:t>
-                      </a:r>
-                      <a:endParaRPr lang="ko-KR" altLang="en-US" sz="1400" dirty="0">
-                        <a:latin typeface="나눔바른고딕" panose="020B0603020101020101" pitchFamily="34" charset="-127"/>
-                        <a:ea typeface="나눔바른고딕" panose="020B0603020101020101" pitchFamily="34" charset="-127"/>
-                      </a:endParaRPr>
-                    </a:p>
-                  </a:txBody>
-                  <a:tcPr anchor="ctr"/>
-                </a:tc>
-                <a:tc>
-                  <a:txBody>
-                    <a:bodyPr/>
-                    <a:lstStyle/>
-                    <a:p>
-                      <a:pPr latinLnBrk="1"/>
-                      <a:r>
                         <a:rPr lang="ko-KR" altLang="en-US" sz="1400" baseline="0" dirty="0">
                           <a:latin typeface="나눔바른고딕" panose="020B0603020101020101" pitchFamily="34" charset="-127"/>
                           <a:ea typeface="나눔바른고딕" panose="020B0603020101020101" pitchFamily="34" charset="-127"/>
@@ -6155,7 +6584,7 @@
                 </a:tc>
                 <a:extLst>
                   <a:ext uri="{0D108BD9-81ED-4DB2-BD59-A6C34878D82A}">
-                    <a16:rowId xmlns="" xmlns:a16="http://schemas.microsoft.com/office/drawing/2014/main" val="10006"/>
+                    <a16:rowId xmlns:a16="http://schemas.microsoft.com/office/drawing/2014/main" xmlns="" val="10006"/>
                   </a:ext>
                 </a:extLst>
               </a:tr>
@@ -6211,19 +6640,12 @@
                         <a:t>복잡한 지형 애니메이션 처리 </a:t>
                       </a:r>
                       <a:r>
-                        <a:rPr lang="en-US" altLang="ko-KR" sz="1400" dirty="0">
+                        <a:rPr lang="en-US" altLang="ko-KR" sz="1400" dirty="0" smtClean="0">
                           <a:latin typeface="나눔바른고딕" panose="020B0603020101020101" pitchFamily="34" charset="-127"/>
                           <a:ea typeface="나눔바른고딕" panose="020B0603020101020101" pitchFamily="34" charset="-127"/>
                         </a:rPr>
                         <a:t>2</a:t>
                       </a:r>
-                      <a:endParaRPr lang="ko-KR" altLang="en-US" sz="1400" dirty="0">
-                        <a:latin typeface="나눔바른고딕" panose="020B0603020101020101" pitchFamily="34" charset="-127"/>
-                        <a:ea typeface="나눔바른고딕" panose="020B0603020101020101" pitchFamily="34" charset="-127"/>
-                      </a:endParaRPr>
-                    </a:p>
-                    <a:p>
-                      <a:pPr latinLnBrk="1"/>
                       <a:endParaRPr lang="ko-KR" altLang="en-US" sz="1400" dirty="0">
                         <a:latin typeface="나눔바른고딕" panose="020B0603020101020101" pitchFamily="34" charset="-127"/>
                         <a:ea typeface="나눔바른고딕" panose="020B0603020101020101" pitchFamily="34" charset="-127"/>
@@ -6290,7 +6712,7 @@
                 </a:tc>
                 <a:extLst>
                   <a:ext uri="{0D108BD9-81ED-4DB2-BD59-A6C34878D82A}">
-                    <a16:rowId xmlns="" xmlns:a16="http://schemas.microsoft.com/office/drawing/2014/main" val="10007"/>
+                    <a16:rowId xmlns:a16="http://schemas.microsoft.com/office/drawing/2014/main" xmlns="" val="10007"/>
                   </a:ext>
                 </a:extLst>
               </a:tr>
@@ -6352,7 +6774,7 @@
                 </a:tc>
                 <a:extLst>
                   <a:ext uri="{0D108BD9-81ED-4DB2-BD59-A6C34878D82A}">
-                    <a16:rowId xmlns="" xmlns:a16="http://schemas.microsoft.com/office/drawing/2014/main" val="10008"/>
+                    <a16:rowId xmlns:a16="http://schemas.microsoft.com/office/drawing/2014/main" xmlns="" val="10008"/>
                   </a:ext>
                 </a:extLst>
               </a:tr>

--- a/PPT/week2.pptx
+++ b/PPT/week2.pptx
@@ -5,15 +5,16 @@
     <p:sldMasterId id="2147483648" r:id="rId1"/>
   </p:sldMasterIdLst>
   <p:notesMasterIdLst>
-    <p:notesMasterId r:id="rId8"/>
+    <p:notesMasterId r:id="rId9"/>
   </p:notesMasterIdLst>
   <p:sldIdLst>
     <p:sldId id="262" r:id="rId2"/>
     <p:sldId id="257" r:id="rId3"/>
-    <p:sldId id="266" r:id="rId4"/>
-    <p:sldId id="260" r:id="rId5"/>
-    <p:sldId id="261" r:id="rId6"/>
-    <p:sldId id="265" r:id="rId7"/>
+    <p:sldId id="267" r:id="rId4"/>
+    <p:sldId id="266" r:id="rId5"/>
+    <p:sldId id="260" r:id="rId6"/>
+    <p:sldId id="261" r:id="rId7"/>
+    <p:sldId id="265" r:id="rId8"/>
   </p:sldIdLst>
   <p:sldSz cx="12192000" cy="6858000"/>
   <p:notesSz cx="6858000" cy="9144000"/>
@@ -627,7 +628,7 @@
           <a:p>
             <a:fld id="{0F03AB99-662C-46EC-B86C-F2E227D3EFAD}" type="slidenum">
               <a:rPr lang="ko-KR" altLang="en-US" smtClean="0"/>
-              <a:t>6</a:t>
+              <a:t>7</a:t>
             </a:fld>
             <a:endParaRPr lang="ko-KR" altLang="en-US"/>
           </a:p>
@@ -668,7 +669,7 @@
           <p:cNvPr id="2" name="제목 1">
             <a:extLst>
               <a:ext uri="{FF2B5EF4-FFF2-40B4-BE49-F238E27FC236}">
-                <a16:creationId xmlns="" xmlns:a16="http://schemas.microsoft.com/office/drawing/2014/main" id="{47C6A88D-EDAF-CEC2-712F-FA6A7E4FF53C}"/>
+                <a16:creationId xmlns:a16="http://schemas.microsoft.com/office/drawing/2014/main" id="{47C6A88D-EDAF-CEC2-712F-FA6A7E4FF53C}"/>
               </a:ext>
             </a:extLst>
           </p:cNvPr>
@@ -705,7 +706,7 @@
           <p:cNvPr id="3" name="부제목 2">
             <a:extLst>
               <a:ext uri="{FF2B5EF4-FFF2-40B4-BE49-F238E27FC236}">
-                <a16:creationId xmlns="" xmlns:a16="http://schemas.microsoft.com/office/drawing/2014/main" id="{1F7A10E8-4E5D-A611-E577-EBA5676A507E}"/>
+                <a16:creationId xmlns:a16="http://schemas.microsoft.com/office/drawing/2014/main" id="{1F7A10E8-4E5D-A611-E577-EBA5676A507E}"/>
               </a:ext>
             </a:extLst>
           </p:cNvPr>
@@ -775,7 +776,7 @@
           <p:cNvPr id="4" name="날짜 개체 틀 3">
             <a:extLst>
               <a:ext uri="{FF2B5EF4-FFF2-40B4-BE49-F238E27FC236}">
-                <a16:creationId xmlns="" xmlns:a16="http://schemas.microsoft.com/office/drawing/2014/main" id="{FA4EF1CD-FA03-944B-0EC0-2AABE3B0C471}"/>
+                <a16:creationId xmlns:a16="http://schemas.microsoft.com/office/drawing/2014/main" id="{FA4EF1CD-FA03-944B-0EC0-2AABE3B0C471}"/>
               </a:ext>
             </a:extLst>
           </p:cNvPr>
@@ -804,7 +805,7 @@
           <p:cNvPr id="5" name="바닥글 개체 틀 4">
             <a:extLst>
               <a:ext uri="{FF2B5EF4-FFF2-40B4-BE49-F238E27FC236}">
-                <a16:creationId xmlns="" xmlns:a16="http://schemas.microsoft.com/office/drawing/2014/main" id="{D7E1904F-F41F-7809-481D-7E79FCD2132E}"/>
+                <a16:creationId xmlns:a16="http://schemas.microsoft.com/office/drawing/2014/main" id="{D7E1904F-F41F-7809-481D-7E79FCD2132E}"/>
               </a:ext>
             </a:extLst>
           </p:cNvPr>
@@ -829,7 +830,7 @@
           <p:cNvPr id="6" name="슬라이드 번호 개체 틀 5">
             <a:extLst>
               <a:ext uri="{FF2B5EF4-FFF2-40B4-BE49-F238E27FC236}">
-                <a16:creationId xmlns="" xmlns:a16="http://schemas.microsoft.com/office/drawing/2014/main" id="{46C721DE-9DEE-BACB-B354-8E260F43215D}"/>
+                <a16:creationId xmlns:a16="http://schemas.microsoft.com/office/drawing/2014/main" id="{46C721DE-9DEE-BACB-B354-8E260F43215D}"/>
               </a:ext>
             </a:extLst>
           </p:cNvPr>
@@ -888,7 +889,7 @@
           <p:cNvPr id="2" name="제목 1">
             <a:extLst>
               <a:ext uri="{FF2B5EF4-FFF2-40B4-BE49-F238E27FC236}">
-                <a16:creationId xmlns="" xmlns:a16="http://schemas.microsoft.com/office/drawing/2014/main" id="{8EC6E50E-2954-B290-1563-C4936B9E8431}"/>
+                <a16:creationId xmlns:a16="http://schemas.microsoft.com/office/drawing/2014/main" id="{8EC6E50E-2954-B290-1563-C4936B9E8431}"/>
               </a:ext>
             </a:extLst>
           </p:cNvPr>
@@ -916,7 +917,7 @@
           <p:cNvPr id="3" name="세로 텍스트 개체 틀 2">
             <a:extLst>
               <a:ext uri="{FF2B5EF4-FFF2-40B4-BE49-F238E27FC236}">
-                <a16:creationId xmlns="" xmlns:a16="http://schemas.microsoft.com/office/drawing/2014/main" id="{5B6A99E4-1414-E268-7B72-A4C896708AE3}"/>
+                <a16:creationId xmlns:a16="http://schemas.microsoft.com/office/drawing/2014/main" id="{5B6A99E4-1414-E268-7B72-A4C896708AE3}"/>
               </a:ext>
             </a:extLst>
           </p:cNvPr>
@@ -973,7 +974,7 @@
           <p:cNvPr id="4" name="날짜 개체 틀 3">
             <a:extLst>
               <a:ext uri="{FF2B5EF4-FFF2-40B4-BE49-F238E27FC236}">
-                <a16:creationId xmlns="" xmlns:a16="http://schemas.microsoft.com/office/drawing/2014/main" id="{3A9BB3C2-1FA4-4151-9ADB-996284F1BDE2}"/>
+                <a16:creationId xmlns:a16="http://schemas.microsoft.com/office/drawing/2014/main" id="{3A9BB3C2-1FA4-4151-9ADB-996284F1BDE2}"/>
               </a:ext>
             </a:extLst>
           </p:cNvPr>
@@ -1002,7 +1003,7 @@
           <p:cNvPr id="5" name="바닥글 개체 틀 4">
             <a:extLst>
               <a:ext uri="{FF2B5EF4-FFF2-40B4-BE49-F238E27FC236}">
-                <a16:creationId xmlns="" xmlns:a16="http://schemas.microsoft.com/office/drawing/2014/main" id="{8A27C81A-BE4E-27CE-6CE4-0AE5876D470A}"/>
+                <a16:creationId xmlns:a16="http://schemas.microsoft.com/office/drawing/2014/main" id="{8A27C81A-BE4E-27CE-6CE4-0AE5876D470A}"/>
               </a:ext>
             </a:extLst>
           </p:cNvPr>
@@ -1027,7 +1028,7 @@
           <p:cNvPr id="6" name="슬라이드 번호 개체 틀 5">
             <a:extLst>
               <a:ext uri="{FF2B5EF4-FFF2-40B4-BE49-F238E27FC236}">
-                <a16:creationId xmlns="" xmlns:a16="http://schemas.microsoft.com/office/drawing/2014/main" id="{B4E3C814-C417-2E3F-F02B-1B9ED6941FBD}"/>
+                <a16:creationId xmlns:a16="http://schemas.microsoft.com/office/drawing/2014/main" id="{B4E3C814-C417-2E3F-F02B-1B9ED6941FBD}"/>
               </a:ext>
             </a:extLst>
           </p:cNvPr>
@@ -1086,7 +1087,7 @@
           <p:cNvPr id="2" name="세로 제목 1">
             <a:extLst>
               <a:ext uri="{FF2B5EF4-FFF2-40B4-BE49-F238E27FC236}">
-                <a16:creationId xmlns="" xmlns:a16="http://schemas.microsoft.com/office/drawing/2014/main" id="{AC1D687F-54E9-57A3-FDA2-5A8060E79A80}"/>
+                <a16:creationId xmlns:a16="http://schemas.microsoft.com/office/drawing/2014/main" id="{AC1D687F-54E9-57A3-FDA2-5A8060E79A80}"/>
               </a:ext>
             </a:extLst>
           </p:cNvPr>
@@ -1119,7 +1120,7 @@
           <p:cNvPr id="3" name="세로 텍스트 개체 틀 2">
             <a:extLst>
               <a:ext uri="{FF2B5EF4-FFF2-40B4-BE49-F238E27FC236}">
-                <a16:creationId xmlns="" xmlns:a16="http://schemas.microsoft.com/office/drawing/2014/main" id="{BC846A14-940B-8FE8-A769-3DABAE11AD25}"/>
+                <a16:creationId xmlns:a16="http://schemas.microsoft.com/office/drawing/2014/main" id="{BC846A14-940B-8FE8-A769-3DABAE11AD25}"/>
               </a:ext>
             </a:extLst>
           </p:cNvPr>
@@ -1181,7 +1182,7 @@
           <p:cNvPr id="4" name="날짜 개체 틀 3">
             <a:extLst>
               <a:ext uri="{FF2B5EF4-FFF2-40B4-BE49-F238E27FC236}">
-                <a16:creationId xmlns="" xmlns:a16="http://schemas.microsoft.com/office/drawing/2014/main" id="{393732A3-4427-5A76-3A9C-DBE87A4364DD}"/>
+                <a16:creationId xmlns:a16="http://schemas.microsoft.com/office/drawing/2014/main" id="{393732A3-4427-5A76-3A9C-DBE87A4364DD}"/>
               </a:ext>
             </a:extLst>
           </p:cNvPr>
@@ -1210,7 +1211,7 @@
           <p:cNvPr id="5" name="바닥글 개체 틀 4">
             <a:extLst>
               <a:ext uri="{FF2B5EF4-FFF2-40B4-BE49-F238E27FC236}">
-                <a16:creationId xmlns="" xmlns:a16="http://schemas.microsoft.com/office/drawing/2014/main" id="{16A5B672-F383-0FF5-2D72-72E1E7F0F0D3}"/>
+                <a16:creationId xmlns:a16="http://schemas.microsoft.com/office/drawing/2014/main" id="{16A5B672-F383-0FF5-2D72-72E1E7F0F0D3}"/>
               </a:ext>
             </a:extLst>
           </p:cNvPr>
@@ -1235,7 +1236,7 @@
           <p:cNvPr id="6" name="슬라이드 번호 개체 틀 5">
             <a:extLst>
               <a:ext uri="{FF2B5EF4-FFF2-40B4-BE49-F238E27FC236}">
-                <a16:creationId xmlns="" xmlns:a16="http://schemas.microsoft.com/office/drawing/2014/main" id="{DE28928A-9906-D889-A8B7-B97D729CDB76}"/>
+                <a16:creationId xmlns:a16="http://schemas.microsoft.com/office/drawing/2014/main" id="{DE28928A-9906-D889-A8B7-B97D729CDB76}"/>
               </a:ext>
             </a:extLst>
           </p:cNvPr>
@@ -1294,7 +1295,7 @@
           <p:cNvPr id="2" name="제목 1">
             <a:extLst>
               <a:ext uri="{FF2B5EF4-FFF2-40B4-BE49-F238E27FC236}">
-                <a16:creationId xmlns="" xmlns:a16="http://schemas.microsoft.com/office/drawing/2014/main" id="{54F5793F-94FE-56B0-E0CB-A317DA7FB4BC}"/>
+                <a16:creationId xmlns:a16="http://schemas.microsoft.com/office/drawing/2014/main" id="{54F5793F-94FE-56B0-E0CB-A317DA7FB4BC}"/>
               </a:ext>
             </a:extLst>
           </p:cNvPr>
@@ -1322,7 +1323,7 @@
           <p:cNvPr id="3" name="내용 개체 틀 2">
             <a:extLst>
               <a:ext uri="{FF2B5EF4-FFF2-40B4-BE49-F238E27FC236}">
-                <a16:creationId xmlns="" xmlns:a16="http://schemas.microsoft.com/office/drawing/2014/main" id="{BFAF79B8-2AD1-69C6-D4D5-21827C6802F8}"/>
+                <a16:creationId xmlns:a16="http://schemas.microsoft.com/office/drawing/2014/main" id="{BFAF79B8-2AD1-69C6-D4D5-21827C6802F8}"/>
               </a:ext>
             </a:extLst>
           </p:cNvPr>
@@ -1379,7 +1380,7 @@
           <p:cNvPr id="4" name="날짜 개체 틀 3">
             <a:extLst>
               <a:ext uri="{FF2B5EF4-FFF2-40B4-BE49-F238E27FC236}">
-                <a16:creationId xmlns="" xmlns:a16="http://schemas.microsoft.com/office/drawing/2014/main" id="{6718AF63-4F49-82B6-24FC-BB457FC964FC}"/>
+                <a16:creationId xmlns:a16="http://schemas.microsoft.com/office/drawing/2014/main" id="{6718AF63-4F49-82B6-24FC-BB457FC964FC}"/>
               </a:ext>
             </a:extLst>
           </p:cNvPr>
@@ -1408,7 +1409,7 @@
           <p:cNvPr id="5" name="바닥글 개체 틀 4">
             <a:extLst>
               <a:ext uri="{FF2B5EF4-FFF2-40B4-BE49-F238E27FC236}">
-                <a16:creationId xmlns="" xmlns:a16="http://schemas.microsoft.com/office/drawing/2014/main" id="{AA45FF19-25D7-1FF3-E311-2C2E07B26764}"/>
+                <a16:creationId xmlns:a16="http://schemas.microsoft.com/office/drawing/2014/main" id="{AA45FF19-25D7-1FF3-E311-2C2E07B26764}"/>
               </a:ext>
             </a:extLst>
           </p:cNvPr>
@@ -1433,7 +1434,7 @@
           <p:cNvPr id="6" name="슬라이드 번호 개체 틀 5">
             <a:extLst>
               <a:ext uri="{FF2B5EF4-FFF2-40B4-BE49-F238E27FC236}">
-                <a16:creationId xmlns="" xmlns:a16="http://schemas.microsoft.com/office/drawing/2014/main" id="{6F43D8BF-52A4-97EB-612B-F9899664EFD5}"/>
+                <a16:creationId xmlns:a16="http://schemas.microsoft.com/office/drawing/2014/main" id="{6F43D8BF-52A4-97EB-612B-F9899664EFD5}"/>
               </a:ext>
             </a:extLst>
           </p:cNvPr>
@@ -1492,7 +1493,7 @@
           <p:cNvPr id="2" name="제목 1">
             <a:extLst>
               <a:ext uri="{FF2B5EF4-FFF2-40B4-BE49-F238E27FC236}">
-                <a16:creationId xmlns="" xmlns:a16="http://schemas.microsoft.com/office/drawing/2014/main" id="{1EB95909-78E9-5BAC-68EA-7DCA2A1271F7}"/>
+                <a16:creationId xmlns:a16="http://schemas.microsoft.com/office/drawing/2014/main" id="{1EB95909-78E9-5BAC-68EA-7DCA2A1271F7}"/>
               </a:ext>
             </a:extLst>
           </p:cNvPr>
@@ -1529,7 +1530,7 @@
           <p:cNvPr id="3" name="텍스트 개체 틀 2">
             <a:extLst>
               <a:ext uri="{FF2B5EF4-FFF2-40B4-BE49-F238E27FC236}">
-                <a16:creationId xmlns="" xmlns:a16="http://schemas.microsoft.com/office/drawing/2014/main" id="{D6B98DAF-2A47-3ECD-807C-96FB70CF9854}"/>
+                <a16:creationId xmlns:a16="http://schemas.microsoft.com/office/drawing/2014/main" id="{D6B98DAF-2A47-3ECD-807C-96FB70CF9854}"/>
               </a:ext>
             </a:extLst>
           </p:cNvPr>
@@ -1654,7 +1655,7 @@
           <p:cNvPr id="4" name="날짜 개체 틀 3">
             <a:extLst>
               <a:ext uri="{FF2B5EF4-FFF2-40B4-BE49-F238E27FC236}">
-                <a16:creationId xmlns="" xmlns:a16="http://schemas.microsoft.com/office/drawing/2014/main" id="{A3AD9670-C268-56FC-281A-FE1F59541EB9}"/>
+                <a16:creationId xmlns:a16="http://schemas.microsoft.com/office/drawing/2014/main" id="{A3AD9670-C268-56FC-281A-FE1F59541EB9}"/>
               </a:ext>
             </a:extLst>
           </p:cNvPr>
@@ -1683,7 +1684,7 @@
           <p:cNvPr id="5" name="바닥글 개체 틀 4">
             <a:extLst>
               <a:ext uri="{FF2B5EF4-FFF2-40B4-BE49-F238E27FC236}">
-                <a16:creationId xmlns="" xmlns:a16="http://schemas.microsoft.com/office/drawing/2014/main" id="{A4946F37-FE38-E38E-7339-DC6E4EFA5B3B}"/>
+                <a16:creationId xmlns:a16="http://schemas.microsoft.com/office/drawing/2014/main" id="{A4946F37-FE38-E38E-7339-DC6E4EFA5B3B}"/>
               </a:ext>
             </a:extLst>
           </p:cNvPr>
@@ -1708,7 +1709,7 @@
           <p:cNvPr id="6" name="슬라이드 번호 개체 틀 5">
             <a:extLst>
               <a:ext uri="{FF2B5EF4-FFF2-40B4-BE49-F238E27FC236}">
-                <a16:creationId xmlns="" xmlns:a16="http://schemas.microsoft.com/office/drawing/2014/main" id="{7C17C39B-6348-28CC-59AF-B1A65BE2F149}"/>
+                <a16:creationId xmlns:a16="http://schemas.microsoft.com/office/drawing/2014/main" id="{7C17C39B-6348-28CC-59AF-B1A65BE2F149}"/>
               </a:ext>
             </a:extLst>
           </p:cNvPr>
@@ -1767,7 +1768,7 @@
           <p:cNvPr id="2" name="제목 1">
             <a:extLst>
               <a:ext uri="{FF2B5EF4-FFF2-40B4-BE49-F238E27FC236}">
-                <a16:creationId xmlns="" xmlns:a16="http://schemas.microsoft.com/office/drawing/2014/main" id="{0D0EFA0F-10D7-865F-1370-4EA34C786709}"/>
+                <a16:creationId xmlns:a16="http://schemas.microsoft.com/office/drawing/2014/main" id="{0D0EFA0F-10D7-865F-1370-4EA34C786709}"/>
               </a:ext>
             </a:extLst>
           </p:cNvPr>
@@ -1795,7 +1796,7 @@
           <p:cNvPr id="3" name="내용 개체 틀 2">
             <a:extLst>
               <a:ext uri="{FF2B5EF4-FFF2-40B4-BE49-F238E27FC236}">
-                <a16:creationId xmlns="" xmlns:a16="http://schemas.microsoft.com/office/drawing/2014/main" id="{0498CDB5-9D2B-5F68-9DD8-ED20454B1044}"/>
+                <a16:creationId xmlns:a16="http://schemas.microsoft.com/office/drawing/2014/main" id="{0498CDB5-9D2B-5F68-9DD8-ED20454B1044}"/>
               </a:ext>
             </a:extLst>
           </p:cNvPr>
@@ -1857,7 +1858,7 @@
           <p:cNvPr id="4" name="내용 개체 틀 3">
             <a:extLst>
               <a:ext uri="{FF2B5EF4-FFF2-40B4-BE49-F238E27FC236}">
-                <a16:creationId xmlns="" xmlns:a16="http://schemas.microsoft.com/office/drawing/2014/main" id="{570EB1B7-8EDE-2794-EA53-E0C1972FAF1A}"/>
+                <a16:creationId xmlns:a16="http://schemas.microsoft.com/office/drawing/2014/main" id="{570EB1B7-8EDE-2794-EA53-E0C1972FAF1A}"/>
               </a:ext>
             </a:extLst>
           </p:cNvPr>
@@ -1919,7 +1920,7 @@
           <p:cNvPr id="5" name="날짜 개체 틀 4">
             <a:extLst>
               <a:ext uri="{FF2B5EF4-FFF2-40B4-BE49-F238E27FC236}">
-                <a16:creationId xmlns="" xmlns:a16="http://schemas.microsoft.com/office/drawing/2014/main" id="{31FBCFA4-CF51-706E-F9F0-8B66CA1A0E1B}"/>
+                <a16:creationId xmlns:a16="http://schemas.microsoft.com/office/drawing/2014/main" id="{31FBCFA4-CF51-706E-F9F0-8B66CA1A0E1B}"/>
               </a:ext>
             </a:extLst>
           </p:cNvPr>
@@ -1948,7 +1949,7 @@
           <p:cNvPr id="6" name="바닥글 개체 틀 5">
             <a:extLst>
               <a:ext uri="{FF2B5EF4-FFF2-40B4-BE49-F238E27FC236}">
-                <a16:creationId xmlns="" xmlns:a16="http://schemas.microsoft.com/office/drawing/2014/main" id="{FD56636A-469F-7FE9-480E-955BCC0E6D70}"/>
+                <a16:creationId xmlns:a16="http://schemas.microsoft.com/office/drawing/2014/main" id="{FD56636A-469F-7FE9-480E-955BCC0E6D70}"/>
               </a:ext>
             </a:extLst>
           </p:cNvPr>
@@ -1973,7 +1974,7 @@
           <p:cNvPr id="7" name="슬라이드 번호 개체 틀 6">
             <a:extLst>
               <a:ext uri="{FF2B5EF4-FFF2-40B4-BE49-F238E27FC236}">
-                <a16:creationId xmlns="" xmlns:a16="http://schemas.microsoft.com/office/drawing/2014/main" id="{3971D272-167D-EE36-E685-CD8BFE8CC9A6}"/>
+                <a16:creationId xmlns:a16="http://schemas.microsoft.com/office/drawing/2014/main" id="{3971D272-167D-EE36-E685-CD8BFE8CC9A6}"/>
               </a:ext>
             </a:extLst>
           </p:cNvPr>
@@ -2032,7 +2033,7 @@
           <p:cNvPr id="2" name="제목 1">
             <a:extLst>
               <a:ext uri="{FF2B5EF4-FFF2-40B4-BE49-F238E27FC236}">
-                <a16:creationId xmlns="" xmlns:a16="http://schemas.microsoft.com/office/drawing/2014/main" id="{9AC7230E-A2F3-4027-B6F6-9C5C289B1314}"/>
+                <a16:creationId xmlns:a16="http://schemas.microsoft.com/office/drawing/2014/main" id="{9AC7230E-A2F3-4027-B6F6-9C5C289B1314}"/>
               </a:ext>
             </a:extLst>
           </p:cNvPr>
@@ -2065,7 +2066,7 @@
           <p:cNvPr id="3" name="텍스트 개체 틀 2">
             <a:extLst>
               <a:ext uri="{FF2B5EF4-FFF2-40B4-BE49-F238E27FC236}">
-                <a16:creationId xmlns="" xmlns:a16="http://schemas.microsoft.com/office/drawing/2014/main" id="{0C685356-7419-AD93-377A-8D9A0293423E}"/>
+                <a16:creationId xmlns:a16="http://schemas.microsoft.com/office/drawing/2014/main" id="{0C685356-7419-AD93-377A-8D9A0293423E}"/>
               </a:ext>
             </a:extLst>
           </p:cNvPr>
@@ -2136,7 +2137,7 @@
           <p:cNvPr id="4" name="내용 개체 틀 3">
             <a:extLst>
               <a:ext uri="{FF2B5EF4-FFF2-40B4-BE49-F238E27FC236}">
-                <a16:creationId xmlns="" xmlns:a16="http://schemas.microsoft.com/office/drawing/2014/main" id="{CC36E6CA-94A6-3223-C91A-F6E9648C8EAD}"/>
+                <a16:creationId xmlns:a16="http://schemas.microsoft.com/office/drawing/2014/main" id="{CC36E6CA-94A6-3223-C91A-F6E9648C8EAD}"/>
               </a:ext>
             </a:extLst>
           </p:cNvPr>
@@ -2198,7 +2199,7 @@
           <p:cNvPr id="5" name="텍스트 개체 틀 4">
             <a:extLst>
               <a:ext uri="{FF2B5EF4-FFF2-40B4-BE49-F238E27FC236}">
-                <a16:creationId xmlns="" xmlns:a16="http://schemas.microsoft.com/office/drawing/2014/main" id="{F4DFD790-787A-88A3-300F-C173DAD2E1AF}"/>
+                <a16:creationId xmlns:a16="http://schemas.microsoft.com/office/drawing/2014/main" id="{F4DFD790-787A-88A3-300F-C173DAD2E1AF}"/>
               </a:ext>
             </a:extLst>
           </p:cNvPr>
@@ -2269,7 +2270,7 @@
           <p:cNvPr id="6" name="내용 개체 틀 5">
             <a:extLst>
               <a:ext uri="{FF2B5EF4-FFF2-40B4-BE49-F238E27FC236}">
-                <a16:creationId xmlns="" xmlns:a16="http://schemas.microsoft.com/office/drawing/2014/main" id="{012AE83D-2990-A6E4-CC9C-06D342A67C09}"/>
+                <a16:creationId xmlns:a16="http://schemas.microsoft.com/office/drawing/2014/main" id="{012AE83D-2990-A6E4-CC9C-06D342A67C09}"/>
               </a:ext>
             </a:extLst>
           </p:cNvPr>
@@ -2331,7 +2332,7 @@
           <p:cNvPr id="7" name="날짜 개체 틀 6">
             <a:extLst>
               <a:ext uri="{FF2B5EF4-FFF2-40B4-BE49-F238E27FC236}">
-                <a16:creationId xmlns="" xmlns:a16="http://schemas.microsoft.com/office/drawing/2014/main" id="{3C11F8C3-5AD3-730B-8ADB-304185DAA67E}"/>
+                <a16:creationId xmlns:a16="http://schemas.microsoft.com/office/drawing/2014/main" id="{3C11F8C3-5AD3-730B-8ADB-304185DAA67E}"/>
               </a:ext>
             </a:extLst>
           </p:cNvPr>
@@ -2360,7 +2361,7 @@
           <p:cNvPr id="8" name="바닥글 개체 틀 7">
             <a:extLst>
               <a:ext uri="{FF2B5EF4-FFF2-40B4-BE49-F238E27FC236}">
-                <a16:creationId xmlns="" xmlns:a16="http://schemas.microsoft.com/office/drawing/2014/main" id="{EF36ABA7-53C4-C11E-CC9D-F5E59BDBBD9B}"/>
+                <a16:creationId xmlns:a16="http://schemas.microsoft.com/office/drawing/2014/main" id="{EF36ABA7-53C4-C11E-CC9D-F5E59BDBBD9B}"/>
               </a:ext>
             </a:extLst>
           </p:cNvPr>
@@ -2385,7 +2386,7 @@
           <p:cNvPr id="9" name="슬라이드 번호 개체 틀 8">
             <a:extLst>
               <a:ext uri="{FF2B5EF4-FFF2-40B4-BE49-F238E27FC236}">
-                <a16:creationId xmlns="" xmlns:a16="http://schemas.microsoft.com/office/drawing/2014/main" id="{5E29E145-D4AE-F9FB-A218-47B323C43E03}"/>
+                <a16:creationId xmlns:a16="http://schemas.microsoft.com/office/drawing/2014/main" id="{5E29E145-D4AE-F9FB-A218-47B323C43E03}"/>
               </a:ext>
             </a:extLst>
           </p:cNvPr>
@@ -2444,7 +2445,7 @@
           <p:cNvPr id="2" name="제목 1">
             <a:extLst>
               <a:ext uri="{FF2B5EF4-FFF2-40B4-BE49-F238E27FC236}">
-                <a16:creationId xmlns="" xmlns:a16="http://schemas.microsoft.com/office/drawing/2014/main" id="{13D855E6-5AD7-B657-346A-38D87715A5E7}"/>
+                <a16:creationId xmlns:a16="http://schemas.microsoft.com/office/drawing/2014/main" id="{13D855E6-5AD7-B657-346A-38D87715A5E7}"/>
               </a:ext>
             </a:extLst>
           </p:cNvPr>
@@ -2472,7 +2473,7 @@
           <p:cNvPr id="3" name="날짜 개체 틀 2">
             <a:extLst>
               <a:ext uri="{FF2B5EF4-FFF2-40B4-BE49-F238E27FC236}">
-                <a16:creationId xmlns="" xmlns:a16="http://schemas.microsoft.com/office/drawing/2014/main" id="{F3052B06-09E1-1CD0-A032-AEB30F69A0E7}"/>
+                <a16:creationId xmlns:a16="http://schemas.microsoft.com/office/drawing/2014/main" id="{F3052B06-09E1-1CD0-A032-AEB30F69A0E7}"/>
               </a:ext>
             </a:extLst>
           </p:cNvPr>
@@ -2501,7 +2502,7 @@
           <p:cNvPr id="4" name="바닥글 개체 틀 3">
             <a:extLst>
               <a:ext uri="{FF2B5EF4-FFF2-40B4-BE49-F238E27FC236}">
-                <a16:creationId xmlns="" xmlns:a16="http://schemas.microsoft.com/office/drawing/2014/main" id="{DE18691A-8582-987D-DF06-E6D8B618E7BB}"/>
+                <a16:creationId xmlns:a16="http://schemas.microsoft.com/office/drawing/2014/main" id="{DE18691A-8582-987D-DF06-E6D8B618E7BB}"/>
               </a:ext>
             </a:extLst>
           </p:cNvPr>
@@ -2526,7 +2527,7 @@
           <p:cNvPr id="5" name="슬라이드 번호 개체 틀 4">
             <a:extLst>
               <a:ext uri="{FF2B5EF4-FFF2-40B4-BE49-F238E27FC236}">
-                <a16:creationId xmlns="" xmlns:a16="http://schemas.microsoft.com/office/drawing/2014/main" id="{6F997ACE-7D00-7B35-1F16-F56C5450EF85}"/>
+                <a16:creationId xmlns:a16="http://schemas.microsoft.com/office/drawing/2014/main" id="{6F997ACE-7D00-7B35-1F16-F56C5450EF85}"/>
               </a:ext>
             </a:extLst>
           </p:cNvPr>
@@ -2585,7 +2586,7 @@
           <p:cNvPr id="2" name="날짜 개체 틀 1">
             <a:extLst>
               <a:ext uri="{FF2B5EF4-FFF2-40B4-BE49-F238E27FC236}">
-                <a16:creationId xmlns="" xmlns:a16="http://schemas.microsoft.com/office/drawing/2014/main" id="{2703D88F-9D50-1761-731E-68DD1FC6B740}"/>
+                <a16:creationId xmlns:a16="http://schemas.microsoft.com/office/drawing/2014/main" id="{2703D88F-9D50-1761-731E-68DD1FC6B740}"/>
               </a:ext>
             </a:extLst>
           </p:cNvPr>
@@ -2614,7 +2615,7 @@
           <p:cNvPr id="3" name="바닥글 개체 틀 2">
             <a:extLst>
               <a:ext uri="{FF2B5EF4-FFF2-40B4-BE49-F238E27FC236}">
-                <a16:creationId xmlns="" xmlns:a16="http://schemas.microsoft.com/office/drawing/2014/main" id="{70793086-842E-7906-6019-4284A9E469F4}"/>
+                <a16:creationId xmlns:a16="http://schemas.microsoft.com/office/drawing/2014/main" id="{70793086-842E-7906-6019-4284A9E469F4}"/>
               </a:ext>
             </a:extLst>
           </p:cNvPr>
@@ -2639,7 +2640,7 @@
           <p:cNvPr id="4" name="슬라이드 번호 개체 틀 3">
             <a:extLst>
               <a:ext uri="{FF2B5EF4-FFF2-40B4-BE49-F238E27FC236}">
-                <a16:creationId xmlns="" xmlns:a16="http://schemas.microsoft.com/office/drawing/2014/main" id="{6D4FE3DE-7F26-4352-74EE-A720C7AF5564}"/>
+                <a16:creationId xmlns:a16="http://schemas.microsoft.com/office/drawing/2014/main" id="{6D4FE3DE-7F26-4352-74EE-A720C7AF5564}"/>
               </a:ext>
             </a:extLst>
           </p:cNvPr>
@@ -2698,7 +2699,7 @@
           <p:cNvPr id="2" name="제목 1">
             <a:extLst>
               <a:ext uri="{FF2B5EF4-FFF2-40B4-BE49-F238E27FC236}">
-                <a16:creationId xmlns="" xmlns:a16="http://schemas.microsoft.com/office/drawing/2014/main" id="{0AFB6F63-D5C7-EB4A-A651-8DA5561AD0DC}"/>
+                <a16:creationId xmlns:a16="http://schemas.microsoft.com/office/drawing/2014/main" id="{0AFB6F63-D5C7-EB4A-A651-8DA5561AD0DC}"/>
               </a:ext>
             </a:extLst>
           </p:cNvPr>
@@ -2735,7 +2736,7 @@
           <p:cNvPr id="3" name="내용 개체 틀 2">
             <a:extLst>
               <a:ext uri="{FF2B5EF4-FFF2-40B4-BE49-F238E27FC236}">
-                <a16:creationId xmlns="" xmlns:a16="http://schemas.microsoft.com/office/drawing/2014/main" id="{2000FB2D-0CF3-1A3C-E704-F8CA96C2D5D5}"/>
+                <a16:creationId xmlns:a16="http://schemas.microsoft.com/office/drawing/2014/main" id="{2000FB2D-0CF3-1A3C-E704-F8CA96C2D5D5}"/>
               </a:ext>
             </a:extLst>
           </p:cNvPr>
@@ -2825,7 +2826,7 @@
           <p:cNvPr id="4" name="텍스트 개체 틀 3">
             <a:extLst>
               <a:ext uri="{FF2B5EF4-FFF2-40B4-BE49-F238E27FC236}">
-                <a16:creationId xmlns="" xmlns:a16="http://schemas.microsoft.com/office/drawing/2014/main" id="{88C3C47D-E633-BB5D-0FA3-41A5E3C28A6A}"/>
+                <a16:creationId xmlns:a16="http://schemas.microsoft.com/office/drawing/2014/main" id="{88C3C47D-E633-BB5D-0FA3-41A5E3C28A6A}"/>
               </a:ext>
             </a:extLst>
           </p:cNvPr>
@@ -2896,7 +2897,7 @@
           <p:cNvPr id="5" name="날짜 개체 틀 4">
             <a:extLst>
               <a:ext uri="{FF2B5EF4-FFF2-40B4-BE49-F238E27FC236}">
-                <a16:creationId xmlns="" xmlns:a16="http://schemas.microsoft.com/office/drawing/2014/main" id="{603DA118-0D2F-73A1-6311-85E95462C569}"/>
+                <a16:creationId xmlns:a16="http://schemas.microsoft.com/office/drawing/2014/main" id="{603DA118-0D2F-73A1-6311-85E95462C569}"/>
               </a:ext>
             </a:extLst>
           </p:cNvPr>
@@ -2925,7 +2926,7 @@
           <p:cNvPr id="6" name="바닥글 개체 틀 5">
             <a:extLst>
               <a:ext uri="{FF2B5EF4-FFF2-40B4-BE49-F238E27FC236}">
-                <a16:creationId xmlns="" xmlns:a16="http://schemas.microsoft.com/office/drawing/2014/main" id="{DE46749A-348F-886F-32BD-A562F1A2A3B9}"/>
+                <a16:creationId xmlns:a16="http://schemas.microsoft.com/office/drawing/2014/main" id="{DE46749A-348F-886F-32BD-A562F1A2A3B9}"/>
               </a:ext>
             </a:extLst>
           </p:cNvPr>
@@ -2950,7 +2951,7 @@
           <p:cNvPr id="7" name="슬라이드 번호 개체 틀 6">
             <a:extLst>
               <a:ext uri="{FF2B5EF4-FFF2-40B4-BE49-F238E27FC236}">
-                <a16:creationId xmlns="" xmlns:a16="http://schemas.microsoft.com/office/drawing/2014/main" id="{0BF22D09-FBE9-294C-014E-9A808723A1A7}"/>
+                <a16:creationId xmlns:a16="http://schemas.microsoft.com/office/drawing/2014/main" id="{0BF22D09-FBE9-294C-014E-9A808723A1A7}"/>
               </a:ext>
             </a:extLst>
           </p:cNvPr>
@@ -3009,7 +3010,7 @@
           <p:cNvPr id="2" name="제목 1">
             <a:extLst>
               <a:ext uri="{FF2B5EF4-FFF2-40B4-BE49-F238E27FC236}">
-                <a16:creationId xmlns="" xmlns:a16="http://schemas.microsoft.com/office/drawing/2014/main" id="{DA50C132-3A30-7E9C-0BBB-1CD1A789CE68}"/>
+                <a16:creationId xmlns:a16="http://schemas.microsoft.com/office/drawing/2014/main" id="{DA50C132-3A30-7E9C-0BBB-1CD1A789CE68}"/>
               </a:ext>
             </a:extLst>
           </p:cNvPr>
@@ -3046,7 +3047,7 @@
           <p:cNvPr id="3" name="그림 개체 틀 2">
             <a:extLst>
               <a:ext uri="{FF2B5EF4-FFF2-40B4-BE49-F238E27FC236}">
-                <a16:creationId xmlns="" xmlns:a16="http://schemas.microsoft.com/office/drawing/2014/main" id="{2F31776A-D32D-34F5-8A99-A26F4F6535B9}"/>
+                <a16:creationId xmlns:a16="http://schemas.microsoft.com/office/drawing/2014/main" id="{2F31776A-D32D-34F5-8A99-A26F4F6535B9}"/>
               </a:ext>
             </a:extLst>
           </p:cNvPr>
@@ -3113,7 +3114,7 @@
           <p:cNvPr id="4" name="텍스트 개체 틀 3">
             <a:extLst>
               <a:ext uri="{FF2B5EF4-FFF2-40B4-BE49-F238E27FC236}">
-                <a16:creationId xmlns="" xmlns:a16="http://schemas.microsoft.com/office/drawing/2014/main" id="{3E500BF3-C366-20F6-6257-8233A0794521}"/>
+                <a16:creationId xmlns:a16="http://schemas.microsoft.com/office/drawing/2014/main" id="{3E500BF3-C366-20F6-6257-8233A0794521}"/>
               </a:ext>
             </a:extLst>
           </p:cNvPr>
@@ -3184,7 +3185,7 @@
           <p:cNvPr id="5" name="날짜 개체 틀 4">
             <a:extLst>
               <a:ext uri="{FF2B5EF4-FFF2-40B4-BE49-F238E27FC236}">
-                <a16:creationId xmlns="" xmlns:a16="http://schemas.microsoft.com/office/drawing/2014/main" id="{DB1C119C-B590-D055-6B10-AAE861F0D2B1}"/>
+                <a16:creationId xmlns:a16="http://schemas.microsoft.com/office/drawing/2014/main" id="{DB1C119C-B590-D055-6B10-AAE861F0D2B1}"/>
               </a:ext>
             </a:extLst>
           </p:cNvPr>
@@ -3213,7 +3214,7 @@
           <p:cNvPr id="6" name="바닥글 개체 틀 5">
             <a:extLst>
               <a:ext uri="{FF2B5EF4-FFF2-40B4-BE49-F238E27FC236}">
-                <a16:creationId xmlns="" xmlns:a16="http://schemas.microsoft.com/office/drawing/2014/main" id="{00064F92-4550-973E-464E-89CA3E7EED4F}"/>
+                <a16:creationId xmlns:a16="http://schemas.microsoft.com/office/drawing/2014/main" id="{00064F92-4550-973E-464E-89CA3E7EED4F}"/>
               </a:ext>
             </a:extLst>
           </p:cNvPr>
@@ -3238,7 +3239,7 @@
           <p:cNvPr id="7" name="슬라이드 번호 개체 틀 6">
             <a:extLst>
               <a:ext uri="{FF2B5EF4-FFF2-40B4-BE49-F238E27FC236}">
-                <a16:creationId xmlns="" xmlns:a16="http://schemas.microsoft.com/office/drawing/2014/main" id="{708384D1-792D-8EA8-718E-F756CEE623A7}"/>
+                <a16:creationId xmlns:a16="http://schemas.microsoft.com/office/drawing/2014/main" id="{708384D1-792D-8EA8-718E-F756CEE623A7}"/>
               </a:ext>
             </a:extLst>
           </p:cNvPr>
@@ -3302,7 +3303,7 @@
           <p:cNvPr id="2" name="제목 개체 틀 1">
             <a:extLst>
               <a:ext uri="{FF2B5EF4-FFF2-40B4-BE49-F238E27FC236}">
-                <a16:creationId xmlns="" xmlns:a16="http://schemas.microsoft.com/office/drawing/2014/main" id="{C0AC0570-6E75-D8C0-582D-3A448969CF8B}"/>
+                <a16:creationId xmlns:a16="http://schemas.microsoft.com/office/drawing/2014/main" id="{C0AC0570-6E75-D8C0-582D-3A448969CF8B}"/>
               </a:ext>
             </a:extLst>
           </p:cNvPr>
@@ -3340,7 +3341,7 @@
           <p:cNvPr id="3" name="텍스트 개체 틀 2">
             <a:extLst>
               <a:ext uri="{FF2B5EF4-FFF2-40B4-BE49-F238E27FC236}">
-                <a16:creationId xmlns="" xmlns:a16="http://schemas.microsoft.com/office/drawing/2014/main" id="{79ADFDDF-DF3C-19FA-0ED8-5D640C08DB4B}"/>
+                <a16:creationId xmlns:a16="http://schemas.microsoft.com/office/drawing/2014/main" id="{79ADFDDF-DF3C-19FA-0ED8-5D640C08DB4B}"/>
               </a:ext>
             </a:extLst>
           </p:cNvPr>
@@ -3407,7 +3408,7 @@
           <p:cNvPr id="4" name="날짜 개체 틀 3">
             <a:extLst>
               <a:ext uri="{FF2B5EF4-FFF2-40B4-BE49-F238E27FC236}">
-                <a16:creationId xmlns="" xmlns:a16="http://schemas.microsoft.com/office/drawing/2014/main" id="{AB9AC677-7913-29B2-30F7-969771FA5D05}"/>
+                <a16:creationId xmlns:a16="http://schemas.microsoft.com/office/drawing/2014/main" id="{AB9AC677-7913-29B2-30F7-969771FA5D05}"/>
               </a:ext>
             </a:extLst>
           </p:cNvPr>
@@ -3454,7 +3455,7 @@
           <p:cNvPr id="5" name="바닥글 개체 틀 4">
             <a:extLst>
               <a:ext uri="{FF2B5EF4-FFF2-40B4-BE49-F238E27FC236}">
-                <a16:creationId xmlns="" xmlns:a16="http://schemas.microsoft.com/office/drawing/2014/main" id="{3A6836E4-21B2-245A-8933-7F64F64AC382}"/>
+                <a16:creationId xmlns:a16="http://schemas.microsoft.com/office/drawing/2014/main" id="{3A6836E4-21B2-245A-8933-7F64F64AC382}"/>
               </a:ext>
             </a:extLst>
           </p:cNvPr>
@@ -3497,7 +3498,7 @@
           <p:cNvPr id="6" name="슬라이드 번호 개체 틀 5">
             <a:extLst>
               <a:ext uri="{FF2B5EF4-FFF2-40B4-BE49-F238E27FC236}">
-                <a16:creationId xmlns="" xmlns:a16="http://schemas.microsoft.com/office/drawing/2014/main" id="{6F2D0B4E-8F0D-F1B8-2A71-9862FC9749C5}"/>
+                <a16:creationId xmlns:a16="http://schemas.microsoft.com/office/drawing/2014/main" id="{6F2D0B4E-8F0D-F1B8-2A71-9862FC9749C5}"/>
               </a:ext>
             </a:extLst>
           </p:cNvPr>
@@ -3924,7 +3925,7 @@
               <a:t>1</a:t>
             </a:r>
             <a:r>
-              <a:rPr lang="ko-KR" altLang="en-US" sz="2400" dirty="0" smtClean="0">
+              <a:rPr lang="ko-KR" altLang="en-US" sz="2400" dirty="0">
                 <a:latin typeface="나눔바른고딕" panose="020B0603020101020101" pitchFamily="34" charset="-127"/>
                 <a:ea typeface="나눔바른고딕" panose="020B0603020101020101" pitchFamily="34" charset="-127"/>
               </a:rPr>
@@ -4003,7 +4004,7 @@
         <p:cNvPr id="1" name="">
           <a:extLst>
             <a:ext uri="{FF2B5EF4-FFF2-40B4-BE49-F238E27FC236}">
-              <a16:creationId xmlns="" xmlns:a16="http://schemas.microsoft.com/office/drawing/2014/main" id="{49DA7EAA-204E-2F90-E52A-6C83B9013025}"/>
+              <a16:creationId xmlns:a16="http://schemas.microsoft.com/office/drawing/2014/main" id="{49DA7EAA-204E-2F90-E52A-6C83B9013025}"/>
             </a:ext>
           </a:extLst>
         </p:cNvPr>
@@ -4023,7 +4024,7 @@
           <p:cNvPr id="8" name="TextBox 7">
             <a:extLst>
               <a:ext uri="{FF2B5EF4-FFF2-40B4-BE49-F238E27FC236}">
-                <a16:creationId xmlns="" xmlns:a16="http://schemas.microsoft.com/office/drawing/2014/main" id="{701093AF-254C-83D7-8032-465A5FB513FB}"/>
+                <a16:creationId xmlns:a16="http://schemas.microsoft.com/office/drawing/2014/main" id="{701093AF-254C-83D7-8032-465A5FB513FB}"/>
               </a:ext>
             </a:extLst>
           </p:cNvPr>
@@ -4065,7 +4066,7 @@
           <p:cNvPr id="10" name="TextBox 9">
             <a:extLst>
               <a:ext uri="{FF2B5EF4-FFF2-40B4-BE49-F238E27FC236}">
-                <a16:creationId xmlns="" xmlns:a16="http://schemas.microsoft.com/office/drawing/2014/main" id="{2D538815-CBEF-E37B-5659-B5091F86B485}"/>
+                <a16:creationId xmlns:a16="http://schemas.microsoft.com/office/drawing/2014/main" id="{2D538815-CBEF-E37B-5659-B5091F86B485}"/>
               </a:ext>
             </a:extLst>
           </p:cNvPr>
@@ -4075,7 +4076,7 @@
         <p:spPr>
           <a:xfrm>
             <a:off x="302451" y="684785"/>
-            <a:ext cx="8118068" cy="2308324"/>
+            <a:ext cx="8118068" cy="1569660"/>
           </a:xfrm>
           <a:prstGeom prst="rect">
             <a:avLst/>
@@ -4093,14 +4094,7 @@
                 <a:latin typeface="나눔바른고딕" panose="020B0603020101020101" pitchFamily="34" charset="-127"/>
                 <a:ea typeface="나눔바른고딕" panose="020B0603020101020101" pitchFamily="34" charset="-127"/>
               </a:rPr>
-              <a:t>애니메이션 </a:t>
-            </a:r>
-            <a:r>
-              <a:rPr lang="ko-KR" altLang="en-US" sz="1600" dirty="0" smtClean="0">
-                <a:latin typeface="나눔바른고딕" panose="020B0603020101020101" pitchFamily="34" charset="-127"/>
-                <a:ea typeface="나눔바른고딕" panose="020B0603020101020101" pitchFamily="34" charset="-127"/>
-              </a:rPr>
-              <a:t>시스템</a:t>
+              <a:t>애니메이션 시스템</a:t>
             </a:r>
             <a:endParaRPr lang="en-US" altLang="ko-KR" sz="1600" dirty="0">
               <a:latin typeface="나눔바른고딕" panose="020B0603020101020101" pitchFamily="34" charset="-127"/>
@@ -4113,34 +4107,34 @@
               <a:buChar char="•"/>
             </a:pPr>
             <a:r>
-              <a:rPr lang="ko-KR" altLang="en-US" sz="1600" dirty="0" err="1" smtClean="0">
+              <a:rPr lang="ko-KR" altLang="en-US" sz="1600" dirty="0" err="1">
                 <a:latin typeface="나눔바른고딕" panose="020B0603020101020101" pitchFamily="34" charset="-127"/>
                 <a:ea typeface="나눔바른고딕" panose="020B0603020101020101" pitchFamily="34" charset="-127"/>
               </a:rPr>
               <a:t>애니메이터</a:t>
             </a:r>
             <a:r>
-              <a:rPr lang="ko-KR" altLang="en-US" sz="1600" dirty="0" smtClean="0">
+              <a:rPr lang="ko-KR" altLang="en-US" sz="1600" dirty="0">
                 <a:latin typeface="나눔바른고딕" panose="020B0603020101020101" pitchFamily="34" charset="-127"/>
                 <a:ea typeface="나눔바른고딕" panose="020B0603020101020101" pitchFamily="34" charset="-127"/>
               </a:rPr>
               <a:t> </a:t>
             </a:r>
             <a:r>
-              <a:rPr lang="en-US" altLang="ko-KR" sz="1600" dirty="0" smtClean="0">
+              <a:rPr lang="en-US" altLang="ko-KR" sz="1600" dirty="0">
                 <a:latin typeface="나눔바른고딕" panose="020B0603020101020101" pitchFamily="34" charset="-127"/>
                 <a:ea typeface="나눔바른고딕" panose="020B0603020101020101" pitchFamily="34" charset="-127"/>
               </a:rPr>
               <a:t>: </a:t>
             </a:r>
             <a:r>
-              <a:rPr lang="ko-KR" altLang="en-US" sz="1600" dirty="0" smtClean="0">
+              <a:rPr lang="ko-KR" altLang="en-US" sz="1600" dirty="0">
                 <a:latin typeface="나눔바른고딕" panose="020B0603020101020101" pitchFamily="34" charset="-127"/>
                 <a:ea typeface="나눔바른고딕" panose="020B0603020101020101" pitchFamily="34" charset="-127"/>
               </a:rPr>
               <a:t>애니메이션 재생 제어</a:t>
             </a:r>
-            <a:endParaRPr lang="en-US" altLang="ko-KR" sz="1600" dirty="0" smtClean="0">
+            <a:endParaRPr lang="en-US" altLang="ko-KR" sz="1600" dirty="0">
               <a:latin typeface="나눔바른고딕" panose="020B0603020101020101" pitchFamily="34" charset="-127"/>
               <a:ea typeface="나눔바른고딕" panose="020B0603020101020101" pitchFamily="34" charset="-127"/>
             </a:endParaRPr>
@@ -4151,14 +4145,14 @@
               <a:buChar char="•"/>
             </a:pPr>
             <a:r>
-              <a:rPr lang="ko-KR" altLang="en-US" sz="1600" dirty="0" err="1" smtClean="0">
+              <a:rPr lang="ko-KR" altLang="en-US" sz="1600" dirty="0" err="1">
                 <a:latin typeface="나눔바른고딕" panose="020B0603020101020101" pitchFamily="34" charset="-127"/>
                 <a:ea typeface="나눔바른고딕" panose="020B0603020101020101" pitchFamily="34" charset="-127"/>
               </a:rPr>
               <a:t>블렌드</a:t>
             </a:r>
             <a:r>
-              <a:rPr lang="ko-KR" altLang="en-US" sz="1600" dirty="0" smtClean="0">
+              <a:rPr lang="ko-KR" altLang="en-US" sz="1600" dirty="0">
                 <a:latin typeface="나눔바른고딕" panose="020B0603020101020101" pitchFamily="34" charset="-127"/>
                 <a:ea typeface="나눔바른고딕" panose="020B0603020101020101" pitchFamily="34" charset="-127"/>
               </a:rPr>
@@ -4169,14 +4163,7 @@
                 <a:latin typeface="나눔바른고딕" panose="020B0603020101020101" pitchFamily="34" charset="-127"/>
                 <a:ea typeface="나눔바른고딕" panose="020B0603020101020101" pitchFamily="34" charset="-127"/>
               </a:rPr>
-              <a:t>(2D</a:t>
-            </a:r>
-            <a:r>
-              <a:rPr lang="en-US" altLang="ko-KR" sz="1600" dirty="0" smtClean="0">
-                <a:latin typeface="나눔바른고딕" panose="020B0603020101020101" pitchFamily="34" charset="-127"/>
-                <a:ea typeface="나눔바른고딕" panose="020B0603020101020101" pitchFamily="34" charset="-127"/>
-              </a:rPr>
-              <a:t>) : </a:t>
+              <a:t>(2D) : </a:t>
             </a:r>
           </a:p>
           <a:p>
@@ -4185,7 +4172,7 @@
               <a:buChar char="•"/>
             </a:pPr>
             <a:r>
-              <a:rPr lang="en-US" altLang="ko-KR" sz="1600" dirty="0" smtClean="0">
+              <a:rPr lang="en-US" altLang="ko-KR" sz="1600" dirty="0">
                 <a:latin typeface="나눔바른고딕" panose="020B0603020101020101" pitchFamily="34" charset="-127"/>
                 <a:ea typeface="나눔바른고딕" panose="020B0603020101020101" pitchFamily="34" charset="-127"/>
               </a:rPr>
@@ -4196,16 +4183,9 @@
                 <a:latin typeface="나눔바른고딕" panose="020B0603020101020101" pitchFamily="34" charset="-127"/>
                 <a:ea typeface="나눔바른고딕" panose="020B0603020101020101" pitchFamily="34" charset="-127"/>
               </a:rPr>
-              <a:t>평면에서 입력한 좌표를 </a:t>
-            </a:r>
-            <a:r>
-              <a:rPr lang="ko-KR" altLang="en-US" sz="1600" dirty="0" smtClean="0">
-                <a:latin typeface="나눔바른고딕" panose="020B0603020101020101" pitchFamily="34" charset="-127"/>
-                <a:ea typeface="나눔바른고딕" panose="020B0603020101020101" pitchFamily="34" charset="-127"/>
-              </a:rPr>
-              <a:t>이용해 사전에 배치된 애니메이션 간 거리를 계산</a:t>
-            </a:r>
-            <a:endParaRPr lang="en-US" altLang="ko-KR" sz="1600" dirty="0" smtClean="0">
+              <a:t>평면에서 입력한 좌표를 이용해 사전에 배치된 애니메이션 간 거리를 계산</a:t>
+            </a:r>
+            <a:endParaRPr lang="en-US" altLang="ko-KR" sz="1600" dirty="0">
               <a:latin typeface="나눔바른고딕" panose="020B0603020101020101" pitchFamily="34" charset="-127"/>
               <a:ea typeface="나눔바른고딕" panose="020B0603020101020101" pitchFamily="34" charset="-127"/>
             </a:endParaRPr>
@@ -4216,7 +4196,7 @@
               <a:buChar char="•"/>
             </a:pPr>
             <a:r>
-              <a:rPr lang="ko-KR" altLang="en-US" sz="1600" dirty="0" smtClean="0">
+              <a:rPr lang="ko-KR" altLang="en-US" sz="1600" dirty="0">
                 <a:latin typeface="나눔바른고딕" panose="020B0603020101020101" pitchFamily="34" charset="-127"/>
                 <a:ea typeface="나눔바른고딕" panose="020B0603020101020101" pitchFamily="34" charset="-127"/>
               </a:rPr>
@@ -4233,86 +4213,18 @@
               <a:buChar char="•"/>
             </a:pPr>
             <a:r>
-              <a:rPr lang="ko-KR" altLang="en-US" sz="1600" dirty="0" err="1" smtClean="0">
+              <a:rPr lang="ko-KR" altLang="en-US" sz="1600" dirty="0" err="1">
                 <a:latin typeface="나눔바른고딕" panose="020B0603020101020101" pitchFamily="34" charset="-127"/>
                 <a:ea typeface="나눔바른고딕" panose="020B0603020101020101" pitchFamily="34" charset="-127"/>
               </a:rPr>
               <a:t>로코모션</a:t>
             </a:r>
             <a:r>
-              <a:rPr lang="ko-KR" altLang="en-US" sz="1600" dirty="0" smtClean="0">
+              <a:rPr lang="ko-KR" altLang="en-US" sz="1600" dirty="0">
                 <a:latin typeface="나눔바른고딕" panose="020B0603020101020101" pitchFamily="34" charset="-127"/>
                 <a:ea typeface="나눔바른고딕" panose="020B0603020101020101" pitchFamily="34" charset="-127"/>
               </a:rPr>
               <a:t> 형태의 애니메이션의 축 입력을 자연스럽게 처리하고자 구현</a:t>
-            </a:r>
-            <a:endParaRPr lang="en-US" altLang="ko-KR" sz="1600" dirty="0" smtClean="0">
-              <a:latin typeface="나눔바른고딕" panose="020B0603020101020101" pitchFamily="34" charset="-127"/>
-              <a:ea typeface="나눔바른고딕" panose="020B0603020101020101" pitchFamily="34" charset="-127"/>
-            </a:endParaRPr>
-          </a:p>
-          <a:p>
-            <a:pPr marL="285750" lvl="1" indent="-285750">
-              <a:buFont typeface="Arial" panose="020B0604020202020204" pitchFamily="34" charset="0"/>
-              <a:buChar char="•"/>
-            </a:pPr>
-            <a:r>
-              <a:rPr lang="ko-KR" altLang="en-US" sz="1600" dirty="0" smtClean="0">
-                <a:latin typeface="나눔바른고딕" panose="020B0603020101020101" pitchFamily="34" charset="-127"/>
-                <a:ea typeface="나눔바른고딕" panose="020B0603020101020101" pitchFamily="34" charset="-127"/>
-              </a:rPr>
-              <a:t>액션 클립 </a:t>
-            </a:r>
-            <a:r>
-              <a:rPr lang="en-US" altLang="ko-KR" sz="1600" dirty="0" smtClean="0">
-                <a:latin typeface="나눔바른고딕" panose="020B0603020101020101" pitchFamily="34" charset="-127"/>
-                <a:ea typeface="나눔바른고딕" panose="020B0603020101020101" pitchFamily="34" charset="-127"/>
-              </a:rPr>
-              <a:t>: </a:t>
-            </a:r>
-          </a:p>
-          <a:p>
-            <a:pPr marL="742950" lvl="2" indent="-285750">
-              <a:buFont typeface="Arial" panose="020B0604020202020204" pitchFamily="34" charset="0"/>
-              <a:buChar char="•"/>
-            </a:pPr>
-            <a:r>
-              <a:rPr lang="ko-KR" altLang="en-US" sz="1600" dirty="0" smtClean="0">
-                <a:latin typeface="나눔바른고딕" panose="020B0603020101020101" pitchFamily="34" charset="-127"/>
-                <a:ea typeface="나눔바른고딕" panose="020B0603020101020101" pitchFamily="34" charset="-127"/>
-              </a:rPr>
-              <a:t>단발성 재생을 위한 애니메이션 처리</a:t>
-            </a:r>
-            <a:endParaRPr lang="en-US" altLang="ko-KR" sz="1600" dirty="0" smtClean="0">
-              <a:latin typeface="나눔바른고딕" panose="020B0603020101020101" pitchFamily="34" charset="-127"/>
-              <a:ea typeface="나눔바른고딕" panose="020B0603020101020101" pitchFamily="34" charset="-127"/>
-            </a:endParaRPr>
-          </a:p>
-          <a:p>
-            <a:pPr marL="742950" lvl="2" indent="-285750">
-              <a:buFont typeface="Arial" panose="020B0604020202020204" pitchFamily="34" charset="0"/>
-              <a:buChar char="•"/>
-            </a:pPr>
-            <a:r>
-              <a:rPr lang="ko-KR" altLang="en-US" sz="1600" dirty="0" smtClean="0">
-                <a:latin typeface="나눔바른고딕" panose="020B0603020101020101" pitchFamily="34" charset="-127"/>
-                <a:ea typeface="나눔바른고딕" panose="020B0603020101020101" pitchFamily="34" charset="-127"/>
-              </a:rPr>
-              <a:t>점프</a:t>
-            </a:r>
-            <a:r>
-              <a:rPr lang="en-US" altLang="ko-KR" sz="1600" dirty="0" smtClean="0">
-                <a:latin typeface="나눔바른고딕" panose="020B0603020101020101" pitchFamily="34" charset="-127"/>
-                <a:ea typeface="나눔바른고딕" panose="020B0603020101020101" pitchFamily="34" charset="-127"/>
-              </a:rPr>
-              <a:t>, </a:t>
-            </a:r>
-            <a:r>
-              <a:rPr lang="ko-KR" altLang="en-US" sz="1600" dirty="0" smtClean="0">
-                <a:latin typeface="나눔바른고딕" panose="020B0603020101020101" pitchFamily="34" charset="-127"/>
-                <a:ea typeface="나눔바른고딕" panose="020B0603020101020101" pitchFamily="34" charset="-127"/>
-              </a:rPr>
-              <a:t>장애물 넘기 등 단발성으로 재생하는 애니메이션</a:t>
             </a:r>
             <a:endParaRPr lang="en-US" altLang="ko-KR" sz="1600" dirty="0">
               <a:latin typeface="나눔바른고딕" panose="020B0603020101020101" pitchFamily="34" charset="-127"/>
@@ -4321,84 +4233,72 @@
           </a:p>
         </p:txBody>
       </p:sp>
-      <p:sp>
-        <p:nvSpPr>
-          <p:cNvPr id="2" name="직사각형 1"/>
-          <p:cNvSpPr/>
+      <p:pic>
+        <p:nvPicPr>
+          <p:cNvPr id="7" name="그림 6">
+            <a:extLst>
+              <a:ext uri="{FF2B5EF4-FFF2-40B4-BE49-F238E27FC236}">
+                <a16:creationId xmlns:a16="http://schemas.microsoft.com/office/drawing/2014/main" id="{32D73928-A2A2-7D46-E3CF-878238F0483E}"/>
+              </a:ext>
+            </a:extLst>
+          </p:cNvPr>
+          <p:cNvPicPr>
+            <a:picLocks noChangeAspect="1"/>
+          </p:cNvPicPr>
           <p:nvPr/>
-        </p:nvSpPr>
+        </p:nvPicPr>
+        <p:blipFill>
+          <a:blip r:embed="rId2"/>
+          <a:stretch>
+            <a:fillRect/>
+          </a:stretch>
+        </p:blipFill>
         <p:spPr>
           <a:xfrm>
-            <a:off x="5246591" y="3362441"/>
-            <a:ext cx="806631" cy="276999"/>
+            <a:off x="770283" y="3233684"/>
+            <a:ext cx="5138742" cy="2178288"/>
           </a:xfrm>
           <a:prstGeom prst="rect">
             <a:avLst/>
           </a:prstGeom>
         </p:spPr>
-        <p:txBody>
-          <a:bodyPr wrap="none">
-            <a:spAutoFit/>
-          </a:bodyPr>
-          <a:lstStyle/>
-          <a:p>
-            <a:r>
-              <a:rPr lang="ko-KR" altLang="en-US" sz="1200" dirty="0">
-                <a:latin typeface="나눔바른고딕" panose="020B0603020101020101" pitchFamily="34" charset="-127"/>
-                <a:ea typeface="나눔바른고딕" panose="020B0603020101020101" pitchFamily="34" charset="-127"/>
-              </a:rPr>
-              <a:t>액션 클립 </a:t>
-            </a:r>
-            <a:endParaRPr lang="ko-KR" altLang="en-US" sz="1200" dirty="0"/>
-          </a:p>
-        </p:txBody>
-      </p:sp>
-      <p:sp>
-        <p:nvSpPr>
-          <p:cNvPr id="6" name="직사각형 5"/>
-          <p:cNvSpPr/>
+      </p:pic>
+      <p:pic>
+        <p:nvPicPr>
+          <p:cNvPr id="11" name="그림 10">
+            <a:extLst>
+              <a:ext uri="{FF2B5EF4-FFF2-40B4-BE49-F238E27FC236}">
+                <a16:creationId xmlns:a16="http://schemas.microsoft.com/office/drawing/2014/main" id="{8A97F9AB-B5C2-B00D-CCA1-AF75CBE72BE0}"/>
+              </a:ext>
+            </a:extLst>
+          </p:cNvPr>
+          <p:cNvPicPr>
+            <a:picLocks noChangeAspect="1"/>
+          </p:cNvPicPr>
           <p:nvPr/>
-        </p:nvSpPr>
+        </p:nvPicPr>
+        <p:blipFill>
+          <a:blip r:embed="rId3">
+            <a:extLst>
+              <a:ext uri="{28A0092B-C50C-407E-A947-70E740481C1C}">
+                <a14:useLocalDpi xmlns:a14="http://schemas.microsoft.com/office/drawing/2010/main" val="0"/>
+              </a:ext>
+            </a:extLst>
+          </a:blip>
+          <a:stretch>
+            <a:fillRect/>
+          </a:stretch>
+        </p:blipFill>
         <p:spPr>
           <a:xfrm>
-            <a:off x="302451" y="3362440"/>
-            <a:ext cx="944489" cy="276999"/>
+            <a:off x="7062233" y="2730102"/>
+            <a:ext cx="3752788" cy="3023079"/>
           </a:xfrm>
           <a:prstGeom prst="rect">
             <a:avLst/>
           </a:prstGeom>
         </p:spPr>
-        <p:txBody>
-          <a:bodyPr wrap="none">
-            <a:spAutoFit/>
-          </a:bodyPr>
-          <a:lstStyle/>
-          <a:p>
-            <a:r>
-              <a:rPr lang="ko-KR" altLang="en-US" sz="1200" dirty="0" err="1" smtClean="0">
-                <a:latin typeface="나눔바른고딕" panose="020B0603020101020101" pitchFamily="34" charset="-127"/>
-                <a:ea typeface="나눔바른고딕" panose="020B0603020101020101" pitchFamily="34" charset="-127"/>
-              </a:rPr>
-              <a:t>블렌드</a:t>
-            </a:r>
-            <a:r>
-              <a:rPr lang="ko-KR" altLang="en-US" sz="1200" dirty="0" smtClean="0">
-                <a:latin typeface="나눔바른고딕" panose="020B0603020101020101" pitchFamily="34" charset="-127"/>
-                <a:ea typeface="나눔바른고딕" panose="020B0603020101020101" pitchFamily="34" charset="-127"/>
-              </a:rPr>
-              <a:t> </a:t>
-            </a:r>
-            <a:r>
-              <a:rPr lang="ko-KR" altLang="en-US" sz="1200" dirty="0">
-                <a:latin typeface="나눔바른고딕" panose="020B0603020101020101" pitchFamily="34" charset="-127"/>
-                <a:ea typeface="나눔바른고딕" panose="020B0603020101020101" pitchFamily="34" charset="-127"/>
-              </a:rPr>
-              <a:t>클립 </a:t>
-            </a:r>
-            <a:endParaRPr lang="ko-KR" altLang="en-US" sz="1200" dirty="0"/>
-          </a:p>
-        </p:txBody>
-      </p:sp>
+      </p:pic>
     </p:spTree>
     <p:extLst>
       <p:ext uri="{BB962C8B-B14F-4D97-AF65-F5344CB8AC3E}">
@@ -4420,7 +4320,7 @@
         <p:cNvPr id="1" name="">
           <a:extLst>
             <a:ext uri="{FF2B5EF4-FFF2-40B4-BE49-F238E27FC236}">
-              <a16:creationId xmlns="" xmlns:a16="http://schemas.microsoft.com/office/drawing/2014/main" id="{49DA7EAA-204E-2F90-E52A-6C83B9013025}"/>
+              <a16:creationId xmlns:a16="http://schemas.microsoft.com/office/drawing/2014/main" id="{1F23310D-1C56-1CE2-7C56-8DCC710882F8}"/>
             </a:ext>
           </a:extLst>
         </p:cNvPr>
@@ -4440,7 +4340,7 @@
           <p:cNvPr id="8" name="TextBox 7">
             <a:extLst>
               <a:ext uri="{FF2B5EF4-FFF2-40B4-BE49-F238E27FC236}">
-                <a16:creationId xmlns="" xmlns:a16="http://schemas.microsoft.com/office/drawing/2014/main" id="{701093AF-254C-83D7-8032-465A5FB513FB}"/>
+                <a16:creationId xmlns:a16="http://schemas.microsoft.com/office/drawing/2014/main" id="{E39862E1-38CC-F80A-E137-C6D927426C41}"/>
               </a:ext>
             </a:extLst>
           </p:cNvPr>
@@ -4479,10 +4379,10 @@
       </p:sp>
       <p:sp>
         <p:nvSpPr>
-          <p:cNvPr id="12" name="TextBox 11">
-            <a:extLst>
-              <a:ext uri="{FF2B5EF4-FFF2-40B4-BE49-F238E27FC236}">
-                <a16:creationId xmlns="" xmlns:a16="http://schemas.microsoft.com/office/drawing/2014/main" id="{8E37654D-B1C1-B17B-2A32-BB0F324B7AC3}"/>
+          <p:cNvPr id="10" name="TextBox 9">
+            <a:extLst>
+              <a:ext uri="{FF2B5EF4-FFF2-40B4-BE49-F238E27FC236}">
+                <a16:creationId xmlns:a16="http://schemas.microsoft.com/office/drawing/2014/main" id="{9E02EDB0-2721-2B8D-A246-70F81C512032}"/>
               </a:ext>
             </a:extLst>
           </p:cNvPr>
@@ -4492,7 +4392,7 @@
         <p:spPr>
           <a:xfrm>
             <a:off x="302451" y="684785"/>
-            <a:ext cx="8118068" cy="1323439"/>
+            <a:ext cx="8118068" cy="1077218"/>
           </a:xfrm>
           <a:prstGeom prst="rect">
             <a:avLst/>
@@ -4506,27 +4406,280 @@
           <a:lstStyle/>
           <a:p>
             <a:r>
-              <a:rPr lang="ko-KR" altLang="en-US" sz="1600" dirty="0" err="1" smtClean="0">
+              <a:rPr lang="ko-KR" altLang="en-US" sz="1600" dirty="0">
+                <a:latin typeface="나눔바른고딕" panose="020B0603020101020101" pitchFamily="34" charset="-127"/>
+                <a:ea typeface="나눔바른고딕" panose="020B0603020101020101" pitchFamily="34" charset="-127"/>
+              </a:rPr>
+              <a:t>애니메이션 시스템</a:t>
+            </a:r>
+            <a:endParaRPr lang="en-US" altLang="ko-KR" sz="1600" dirty="0">
+              <a:latin typeface="나눔바른고딕" panose="020B0603020101020101" pitchFamily="34" charset="-127"/>
+              <a:ea typeface="나눔바른고딕" panose="020B0603020101020101" pitchFamily="34" charset="-127"/>
+            </a:endParaRPr>
+          </a:p>
+          <a:p>
+            <a:pPr marL="285750" lvl="1" indent="-285750">
+              <a:buFont typeface="Arial" panose="020B0604020202020204" pitchFamily="34" charset="0"/>
+              <a:buChar char="•"/>
+            </a:pPr>
+            <a:r>
+              <a:rPr lang="ko-KR" altLang="en-US" sz="1600" dirty="0">
+                <a:latin typeface="나눔바른고딕" panose="020B0603020101020101" pitchFamily="34" charset="-127"/>
+                <a:ea typeface="나눔바른고딕" panose="020B0603020101020101" pitchFamily="34" charset="-127"/>
+              </a:rPr>
+              <a:t>액션 클립 </a:t>
+            </a:r>
+            <a:r>
+              <a:rPr lang="en-US" altLang="ko-KR" sz="1600" dirty="0">
+                <a:latin typeface="나눔바른고딕" panose="020B0603020101020101" pitchFamily="34" charset="-127"/>
+                <a:ea typeface="나눔바른고딕" panose="020B0603020101020101" pitchFamily="34" charset="-127"/>
+              </a:rPr>
+              <a:t>: </a:t>
+            </a:r>
+          </a:p>
+          <a:p>
+            <a:pPr marL="742950" lvl="2" indent="-285750">
+              <a:buFont typeface="Arial" panose="020B0604020202020204" pitchFamily="34" charset="0"/>
+              <a:buChar char="•"/>
+            </a:pPr>
+            <a:r>
+              <a:rPr lang="ko-KR" altLang="en-US" sz="1600" dirty="0">
+                <a:latin typeface="나눔바른고딕" panose="020B0603020101020101" pitchFamily="34" charset="-127"/>
+                <a:ea typeface="나눔바른고딕" panose="020B0603020101020101" pitchFamily="34" charset="-127"/>
+              </a:rPr>
+              <a:t>단발성 재생을 위한 애니메이션 처리</a:t>
+            </a:r>
+            <a:endParaRPr lang="en-US" altLang="ko-KR" sz="1600" dirty="0">
+              <a:latin typeface="나눔바른고딕" panose="020B0603020101020101" pitchFamily="34" charset="-127"/>
+              <a:ea typeface="나눔바른고딕" panose="020B0603020101020101" pitchFamily="34" charset="-127"/>
+            </a:endParaRPr>
+          </a:p>
+          <a:p>
+            <a:pPr marL="742950" lvl="2" indent="-285750">
+              <a:buFont typeface="Arial" panose="020B0604020202020204" pitchFamily="34" charset="0"/>
+              <a:buChar char="•"/>
+            </a:pPr>
+            <a:r>
+              <a:rPr lang="ko-KR" altLang="en-US" sz="1600" dirty="0">
+                <a:latin typeface="나눔바른고딕" panose="020B0603020101020101" pitchFamily="34" charset="-127"/>
+                <a:ea typeface="나눔바른고딕" panose="020B0603020101020101" pitchFamily="34" charset="-127"/>
+              </a:rPr>
+              <a:t>점프</a:t>
+            </a:r>
+            <a:r>
+              <a:rPr lang="en-US" altLang="ko-KR" sz="1600" dirty="0">
+                <a:latin typeface="나눔바른고딕" panose="020B0603020101020101" pitchFamily="34" charset="-127"/>
+                <a:ea typeface="나눔바른고딕" panose="020B0603020101020101" pitchFamily="34" charset="-127"/>
+              </a:rPr>
+              <a:t>, </a:t>
+            </a:r>
+            <a:r>
+              <a:rPr lang="ko-KR" altLang="en-US" sz="1600" dirty="0">
+                <a:latin typeface="나눔바른고딕" panose="020B0603020101020101" pitchFamily="34" charset="-127"/>
+                <a:ea typeface="나눔바른고딕" panose="020B0603020101020101" pitchFamily="34" charset="-127"/>
+              </a:rPr>
+              <a:t>장애물 넘기 등 단발성으로 재생하는 애니메이션</a:t>
+            </a:r>
+            <a:endParaRPr lang="en-US" altLang="ko-KR" sz="1600" dirty="0">
+              <a:latin typeface="나눔바른고딕" panose="020B0603020101020101" pitchFamily="34" charset="-127"/>
+              <a:ea typeface="나눔바른고딕" panose="020B0603020101020101" pitchFamily="34" charset="-127"/>
+            </a:endParaRPr>
+          </a:p>
+        </p:txBody>
+      </p:sp>
+      <p:pic>
+        <p:nvPicPr>
+          <p:cNvPr id="4" name="그림 3">
+            <a:extLst>
+              <a:ext uri="{FF2B5EF4-FFF2-40B4-BE49-F238E27FC236}">
+                <a16:creationId xmlns:a16="http://schemas.microsoft.com/office/drawing/2014/main" id="{0FFFED53-0F30-89FA-D6A5-0BBCB95790A3}"/>
+              </a:ext>
+            </a:extLst>
+          </p:cNvPr>
+          <p:cNvPicPr>
+            <a:picLocks noChangeAspect="1"/>
+          </p:cNvPicPr>
+          <p:nvPr/>
+        </p:nvPicPr>
+        <p:blipFill>
+          <a:blip r:embed="rId2">
+            <a:extLst>
+              <a:ext uri="{28A0092B-C50C-407E-A947-70E740481C1C}">
+                <a14:useLocalDpi xmlns:a14="http://schemas.microsoft.com/office/drawing/2010/main" val="0"/>
+              </a:ext>
+            </a:extLst>
+          </a:blip>
+          <a:stretch>
+            <a:fillRect/>
+          </a:stretch>
+        </p:blipFill>
+        <p:spPr>
+          <a:xfrm>
+            <a:off x="397746" y="2131335"/>
+            <a:ext cx="4848845" cy="3906014"/>
+          </a:xfrm>
+          <a:prstGeom prst="rect">
+            <a:avLst/>
+          </a:prstGeom>
+        </p:spPr>
+      </p:pic>
+      <p:pic>
+        <p:nvPicPr>
+          <p:cNvPr id="9" name="그림 8">
+            <a:extLst>
+              <a:ext uri="{FF2B5EF4-FFF2-40B4-BE49-F238E27FC236}">
+                <a16:creationId xmlns:a16="http://schemas.microsoft.com/office/drawing/2014/main" id="{E648C512-58E7-CB12-F280-E253A7AAD18A}"/>
+              </a:ext>
+            </a:extLst>
+          </p:cNvPr>
+          <p:cNvPicPr>
+            <a:picLocks noChangeAspect="1"/>
+          </p:cNvPicPr>
+          <p:nvPr/>
+        </p:nvPicPr>
+        <p:blipFill>
+          <a:blip r:embed="rId3">
+            <a:extLst>
+              <a:ext uri="{28A0092B-C50C-407E-A947-70E740481C1C}">
+                <a14:useLocalDpi xmlns:a14="http://schemas.microsoft.com/office/drawing/2010/main" val="0"/>
+              </a:ext>
+            </a:extLst>
+          </a:blip>
+          <a:stretch>
+            <a:fillRect/>
+          </a:stretch>
+        </p:blipFill>
+        <p:spPr>
+          <a:xfrm>
+            <a:off x="5387145" y="2131335"/>
+            <a:ext cx="6045210" cy="3906014"/>
+          </a:xfrm>
+          <a:prstGeom prst="rect">
+            <a:avLst/>
+          </a:prstGeom>
+        </p:spPr>
+      </p:pic>
+    </p:spTree>
+    <p:extLst>
+      <p:ext uri="{BB962C8B-B14F-4D97-AF65-F5344CB8AC3E}">
+        <p14:creationId xmlns:p14="http://schemas.microsoft.com/office/powerpoint/2010/main" val="2129410737"/>
+      </p:ext>
+    </p:extLst>
+  </p:cSld>
+  <p:clrMapOvr>
+    <a:masterClrMapping/>
+  </p:clrMapOvr>
+</p:sld>
+</file>
+
+<file path=ppt/slides/slide4.xml><?xml version="1.0" encoding="utf-8"?>
+<p:sld xmlns:a="http://schemas.openxmlformats.org/drawingml/2006/main" xmlns:r="http://schemas.openxmlformats.org/officeDocument/2006/relationships" xmlns:p="http://schemas.openxmlformats.org/presentationml/2006/main">
+  <p:cSld>
+    <p:spTree>
+      <p:nvGrpSpPr>
+        <p:cNvPr id="1" name="">
+          <a:extLst>
+            <a:ext uri="{FF2B5EF4-FFF2-40B4-BE49-F238E27FC236}">
+              <a16:creationId xmlns:a16="http://schemas.microsoft.com/office/drawing/2014/main" id="{49DA7EAA-204E-2F90-E52A-6C83B9013025}"/>
+            </a:ext>
+          </a:extLst>
+        </p:cNvPr>
+        <p:cNvGrpSpPr/>
+        <p:nvPr/>
+      </p:nvGrpSpPr>
+      <p:grpSpPr>
+        <a:xfrm>
+          <a:off x="0" y="0"/>
+          <a:ext cx="0" cy="0"/>
+          <a:chOff x="0" y="0"/>
+          <a:chExt cx="0" cy="0"/>
+        </a:xfrm>
+      </p:grpSpPr>
+      <p:sp>
+        <p:nvSpPr>
+          <p:cNvPr id="8" name="TextBox 7">
+            <a:extLst>
+              <a:ext uri="{FF2B5EF4-FFF2-40B4-BE49-F238E27FC236}">
+                <a16:creationId xmlns:a16="http://schemas.microsoft.com/office/drawing/2014/main" id="{701093AF-254C-83D7-8032-465A5FB513FB}"/>
+              </a:ext>
+            </a:extLst>
+          </p:cNvPr>
+          <p:cNvSpPr txBox="1"/>
+          <p:nvPr/>
+        </p:nvSpPr>
+        <p:spPr>
+          <a:xfrm>
+            <a:off x="302451" y="315453"/>
+            <a:ext cx="4944140" cy="369332"/>
+          </a:xfrm>
+          <a:prstGeom prst="rect">
+            <a:avLst/>
+          </a:prstGeom>
+          <a:noFill/>
+        </p:spPr>
+        <p:txBody>
+          <a:bodyPr wrap="square" rtlCol="0">
+            <a:spAutoFit/>
+          </a:bodyPr>
+          <a:lstStyle/>
+          <a:p>
+            <a:r>
+              <a:rPr lang="ko-KR" altLang="en-US" dirty="0">
+                <a:latin typeface="나눔바른고딕" panose="020B0603020101020101" pitchFamily="34" charset="-127"/>
+                <a:ea typeface="나눔바른고딕" panose="020B0603020101020101" pitchFamily="34" charset="-127"/>
+              </a:rPr>
+              <a:t>이번 주 작업 내역</a:t>
+            </a:r>
+            <a:endParaRPr lang="en-US" altLang="ko-KR" dirty="0">
+              <a:latin typeface="나눔바른고딕" panose="020B0603020101020101" pitchFamily="34" charset="-127"/>
+              <a:ea typeface="나눔바른고딕" panose="020B0603020101020101" pitchFamily="34" charset="-127"/>
+            </a:endParaRPr>
+          </a:p>
+        </p:txBody>
+      </p:sp>
+      <p:sp>
+        <p:nvSpPr>
+          <p:cNvPr id="12" name="TextBox 11">
+            <a:extLst>
+              <a:ext uri="{FF2B5EF4-FFF2-40B4-BE49-F238E27FC236}">
+                <a16:creationId xmlns:a16="http://schemas.microsoft.com/office/drawing/2014/main" id="{8E37654D-B1C1-B17B-2A32-BB0F324B7AC3}"/>
+              </a:ext>
+            </a:extLst>
+          </p:cNvPr>
+          <p:cNvSpPr txBox="1"/>
+          <p:nvPr/>
+        </p:nvSpPr>
+        <p:spPr>
+          <a:xfrm>
+            <a:off x="302451" y="684785"/>
+            <a:ext cx="8118068" cy="1569660"/>
+          </a:xfrm>
+          <a:prstGeom prst="rect">
+            <a:avLst/>
+          </a:prstGeom>
+          <a:noFill/>
+        </p:spPr>
+        <p:txBody>
+          <a:bodyPr wrap="square" rtlCol="0">
+            <a:spAutoFit/>
+          </a:bodyPr>
+          <a:lstStyle/>
+          <a:p>
+            <a:r>
+              <a:rPr lang="ko-KR" altLang="en-US" sz="1600" dirty="0" err="1">
                 <a:latin typeface="나눔바른고딕" panose="020B0603020101020101" pitchFamily="34" charset="-127"/>
                 <a:ea typeface="나눔바른고딕" panose="020B0603020101020101" pitchFamily="34" charset="-127"/>
               </a:rPr>
               <a:t>애니메이터</a:t>
             </a:r>
             <a:r>
-              <a:rPr lang="ko-KR" altLang="en-US" sz="1600" dirty="0" smtClean="0">
-                <a:latin typeface="나눔바른고딕" panose="020B0603020101020101" pitchFamily="34" charset="-127"/>
-                <a:ea typeface="나눔바른고딕" panose="020B0603020101020101" pitchFamily="34" charset="-127"/>
-              </a:rPr>
-              <a:t> </a:t>
-            </a:r>
-            <a:r>
-              <a:rPr lang="ko-KR" altLang="en-US" sz="1600" dirty="0" err="1" smtClean="0">
-                <a:latin typeface="나눔바른고딕" panose="020B0603020101020101" pitchFamily="34" charset="-127"/>
-                <a:ea typeface="나눔바른고딕" panose="020B0603020101020101" pitchFamily="34" charset="-127"/>
-              </a:rPr>
-              <a:t>레이어</a:t>
-            </a:r>
-            <a:endParaRPr lang="en-US" altLang="ko-KR" sz="1600" dirty="0" smtClean="0">
+              <a:rPr lang="ko-KR" altLang="en-US" sz="1600" dirty="0">
+                <a:latin typeface="나눔바른고딕" panose="020B0603020101020101" pitchFamily="34" charset="-127"/>
+                <a:ea typeface="나눔바른고딕" panose="020B0603020101020101" pitchFamily="34" charset="-127"/>
+              </a:rPr>
+              <a:t> 레이어</a:t>
+            </a:r>
+            <a:endParaRPr lang="en-US" altLang="ko-KR" sz="1600" dirty="0">
               <a:latin typeface="나눔바른고딕" panose="020B0603020101020101" pitchFamily="34" charset="-127"/>
               <a:ea typeface="나눔바른고딕" panose="020B0603020101020101" pitchFamily="34" charset="-127"/>
             </a:endParaRPr>
@@ -4537,21 +4690,21 @@
               <a:buChar char="•"/>
             </a:pPr>
             <a:r>
-              <a:rPr lang="en-US" altLang="ko-KR" sz="1600" dirty="0" smtClean="0">
-                <a:latin typeface="나눔바른고딕" panose="020B0603020101020101" pitchFamily="34" charset="-127"/>
-                <a:ea typeface="나눔바른고딕" panose="020B0603020101020101" pitchFamily="34" charset="-127"/>
-              </a:rPr>
-              <a:t>Base </a:t>
-            </a:r>
-            <a:r>
-              <a:rPr lang="en-US" altLang="ko-KR" sz="1600" dirty="0" smtClean="0">
-                <a:latin typeface="나눔바른고딕" panose="020B0603020101020101" pitchFamily="34" charset="-127"/>
-                <a:ea typeface="나눔바른고딕" panose="020B0603020101020101" pitchFamily="34" charset="-127"/>
-              </a:rPr>
-              <a:t>Layer </a:t>
-            </a:r>
-            <a:r>
-              <a:rPr lang="en-US" altLang="ko-KR" sz="1600" dirty="0" smtClean="0">
+              <a:rPr lang="ko-KR" altLang="en-US" sz="1600" dirty="0" err="1">
+                <a:latin typeface="나눔바른고딕" panose="020B0603020101020101" pitchFamily="34" charset="-127"/>
+                <a:ea typeface="나눔바른고딕" panose="020B0603020101020101" pitchFamily="34" charset="-127"/>
+              </a:rPr>
+              <a:t>애니메이터</a:t>
+            </a:r>
+            <a:r>
+              <a:rPr lang="ko-KR" altLang="en-US" sz="1600" dirty="0">
+                <a:latin typeface="나눔바른고딕" panose="020B0603020101020101" pitchFamily="34" charset="-127"/>
+                <a:ea typeface="나눔바른고딕" panose="020B0603020101020101" pitchFamily="34" charset="-127"/>
+              </a:rPr>
+              <a:t> </a:t>
+            </a:r>
+            <a:r>
+              <a:rPr lang="en-US" altLang="ko-KR" sz="1600" dirty="0">
                 <a:latin typeface="나눔바른고딕" panose="020B0603020101020101" pitchFamily="34" charset="-127"/>
                 <a:ea typeface="나눔바른고딕" panose="020B0603020101020101" pitchFamily="34" charset="-127"/>
               </a:rPr>
@@ -4562,16 +4715,33 @@
                 <a:latin typeface="나눔바른고딕" panose="020B0603020101020101" pitchFamily="34" charset="-127"/>
                 <a:ea typeface="나눔바른고딕" panose="020B0603020101020101" pitchFamily="34" charset="-127"/>
               </a:rPr>
-              <a:t>지속적인 재생 </a:t>
-            </a:r>
-            <a:r>
-              <a:rPr lang="ko-KR" altLang="en-US" sz="1600" dirty="0" smtClean="0">
-                <a:latin typeface="나눔바른고딕" panose="020B0603020101020101" pitchFamily="34" charset="-127"/>
-                <a:ea typeface="나눔바른고딕" panose="020B0603020101020101" pitchFamily="34" charset="-127"/>
-              </a:rPr>
-              <a:t>필요한 경우</a:t>
-            </a:r>
-            <a:endParaRPr lang="en-US" altLang="ko-KR" sz="1600" dirty="0" smtClean="0">
+              <a:t>애니메이션 재생 제어</a:t>
+            </a:r>
+            <a:endParaRPr lang="en-US" altLang="ko-KR" sz="1600" dirty="0">
+              <a:latin typeface="나눔바른고딕" panose="020B0603020101020101" pitchFamily="34" charset="-127"/>
+              <a:ea typeface="나눔바른고딕" panose="020B0603020101020101" pitchFamily="34" charset="-127"/>
+            </a:endParaRPr>
+          </a:p>
+          <a:p>
+            <a:pPr marL="285750" indent="-285750">
+              <a:buFont typeface="Arial" panose="020B0604020202020204" pitchFamily="34" charset="0"/>
+              <a:buChar char="•"/>
+            </a:pPr>
+            <a:r>
+              <a:rPr lang="en-US" altLang="ko-KR" sz="1600" dirty="0">
+                <a:latin typeface="나눔바른고딕" panose="020B0603020101020101" pitchFamily="34" charset="-127"/>
+                <a:ea typeface="나눔바른고딕" panose="020B0603020101020101" pitchFamily="34" charset="-127"/>
+              </a:rPr>
+              <a:t>Base Layer : </a:t>
+            </a:r>
+            <a:r>
+              <a:rPr lang="ko-KR" altLang="en-US" sz="1600" dirty="0">
+                <a:latin typeface="나눔바른고딕" panose="020B0603020101020101" pitchFamily="34" charset="-127"/>
+                <a:ea typeface="나눔바른고딕" panose="020B0603020101020101" pitchFamily="34" charset="-127"/>
+              </a:rPr>
+              <a:t>지속적인 재생 필요한 경우</a:t>
+            </a:r>
+            <a:endParaRPr lang="en-US" altLang="ko-KR" sz="1600" dirty="0">
               <a:latin typeface="나눔바른고딕" panose="020B0603020101020101" pitchFamily="34" charset="-127"/>
               <a:ea typeface="나눔바른고딕" panose="020B0603020101020101" pitchFamily="34" charset="-127"/>
             </a:endParaRPr>
@@ -4582,55 +4752,55 @@
               <a:buChar char="•"/>
             </a:pPr>
             <a:r>
-              <a:rPr lang="ko-KR" altLang="en-US" sz="1600" dirty="0" smtClean="0">
+              <a:rPr lang="ko-KR" altLang="en-US" sz="1600" dirty="0">
                 <a:latin typeface="나눔바른고딕" panose="020B0603020101020101" pitchFamily="34" charset="-127"/>
                 <a:ea typeface="나눔바른고딕" panose="020B0603020101020101" pitchFamily="34" charset="-127"/>
               </a:rPr>
               <a:t>평지</a:t>
             </a:r>
             <a:r>
-              <a:rPr lang="en-US" altLang="ko-KR" sz="1600" dirty="0" smtClean="0">
+              <a:rPr lang="en-US" altLang="ko-KR" sz="1600" dirty="0">
                 <a:latin typeface="나눔바른고딕" panose="020B0603020101020101" pitchFamily="34" charset="-127"/>
                 <a:ea typeface="나눔바른고딕" panose="020B0603020101020101" pitchFamily="34" charset="-127"/>
               </a:rPr>
               <a:t>, </a:t>
             </a:r>
             <a:r>
-              <a:rPr lang="ko-KR" altLang="en-US" sz="1600" dirty="0" smtClean="0">
+              <a:rPr lang="ko-KR" altLang="en-US" sz="1600" dirty="0">
                 <a:latin typeface="나눔바른고딕" panose="020B0603020101020101" pitchFamily="34" charset="-127"/>
                 <a:ea typeface="나눔바른고딕" panose="020B0603020101020101" pitchFamily="34" charset="-127"/>
               </a:rPr>
               <a:t>벽면 매달린 상태</a:t>
             </a:r>
             <a:r>
-              <a:rPr lang="en-US" altLang="ko-KR" sz="1600" dirty="0" smtClean="0">
+              <a:rPr lang="en-US" altLang="ko-KR" sz="1600" dirty="0">
                 <a:latin typeface="나눔바른고딕" panose="020B0603020101020101" pitchFamily="34" charset="-127"/>
                 <a:ea typeface="나눔바른고딕" panose="020B0603020101020101" pitchFamily="34" charset="-127"/>
               </a:rPr>
               <a:t>, </a:t>
             </a:r>
             <a:r>
-              <a:rPr lang="ko-KR" altLang="en-US" sz="1600" dirty="0" smtClean="0">
+              <a:rPr lang="ko-KR" altLang="en-US" sz="1600" dirty="0">
                 <a:latin typeface="나눔바른고딕" panose="020B0603020101020101" pitchFamily="34" charset="-127"/>
                 <a:ea typeface="나눔바른고딕" panose="020B0603020101020101" pitchFamily="34" charset="-127"/>
               </a:rPr>
               <a:t>벽 오르기 등 </a:t>
             </a:r>
             <a:r>
-              <a:rPr lang="ko-KR" altLang="en-US" sz="1600" dirty="0" err="1" smtClean="0">
+              <a:rPr lang="ko-KR" altLang="en-US" sz="1600" dirty="0" err="1">
                 <a:latin typeface="나눔바른고딕" panose="020B0603020101020101" pitchFamily="34" charset="-127"/>
                 <a:ea typeface="나눔바른고딕" panose="020B0603020101020101" pitchFamily="34" charset="-127"/>
               </a:rPr>
               <a:t>상태머신</a:t>
             </a:r>
             <a:r>
-              <a:rPr lang="ko-KR" altLang="en-US" sz="1600" dirty="0" smtClean="0">
+              <a:rPr lang="ko-KR" altLang="en-US" sz="1600" dirty="0">
                 <a:latin typeface="나눔바른고딕" panose="020B0603020101020101" pitchFamily="34" charset="-127"/>
                 <a:ea typeface="나눔바른고딕" panose="020B0603020101020101" pitchFamily="34" charset="-127"/>
               </a:rPr>
               <a:t> 형태로 구현</a:t>
             </a:r>
-            <a:endParaRPr lang="en-US" altLang="ko-KR" sz="1600" dirty="0" smtClean="0">
+            <a:endParaRPr lang="en-US" altLang="ko-KR" sz="1600" dirty="0">
               <a:latin typeface="나눔바른고딕" panose="020B0603020101020101" pitchFamily="34" charset="-127"/>
               <a:ea typeface="나눔바른고딕" panose="020B0603020101020101" pitchFamily="34" charset="-127"/>
             </a:endParaRPr>
@@ -4645,51 +4815,30 @@
                 <a:latin typeface="나눔바른고딕" panose="020B0603020101020101" pitchFamily="34" charset="-127"/>
                 <a:ea typeface="나눔바른고딕" panose="020B0603020101020101" pitchFamily="34" charset="-127"/>
               </a:rPr>
-              <a:t>Override Layer </a:t>
-            </a:r>
-            <a:r>
-              <a:rPr lang="en-US" altLang="ko-KR" sz="1600" dirty="0" smtClean="0">
-                <a:latin typeface="나눔바른고딕" panose="020B0603020101020101" pitchFamily="34" charset="-127"/>
-                <a:ea typeface="나눔바른고딕" panose="020B0603020101020101" pitchFamily="34" charset="-127"/>
-              </a:rPr>
-              <a:t>: </a:t>
-            </a:r>
-            <a:r>
-              <a:rPr lang="ko-KR" altLang="en-US" sz="1600" dirty="0" smtClean="0">
+              <a:t>Override Layer : </a:t>
+            </a:r>
+            <a:r>
+              <a:rPr lang="ko-KR" altLang="en-US" sz="1600" dirty="0">
                 <a:latin typeface="나눔바른고딕" panose="020B0603020101020101" pitchFamily="34" charset="-127"/>
                 <a:ea typeface="나눔바른고딕" panose="020B0603020101020101" pitchFamily="34" charset="-127"/>
               </a:rPr>
               <a:t>필요한 시점에</a:t>
             </a:r>
             <a:r>
-              <a:rPr lang="en-US" altLang="ko-KR" sz="1600" dirty="0" smtClean="0">
+              <a:rPr lang="en-US" altLang="ko-KR" sz="1600" dirty="0">
                 <a:latin typeface="나눔바른고딕" panose="020B0603020101020101" pitchFamily="34" charset="-127"/>
                 <a:ea typeface="나눔바른고딕" panose="020B0603020101020101" pitchFamily="34" charset="-127"/>
               </a:rPr>
               <a:t> </a:t>
             </a:r>
             <a:r>
-              <a:rPr lang="ko-KR" altLang="en-US" sz="1600" dirty="0" smtClean="0">
-                <a:latin typeface="나눔바른고딕" panose="020B0603020101020101" pitchFamily="34" charset="-127"/>
-                <a:ea typeface="나눔바른고딕" panose="020B0603020101020101" pitchFamily="34" charset="-127"/>
-              </a:rPr>
-              <a:t>한 </a:t>
-            </a:r>
-            <a:r>
-              <a:rPr lang="ko-KR" altLang="en-US" sz="1600" dirty="0" smtClean="0">
-                <a:latin typeface="나눔바른고딕" panose="020B0603020101020101" pitchFamily="34" charset="-127"/>
-                <a:ea typeface="나눔바른고딕" panose="020B0603020101020101" pitchFamily="34" charset="-127"/>
-              </a:rPr>
-              <a:t>차례 재생 </a:t>
-            </a:r>
-            <a:r>
-              <a:rPr lang="ko-KR" altLang="en-US" sz="1600" dirty="0" smtClean="0">
-                <a:latin typeface="나눔바른고딕" panose="020B0603020101020101" pitchFamily="34" charset="-127"/>
-                <a:ea typeface="나눔바른고딕" panose="020B0603020101020101" pitchFamily="34" charset="-127"/>
-              </a:rPr>
-              <a:t>필요</a:t>
-            </a:r>
-            <a:endParaRPr lang="en-US" altLang="ko-KR" sz="1600" dirty="0" smtClean="0">
+              <a:rPr lang="ko-KR" altLang="en-US" sz="1600" dirty="0">
+                <a:latin typeface="나눔바른고딕" panose="020B0603020101020101" pitchFamily="34" charset="-127"/>
+                <a:ea typeface="나눔바른고딕" panose="020B0603020101020101" pitchFamily="34" charset="-127"/>
+              </a:rPr>
+              <a:t>한 차례 재생 필요</a:t>
+            </a:r>
+            <a:endParaRPr lang="en-US" altLang="ko-KR" sz="1600" dirty="0">
               <a:latin typeface="나눔바른고딕" panose="020B0603020101020101" pitchFamily="34" charset="-127"/>
               <a:ea typeface="나눔바른고딕" panose="020B0603020101020101" pitchFamily="34" charset="-127"/>
             </a:endParaRPr>
@@ -4700,21 +4849,21 @@
               <a:buChar char="•"/>
             </a:pPr>
             <a:r>
-              <a:rPr lang="ko-KR" altLang="en-US" sz="1600" dirty="0" smtClean="0">
+              <a:rPr lang="ko-KR" altLang="en-US" sz="1600" dirty="0">
                 <a:latin typeface="나눔바른고딕" panose="020B0603020101020101" pitchFamily="34" charset="-127"/>
                 <a:ea typeface="나눔바른고딕" panose="020B0603020101020101" pitchFamily="34" charset="-127"/>
               </a:rPr>
               <a:t>점프</a:t>
             </a:r>
             <a:r>
-              <a:rPr lang="en-US" altLang="ko-KR" sz="1600" dirty="0" smtClean="0">
+              <a:rPr lang="en-US" altLang="ko-KR" sz="1600" dirty="0">
                 <a:latin typeface="나눔바른고딕" panose="020B0603020101020101" pitchFamily="34" charset="-127"/>
                 <a:ea typeface="나눔바른고딕" panose="020B0603020101020101" pitchFamily="34" charset="-127"/>
               </a:rPr>
               <a:t>, </a:t>
             </a:r>
             <a:r>
-              <a:rPr lang="ko-KR" altLang="en-US" sz="1600" dirty="0" smtClean="0">
+              <a:rPr lang="ko-KR" altLang="en-US" sz="1600" dirty="0">
                 <a:latin typeface="나눔바른고딕" panose="020B0603020101020101" pitchFamily="34" charset="-127"/>
                 <a:ea typeface="나눔바른고딕" panose="020B0603020101020101" pitchFamily="34" charset="-127"/>
               </a:rPr>
@@ -4728,13 +4877,13 @@
               <a:t> </a:t>
             </a:r>
             <a:r>
-              <a:rPr lang="ko-KR" altLang="en-US" sz="1600" dirty="0" smtClean="0">
+              <a:rPr lang="ko-KR" altLang="en-US" sz="1600" dirty="0">
                 <a:latin typeface="나눔바른고딕" panose="020B0603020101020101" pitchFamily="34" charset="-127"/>
                 <a:ea typeface="나눔바른고딕" panose="020B0603020101020101" pitchFamily="34" charset="-127"/>
               </a:rPr>
               <a:t>등 </a:t>
             </a:r>
-            <a:endParaRPr lang="en-US" altLang="ko-KR" sz="1600" dirty="0" smtClean="0">
+            <a:endParaRPr lang="en-US" altLang="ko-KR" sz="1600" dirty="0">
               <a:latin typeface="나눔바른고딕" panose="020B0603020101020101" pitchFamily="34" charset="-127"/>
               <a:ea typeface="나눔바른고딕" panose="020B0603020101020101" pitchFamily="34" charset="-127"/>
             </a:endParaRPr>
@@ -4778,7 +4927,7 @@
 </p:sld>
 </file>
 
-<file path=ppt/slides/slide4.xml><?xml version="1.0" encoding="utf-8"?>
+<file path=ppt/slides/slide5.xml><?xml version="1.0" encoding="utf-8"?>
 <p:sld xmlns:a="http://schemas.openxmlformats.org/drawingml/2006/main" xmlns:r="http://schemas.openxmlformats.org/officeDocument/2006/relationships" xmlns:p="http://schemas.openxmlformats.org/presentationml/2006/main">
   <p:cSld>
     <p:spTree>
@@ -4786,7 +4935,7 @@
         <p:cNvPr id="1" name="">
           <a:extLst>
             <a:ext uri="{FF2B5EF4-FFF2-40B4-BE49-F238E27FC236}">
-              <a16:creationId xmlns="" xmlns:a16="http://schemas.microsoft.com/office/drawing/2014/main" id="{A8A918DD-265C-DDB9-B7FC-A9D58086B7F3}"/>
+              <a16:creationId xmlns:a16="http://schemas.microsoft.com/office/drawing/2014/main" id="{A8A918DD-265C-DDB9-B7FC-A9D58086B7F3}"/>
             </a:ext>
           </a:extLst>
         </p:cNvPr>
@@ -4806,7 +4955,7 @@
           <p:cNvPr id="8" name="TextBox 7">
             <a:extLst>
               <a:ext uri="{FF2B5EF4-FFF2-40B4-BE49-F238E27FC236}">
-                <a16:creationId xmlns="" xmlns:a16="http://schemas.microsoft.com/office/drawing/2014/main" id="{38DA243F-1ACF-A8F6-3DE3-D3DB1A8A7D80}"/>
+                <a16:creationId xmlns:a16="http://schemas.microsoft.com/office/drawing/2014/main" id="{38DA243F-1ACF-A8F6-3DE3-D3DB1A8A7D80}"/>
               </a:ext>
             </a:extLst>
           </p:cNvPr>
@@ -4848,7 +4997,7 @@
           <p:cNvPr id="10" name="TextBox 9">
             <a:extLst>
               <a:ext uri="{FF2B5EF4-FFF2-40B4-BE49-F238E27FC236}">
-                <a16:creationId xmlns="" xmlns:a16="http://schemas.microsoft.com/office/drawing/2014/main" id="{75DAA775-31E2-50BB-2BF3-4EF90C8083FC}"/>
+                <a16:creationId xmlns:a16="http://schemas.microsoft.com/office/drawing/2014/main" id="{75DAA775-31E2-50BB-2BF3-4EF90C8083FC}"/>
               </a:ext>
             </a:extLst>
           </p:cNvPr>
@@ -4883,16 +5032,9 @@
                 <a:latin typeface="나눔바른고딕" panose="020B0603020101020101" pitchFamily="34" charset="-127"/>
                 <a:ea typeface="나눔바른고딕" panose="020B0603020101020101" pitchFamily="34" charset="-127"/>
               </a:rPr>
-              <a:t> </a:t>
-            </a:r>
-            <a:r>
-              <a:rPr lang="ko-KR" altLang="en-US" sz="1600" dirty="0" smtClean="0">
-                <a:latin typeface="나눔바른고딕" panose="020B0603020101020101" pitchFamily="34" charset="-127"/>
-                <a:ea typeface="나눔바른고딕" panose="020B0603020101020101" pitchFamily="34" charset="-127"/>
-              </a:rPr>
-              <a:t>적용</a:t>
-            </a:r>
-            <a:endParaRPr lang="en-US" altLang="ko-KR" sz="1600" dirty="0" smtClean="0">
+              <a:t> 적용</a:t>
+            </a:r>
+            <a:endParaRPr lang="en-US" altLang="ko-KR" sz="1600" dirty="0">
               <a:latin typeface="나눔바른고딕" panose="020B0603020101020101" pitchFamily="34" charset="-127"/>
               <a:ea typeface="나눔바른고딕" panose="020B0603020101020101" pitchFamily="34" charset="-127"/>
             </a:endParaRPr>
@@ -4903,7 +5045,7 @@
               <a:buChar char="•"/>
             </a:pPr>
             <a:r>
-              <a:rPr lang="ko-KR" altLang="en-US" sz="1600" dirty="0" smtClean="0">
+              <a:rPr lang="ko-KR" altLang="en-US" sz="1600" dirty="0">
                 <a:latin typeface="나눔바른고딕" panose="020B0603020101020101" pitchFamily="34" charset="-127"/>
                 <a:ea typeface="나눔바른고딕" panose="020B0603020101020101" pitchFamily="34" charset="-127"/>
               </a:rPr>
@@ -4920,27 +5062,27 @@
               <a:buChar char="•"/>
             </a:pPr>
             <a:r>
-              <a:rPr lang="ko-KR" altLang="en-US" sz="1600" dirty="0" smtClean="0">
+              <a:rPr lang="ko-KR" altLang="en-US" sz="1600" dirty="0">
                 <a:latin typeface="나눔바른고딕" panose="020B0603020101020101" pitchFamily="34" charset="-127"/>
                 <a:ea typeface="나눔바른고딕" panose="020B0603020101020101" pitchFamily="34" charset="-127"/>
               </a:rPr>
               <a:t>장애물을 향해 </a:t>
             </a:r>
             <a:r>
-              <a:rPr lang="ko-KR" altLang="en-US" sz="1600" dirty="0" err="1" smtClean="0">
+              <a:rPr lang="ko-KR" altLang="en-US" sz="1600" dirty="0" err="1">
                 <a:latin typeface="나눔바른고딕" panose="020B0603020101020101" pitchFamily="34" charset="-127"/>
                 <a:ea typeface="나눔바른고딕" panose="020B0603020101020101" pitchFamily="34" charset="-127"/>
               </a:rPr>
               <a:t>레이캐스트로</a:t>
             </a:r>
             <a:r>
-              <a:rPr lang="ko-KR" altLang="en-US" sz="1600" dirty="0" smtClean="0">
+              <a:rPr lang="ko-KR" altLang="en-US" sz="1600" dirty="0">
                 <a:latin typeface="나눔바른고딕" panose="020B0603020101020101" pitchFamily="34" charset="-127"/>
                 <a:ea typeface="나눔바른고딕" panose="020B0603020101020101" pitchFamily="34" charset="-127"/>
               </a:rPr>
               <a:t> 환경 탐색</a:t>
             </a:r>
-            <a:endParaRPr lang="en-US" altLang="ko-KR" sz="1600" dirty="0" smtClean="0">
+            <a:endParaRPr lang="en-US" altLang="ko-KR" sz="1600" dirty="0">
               <a:latin typeface="나눔바른고딕" panose="020B0603020101020101" pitchFamily="34" charset="-127"/>
               <a:ea typeface="나눔바른고딕" panose="020B0603020101020101" pitchFamily="34" charset="-127"/>
             </a:endParaRPr>
@@ -4952,7 +5094,7 @@
           <p:cNvPr id="4" name="TextBox 3">
             <a:extLst>
               <a:ext uri="{FF2B5EF4-FFF2-40B4-BE49-F238E27FC236}">
-                <a16:creationId xmlns="" xmlns:a16="http://schemas.microsoft.com/office/drawing/2014/main" id="{75DAA775-31E2-50BB-2BF3-4EF90C8083FC}"/>
+                <a16:creationId xmlns:a16="http://schemas.microsoft.com/office/drawing/2014/main" id="{75DAA775-31E2-50BB-2BF3-4EF90C8083FC}"/>
               </a:ext>
             </a:extLst>
           </p:cNvPr>
@@ -4976,27 +5118,27 @@
           <a:lstStyle/>
           <a:p>
             <a:r>
-              <a:rPr lang="ko-KR" altLang="en-US" sz="1600" dirty="0" smtClean="0">
+              <a:rPr lang="ko-KR" altLang="en-US" sz="1600" dirty="0">
                 <a:latin typeface="나눔바른고딕" panose="020B0603020101020101" pitchFamily="34" charset="-127"/>
                 <a:ea typeface="나눔바른고딕" panose="020B0603020101020101" pitchFamily="34" charset="-127"/>
               </a:rPr>
               <a:t>객체 식별 </a:t>
             </a:r>
             <a:r>
-              <a:rPr lang="en-US" altLang="ko-KR" sz="1600" dirty="0" smtClean="0">
+              <a:rPr lang="en-US" altLang="ko-KR" sz="1600" dirty="0">
                 <a:latin typeface="나눔바른고딕" panose="020B0603020101020101" pitchFamily="34" charset="-127"/>
                 <a:ea typeface="나눔바른고딕" panose="020B0603020101020101" pitchFamily="34" charset="-127"/>
               </a:rPr>
               <a:t>:</a:t>
             </a:r>
             <a:r>
-              <a:rPr lang="ko-KR" altLang="en-US" sz="1600" dirty="0" smtClean="0">
+              <a:rPr lang="ko-KR" altLang="en-US" sz="1600" dirty="0">
                 <a:latin typeface="나눔바른고딕" panose="020B0603020101020101" pitchFamily="34" charset="-127"/>
                 <a:ea typeface="나눔바른고딕" panose="020B0603020101020101" pitchFamily="34" charset="-127"/>
               </a:rPr>
               <a:t> 태그</a:t>
             </a:r>
-            <a:endParaRPr lang="en-US" altLang="ko-KR" sz="1600" dirty="0" smtClean="0">
+            <a:endParaRPr lang="en-US" altLang="ko-KR" sz="1600" dirty="0">
               <a:latin typeface="나눔바른고딕" panose="020B0603020101020101" pitchFamily="34" charset="-127"/>
               <a:ea typeface="나눔바른고딕" panose="020B0603020101020101" pitchFamily="34" charset="-127"/>
             </a:endParaRPr>
@@ -5007,20 +5149,13 @@
               <a:buChar char="•"/>
             </a:pPr>
             <a:r>
-              <a:rPr lang="ko-KR" altLang="en-US" sz="1600" dirty="0" smtClean="0">
-                <a:latin typeface="나눔바른고딕" panose="020B0603020101020101" pitchFamily="34" charset="-127"/>
-                <a:ea typeface="나눔바른고딕" panose="020B0603020101020101" pitchFamily="34" charset="-127"/>
-              </a:rPr>
-              <a:t>부여한 태그를 기반으로 캐릭터의 행위를 </a:t>
-            </a:r>
-            <a:r>
-              <a:rPr lang="ko-KR" altLang="en-US" sz="1600" dirty="0" smtClean="0">
-                <a:latin typeface="나눔바른고딕" panose="020B0603020101020101" pitchFamily="34" charset="-127"/>
-                <a:ea typeface="나눔바른고딕" panose="020B0603020101020101" pitchFamily="34" charset="-127"/>
-              </a:rPr>
-              <a:t>결정</a:t>
-            </a:r>
-            <a:endParaRPr lang="en-US" altLang="ko-KR" sz="1600" dirty="0" smtClean="0">
+              <a:rPr lang="ko-KR" altLang="en-US" sz="1600" dirty="0">
+                <a:latin typeface="나눔바른고딕" panose="020B0603020101020101" pitchFamily="34" charset="-127"/>
+                <a:ea typeface="나눔바른고딕" panose="020B0603020101020101" pitchFamily="34" charset="-127"/>
+              </a:rPr>
+              <a:t>부여한 태그를 기반으로 캐릭터의 행위를 결정</a:t>
+            </a:r>
+            <a:endParaRPr lang="en-US" altLang="ko-KR" sz="1600" dirty="0">
               <a:latin typeface="나눔바른고딕" panose="020B0603020101020101" pitchFamily="34" charset="-127"/>
               <a:ea typeface="나눔바른고딕" panose="020B0603020101020101" pitchFamily="34" charset="-127"/>
             </a:endParaRPr>
@@ -5031,72 +5166,61 @@
               <a:buChar char="•"/>
             </a:pPr>
             <a:r>
-              <a:rPr lang="ko-KR" altLang="en-US" sz="1600" dirty="0" smtClean="0">
+              <a:rPr lang="ko-KR" altLang="en-US" sz="1600" dirty="0">
                 <a:latin typeface="나눔바른고딕" panose="020B0603020101020101" pitchFamily="34" charset="-127"/>
                 <a:ea typeface="나눔바른고딕" panose="020B0603020101020101" pitchFamily="34" charset="-127"/>
               </a:rPr>
               <a:t>객체 종류 </a:t>
             </a:r>
             <a:r>
-              <a:rPr lang="en-US" altLang="ko-KR" sz="1600" dirty="0" smtClean="0">
+              <a:rPr lang="en-US" altLang="ko-KR" sz="1600" dirty="0">
                 <a:latin typeface="나눔바른고딕" panose="020B0603020101020101" pitchFamily="34" charset="-127"/>
                 <a:ea typeface="나눔바른고딕" panose="020B0603020101020101" pitchFamily="34" charset="-127"/>
               </a:rPr>
               <a:t>– </a:t>
             </a:r>
             <a:r>
-              <a:rPr lang="ko-KR" altLang="en-US" sz="1600" dirty="0" smtClean="0">
+              <a:rPr lang="ko-KR" altLang="en-US" sz="1600" dirty="0">
                 <a:latin typeface="나눔바른고딕" panose="020B0603020101020101" pitchFamily="34" charset="-127"/>
                 <a:ea typeface="나눔바른고딕" panose="020B0603020101020101" pitchFamily="34" charset="-127"/>
               </a:rPr>
               <a:t>행동 양식 </a:t>
             </a:r>
             <a:r>
-              <a:rPr lang="en-US" altLang="ko-KR" sz="1600" dirty="0" smtClean="0">
+              <a:rPr lang="en-US" altLang="ko-KR" sz="1600" dirty="0">
                 <a:latin typeface="나눔바른고딕" panose="020B0603020101020101" pitchFamily="34" charset="-127"/>
                 <a:ea typeface="나눔바른고딕" panose="020B0603020101020101" pitchFamily="34" charset="-127"/>
               </a:rPr>
               <a:t>– </a:t>
             </a:r>
             <a:r>
-              <a:rPr lang="ko-KR" altLang="en-US" sz="1600" dirty="0" smtClean="0">
-                <a:latin typeface="나눔바른고딕" panose="020B0603020101020101" pitchFamily="34" charset="-127"/>
-                <a:ea typeface="나눔바른고딕" panose="020B0603020101020101" pitchFamily="34" charset="-127"/>
-              </a:rPr>
-              <a:t>높낮이 </a:t>
-            </a:r>
-            <a:r>
-              <a:rPr lang="ko-KR" altLang="en-US" sz="1600" dirty="0" smtClean="0">
-                <a:latin typeface="나눔바른고딕" panose="020B0603020101020101" pitchFamily="34" charset="-127"/>
-                <a:ea typeface="나눔바른고딕" panose="020B0603020101020101" pitchFamily="34" charset="-127"/>
-              </a:rPr>
-              <a:t>유형 등 </a:t>
-            </a:r>
-            <a:r>
-              <a:rPr lang="en-US" altLang="ko-KR" sz="1600" dirty="0" smtClean="0">
+              <a:rPr lang="ko-KR" altLang="en-US" sz="1600" dirty="0">
+                <a:latin typeface="나눔바른고딕" panose="020B0603020101020101" pitchFamily="34" charset="-127"/>
+                <a:ea typeface="나눔바른고딕" panose="020B0603020101020101" pitchFamily="34" charset="-127"/>
+              </a:rPr>
+              <a:t>높낮이 유형 등 </a:t>
+            </a:r>
+            <a:r>
+              <a:rPr lang="en-US" altLang="ko-KR" sz="1600" dirty="0">
                 <a:latin typeface="나눔바른고딕" panose="020B0603020101020101" pitchFamily="34" charset="-127"/>
                 <a:ea typeface="나눔바른고딕" panose="020B0603020101020101" pitchFamily="34" charset="-127"/>
               </a:rPr>
               <a:t>(</a:t>
             </a:r>
             <a:r>
-              <a:rPr lang="ko-KR" altLang="en-US" sz="1600" dirty="0" smtClean="0">
+              <a:rPr lang="ko-KR" altLang="en-US" sz="1600" dirty="0">
                 <a:latin typeface="나눔바른고딕" panose="020B0603020101020101" pitchFamily="34" charset="-127"/>
                 <a:ea typeface="나눔바른고딕" panose="020B0603020101020101" pitchFamily="34" charset="-127"/>
               </a:rPr>
               <a:t>구성 변경 가능</a:t>
             </a:r>
             <a:r>
-              <a:rPr lang="en-US" altLang="ko-KR" sz="1600" dirty="0" smtClean="0">
+              <a:rPr lang="en-US" altLang="ko-KR" sz="1600" dirty="0">
                 <a:latin typeface="나눔바른고딕" panose="020B0603020101020101" pitchFamily="34" charset="-127"/>
                 <a:ea typeface="나눔바른고딕" panose="020B0603020101020101" pitchFamily="34" charset="-127"/>
               </a:rPr>
               <a:t>)</a:t>
             </a:r>
-            <a:endParaRPr lang="en-US" altLang="ko-KR" sz="1600" dirty="0" smtClean="0">
-              <a:latin typeface="나눔바른고딕" panose="020B0603020101020101" pitchFamily="34" charset="-127"/>
-              <a:ea typeface="나눔바른고딕" panose="020B0603020101020101" pitchFamily="34" charset="-127"/>
-            </a:endParaRPr>
           </a:p>
         </p:txBody>
       </p:sp>
@@ -5124,235 +5248,46 @@
           </a:prstGeom>
         </p:spPr>
       </p:pic>
+      <p:pic>
+        <p:nvPicPr>
+          <p:cNvPr id="5" name="그림 4">
+            <a:extLst>
+              <a:ext uri="{FF2B5EF4-FFF2-40B4-BE49-F238E27FC236}">
+                <a16:creationId xmlns:a16="http://schemas.microsoft.com/office/drawing/2014/main" id="{9C848E5E-59D9-90C3-3D96-54F503C53639}"/>
+              </a:ext>
+            </a:extLst>
+          </p:cNvPr>
+          <p:cNvPicPr>
+            <a:picLocks noChangeAspect="1"/>
+          </p:cNvPicPr>
+          <p:nvPr/>
+        </p:nvPicPr>
+        <p:blipFill>
+          <a:blip r:embed="rId3">
+            <a:extLst>
+              <a:ext uri="{28A0092B-C50C-407E-A947-70E740481C1C}">
+                <a14:useLocalDpi xmlns:a14="http://schemas.microsoft.com/office/drawing/2010/main" val="0"/>
+              </a:ext>
+            </a:extLst>
+          </a:blip>
+          <a:stretch>
+            <a:fillRect/>
+          </a:stretch>
+        </p:blipFill>
+        <p:spPr>
+          <a:xfrm>
+            <a:off x="325926" y="1747321"/>
+            <a:ext cx="4920665" cy="3179407"/>
+          </a:xfrm>
+          <a:prstGeom prst="rect">
+            <a:avLst/>
+          </a:prstGeom>
+        </p:spPr>
+      </p:pic>
     </p:spTree>
     <p:extLst>
       <p:ext uri="{BB962C8B-B14F-4D97-AF65-F5344CB8AC3E}">
         <p14:creationId xmlns:p14="http://schemas.microsoft.com/office/powerpoint/2010/main" val="1245471679"/>
-      </p:ext>
-    </p:extLst>
-  </p:cSld>
-  <p:clrMapOvr>
-    <a:masterClrMapping/>
-  </p:clrMapOvr>
-</p:sld>
-</file>
-
-<file path=ppt/slides/slide5.xml><?xml version="1.0" encoding="utf-8"?>
-<p:sld xmlns:a="http://schemas.openxmlformats.org/drawingml/2006/main" xmlns:r="http://schemas.openxmlformats.org/officeDocument/2006/relationships" xmlns:p="http://schemas.openxmlformats.org/presentationml/2006/main">
-  <p:cSld>
-    <p:spTree>
-      <p:nvGrpSpPr>
-        <p:cNvPr id="1" name="">
-          <a:extLst>
-            <a:ext uri="{FF2B5EF4-FFF2-40B4-BE49-F238E27FC236}">
-              <a16:creationId xmlns="" xmlns:a16="http://schemas.microsoft.com/office/drawing/2014/main" id="{960F3801-1345-73B1-BC4D-455683B38EDD}"/>
-            </a:ext>
-          </a:extLst>
-        </p:cNvPr>
-        <p:cNvGrpSpPr/>
-        <p:nvPr/>
-      </p:nvGrpSpPr>
-      <p:grpSpPr>
-        <a:xfrm>
-          <a:off x="0" y="0"/>
-          <a:ext cx="0" cy="0"/>
-          <a:chOff x="0" y="0"/>
-          <a:chExt cx="0" cy="0"/>
-        </a:xfrm>
-      </p:grpSpPr>
-      <p:sp>
-        <p:nvSpPr>
-          <p:cNvPr id="8" name="TextBox 7">
-            <a:extLst>
-              <a:ext uri="{FF2B5EF4-FFF2-40B4-BE49-F238E27FC236}">
-                <a16:creationId xmlns="" xmlns:a16="http://schemas.microsoft.com/office/drawing/2014/main" id="{953A2C19-7BB6-4B8F-B088-53F2041DCA07}"/>
-              </a:ext>
-            </a:extLst>
-          </p:cNvPr>
-          <p:cNvSpPr txBox="1"/>
-          <p:nvPr/>
-        </p:nvSpPr>
-        <p:spPr>
-          <a:xfrm>
-            <a:off x="302451" y="315453"/>
-            <a:ext cx="4944140" cy="369332"/>
-          </a:xfrm>
-          <a:prstGeom prst="rect">
-            <a:avLst/>
-          </a:prstGeom>
-          <a:noFill/>
-        </p:spPr>
-        <p:txBody>
-          <a:bodyPr wrap="square" rtlCol="0">
-            <a:spAutoFit/>
-          </a:bodyPr>
-          <a:lstStyle/>
-          <a:p>
-            <a:r>
-              <a:rPr lang="ko-KR" altLang="en-US" dirty="0">
-                <a:latin typeface="나눔바른고딕" panose="020B0603020101020101" pitchFamily="34" charset="-127"/>
-                <a:ea typeface="나눔바른고딕" panose="020B0603020101020101" pitchFamily="34" charset="-127"/>
-              </a:rPr>
-              <a:t>이번 주 작업 내역</a:t>
-            </a:r>
-            <a:endParaRPr lang="en-US" altLang="ko-KR" dirty="0">
-              <a:latin typeface="나눔바른고딕" panose="020B0603020101020101" pitchFamily="34" charset="-127"/>
-              <a:ea typeface="나눔바른고딕" panose="020B0603020101020101" pitchFamily="34" charset="-127"/>
-            </a:endParaRPr>
-          </a:p>
-        </p:txBody>
-      </p:sp>
-      <p:sp>
-        <p:nvSpPr>
-          <p:cNvPr id="10" name="TextBox 9">
-            <a:extLst>
-              <a:ext uri="{FF2B5EF4-FFF2-40B4-BE49-F238E27FC236}">
-                <a16:creationId xmlns="" xmlns:a16="http://schemas.microsoft.com/office/drawing/2014/main" id="{1C05991D-1DDC-77AC-5E76-B990175DF25D}"/>
-              </a:ext>
-            </a:extLst>
-          </p:cNvPr>
-          <p:cNvSpPr txBox="1"/>
-          <p:nvPr/>
-        </p:nvSpPr>
-        <p:spPr>
-          <a:xfrm>
-            <a:off x="302450" y="758852"/>
-            <a:ext cx="10298209" cy="584775"/>
-          </a:xfrm>
-          <a:prstGeom prst="rect">
-            <a:avLst/>
-          </a:prstGeom>
-          <a:noFill/>
-        </p:spPr>
-        <p:txBody>
-          <a:bodyPr wrap="square" rtlCol="0">
-            <a:spAutoFit/>
-          </a:bodyPr>
-          <a:lstStyle/>
-          <a:p>
-            <a:pPr marL="285750" indent="-285750">
-              <a:buFont typeface="Arial" panose="020B0604020202020204" pitchFamily="34" charset="0"/>
-              <a:buChar char="•"/>
-            </a:pPr>
-            <a:r>
-              <a:rPr lang="ko-KR" altLang="en-US" sz="1600" dirty="0">
-                <a:latin typeface="나눔바른고딕" panose="020B0603020101020101" pitchFamily="34" charset="-127"/>
-                <a:ea typeface="나눔바른고딕" panose="020B0603020101020101" pitchFamily="34" charset="-127"/>
-              </a:rPr>
-              <a:t>애니메이션 재생 결과</a:t>
-            </a:r>
-            <a:endParaRPr lang="en-US" altLang="ko-KR" sz="1600" dirty="0">
-              <a:latin typeface="나눔바른고딕" panose="020B0603020101020101" pitchFamily="34" charset="-127"/>
-              <a:ea typeface="나눔바른고딕" panose="020B0603020101020101" pitchFamily="34" charset="-127"/>
-            </a:endParaRPr>
-          </a:p>
-          <a:p>
-            <a:pPr marL="742950" lvl="1" indent="-285750">
-              <a:buFont typeface="Arial" panose="020B0604020202020204" pitchFamily="34" charset="0"/>
-              <a:buChar char="•"/>
-            </a:pPr>
-            <a:r>
-              <a:rPr lang="ko-KR" altLang="en-US" sz="1600" dirty="0">
-                <a:latin typeface="나눔바른고딕" panose="020B0603020101020101" pitchFamily="34" charset="-127"/>
-                <a:ea typeface="나눔바른고딕" panose="020B0603020101020101" pitchFamily="34" charset="-127"/>
-              </a:rPr>
-              <a:t>평지 </a:t>
-            </a:r>
-            <a:r>
-              <a:rPr lang="ko-KR" altLang="en-US" sz="1600" dirty="0" err="1">
-                <a:latin typeface="나눔바른고딕" panose="020B0603020101020101" pitchFamily="34" charset="-127"/>
-                <a:ea typeface="나눔바른고딕" panose="020B0603020101020101" pitchFamily="34" charset="-127"/>
-              </a:rPr>
-              <a:t>로코모션</a:t>
-            </a:r>
-            <a:r>
-              <a:rPr lang="ko-KR" altLang="en-US" sz="1600" dirty="0">
-                <a:latin typeface="나눔바른고딕" panose="020B0603020101020101" pitchFamily="34" charset="-127"/>
-                <a:ea typeface="나눔바른고딕" panose="020B0603020101020101" pitchFamily="34" charset="-127"/>
-              </a:rPr>
-              <a:t> </a:t>
-            </a:r>
-            <a:r>
-              <a:rPr lang="en-US" altLang="ko-KR" sz="1600" dirty="0">
-                <a:latin typeface="나눔바른고딕" panose="020B0603020101020101" pitchFamily="34" charset="-127"/>
-                <a:ea typeface="나눔바른고딕" panose="020B0603020101020101" pitchFamily="34" charset="-127"/>
-              </a:rPr>
-              <a:t>-&gt; </a:t>
-            </a:r>
-            <a:r>
-              <a:rPr lang="en-US" altLang="ko-KR" sz="1600" dirty="0" err="1">
-                <a:latin typeface="나눔바른고딕" panose="020B0603020101020101" pitchFamily="34" charset="-127"/>
-                <a:ea typeface="나눔바른고딕" panose="020B0603020101020101" pitchFamily="34" charset="-127"/>
-              </a:rPr>
-              <a:t>Lshift</a:t>
-            </a:r>
-            <a:r>
-              <a:rPr lang="en-US" altLang="ko-KR" sz="1600" dirty="0">
-                <a:latin typeface="나눔바른고딕" panose="020B0603020101020101" pitchFamily="34" charset="-127"/>
-                <a:ea typeface="나눔바른고딕" panose="020B0603020101020101" pitchFamily="34" charset="-127"/>
-              </a:rPr>
-              <a:t> </a:t>
-            </a:r>
-            <a:r>
-              <a:rPr lang="ko-KR" altLang="en-US" sz="1600" dirty="0" err="1">
-                <a:latin typeface="나눔바른고딕" panose="020B0603020101020101" pitchFamily="34" charset="-127"/>
-                <a:ea typeface="나눔바른고딕" panose="020B0603020101020101" pitchFamily="34" charset="-127"/>
-              </a:rPr>
-              <a:t>레이캐스트</a:t>
-            </a:r>
-            <a:r>
-              <a:rPr lang="ko-KR" altLang="en-US" sz="1600" dirty="0">
-                <a:latin typeface="나눔바른고딕" panose="020B0603020101020101" pitchFamily="34" charset="-127"/>
-                <a:ea typeface="나눔바른고딕" panose="020B0603020101020101" pitchFamily="34" charset="-127"/>
-              </a:rPr>
-              <a:t> 장애물 식별 </a:t>
-            </a:r>
-            <a:r>
-              <a:rPr lang="en-US" altLang="ko-KR" sz="1600" dirty="0">
-                <a:latin typeface="나눔바른고딕" panose="020B0603020101020101" pitchFamily="34" charset="-127"/>
-                <a:ea typeface="나눔바른고딕" panose="020B0603020101020101" pitchFamily="34" charset="-127"/>
-              </a:rPr>
-              <a:t>-&gt; </a:t>
-            </a:r>
-            <a:r>
-              <a:rPr lang="ko-KR" altLang="en-US" sz="1600" dirty="0">
-                <a:latin typeface="나눔바른고딕" panose="020B0603020101020101" pitchFamily="34" charset="-127"/>
-                <a:ea typeface="나눔바른고딕" panose="020B0603020101020101" pitchFamily="34" charset="-127"/>
-              </a:rPr>
-              <a:t>담 넘기 </a:t>
-            </a:r>
-            <a:r>
-              <a:rPr lang="en-US" altLang="ko-KR" sz="1600" dirty="0">
-                <a:latin typeface="나눔바른고딕" panose="020B0603020101020101" pitchFamily="34" charset="-127"/>
-                <a:ea typeface="나눔바른고딕" panose="020B0603020101020101" pitchFamily="34" charset="-127"/>
-              </a:rPr>
-              <a:t>-&gt; </a:t>
-            </a:r>
-            <a:r>
-              <a:rPr lang="ko-KR" altLang="en-US" sz="1600" dirty="0">
-                <a:latin typeface="나눔바른고딕" panose="020B0603020101020101" pitchFamily="34" charset="-127"/>
-                <a:ea typeface="나눔바른고딕" panose="020B0603020101020101" pitchFamily="34" charset="-127"/>
-              </a:rPr>
-              <a:t>평지 </a:t>
-            </a:r>
-            <a:r>
-              <a:rPr lang="ko-KR" altLang="en-US" sz="1600" dirty="0" err="1">
-                <a:latin typeface="나눔바른고딕" panose="020B0603020101020101" pitchFamily="34" charset="-127"/>
-                <a:ea typeface="나눔바른고딕" panose="020B0603020101020101" pitchFamily="34" charset="-127"/>
-              </a:rPr>
-              <a:t>로코모션</a:t>
-            </a:r>
-            <a:endParaRPr lang="en-US" altLang="ko-KR" sz="1600" dirty="0">
-              <a:latin typeface="나눔바른고딕" panose="020B0603020101020101" pitchFamily="34" charset="-127"/>
-              <a:ea typeface="나눔바른고딕" panose="020B0603020101020101" pitchFamily="34" charset="-127"/>
-            </a:endParaRPr>
-          </a:p>
-        </p:txBody>
-      </p:sp>
-    </p:spTree>
-    <p:extLst>
-      <p:ext uri="{BB962C8B-B14F-4D97-AF65-F5344CB8AC3E}">
-        <p14:creationId xmlns:p14="http://schemas.microsoft.com/office/powerpoint/2010/main" val="756431288"/>
       </p:ext>
     </p:extLst>
   </p:cSld>
@@ -5370,7 +5305,7 @@
         <p:cNvPr id="1" name="">
           <a:extLst>
             <a:ext uri="{FF2B5EF4-FFF2-40B4-BE49-F238E27FC236}">
-              <a16:creationId xmlns:a16="http://schemas.microsoft.com/office/drawing/2014/main" xmlns="" id="{49DA7EAA-204E-2F90-E52A-6C83B9013025}"/>
+              <a16:creationId xmlns:a16="http://schemas.microsoft.com/office/drawing/2014/main" id="{960F3801-1345-73B1-BC4D-455683B38EDD}"/>
             </a:ext>
           </a:extLst>
         </p:cNvPr>
@@ -5387,10 +5322,271 @@
       </p:grpSpPr>
       <p:sp>
         <p:nvSpPr>
+          <p:cNvPr id="8" name="TextBox 7">
+            <a:extLst>
+              <a:ext uri="{FF2B5EF4-FFF2-40B4-BE49-F238E27FC236}">
+                <a16:creationId xmlns:a16="http://schemas.microsoft.com/office/drawing/2014/main" id="{953A2C19-7BB6-4B8F-B088-53F2041DCA07}"/>
+              </a:ext>
+            </a:extLst>
+          </p:cNvPr>
+          <p:cNvSpPr txBox="1"/>
+          <p:nvPr/>
+        </p:nvSpPr>
+        <p:spPr>
+          <a:xfrm>
+            <a:off x="302451" y="315453"/>
+            <a:ext cx="4944140" cy="369332"/>
+          </a:xfrm>
+          <a:prstGeom prst="rect">
+            <a:avLst/>
+          </a:prstGeom>
+          <a:noFill/>
+        </p:spPr>
+        <p:txBody>
+          <a:bodyPr wrap="square" rtlCol="0">
+            <a:spAutoFit/>
+          </a:bodyPr>
+          <a:lstStyle/>
+          <a:p>
+            <a:r>
+              <a:rPr lang="ko-KR" altLang="en-US" dirty="0">
+                <a:latin typeface="나눔바른고딕" panose="020B0603020101020101" pitchFamily="34" charset="-127"/>
+                <a:ea typeface="나눔바른고딕" panose="020B0603020101020101" pitchFamily="34" charset="-127"/>
+              </a:rPr>
+              <a:t>이번 주 작업 내역</a:t>
+            </a:r>
+            <a:endParaRPr lang="en-US" altLang="ko-KR" dirty="0">
+              <a:latin typeface="나눔바른고딕" panose="020B0603020101020101" pitchFamily="34" charset="-127"/>
+              <a:ea typeface="나눔바른고딕" panose="020B0603020101020101" pitchFamily="34" charset="-127"/>
+            </a:endParaRPr>
+          </a:p>
+        </p:txBody>
+      </p:sp>
+      <p:sp>
+        <p:nvSpPr>
+          <p:cNvPr id="10" name="TextBox 9">
+            <a:extLst>
+              <a:ext uri="{FF2B5EF4-FFF2-40B4-BE49-F238E27FC236}">
+                <a16:creationId xmlns:a16="http://schemas.microsoft.com/office/drawing/2014/main" id="{1C05991D-1DDC-77AC-5E76-B990175DF25D}"/>
+              </a:ext>
+            </a:extLst>
+          </p:cNvPr>
+          <p:cNvSpPr txBox="1"/>
+          <p:nvPr/>
+        </p:nvSpPr>
+        <p:spPr>
+          <a:xfrm>
+            <a:off x="302450" y="758852"/>
+            <a:ext cx="10298209" cy="584775"/>
+          </a:xfrm>
+          <a:prstGeom prst="rect">
+            <a:avLst/>
+          </a:prstGeom>
+          <a:noFill/>
+        </p:spPr>
+        <p:txBody>
+          <a:bodyPr wrap="square" rtlCol="0">
+            <a:spAutoFit/>
+          </a:bodyPr>
+          <a:lstStyle/>
+          <a:p>
+            <a:pPr marL="285750" indent="-285750">
+              <a:buFont typeface="Arial" panose="020B0604020202020204" pitchFamily="34" charset="0"/>
+              <a:buChar char="•"/>
+            </a:pPr>
+            <a:r>
+              <a:rPr lang="ko-KR" altLang="en-US" sz="1600" dirty="0">
+                <a:latin typeface="나눔바른고딕" panose="020B0603020101020101" pitchFamily="34" charset="-127"/>
+                <a:ea typeface="나눔바른고딕" panose="020B0603020101020101" pitchFamily="34" charset="-127"/>
+              </a:rPr>
+              <a:t>애니메이션 재생 결과</a:t>
+            </a:r>
+            <a:endParaRPr lang="en-US" altLang="ko-KR" sz="1600" dirty="0">
+              <a:latin typeface="나눔바른고딕" panose="020B0603020101020101" pitchFamily="34" charset="-127"/>
+              <a:ea typeface="나눔바른고딕" panose="020B0603020101020101" pitchFamily="34" charset="-127"/>
+            </a:endParaRPr>
+          </a:p>
+          <a:p>
+            <a:pPr marL="742950" lvl="1" indent="-285750">
+              <a:buFont typeface="Arial" panose="020B0604020202020204" pitchFamily="34" charset="0"/>
+              <a:buChar char="•"/>
+            </a:pPr>
+            <a:r>
+              <a:rPr lang="ko-KR" altLang="en-US" sz="1600" dirty="0">
+                <a:latin typeface="나눔바른고딕" panose="020B0603020101020101" pitchFamily="34" charset="-127"/>
+                <a:ea typeface="나눔바른고딕" panose="020B0603020101020101" pitchFamily="34" charset="-127"/>
+              </a:rPr>
+              <a:t>평지 </a:t>
+            </a:r>
+            <a:r>
+              <a:rPr lang="ko-KR" altLang="en-US" sz="1600" dirty="0" err="1">
+                <a:latin typeface="나눔바른고딕" panose="020B0603020101020101" pitchFamily="34" charset="-127"/>
+                <a:ea typeface="나눔바른고딕" panose="020B0603020101020101" pitchFamily="34" charset="-127"/>
+              </a:rPr>
+              <a:t>로코모션</a:t>
+            </a:r>
+            <a:r>
+              <a:rPr lang="ko-KR" altLang="en-US" sz="1600" dirty="0">
+                <a:latin typeface="나눔바른고딕" panose="020B0603020101020101" pitchFamily="34" charset="-127"/>
+                <a:ea typeface="나눔바른고딕" panose="020B0603020101020101" pitchFamily="34" charset="-127"/>
+              </a:rPr>
+              <a:t> </a:t>
+            </a:r>
+            <a:r>
+              <a:rPr lang="en-US" altLang="ko-KR" sz="1600" dirty="0">
+                <a:latin typeface="나눔바른고딕" panose="020B0603020101020101" pitchFamily="34" charset="-127"/>
+                <a:ea typeface="나눔바른고딕" panose="020B0603020101020101" pitchFamily="34" charset="-127"/>
+              </a:rPr>
+              <a:t>-&gt; </a:t>
+            </a:r>
+            <a:r>
+              <a:rPr lang="en-US" altLang="ko-KR" sz="1600" dirty="0" err="1">
+                <a:latin typeface="나눔바른고딕" panose="020B0603020101020101" pitchFamily="34" charset="-127"/>
+                <a:ea typeface="나눔바른고딕" panose="020B0603020101020101" pitchFamily="34" charset="-127"/>
+              </a:rPr>
+              <a:t>Lshift</a:t>
+            </a:r>
+            <a:r>
+              <a:rPr lang="en-US" altLang="ko-KR" sz="1600" dirty="0">
+                <a:latin typeface="나눔바른고딕" panose="020B0603020101020101" pitchFamily="34" charset="-127"/>
+                <a:ea typeface="나눔바른고딕" panose="020B0603020101020101" pitchFamily="34" charset="-127"/>
+              </a:rPr>
+              <a:t> </a:t>
+            </a:r>
+            <a:r>
+              <a:rPr lang="ko-KR" altLang="en-US" sz="1600" dirty="0" err="1">
+                <a:latin typeface="나눔바른고딕" panose="020B0603020101020101" pitchFamily="34" charset="-127"/>
+                <a:ea typeface="나눔바른고딕" panose="020B0603020101020101" pitchFamily="34" charset="-127"/>
+              </a:rPr>
+              <a:t>레이캐스트</a:t>
+            </a:r>
+            <a:r>
+              <a:rPr lang="ko-KR" altLang="en-US" sz="1600" dirty="0">
+                <a:latin typeface="나눔바른고딕" panose="020B0603020101020101" pitchFamily="34" charset="-127"/>
+                <a:ea typeface="나눔바른고딕" panose="020B0603020101020101" pitchFamily="34" charset="-127"/>
+              </a:rPr>
+              <a:t> 장애물 식별 </a:t>
+            </a:r>
+            <a:r>
+              <a:rPr lang="en-US" altLang="ko-KR" sz="1600" dirty="0">
+                <a:latin typeface="나눔바른고딕" panose="020B0603020101020101" pitchFamily="34" charset="-127"/>
+                <a:ea typeface="나눔바른고딕" panose="020B0603020101020101" pitchFamily="34" charset="-127"/>
+              </a:rPr>
+              <a:t>-&gt; </a:t>
+            </a:r>
+            <a:r>
+              <a:rPr lang="ko-KR" altLang="en-US" sz="1600" dirty="0">
+                <a:latin typeface="나눔바른고딕" panose="020B0603020101020101" pitchFamily="34" charset="-127"/>
+                <a:ea typeface="나눔바른고딕" panose="020B0603020101020101" pitchFamily="34" charset="-127"/>
+              </a:rPr>
+              <a:t>담 넘기 </a:t>
+            </a:r>
+            <a:r>
+              <a:rPr lang="en-US" altLang="ko-KR" sz="1600" dirty="0">
+                <a:latin typeface="나눔바른고딕" panose="020B0603020101020101" pitchFamily="34" charset="-127"/>
+                <a:ea typeface="나눔바른고딕" panose="020B0603020101020101" pitchFamily="34" charset="-127"/>
+              </a:rPr>
+              <a:t>-&gt; </a:t>
+            </a:r>
+            <a:r>
+              <a:rPr lang="ko-KR" altLang="en-US" sz="1600" dirty="0">
+                <a:latin typeface="나눔바른고딕" panose="020B0603020101020101" pitchFamily="34" charset="-127"/>
+                <a:ea typeface="나눔바른고딕" panose="020B0603020101020101" pitchFamily="34" charset="-127"/>
+              </a:rPr>
+              <a:t>평지 </a:t>
+            </a:r>
+            <a:r>
+              <a:rPr lang="ko-KR" altLang="en-US" sz="1600" dirty="0" err="1">
+                <a:latin typeface="나눔바른고딕" panose="020B0603020101020101" pitchFamily="34" charset="-127"/>
+                <a:ea typeface="나눔바른고딕" panose="020B0603020101020101" pitchFamily="34" charset="-127"/>
+              </a:rPr>
+              <a:t>로코모션</a:t>
+            </a:r>
+            <a:endParaRPr lang="en-US" altLang="ko-KR" sz="1600" dirty="0">
+              <a:latin typeface="나눔바른고딕" panose="020B0603020101020101" pitchFamily="34" charset="-127"/>
+              <a:ea typeface="나눔바른고딕" panose="020B0603020101020101" pitchFamily="34" charset="-127"/>
+            </a:endParaRPr>
+          </a:p>
+        </p:txBody>
+      </p:sp>
+      <p:pic>
+        <p:nvPicPr>
+          <p:cNvPr id="3" name="그림 2">
+            <a:extLst>
+              <a:ext uri="{FF2B5EF4-FFF2-40B4-BE49-F238E27FC236}">
+                <a16:creationId xmlns:a16="http://schemas.microsoft.com/office/drawing/2014/main" id="{2AFD0131-D1D6-4CE5-4DC9-A89BC5404219}"/>
+              </a:ext>
+            </a:extLst>
+          </p:cNvPr>
+          <p:cNvPicPr>
+            <a:picLocks noChangeAspect="1"/>
+          </p:cNvPicPr>
+          <p:nvPr/>
+        </p:nvPicPr>
+        <p:blipFill>
+          <a:blip r:embed="rId2">
+            <a:extLst>
+              <a:ext uri="{28A0092B-C50C-407E-A947-70E740481C1C}">
+                <a14:useLocalDpi xmlns:a14="http://schemas.microsoft.com/office/drawing/2010/main" val="0"/>
+              </a:ext>
+            </a:extLst>
+          </a:blip>
+          <a:stretch>
+            <a:fillRect/>
+          </a:stretch>
+        </p:blipFill>
+        <p:spPr>
+          <a:xfrm>
+            <a:off x="1973114" y="1591450"/>
+            <a:ext cx="7267575" cy="4695825"/>
+          </a:xfrm>
+          <a:prstGeom prst="rect">
+            <a:avLst/>
+          </a:prstGeom>
+        </p:spPr>
+      </p:pic>
+    </p:spTree>
+    <p:extLst>
+      <p:ext uri="{BB962C8B-B14F-4D97-AF65-F5344CB8AC3E}">
+        <p14:creationId xmlns:p14="http://schemas.microsoft.com/office/powerpoint/2010/main" val="756431288"/>
+      </p:ext>
+    </p:extLst>
+  </p:cSld>
+  <p:clrMapOvr>
+    <a:masterClrMapping/>
+  </p:clrMapOvr>
+</p:sld>
+</file>
+
+<file path=ppt/slides/slide7.xml><?xml version="1.0" encoding="utf-8"?>
+<p:sld xmlns:a="http://schemas.openxmlformats.org/drawingml/2006/main" xmlns:r="http://schemas.openxmlformats.org/officeDocument/2006/relationships" xmlns:p="http://schemas.openxmlformats.org/presentationml/2006/main">
+  <p:cSld>
+    <p:spTree>
+      <p:nvGrpSpPr>
+        <p:cNvPr id="1" name="">
+          <a:extLst>
+            <a:ext uri="{FF2B5EF4-FFF2-40B4-BE49-F238E27FC236}">
+              <a16:creationId xmlns:a16="http://schemas.microsoft.com/office/drawing/2014/main" id="{49DA7EAA-204E-2F90-E52A-6C83B9013025}"/>
+            </a:ext>
+          </a:extLst>
+        </p:cNvPr>
+        <p:cNvGrpSpPr/>
+        <p:nvPr/>
+      </p:nvGrpSpPr>
+      <p:grpSpPr>
+        <a:xfrm>
+          <a:off x="0" y="0"/>
+          <a:ext cx="0" cy="0"/>
+          <a:chOff x="0" y="0"/>
+          <a:chExt cx="0" cy="0"/>
+        </a:xfrm>
+      </p:grpSpPr>
+      <p:sp>
+        <p:nvSpPr>
           <p:cNvPr id="5" name="TextBox 4">
             <a:extLst>
               <a:ext uri="{FF2B5EF4-FFF2-40B4-BE49-F238E27FC236}">
-                <a16:creationId xmlns:a16="http://schemas.microsoft.com/office/drawing/2014/main" xmlns="" id="{4715F932-2F2C-4A3F-7F16-1B13D352985A}"/>
+                <a16:creationId xmlns:a16="http://schemas.microsoft.com/office/drawing/2014/main" id="{4715F932-2F2C-4A3F-7F16-1B13D352985A}"/>
               </a:ext>
             </a:extLst>
           </p:cNvPr>
@@ -5460,7 +5656,7 @@
           <p:nvPr>
             <p:extLst>
               <p:ext uri="{D42A27DB-BD31-4B8C-83A1-F6EECF244321}">
-                <p14:modId xmlns:p14="http://schemas.microsoft.com/office/powerpoint/2010/main" val="2513765672"/>
+                <p14:modId xmlns:p14="http://schemas.microsoft.com/office/powerpoint/2010/main" val="1838506368"/>
               </p:ext>
             </p:extLst>
           </p:nvPr>
@@ -5479,21 +5675,21 @@
                 <a:gridCol w="791436">
                   <a:extLst>
                     <a:ext uri="{9D8B030D-6E8A-4147-A177-3AD203B41FA5}">
-                      <a16:colId xmlns:a16="http://schemas.microsoft.com/office/drawing/2014/main" xmlns="" val="20000"/>
+                      <a16:colId xmlns:a16="http://schemas.microsoft.com/office/drawing/2014/main" val="20000"/>
                     </a:ext>
                   </a:extLst>
                 </a:gridCol>
                 <a:gridCol w="4207281">
                   <a:extLst>
                     <a:ext uri="{9D8B030D-6E8A-4147-A177-3AD203B41FA5}">
-                      <a16:colId xmlns:a16="http://schemas.microsoft.com/office/drawing/2014/main" xmlns="" val="20001"/>
+                      <a16:colId xmlns:a16="http://schemas.microsoft.com/office/drawing/2014/main" val="20001"/>
                     </a:ext>
                   </a:extLst>
                 </a:gridCol>
                 <a:gridCol w="6320143">
                   <a:extLst>
                     <a:ext uri="{9D8B030D-6E8A-4147-A177-3AD203B41FA5}">
-                      <a16:colId xmlns:a16="http://schemas.microsoft.com/office/drawing/2014/main" xmlns="" val="20002"/>
+                      <a16:colId xmlns:a16="http://schemas.microsoft.com/office/drawing/2014/main" val="20002"/>
                     </a:ext>
                   </a:extLst>
                 </a:gridCol>
@@ -5549,7 +5745,7 @@
                 </a:tc>
                 <a:extLst>
                   <a:ext uri="{0D108BD9-81ED-4DB2-BD59-A6C34878D82A}">
-                    <a16:rowId xmlns:a16="http://schemas.microsoft.com/office/drawing/2014/main" xmlns="" val="10000"/>
+                    <a16:rowId xmlns:a16="http://schemas.microsoft.com/office/drawing/2014/main" val="10000"/>
                   </a:ext>
                 </a:extLst>
               </a:tr>
@@ -5728,7 +5924,7 @@
                 </a:tc>
                 <a:extLst>
                   <a:ext uri="{0D108BD9-81ED-4DB2-BD59-A6C34878D82A}">
-                    <a16:rowId xmlns:a16="http://schemas.microsoft.com/office/drawing/2014/main" xmlns="" val="10001"/>
+                    <a16:rowId xmlns:a16="http://schemas.microsoft.com/office/drawing/2014/main" val="10001"/>
                   </a:ext>
                 </a:extLst>
               </a:tr>
@@ -5930,6 +6126,24 @@
                         </a:rPr>
                         <a:t> 적용</a:t>
                       </a:r>
+                      <a:r>
+                        <a:rPr lang="en-US" altLang="ko-KR" sz="1400" dirty="0">
+                          <a:latin typeface="나눔바른고딕" panose="020B0603020101020101" pitchFamily="34" charset="-127"/>
+                          <a:ea typeface="나눔바른고딕" panose="020B0603020101020101" pitchFamily="34" charset="-127"/>
+                        </a:rPr>
+                        <a:t>, </a:t>
+                      </a:r>
+                      <a:r>
+                        <a:rPr lang="ko-KR" altLang="en-US" sz="1400">
+                          <a:latin typeface="나눔바른고딕" panose="020B0603020101020101" pitchFamily="34" charset="-127"/>
+                          <a:ea typeface="나눔바른고딕" panose="020B0603020101020101" pitchFamily="34" charset="-127"/>
+                        </a:rPr>
+                        <a:t>루트 모션 적용</a:t>
+                      </a:r>
+                      <a:endParaRPr lang="ko-KR" altLang="en-US" sz="1400" dirty="0">
+                        <a:latin typeface="나눔바른고딕" panose="020B0603020101020101" pitchFamily="34" charset="-127"/>
+                        <a:ea typeface="나눔바른고딕" panose="020B0603020101020101" pitchFamily="34" charset="-127"/>
+                      </a:endParaRPr>
                     </a:p>
                   </a:txBody>
                   <a:tcPr anchor="ctr">
@@ -5943,7 +6157,7 @@
                 </a:tc>
                 <a:extLst>
                   <a:ext uri="{0D108BD9-81ED-4DB2-BD59-A6C34878D82A}">
-                    <a16:rowId xmlns:a16="http://schemas.microsoft.com/office/drawing/2014/main" xmlns="" val="10002"/>
+                    <a16:rowId xmlns:a16="http://schemas.microsoft.com/office/drawing/2014/main" val="10002"/>
                   </a:ext>
                 </a:extLst>
               </a:tr>
@@ -5980,42 +6194,28 @@
                           <a:latin typeface="나눔바른고딕" panose="020B0603020101020101" pitchFamily="34" charset="-127"/>
                           <a:ea typeface="나눔바른고딕" panose="020B0603020101020101" pitchFamily="34" charset="-127"/>
                         </a:rPr>
-                        <a:t>씬 배치</a:t>
+                        <a:t>캐릭터</a:t>
                       </a:r>
                       <a:r>
                         <a:rPr lang="en-US" altLang="ko-KR" sz="1400" dirty="0">
                           <a:latin typeface="나눔바른고딕" panose="020B0603020101020101" pitchFamily="34" charset="-127"/>
                           <a:ea typeface="나눔바른고딕" panose="020B0603020101020101" pitchFamily="34" charset="-127"/>
                         </a:rPr>
-                        <a:t>, </a:t>
+                        <a:t> </a:t>
+                      </a:r>
+                      <a:r>
+                        <a:rPr lang="ko-KR" altLang="en-US" sz="1400" dirty="0" err="1">
+                          <a:latin typeface="나눔바른고딕" panose="020B0603020101020101" pitchFamily="34" charset="-127"/>
+                          <a:ea typeface="나눔바른고딕" panose="020B0603020101020101" pitchFamily="34" charset="-127"/>
+                        </a:rPr>
+                        <a:t>파쿠르</a:t>
                       </a:r>
                       <a:r>
                         <a:rPr lang="ko-KR" altLang="en-US" sz="1400" dirty="0">
                           <a:latin typeface="나눔바른고딕" panose="020B0603020101020101" pitchFamily="34" charset="-127"/>
                           <a:ea typeface="나눔바른고딕" panose="020B0603020101020101" pitchFamily="34" charset="-127"/>
                         </a:rPr>
-                        <a:t>캐릭터</a:t>
-                      </a:r>
-                      <a:r>
-                        <a:rPr lang="en-US" altLang="ko-KR" sz="1400" dirty="0">
-                          <a:latin typeface="나눔바른고딕" panose="020B0603020101020101" pitchFamily="34" charset="-127"/>
-                          <a:ea typeface="나눔바른고딕" panose="020B0603020101020101" pitchFamily="34" charset="-127"/>
-                        </a:rPr>
-                        <a:t> </a:t>
-                      </a:r>
-                      <a:r>
-                        <a:rPr lang="ko-KR" altLang="en-US" sz="1400" dirty="0" err="1">
-                          <a:latin typeface="나눔바른고딕" panose="020B0603020101020101" pitchFamily="34" charset="-127"/>
-                          <a:ea typeface="나눔바른고딕" panose="020B0603020101020101" pitchFamily="34" charset="-127"/>
-                        </a:rPr>
-                        <a:t>파쿠르</a:t>
-                      </a:r>
-                      <a:r>
-                        <a:rPr lang="ko-KR" altLang="en-US" sz="1400" dirty="0">
-                          <a:latin typeface="나눔바른고딕" panose="020B0603020101020101" pitchFamily="34" charset="-127"/>
-                          <a:ea typeface="나눔바른고딕" panose="020B0603020101020101" pitchFamily="34" charset="-127"/>
-                        </a:rPr>
-                        <a:t> 애니메이션 적용</a:t>
+                        <a:t> 애니메이션</a:t>
                       </a:r>
                     </a:p>
                   </a:txBody>
@@ -6028,17 +6228,45 @@
                     <a:p>
                       <a:pPr latinLnBrk="1"/>
                       <a:r>
-                        <a:rPr lang="ko-KR" altLang="en-US" sz="1400" dirty="0">
-                          <a:latin typeface="나눔바른고딕" panose="020B0603020101020101" pitchFamily="34" charset="-127"/>
-                          <a:ea typeface="나눔바른고딕" panose="020B0603020101020101" pitchFamily="34" charset="-127"/>
-                        </a:rPr>
-                        <a:t>씬</a:t>
+                        <a:rPr lang="ko-KR" altLang="en-US" sz="1400" baseline="0" dirty="0">
+                          <a:latin typeface="나눔바른고딕" panose="020B0603020101020101" pitchFamily="34" charset="-127"/>
+                          <a:ea typeface="나눔바른고딕" panose="020B0603020101020101" pitchFamily="34" charset="-127"/>
+                        </a:rPr>
+                        <a:t>장애물 높이 인식</a:t>
                       </a:r>
                       <a:r>
                         <a:rPr lang="en-US" altLang="ko-KR" sz="1400" baseline="0" dirty="0">
                           <a:latin typeface="나눔바른고딕" panose="020B0603020101020101" pitchFamily="34" charset="-127"/>
                           <a:ea typeface="나눔바른고딕" panose="020B0603020101020101" pitchFamily="34" charset="-127"/>
                         </a:rPr>
+                        <a:t>, </a:t>
+                      </a:r>
+                      <a:r>
+                        <a:rPr lang="ko-KR" altLang="en-US" sz="1400" baseline="0" dirty="0">
+                          <a:latin typeface="나눔바른고딕" panose="020B0603020101020101" pitchFamily="34" charset="-127"/>
+                          <a:ea typeface="나눔바른고딕" panose="020B0603020101020101" pitchFamily="34" charset="-127"/>
+                        </a:rPr>
+                        <a:t>인식한 장애물에 대한 </a:t>
+                      </a:r>
+                      <a:r>
+                        <a:rPr lang="ko-KR" altLang="en-US" sz="1400" baseline="0" dirty="0" err="1">
+                          <a:latin typeface="나눔바른고딕" panose="020B0603020101020101" pitchFamily="34" charset="-127"/>
+                          <a:ea typeface="나눔바른고딕" panose="020B0603020101020101" pitchFamily="34" charset="-127"/>
+                        </a:rPr>
+                        <a:t>파쿠르</a:t>
+                      </a:r>
+                      <a:r>
+                        <a:rPr lang="ko-KR" altLang="en-US" sz="1400" baseline="0" dirty="0">
+                          <a:latin typeface="나눔바른고딕" panose="020B0603020101020101" pitchFamily="34" charset="-127"/>
+                          <a:ea typeface="나눔바른고딕" panose="020B0603020101020101" pitchFamily="34" charset="-127"/>
+                        </a:rPr>
+                        <a:t> 애니메이션 선택</a:t>
+                      </a:r>
+                      <a:r>
+                        <a:rPr lang="en-US" altLang="ko-KR" sz="1400" baseline="0" dirty="0">
+                          <a:latin typeface="나눔바른고딕" panose="020B0603020101020101" pitchFamily="34" charset="-127"/>
+                          <a:ea typeface="나눔바른고딕" panose="020B0603020101020101" pitchFamily="34" charset="-127"/>
+                        </a:rPr>
                         <a:t> </a:t>
                       </a:r>
                       <a:r>
@@ -6046,42 +6274,14 @@
                           <a:latin typeface="나눔바른고딕" panose="020B0603020101020101" pitchFamily="34" charset="-127"/>
                           <a:ea typeface="나눔바른고딕" panose="020B0603020101020101" pitchFamily="34" charset="-127"/>
                         </a:rPr>
-                        <a:t>데이터 직렬화 </a:t>
+                        <a:t>및 출력</a:t>
                       </a:r>
                       <a:r>
                         <a:rPr lang="en-US" altLang="ko-KR" sz="1400" baseline="0" dirty="0">
                           <a:latin typeface="나눔바른고딕" panose="020B0603020101020101" pitchFamily="34" charset="-127"/>
                           <a:ea typeface="나눔바른고딕" panose="020B0603020101020101" pitchFamily="34" charset="-127"/>
                         </a:rPr>
-                        <a:t>(</a:t>
-                      </a:r>
-                      <a:r>
-                        <a:rPr lang="ko-KR" altLang="en-US" sz="1400" baseline="0" dirty="0">
-                          <a:latin typeface="나눔바른고딕" panose="020B0603020101020101" pitchFamily="34" charset="-127"/>
-                          <a:ea typeface="나눔바른고딕" panose="020B0603020101020101" pitchFamily="34" charset="-127"/>
-                        </a:rPr>
-                        <a:t>장애물 배치 정보</a:t>
-                      </a:r>
-                      <a:r>
-                        <a:rPr lang="en-US" altLang="ko-KR" sz="1400" baseline="0" dirty="0">
-                          <a:latin typeface="나눔바른고딕" panose="020B0603020101020101" pitchFamily="34" charset="-127"/>
-                          <a:ea typeface="나눔바른고딕" panose="020B0603020101020101" pitchFamily="34" charset="-127"/>
-                        </a:rPr>
-                        <a:t>), </a:t>
-                      </a:r>
-                      <a:r>
-                        <a:rPr lang="ko-KR" altLang="en-US" sz="1400" baseline="0" dirty="0">
-                          <a:latin typeface="나눔바른고딕" panose="020B0603020101020101" pitchFamily="34" charset="-127"/>
-                          <a:ea typeface="나눔바른고딕" panose="020B0603020101020101" pitchFamily="34" charset="-127"/>
-                        </a:rPr>
-                        <a:t>장애물 높이 인식</a:t>
-                      </a:r>
-                      <a:r>
-                        <a:rPr lang="en-US" altLang="ko-KR" sz="1400" baseline="0" dirty="0">
-                          <a:latin typeface="나눔바른고딕" panose="020B0603020101020101" pitchFamily="34" charset="-127"/>
-                          <a:ea typeface="나눔바른고딕" panose="020B0603020101020101" pitchFamily="34" charset="-127"/>
-                        </a:rPr>
-                        <a:t>, </a:t>
+                        <a:t>,</a:t>
                       </a:r>
                       <a:br>
                         <a:rPr lang="en-US" altLang="ko-KR" sz="1400" baseline="0" dirty="0">
@@ -6090,39 +6290,25 @@
                         </a:rPr>
                       </a:br>
                       <a:r>
+                        <a:rPr lang="en-US" altLang="ko-KR" sz="1400" baseline="0" dirty="0">
+                          <a:latin typeface="나눔바른고딕" panose="020B0603020101020101" pitchFamily="34" charset="-127"/>
+                          <a:ea typeface="나눔바른고딕" panose="020B0603020101020101" pitchFamily="34" charset="-127"/>
+                        </a:rPr>
+                        <a:t> </a:t>
+                      </a:r>
+                      <a:r>
+                        <a:rPr lang="ko-KR" altLang="en-US" sz="1400" baseline="0" dirty="0" err="1">
+                          <a:latin typeface="나눔바른고딕" panose="020B0603020101020101" pitchFamily="34" charset="-127"/>
+                          <a:ea typeface="나눔바른고딕" panose="020B0603020101020101" pitchFamily="34" charset="-127"/>
+                        </a:rPr>
+                        <a:t>파쿠르</a:t>
+                      </a:r>
+                      <a:r>
                         <a:rPr lang="ko-KR" altLang="en-US" sz="1400" baseline="0" dirty="0">
                           <a:latin typeface="나눔바른고딕" panose="020B0603020101020101" pitchFamily="34" charset="-127"/>
                           <a:ea typeface="나눔바른고딕" panose="020B0603020101020101" pitchFamily="34" charset="-127"/>
                         </a:rPr>
-                        <a:t>인식한 장애물에 대한 </a:t>
-                      </a:r>
-                      <a:r>
-                        <a:rPr lang="ko-KR" altLang="en-US" sz="1400" baseline="0" dirty="0" err="1">
-                          <a:latin typeface="나눔바른고딕" panose="020B0603020101020101" pitchFamily="34" charset="-127"/>
-                          <a:ea typeface="나눔바른고딕" panose="020B0603020101020101" pitchFamily="34" charset="-127"/>
-                        </a:rPr>
-                        <a:t>파쿠르</a:t>
-                      </a:r>
-                      <a:r>
-                        <a:rPr lang="ko-KR" altLang="en-US" sz="1400" baseline="0" dirty="0">
-                          <a:latin typeface="나눔바른고딕" panose="020B0603020101020101" pitchFamily="34" charset="-127"/>
-                          <a:ea typeface="나눔바른고딕" panose="020B0603020101020101" pitchFamily="34" charset="-127"/>
-                        </a:rPr>
-                        <a:t> 애니메이션 선택</a:t>
-                      </a:r>
-                      <a:r>
-                        <a:rPr lang="en-US" altLang="ko-KR" sz="1400" baseline="0" dirty="0">
-                          <a:latin typeface="나눔바른고딕" panose="020B0603020101020101" pitchFamily="34" charset="-127"/>
-                          <a:ea typeface="나눔바른고딕" panose="020B0603020101020101" pitchFamily="34" charset="-127"/>
-                        </a:rPr>
-                        <a:t> </a:t>
-                      </a:r>
-                      <a:r>
-                        <a:rPr lang="ko-KR" altLang="en-US" sz="1400" baseline="0" dirty="0">
-                          <a:latin typeface="나눔바른고딕" panose="020B0603020101020101" pitchFamily="34" charset="-127"/>
-                          <a:ea typeface="나눔바른고딕" panose="020B0603020101020101" pitchFamily="34" charset="-127"/>
-                        </a:rPr>
-                        <a:t>및 출력</a:t>
+                        <a:t> 애니메이션 위치에 따른 보정</a:t>
                       </a:r>
                       <a:endParaRPr lang="ko-KR" altLang="en-US" sz="1400" dirty="0">
                         <a:latin typeface="나눔바른고딕" panose="020B0603020101020101" pitchFamily="34" charset="-127"/>
@@ -6134,7 +6320,7 @@
                 </a:tc>
                 <a:extLst>
                   <a:ext uri="{0D108BD9-81ED-4DB2-BD59-A6C34878D82A}">
-                    <a16:rowId xmlns:a16="http://schemas.microsoft.com/office/drawing/2014/main" xmlns="" val="10003"/>
+                    <a16:rowId xmlns:a16="http://schemas.microsoft.com/office/drawing/2014/main" val="10003"/>
                   </a:ext>
                 </a:extLst>
               </a:tr>
@@ -6316,7 +6502,7 @@
                 </a:tc>
                 <a:extLst>
                   <a:ext uri="{0D108BD9-81ED-4DB2-BD59-A6C34878D82A}">
-                    <a16:rowId xmlns:a16="http://schemas.microsoft.com/office/drawing/2014/main" xmlns="" val="10004"/>
+                    <a16:rowId xmlns:a16="http://schemas.microsoft.com/office/drawing/2014/main" val="10004"/>
                   </a:ext>
                 </a:extLst>
               </a:tr>
@@ -6452,7 +6638,7 @@
                 </a:tc>
                 <a:extLst>
                   <a:ext uri="{0D108BD9-81ED-4DB2-BD59-A6C34878D82A}">
-                    <a16:rowId xmlns:a16="http://schemas.microsoft.com/office/drawing/2014/main" xmlns="" val="10005"/>
+                    <a16:rowId xmlns:a16="http://schemas.microsoft.com/office/drawing/2014/main" val="10005"/>
                   </a:ext>
                 </a:extLst>
               </a:tr>
@@ -6547,13 +6733,6 @@
                         </a:rPr>
                         <a:t>철봉 나열된 환경</a:t>
                       </a:r>
-                      <a:r>
-                        <a:rPr lang="en-US" altLang="ko-KR" sz="1400" baseline="0" dirty="0">
-                          <a:latin typeface="나눔바른고딕" panose="020B0603020101020101" pitchFamily="34" charset="-127"/>
-                          <a:ea typeface="나눔바른고딕" panose="020B0603020101020101" pitchFamily="34" charset="-127"/>
-                        </a:rPr>
-                        <a:t/>
-                      </a:r>
                       <a:br>
                         <a:rPr lang="en-US" altLang="ko-KR" sz="1400" baseline="0" dirty="0">
                           <a:latin typeface="나눔바른고딕" panose="020B0603020101020101" pitchFamily="34" charset="-127"/>
@@ -6584,7 +6763,7 @@
                 </a:tc>
                 <a:extLst>
                   <a:ext uri="{0D108BD9-81ED-4DB2-BD59-A6C34878D82A}">
-                    <a16:rowId xmlns:a16="http://schemas.microsoft.com/office/drawing/2014/main" xmlns="" val="10006"/>
+                    <a16:rowId xmlns:a16="http://schemas.microsoft.com/office/drawing/2014/main" val="10006"/>
                   </a:ext>
                 </a:extLst>
               </a:tr>
@@ -6640,7 +6819,7 @@
                         <a:t>복잡한 지형 애니메이션 처리 </a:t>
                       </a:r>
                       <a:r>
-                        <a:rPr lang="en-US" altLang="ko-KR" sz="1400" dirty="0" smtClean="0">
+                        <a:rPr lang="en-US" altLang="ko-KR" sz="1400" dirty="0">
                           <a:latin typeface="나눔바른고딕" panose="020B0603020101020101" pitchFamily="34" charset="-127"/>
                           <a:ea typeface="나눔바른고딕" panose="020B0603020101020101" pitchFamily="34" charset="-127"/>
                         </a:rPr>
@@ -6712,7 +6891,7 @@
                 </a:tc>
                 <a:extLst>
                   <a:ext uri="{0D108BD9-81ED-4DB2-BD59-A6C34878D82A}">
-                    <a16:rowId xmlns:a16="http://schemas.microsoft.com/office/drawing/2014/main" xmlns="" val="10007"/>
+                    <a16:rowId xmlns:a16="http://schemas.microsoft.com/office/drawing/2014/main" val="10007"/>
                   </a:ext>
                 </a:extLst>
               </a:tr>
@@ -6774,7 +6953,7 @@
                 </a:tc>
                 <a:extLst>
                   <a:ext uri="{0D108BD9-81ED-4DB2-BD59-A6C34878D82A}">
-                    <a16:rowId xmlns:a16="http://schemas.microsoft.com/office/drawing/2014/main" xmlns="" val="10008"/>
+                    <a16:rowId xmlns:a16="http://schemas.microsoft.com/office/drawing/2014/main" val="10008"/>
                   </a:ext>
                 </a:extLst>
               </a:tr>

--- a/PPT/week2.pptx
+++ b/PPT/week2.pptx
@@ -3922,7 +3922,7 @@
                 <a:latin typeface="나눔바른고딕" panose="020B0603020101020101" pitchFamily="34" charset="-127"/>
                 <a:ea typeface="나눔바른고딕" panose="020B0603020101020101" pitchFamily="34" charset="-127"/>
               </a:rPr>
-              <a:t>1</a:t>
+              <a:t>2</a:t>
             </a:r>
             <a:r>
               <a:rPr lang="ko-KR" altLang="en-US" sz="2400" dirty="0">
@@ -4255,7 +4255,7 @@
         </p:blipFill>
         <p:spPr>
           <a:xfrm>
-            <a:off x="770283" y="3233684"/>
+            <a:off x="770283" y="3177670"/>
             <a:ext cx="5138742" cy="2178288"/>
           </a:xfrm>
           <a:prstGeom prst="rect">
@@ -4291,7 +4291,7 @@
         </p:blipFill>
         <p:spPr>
           <a:xfrm>
-            <a:off x="7062233" y="2730102"/>
+            <a:off x="7062233" y="3429000"/>
             <a:ext cx="3752788" cy="3023079"/>
           </a:xfrm>
           <a:prstGeom prst="rect">
@@ -4652,7 +4652,7 @@
         <p:spPr>
           <a:xfrm>
             <a:off x="302451" y="684785"/>
-            <a:ext cx="8118068" cy="1569660"/>
+            <a:ext cx="8118068" cy="1323439"/>
           </a:xfrm>
           <a:prstGeom prst="rect">
             <a:avLst/>
@@ -4677,7 +4677,7 @@
                 <a:latin typeface="나눔바른고딕" panose="020B0603020101020101" pitchFamily="34" charset="-127"/>
                 <a:ea typeface="나눔바른고딕" panose="020B0603020101020101" pitchFamily="34" charset="-127"/>
               </a:rPr>
-              <a:t> 레이어</a:t>
+              <a:t> 재생 구조</a:t>
             </a:r>
             <a:endParaRPr lang="en-US" altLang="ko-KR" sz="1600" dirty="0">
               <a:latin typeface="나눔바른고딕" panose="020B0603020101020101" pitchFamily="34" charset="-127"/>
@@ -4690,32 +4690,18 @@
               <a:buChar char="•"/>
             </a:pPr>
             <a:r>
-              <a:rPr lang="ko-KR" altLang="en-US" sz="1600" dirty="0" err="1">
-                <a:latin typeface="나눔바른고딕" panose="020B0603020101020101" pitchFamily="34" charset="-127"/>
-                <a:ea typeface="나눔바른고딕" panose="020B0603020101020101" pitchFamily="34" charset="-127"/>
-              </a:rPr>
-              <a:t>애니메이터</a:t>
+              <a:rPr lang="en-US" altLang="ko-KR" sz="1600" dirty="0">
+                <a:latin typeface="나눔바른고딕" panose="020B0603020101020101" pitchFamily="34" charset="-127"/>
+                <a:ea typeface="나눔바른고딕" panose="020B0603020101020101" pitchFamily="34" charset="-127"/>
+              </a:rPr>
+              <a:t>Base : </a:t>
             </a:r>
             <a:r>
               <a:rPr lang="ko-KR" altLang="en-US" sz="1600" dirty="0">
                 <a:latin typeface="나눔바른고딕" panose="020B0603020101020101" pitchFamily="34" charset="-127"/>
                 <a:ea typeface="나눔바른고딕" panose="020B0603020101020101" pitchFamily="34" charset="-127"/>
               </a:rPr>
-              <a:t> </a:t>
-            </a:r>
-            <a:r>
-              <a:rPr lang="en-US" altLang="ko-KR" sz="1600" dirty="0">
-                <a:latin typeface="나눔바른고딕" panose="020B0603020101020101" pitchFamily="34" charset="-127"/>
-                <a:ea typeface="나눔바른고딕" panose="020B0603020101020101" pitchFamily="34" charset="-127"/>
-              </a:rPr>
-              <a:t>: </a:t>
-            </a:r>
-            <a:r>
-              <a:rPr lang="ko-KR" altLang="en-US" sz="1600" dirty="0">
-                <a:latin typeface="나눔바른고딕" panose="020B0603020101020101" pitchFamily="34" charset="-127"/>
-                <a:ea typeface="나눔바른고딕" panose="020B0603020101020101" pitchFamily="34" charset="-127"/>
-              </a:rPr>
-              <a:t>애니메이션 재생 제어</a:t>
+              <a:t>지속적인 재생 필요한 경우</a:t>
             </a:r>
             <a:endParaRPr lang="en-US" altLang="ko-KR" sz="1600" dirty="0">
               <a:latin typeface="나눔바른고딕" panose="020B0603020101020101" pitchFamily="34" charset="-127"/>
@@ -4723,6 +4709,65 @@
             </a:endParaRPr>
           </a:p>
           <a:p>
+            <a:pPr marL="742950" lvl="1" indent="-285750">
+              <a:buFont typeface="Arial" panose="020B0604020202020204" pitchFamily="34" charset="0"/>
+              <a:buChar char="•"/>
+            </a:pPr>
+            <a:r>
+              <a:rPr lang="ko-KR" altLang="en-US" sz="1600" dirty="0">
+                <a:latin typeface="나눔바른고딕" panose="020B0603020101020101" pitchFamily="34" charset="-127"/>
+                <a:ea typeface="나눔바른고딕" panose="020B0603020101020101" pitchFamily="34" charset="-127"/>
+              </a:rPr>
+              <a:t>평지</a:t>
+            </a:r>
+            <a:r>
+              <a:rPr lang="en-US" altLang="ko-KR" sz="1600" dirty="0">
+                <a:latin typeface="나눔바른고딕" panose="020B0603020101020101" pitchFamily="34" charset="-127"/>
+                <a:ea typeface="나눔바른고딕" panose="020B0603020101020101" pitchFamily="34" charset="-127"/>
+              </a:rPr>
+              <a:t>, </a:t>
+            </a:r>
+            <a:r>
+              <a:rPr lang="ko-KR" altLang="en-US" sz="1600" dirty="0">
+                <a:latin typeface="나눔바른고딕" panose="020B0603020101020101" pitchFamily="34" charset="-127"/>
+                <a:ea typeface="나눔바른고딕" panose="020B0603020101020101" pitchFamily="34" charset="-127"/>
+              </a:rPr>
+              <a:t>벽면 매달린 상태</a:t>
+            </a:r>
+            <a:r>
+              <a:rPr lang="en-US" altLang="ko-KR" sz="1600" dirty="0">
+                <a:latin typeface="나눔바른고딕" panose="020B0603020101020101" pitchFamily="34" charset="-127"/>
+                <a:ea typeface="나눔바른고딕" panose="020B0603020101020101" pitchFamily="34" charset="-127"/>
+              </a:rPr>
+              <a:t>, </a:t>
+            </a:r>
+            <a:r>
+              <a:rPr lang="ko-KR" altLang="en-US" sz="1600" dirty="0">
+                <a:latin typeface="나눔바른고딕" panose="020B0603020101020101" pitchFamily="34" charset="-127"/>
+                <a:ea typeface="나눔바른고딕" panose="020B0603020101020101" pitchFamily="34" charset="-127"/>
+              </a:rPr>
+              <a:t>벽 오르기 등 </a:t>
+            </a:r>
+            <a:r>
+              <a:rPr lang="ko-KR" altLang="en-US" sz="1600" dirty="0" err="1">
+                <a:latin typeface="나눔바른고딕" panose="020B0603020101020101" pitchFamily="34" charset="-127"/>
+                <a:ea typeface="나눔바른고딕" panose="020B0603020101020101" pitchFamily="34" charset="-127"/>
+              </a:rPr>
+              <a:t>상태머신</a:t>
+            </a:r>
+            <a:r>
+              <a:rPr lang="ko-KR" altLang="en-US" sz="1600" dirty="0">
+                <a:latin typeface="나눔바른고딕" panose="020B0603020101020101" pitchFamily="34" charset="-127"/>
+                <a:ea typeface="나눔바른고딕" panose="020B0603020101020101" pitchFamily="34" charset="-127"/>
+              </a:rPr>
+              <a:t> 형태로 구현</a:t>
+            </a:r>
+            <a:endParaRPr lang="en-US" altLang="ko-KR" sz="1600" dirty="0">
+              <a:latin typeface="나눔바른고딕" panose="020B0603020101020101" pitchFamily="34" charset="-127"/>
+              <a:ea typeface="나눔바른고딕" panose="020B0603020101020101" pitchFamily="34" charset="-127"/>
+            </a:endParaRPr>
+          </a:p>
+          <a:p>
             <a:pPr marL="285750" indent="-285750">
               <a:buFont typeface="Arial" panose="020B0604020202020204" pitchFamily="34" charset="0"/>
               <a:buChar char="•"/>
@@ -4732,14 +4777,28 @@
                 <a:latin typeface="나눔바른고딕" panose="020B0603020101020101" pitchFamily="34" charset="-127"/>
                 <a:ea typeface="나눔바른고딕" panose="020B0603020101020101" pitchFamily="34" charset="-127"/>
               </a:rPr>
-              <a:t>Base Layer : </a:t>
+              <a:t>Override Layer : </a:t>
             </a:r>
             <a:r>
               <a:rPr lang="ko-KR" altLang="en-US" sz="1600" dirty="0">
                 <a:latin typeface="나눔바른고딕" panose="020B0603020101020101" pitchFamily="34" charset="-127"/>
                 <a:ea typeface="나눔바른고딕" panose="020B0603020101020101" pitchFamily="34" charset="-127"/>
               </a:rPr>
-              <a:t>지속적인 재생 필요한 경우</a:t>
+              <a:t>필요한 시점에</a:t>
+            </a:r>
+            <a:r>
+              <a:rPr lang="en-US" altLang="ko-KR" sz="1600" dirty="0">
+                <a:latin typeface="나눔바른고딕" panose="020B0603020101020101" pitchFamily="34" charset="-127"/>
+                <a:ea typeface="나눔바른고딕" panose="020B0603020101020101" pitchFamily="34" charset="-127"/>
+              </a:rPr>
+              <a:t> </a:t>
+            </a:r>
+            <a:r>
+              <a:rPr lang="ko-KR" altLang="en-US" sz="1600" dirty="0">
+                <a:latin typeface="나눔바른고딕" panose="020B0603020101020101" pitchFamily="34" charset="-127"/>
+                <a:ea typeface="나눔바른고딕" panose="020B0603020101020101" pitchFamily="34" charset="-127"/>
+              </a:rPr>
+              <a:t>한 차례 재생 필요</a:t>
             </a:r>
             <a:endParaRPr lang="en-US" altLang="ko-KR" sz="1600" dirty="0">
               <a:latin typeface="나눔바른고딕" panose="020B0603020101020101" pitchFamily="34" charset="-127"/>
@@ -4756,7 +4815,7 @@
                 <a:latin typeface="나눔바른고딕" panose="020B0603020101020101" pitchFamily="34" charset="-127"/>
                 <a:ea typeface="나눔바른고딕" panose="020B0603020101020101" pitchFamily="34" charset="-127"/>
               </a:rPr>
-              <a:t>평지</a:t>
+              <a:t>점프</a:t>
             </a:r>
             <a:r>
               <a:rPr lang="en-US" altLang="ko-KR" sz="1600" dirty="0">
@@ -4770,129 +4829,38 @@
                 <a:latin typeface="나눔바른고딕" panose="020B0603020101020101" pitchFamily="34" charset="-127"/>
                 <a:ea typeface="나눔바른고딕" panose="020B0603020101020101" pitchFamily="34" charset="-127"/>
               </a:rPr>
-              <a:t>벽면 매달린 상태</a:t>
+              <a:t>담 넘기</a:t>
             </a:r>
             <a:r>
               <a:rPr lang="en-US" altLang="ko-KR" sz="1600" dirty="0">
                 <a:latin typeface="나눔바른고딕" panose="020B0603020101020101" pitchFamily="34" charset="-127"/>
                 <a:ea typeface="나눔바른고딕" panose="020B0603020101020101" pitchFamily="34" charset="-127"/>
               </a:rPr>
-              <a:t>, </a:t>
+              <a:t> </a:t>
             </a:r>
             <a:r>
               <a:rPr lang="ko-KR" altLang="en-US" sz="1600" dirty="0">
                 <a:latin typeface="나눔바른고딕" panose="020B0603020101020101" pitchFamily="34" charset="-127"/>
                 <a:ea typeface="나눔바른고딕" panose="020B0603020101020101" pitchFamily="34" charset="-127"/>
               </a:rPr>
-              <a:t>벽 오르기 등 </a:t>
-            </a:r>
-            <a:r>
-              <a:rPr lang="ko-KR" altLang="en-US" sz="1600" dirty="0" err="1">
-                <a:latin typeface="나눔바른고딕" panose="020B0603020101020101" pitchFamily="34" charset="-127"/>
-                <a:ea typeface="나눔바른고딕" panose="020B0603020101020101" pitchFamily="34" charset="-127"/>
-              </a:rPr>
-              <a:t>상태머신</a:t>
-            </a:r>
-            <a:r>
-              <a:rPr lang="ko-KR" altLang="en-US" sz="1600" dirty="0">
-                <a:latin typeface="나눔바른고딕" panose="020B0603020101020101" pitchFamily="34" charset="-127"/>
-                <a:ea typeface="나눔바른고딕" panose="020B0603020101020101" pitchFamily="34" charset="-127"/>
-              </a:rPr>
-              <a:t> 형태로 구현</a:t>
+              <a:t>등 </a:t>
             </a:r>
             <a:endParaRPr lang="en-US" altLang="ko-KR" sz="1600" dirty="0">
               <a:latin typeface="나눔바른고딕" panose="020B0603020101020101" pitchFamily="34" charset="-127"/>
               <a:ea typeface="나눔바른고딕" panose="020B0603020101020101" pitchFamily="34" charset="-127"/>
             </a:endParaRPr>
           </a:p>
-          <a:p>
-            <a:pPr marL="285750" indent="-285750">
-              <a:buFont typeface="Arial" panose="020B0604020202020204" pitchFamily="34" charset="0"/>
-              <a:buChar char="•"/>
-            </a:pPr>
-            <a:r>
-              <a:rPr lang="en-US" altLang="ko-KR" sz="1600" dirty="0">
-                <a:latin typeface="나눔바른고딕" panose="020B0603020101020101" pitchFamily="34" charset="-127"/>
-                <a:ea typeface="나눔바른고딕" panose="020B0603020101020101" pitchFamily="34" charset="-127"/>
-              </a:rPr>
-              <a:t>Override Layer : </a:t>
-            </a:r>
-            <a:r>
-              <a:rPr lang="ko-KR" altLang="en-US" sz="1600" dirty="0">
-                <a:latin typeface="나눔바른고딕" panose="020B0603020101020101" pitchFamily="34" charset="-127"/>
-                <a:ea typeface="나눔바른고딕" panose="020B0603020101020101" pitchFamily="34" charset="-127"/>
-              </a:rPr>
-              <a:t>필요한 시점에</a:t>
-            </a:r>
-            <a:r>
-              <a:rPr lang="en-US" altLang="ko-KR" sz="1600" dirty="0">
-                <a:latin typeface="나눔바른고딕" panose="020B0603020101020101" pitchFamily="34" charset="-127"/>
-                <a:ea typeface="나눔바른고딕" panose="020B0603020101020101" pitchFamily="34" charset="-127"/>
-              </a:rPr>
-              <a:t> </a:t>
-            </a:r>
-            <a:r>
-              <a:rPr lang="ko-KR" altLang="en-US" sz="1600" dirty="0">
-                <a:latin typeface="나눔바른고딕" panose="020B0603020101020101" pitchFamily="34" charset="-127"/>
-                <a:ea typeface="나눔바른고딕" panose="020B0603020101020101" pitchFamily="34" charset="-127"/>
-              </a:rPr>
-              <a:t>한 차례 재생 필요</a:t>
-            </a:r>
-            <a:endParaRPr lang="en-US" altLang="ko-KR" sz="1600" dirty="0">
-              <a:latin typeface="나눔바른고딕" panose="020B0603020101020101" pitchFamily="34" charset="-127"/>
-              <a:ea typeface="나눔바른고딕" panose="020B0603020101020101" pitchFamily="34" charset="-127"/>
-            </a:endParaRPr>
-          </a:p>
-          <a:p>
-            <a:pPr marL="742950" lvl="1" indent="-285750">
-              <a:buFont typeface="Arial" panose="020B0604020202020204" pitchFamily="34" charset="0"/>
-              <a:buChar char="•"/>
-            </a:pPr>
-            <a:r>
-              <a:rPr lang="ko-KR" altLang="en-US" sz="1600" dirty="0">
-                <a:latin typeface="나눔바른고딕" panose="020B0603020101020101" pitchFamily="34" charset="-127"/>
-                <a:ea typeface="나눔바른고딕" panose="020B0603020101020101" pitchFamily="34" charset="-127"/>
-              </a:rPr>
-              <a:t>점프</a:t>
-            </a:r>
-            <a:r>
-              <a:rPr lang="en-US" altLang="ko-KR" sz="1600" dirty="0">
-                <a:latin typeface="나눔바른고딕" panose="020B0603020101020101" pitchFamily="34" charset="-127"/>
-                <a:ea typeface="나눔바른고딕" panose="020B0603020101020101" pitchFamily="34" charset="-127"/>
-              </a:rPr>
-              <a:t>, </a:t>
-            </a:r>
-            <a:r>
-              <a:rPr lang="ko-KR" altLang="en-US" sz="1600" dirty="0">
-                <a:latin typeface="나눔바른고딕" panose="020B0603020101020101" pitchFamily="34" charset="-127"/>
-                <a:ea typeface="나눔바른고딕" panose="020B0603020101020101" pitchFamily="34" charset="-127"/>
-              </a:rPr>
-              <a:t>담 넘기</a:t>
-            </a:r>
-            <a:r>
-              <a:rPr lang="en-US" altLang="ko-KR" sz="1600" dirty="0">
-                <a:latin typeface="나눔바른고딕" panose="020B0603020101020101" pitchFamily="34" charset="-127"/>
-                <a:ea typeface="나눔바른고딕" panose="020B0603020101020101" pitchFamily="34" charset="-127"/>
-              </a:rPr>
-              <a:t> </a:t>
-            </a:r>
-            <a:r>
-              <a:rPr lang="ko-KR" altLang="en-US" sz="1600" dirty="0">
-                <a:latin typeface="나눔바른고딕" panose="020B0603020101020101" pitchFamily="34" charset="-127"/>
-                <a:ea typeface="나눔바른고딕" panose="020B0603020101020101" pitchFamily="34" charset="-127"/>
-              </a:rPr>
-              <a:t>등 </a:t>
-            </a:r>
-            <a:endParaRPr lang="en-US" altLang="ko-KR" sz="1600" dirty="0">
-              <a:latin typeface="나눔바른고딕" panose="020B0603020101020101" pitchFamily="34" charset="-127"/>
-              <a:ea typeface="나눔바른고딕" panose="020B0603020101020101" pitchFamily="34" charset="-127"/>
-            </a:endParaRPr>
-          </a:p>
         </p:txBody>
       </p:sp>
       <p:pic>
         <p:nvPicPr>
-          <p:cNvPr id="2" name="그림 1"/>
+          <p:cNvPr id="4" name="그림 3">
+            <a:extLst>
+              <a:ext uri="{FF2B5EF4-FFF2-40B4-BE49-F238E27FC236}">
+                <a16:creationId xmlns:a16="http://schemas.microsoft.com/office/drawing/2014/main" id="{060B7025-B757-057C-54AF-FCA6B6B9D9BA}"/>
+              </a:ext>
+            </a:extLst>
+          </p:cNvPr>
           <p:cNvPicPr>
             <a:picLocks noChangeAspect="1"/>
           </p:cNvPicPr>
@@ -4906,8 +4874,8 @@
         </p:blipFill>
         <p:spPr>
           <a:xfrm>
-            <a:off x="3217666" y="2377556"/>
-            <a:ext cx="7952668" cy="3484161"/>
+            <a:off x="908050" y="2377556"/>
+            <a:ext cx="10598150" cy="3656441"/>
           </a:xfrm>
           <a:prstGeom prst="rect">
             <a:avLst/>

--- a/PPT/week2.pptx
+++ b/PPT/week2.pptx
@@ -3946,7 +3946,7 @@
         </p:nvSpPr>
         <p:spPr>
           <a:xfrm>
-            <a:off x="540190" y="3421353"/>
+            <a:off x="540190" y="3442142"/>
             <a:ext cx="1587294" cy="369332"/>
           </a:xfrm>
           <a:prstGeom prst="rect">
@@ -4075,8 +4075,8 @@
         </p:nvSpPr>
         <p:spPr>
           <a:xfrm>
-            <a:off x="302451" y="684785"/>
-            <a:ext cx="8118068" cy="1569660"/>
+            <a:off x="302451" y="1003762"/>
+            <a:ext cx="8118068" cy="1323439"/>
           </a:xfrm>
           <a:prstGeom prst="rect">
             <a:avLst/>
@@ -4111,28 +4111,41 @@
                 <a:latin typeface="나눔바른고딕" panose="020B0603020101020101" pitchFamily="34" charset="-127"/>
                 <a:ea typeface="나눔바른고딕" panose="020B0603020101020101" pitchFamily="34" charset="-127"/>
               </a:rPr>
-              <a:t>애니메이터</a:t>
+              <a:t>블렌드</a:t>
             </a:r>
             <a:r>
               <a:rPr lang="ko-KR" altLang="en-US" sz="1600" dirty="0">
                 <a:latin typeface="나눔바른고딕" panose="020B0603020101020101" pitchFamily="34" charset="-127"/>
                 <a:ea typeface="나눔바른고딕" panose="020B0603020101020101" pitchFamily="34" charset="-127"/>
               </a:rPr>
-              <a:t> </a:t>
+              <a:t> 클립 </a:t>
             </a:r>
             <a:r>
               <a:rPr lang="en-US" altLang="ko-KR" sz="1600" dirty="0">
                 <a:latin typeface="나눔바른고딕" panose="020B0603020101020101" pitchFamily="34" charset="-127"/>
                 <a:ea typeface="나눔바른고딕" panose="020B0603020101020101" pitchFamily="34" charset="-127"/>
               </a:rPr>
-              <a:t>: </a:t>
+              <a:t>(2D) : </a:t>
+            </a:r>
+          </a:p>
+          <a:p>
+            <a:pPr marL="742950" lvl="2" indent="-285750">
+              <a:buFont typeface="Arial" panose="020B0604020202020204" pitchFamily="34" charset="0"/>
+              <a:buChar char="•"/>
+            </a:pPr>
+            <a:r>
+              <a:rPr lang="en-US" altLang="ko-KR" sz="1600" dirty="0">
+                <a:latin typeface="나눔바른고딕" panose="020B0603020101020101" pitchFamily="34" charset="-127"/>
+                <a:ea typeface="나눔바른고딕" panose="020B0603020101020101" pitchFamily="34" charset="-127"/>
+              </a:rPr>
+              <a:t>2D </a:t>
             </a:r>
             <a:r>
               <a:rPr lang="ko-KR" altLang="en-US" sz="1600" dirty="0">
                 <a:latin typeface="나눔바른고딕" panose="020B0603020101020101" pitchFamily="34" charset="-127"/>
                 <a:ea typeface="나눔바른고딕" panose="020B0603020101020101" pitchFamily="34" charset="-127"/>
               </a:rPr>
-              <a:t>애니메이션 재생 제어</a:t>
+              <a:t>평면에서 입력한 좌표와 사전에 배치된 애니메이션 간 거리를 계산</a:t>
             </a:r>
             <a:endParaRPr lang="en-US" altLang="ko-KR" sz="1600" dirty="0">
               <a:latin typeface="나눔바른고딕" panose="020B0603020101020101" pitchFamily="34" charset="-127"/>
@@ -4140,50 +4153,16 @@
             </a:endParaRPr>
           </a:p>
           <a:p>
-            <a:pPr marL="285750" lvl="1" indent="-285750">
-              <a:buFont typeface="Arial" panose="020B0604020202020204" pitchFamily="34" charset="0"/>
-              <a:buChar char="•"/>
-            </a:pPr>
-            <a:r>
-              <a:rPr lang="ko-KR" altLang="en-US" sz="1600" dirty="0" err="1">
-                <a:latin typeface="나눔바른고딕" panose="020B0603020101020101" pitchFamily="34" charset="-127"/>
-                <a:ea typeface="나눔바른고딕" panose="020B0603020101020101" pitchFamily="34" charset="-127"/>
-              </a:rPr>
-              <a:t>블렌드</a:t>
-            </a:r>
-            <a:r>
-              <a:rPr lang="ko-KR" altLang="en-US" sz="1600" dirty="0">
-                <a:latin typeface="나눔바른고딕" panose="020B0603020101020101" pitchFamily="34" charset="-127"/>
-                <a:ea typeface="나눔바른고딕" panose="020B0603020101020101" pitchFamily="34" charset="-127"/>
-              </a:rPr>
-              <a:t> 클립 </a:t>
-            </a:r>
-            <a:r>
-              <a:rPr lang="en-US" altLang="ko-KR" sz="1600" dirty="0">
-                <a:latin typeface="나눔바른고딕" panose="020B0603020101020101" pitchFamily="34" charset="-127"/>
-                <a:ea typeface="나눔바른고딕" panose="020B0603020101020101" pitchFamily="34" charset="-127"/>
-              </a:rPr>
-              <a:t>(2D) : </a:t>
-            </a:r>
-          </a:p>
-          <a:p>
             <a:pPr marL="742950" lvl="2" indent="-285750">
               <a:buFont typeface="Arial" panose="020B0604020202020204" pitchFamily="34" charset="0"/>
               <a:buChar char="•"/>
             </a:pPr>
             <a:r>
-              <a:rPr lang="en-US" altLang="ko-KR" sz="1600" dirty="0">
-                <a:latin typeface="나눔바른고딕" panose="020B0603020101020101" pitchFamily="34" charset="-127"/>
-                <a:ea typeface="나눔바른고딕" panose="020B0603020101020101" pitchFamily="34" charset="-127"/>
-              </a:rPr>
-              <a:t>2D </a:t>
-            </a:r>
-            <a:r>
               <a:rPr lang="ko-KR" altLang="en-US" sz="1600" dirty="0">
                 <a:latin typeface="나눔바른고딕" panose="020B0603020101020101" pitchFamily="34" charset="-127"/>
                 <a:ea typeface="나눔바른고딕" panose="020B0603020101020101" pitchFamily="34" charset="-127"/>
               </a:rPr>
-              <a:t>평면에서 입력한 좌표를 이용해 사전에 배치된 애니메이션 간 거리를 계산</a:t>
+              <a:t>좌표에 가까운 애니메이션을 가중치를 높게 주어 재생</a:t>
             </a:r>
             <a:endParaRPr lang="en-US" altLang="ko-KR" sz="1600" dirty="0">
               <a:latin typeface="나눔바른고딕" panose="020B0603020101020101" pitchFamily="34" charset="-127"/>
@@ -4196,35 +4175,18 @@
               <a:buChar char="•"/>
             </a:pPr>
             <a:r>
+              <a:rPr lang="ko-KR" altLang="en-US" sz="1600" dirty="0" err="1">
+                <a:latin typeface="나눔바른고딕" panose="020B0603020101020101" pitchFamily="34" charset="-127"/>
+                <a:ea typeface="나눔바른고딕" panose="020B0603020101020101" pitchFamily="34" charset="-127"/>
+              </a:rPr>
+              <a:t>로코모션</a:t>
+            </a:r>
+            <a:r>
               <a:rPr lang="ko-KR" altLang="en-US" sz="1600" dirty="0">
                 <a:latin typeface="나눔바른고딕" panose="020B0603020101020101" pitchFamily="34" charset="-127"/>
                 <a:ea typeface="나눔바른고딕" panose="020B0603020101020101" pitchFamily="34" charset="-127"/>
               </a:rPr>
-              <a:t>좌표에 가까운 애니메이션을 가중치를 높게 주어 재생</a:t>
-            </a:r>
-            <a:endParaRPr lang="en-US" altLang="ko-KR" sz="1600" dirty="0">
-              <a:latin typeface="나눔바른고딕" panose="020B0603020101020101" pitchFamily="34" charset="-127"/>
-              <a:ea typeface="나눔바른고딕" panose="020B0603020101020101" pitchFamily="34" charset="-127"/>
-            </a:endParaRPr>
-          </a:p>
-          <a:p>
-            <a:pPr marL="742950" lvl="2" indent="-285750">
-              <a:buFont typeface="Arial" panose="020B0604020202020204" pitchFamily="34" charset="0"/>
-              <a:buChar char="•"/>
-            </a:pPr>
-            <a:r>
-              <a:rPr lang="ko-KR" altLang="en-US" sz="1600" dirty="0" err="1">
-                <a:latin typeface="나눔바른고딕" panose="020B0603020101020101" pitchFamily="34" charset="-127"/>
-                <a:ea typeface="나눔바른고딕" panose="020B0603020101020101" pitchFamily="34" charset="-127"/>
-              </a:rPr>
-              <a:t>로코모션</a:t>
-            </a:r>
-            <a:r>
-              <a:rPr lang="ko-KR" altLang="en-US" sz="1600" dirty="0">
-                <a:latin typeface="나눔바른고딕" panose="020B0603020101020101" pitchFamily="34" charset="-127"/>
-                <a:ea typeface="나눔바른고딕" panose="020B0603020101020101" pitchFamily="34" charset="-127"/>
-              </a:rPr>
-              <a:t> 형태의 애니메이션의 축 입력을 자연스럽게 처리하고자 구현</a:t>
+              <a:t> 애니메이션을 축 입력에 따라 자연스럽게 처리하고자 구현</a:t>
             </a:r>
             <a:endParaRPr lang="en-US" altLang="ko-KR" sz="1600" dirty="0">
               <a:latin typeface="나눔바른고딕" panose="020B0603020101020101" pitchFamily="34" charset="-127"/>
@@ -4255,7 +4217,7 @@
         </p:blipFill>
         <p:spPr>
           <a:xfrm>
-            <a:off x="770283" y="3177670"/>
+            <a:off x="749018" y="3514412"/>
             <a:ext cx="5138742" cy="2178288"/>
           </a:xfrm>
           <a:prstGeom prst="rect">
@@ -4291,7 +4253,7 @@
         </p:blipFill>
         <p:spPr>
           <a:xfrm>
-            <a:off x="7062233" y="3429000"/>
+            <a:off x="7104764" y="3092016"/>
             <a:ext cx="3752788" cy="3023079"/>
           </a:xfrm>
           <a:prstGeom prst="rect">
@@ -4299,6 +4261,44 @@
           </a:prstGeom>
         </p:spPr>
       </p:pic>
+      <p:cxnSp>
+        <p:nvCxnSpPr>
+          <p:cNvPr id="3" name="직선 연결선 2">
+            <a:extLst>
+              <a:ext uri="{FF2B5EF4-FFF2-40B4-BE49-F238E27FC236}">
+                <a16:creationId xmlns:a16="http://schemas.microsoft.com/office/drawing/2014/main" id="{76FFFECF-4B1C-95DF-32C3-2D2F19BEDAFB}"/>
+              </a:ext>
+            </a:extLst>
+          </p:cNvPr>
+          <p:cNvCxnSpPr>
+            <a:cxnSpLocks/>
+          </p:cNvCxnSpPr>
+          <p:nvPr/>
+        </p:nvCxnSpPr>
+        <p:spPr>
+          <a:xfrm>
+            <a:off x="387511" y="818707"/>
+            <a:ext cx="11308303" cy="0"/>
+          </a:xfrm>
+          <a:prstGeom prst="line">
+            <a:avLst/>
+          </a:prstGeom>
+        </p:spPr>
+        <p:style>
+          <a:lnRef idx="2">
+            <a:schemeClr val="accent1"/>
+          </a:lnRef>
+          <a:fillRef idx="0">
+            <a:schemeClr val="accent1"/>
+          </a:fillRef>
+          <a:effectRef idx="1">
+            <a:schemeClr val="accent1"/>
+          </a:effectRef>
+          <a:fontRef idx="minor">
+            <a:schemeClr val="tx1"/>
+          </a:fontRef>
+        </p:style>
+      </p:cxnSp>
     </p:spTree>
     <p:extLst>
       <p:ext uri="{BB962C8B-B14F-4D97-AF65-F5344CB8AC3E}">
@@ -4391,7 +4391,7 @@
         </p:nvSpPr>
         <p:spPr>
           <a:xfrm>
-            <a:off x="302451" y="684785"/>
+            <a:off x="302451" y="1011585"/>
             <a:ext cx="8118068" cy="1077218"/>
           </a:xfrm>
           <a:prstGeom prst="rect">
@@ -4515,7 +4515,7 @@
         </p:blipFill>
         <p:spPr>
           <a:xfrm>
-            <a:off x="397746" y="2131335"/>
+            <a:off x="397746" y="2324212"/>
             <a:ext cx="4848845" cy="3906014"/>
           </a:xfrm>
           <a:prstGeom prst="rect">
@@ -4551,7 +4551,7 @@
         </p:blipFill>
         <p:spPr>
           <a:xfrm>
-            <a:off x="5387145" y="2131335"/>
+            <a:off x="5387145" y="2324212"/>
             <a:ext cx="6045210" cy="3906014"/>
           </a:xfrm>
           <a:prstGeom prst="rect">
@@ -4559,6 +4559,44 @@
           </a:prstGeom>
         </p:spPr>
       </p:pic>
+      <p:cxnSp>
+        <p:nvCxnSpPr>
+          <p:cNvPr id="2" name="직선 연결선 1">
+            <a:extLst>
+              <a:ext uri="{FF2B5EF4-FFF2-40B4-BE49-F238E27FC236}">
+                <a16:creationId xmlns:a16="http://schemas.microsoft.com/office/drawing/2014/main" id="{5C9D301D-FD0A-4D92-09AA-89495D2CB379}"/>
+              </a:ext>
+            </a:extLst>
+          </p:cNvPr>
+          <p:cNvCxnSpPr>
+            <a:cxnSpLocks/>
+          </p:cNvCxnSpPr>
+          <p:nvPr/>
+        </p:nvCxnSpPr>
+        <p:spPr>
+          <a:xfrm>
+            <a:off x="387511" y="818707"/>
+            <a:ext cx="11308303" cy="0"/>
+          </a:xfrm>
+          <a:prstGeom prst="line">
+            <a:avLst/>
+          </a:prstGeom>
+        </p:spPr>
+        <p:style>
+          <a:lnRef idx="2">
+            <a:schemeClr val="accent1"/>
+          </a:lnRef>
+          <a:fillRef idx="0">
+            <a:schemeClr val="accent1"/>
+          </a:fillRef>
+          <a:effectRef idx="1">
+            <a:schemeClr val="accent1"/>
+          </a:effectRef>
+          <a:fontRef idx="minor">
+            <a:schemeClr val="tx1"/>
+          </a:fontRef>
+        </p:style>
+      </p:cxnSp>
     </p:spTree>
     <p:extLst>
       <p:ext uri="{BB962C8B-B14F-4D97-AF65-F5344CB8AC3E}">
@@ -4637,221 +4675,6 @@
           </a:p>
         </p:txBody>
       </p:sp>
-      <p:sp>
-        <p:nvSpPr>
-          <p:cNvPr id="12" name="TextBox 11">
-            <a:extLst>
-              <a:ext uri="{FF2B5EF4-FFF2-40B4-BE49-F238E27FC236}">
-                <a16:creationId xmlns:a16="http://schemas.microsoft.com/office/drawing/2014/main" id="{8E37654D-B1C1-B17B-2A32-BB0F324B7AC3}"/>
-              </a:ext>
-            </a:extLst>
-          </p:cNvPr>
-          <p:cNvSpPr txBox="1"/>
-          <p:nvPr/>
-        </p:nvSpPr>
-        <p:spPr>
-          <a:xfrm>
-            <a:off x="302451" y="684785"/>
-            <a:ext cx="8118068" cy="1323439"/>
-          </a:xfrm>
-          <a:prstGeom prst="rect">
-            <a:avLst/>
-          </a:prstGeom>
-          <a:noFill/>
-        </p:spPr>
-        <p:txBody>
-          <a:bodyPr wrap="square" rtlCol="0">
-            <a:spAutoFit/>
-          </a:bodyPr>
-          <a:lstStyle/>
-          <a:p>
-            <a:r>
-              <a:rPr lang="ko-KR" altLang="en-US" sz="1600" dirty="0" err="1">
-                <a:latin typeface="나눔바른고딕" panose="020B0603020101020101" pitchFamily="34" charset="-127"/>
-                <a:ea typeface="나눔바른고딕" panose="020B0603020101020101" pitchFamily="34" charset="-127"/>
-              </a:rPr>
-              <a:t>애니메이터</a:t>
-            </a:r>
-            <a:r>
-              <a:rPr lang="ko-KR" altLang="en-US" sz="1600" dirty="0">
-                <a:latin typeface="나눔바른고딕" panose="020B0603020101020101" pitchFamily="34" charset="-127"/>
-                <a:ea typeface="나눔바른고딕" panose="020B0603020101020101" pitchFamily="34" charset="-127"/>
-              </a:rPr>
-              <a:t> 재생 구조</a:t>
-            </a:r>
-            <a:endParaRPr lang="en-US" altLang="ko-KR" sz="1600" dirty="0">
-              <a:latin typeface="나눔바른고딕" panose="020B0603020101020101" pitchFamily="34" charset="-127"/>
-              <a:ea typeface="나눔바른고딕" panose="020B0603020101020101" pitchFamily="34" charset="-127"/>
-            </a:endParaRPr>
-          </a:p>
-          <a:p>
-            <a:pPr marL="285750" indent="-285750">
-              <a:buFont typeface="Arial" panose="020B0604020202020204" pitchFamily="34" charset="0"/>
-              <a:buChar char="•"/>
-            </a:pPr>
-            <a:r>
-              <a:rPr lang="en-US" altLang="ko-KR" sz="1600" dirty="0">
-                <a:latin typeface="나눔바른고딕" panose="020B0603020101020101" pitchFamily="34" charset="-127"/>
-                <a:ea typeface="나눔바른고딕" panose="020B0603020101020101" pitchFamily="34" charset="-127"/>
-              </a:rPr>
-              <a:t>Base : </a:t>
-            </a:r>
-            <a:r>
-              <a:rPr lang="ko-KR" altLang="en-US" sz="1600" dirty="0">
-                <a:latin typeface="나눔바른고딕" panose="020B0603020101020101" pitchFamily="34" charset="-127"/>
-                <a:ea typeface="나눔바른고딕" panose="020B0603020101020101" pitchFamily="34" charset="-127"/>
-              </a:rPr>
-              <a:t>지속적인 재생 필요한 경우</a:t>
-            </a:r>
-            <a:endParaRPr lang="en-US" altLang="ko-KR" sz="1600" dirty="0">
-              <a:latin typeface="나눔바른고딕" panose="020B0603020101020101" pitchFamily="34" charset="-127"/>
-              <a:ea typeface="나눔바른고딕" panose="020B0603020101020101" pitchFamily="34" charset="-127"/>
-            </a:endParaRPr>
-          </a:p>
-          <a:p>
-            <a:pPr marL="742950" lvl="1" indent="-285750">
-              <a:buFont typeface="Arial" panose="020B0604020202020204" pitchFamily="34" charset="0"/>
-              <a:buChar char="•"/>
-            </a:pPr>
-            <a:r>
-              <a:rPr lang="ko-KR" altLang="en-US" sz="1600" dirty="0">
-                <a:latin typeface="나눔바른고딕" panose="020B0603020101020101" pitchFamily="34" charset="-127"/>
-                <a:ea typeface="나눔바른고딕" panose="020B0603020101020101" pitchFamily="34" charset="-127"/>
-              </a:rPr>
-              <a:t>평지</a:t>
-            </a:r>
-            <a:r>
-              <a:rPr lang="en-US" altLang="ko-KR" sz="1600" dirty="0">
-                <a:latin typeface="나눔바른고딕" panose="020B0603020101020101" pitchFamily="34" charset="-127"/>
-                <a:ea typeface="나눔바른고딕" panose="020B0603020101020101" pitchFamily="34" charset="-127"/>
-              </a:rPr>
-              <a:t>, </a:t>
-            </a:r>
-            <a:r>
-              <a:rPr lang="ko-KR" altLang="en-US" sz="1600" dirty="0">
-                <a:latin typeface="나눔바른고딕" panose="020B0603020101020101" pitchFamily="34" charset="-127"/>
-                <a:ea typeface="나눔바른고딕" panose="020B0603020101020101" pitchFamily="34" charset="-127"/>
-              </a:rPr>
-              <a:t>벽면 매달린 상태</a:t>
-            </a:r>
-            <a:r>
-              <a:rPr lang="en-US" altLang="ko-KR" sz="1600" dirty="0">
-                <a:latin typeface="나눔바른고딕" panose="020B0603020101020101" pitchFamily="34" charset="-127"/>
-                <a:ea typeface="나눔바른고딕" panose="020B0603020101020101" pitchFamily="34" charset="-127"/>
-              </a:rPr>
-              <a:t>, </a:t>
-            </a:r>
-            <a:r>
-              <a:rPr lang="ko-KR" altLang="en-US" sz="1600" dirty="0">
-                <a:latin typeface="나눔바른고딕" panose="020B0603020101020101" pitchFamily="34" charset="-127"/>
-                <a:ea typeface="나눔바른고딕" panose="020B0603020101020101" pitchFamily="34" charset="-127"/>
-              </a:rPr>
-              <a:t>벽 오르기 등 </a:t>
-            </a:r>
-            <a:r>
-              <a:rPr lang="ko-KR" altLang="en-US" sz="1600" dirty="0" err="1">
-                <a:latin typeface="나눔바른고딕" panose="020B0603020101020101" pitchFamily="34" charset="-127"/>
-                <a:ea typeface="나눔바른고딕" panose="020B0603020101020101" pitchFamily="34" charset="-127"/>
-              </a:rPr>
-              <a:t>상태머신</a:t>
-            </a:r>
-            <a:r>
-              <a:rPr lang="ko-KR" altLang="en-US" sz="1600" dirty="0">
-                <a:latin typeface="나눔바른고딕" panose="020B0603020101020101" pitchFamily="34" charset="-127"/>
-                <a:ea typeface="나눔바른고딕" panose="020B0603020101020101" pitchFamily="34" charset="-127"/>
-              </a:rPr>
-              <a:t> 형태로 구현</a:t>
-            </a:r>
-            <a:endParaRPr lang="en-US" altLang="ko-KR" sz="1600" dirty="0">
-              <a:latin typeface="나눔바른고딕" panose="020B0603020101020101" pitchFamily="34" charset="-127"/>
-              <a:ea typeface="나눔바른고딕" panose="020B0603020101020101" pitchFamily="34" charset="-127"/>
-            </a:endParaRPr>
-          </a:p>
-          <a:p>
-            <a:pPr marL="285750" indent="-285750">
-              <a:buFont typeface="Arial" panose="020B0604020202020204" pitchFamily="34" charset="0"/>
-              <a:buChar char="•"/>
-            </a:pPr>
-            <a:r>
-              <a:rPr lang="en-US" altLang="ko-KR" sz="1600" dirty="0">
-                <a:latin typeface="나눔바른고딕" panose="020B0603020101020101" pitchFamily="34" charset="-127"/>
-                <a:ea typeface="나눔바른고딕" panose="020B0603020101020101" pitchFamily="34" charset="-127"/>
-              </a:rPr>
-              <a:t>Override Layer : </a:t>
-            </a:r>
-            <a:r>
-              <a:rPr lang="ko-KR" altLang="en-US" sz="1600" dirty="0">
-                <a:latin typeface="나눔바른고딕" panose="020B0603020101020101" pitchFamily="34" charset="-127"/>
-                <a:ea typeface="나눔바른고딕" panose="020B0603020101020101" pitchFamily="34" charset="-127"/>
-              </a:rPr>
-              <a:t>필요한 시점에</a:t>
-            </a:r>
-            <a:r>
-              <a:rPr lang="en-US" altLang="ko-KR" sz="1600" dirty="0">
-                <a:latin typeface="나눔바른고딕" panose="020B0603020101020101" pitchFamily="34" charset="-127"/>
-                <a:ea typeface="나눔바른고딕" panose="020B0603020101020101" pitchFamily="34" charset="-127"/>
-              </a:rPr>
-              <a:t> </a:t>
-            </a:r>
-            <a:r>
-              <a:rPr lang="ko-KR" altLang="en-US" sz="1600" dirty="0">
-                <a:latin typeface="나눔바른고딕" panose="020B0603020101020101" pitchFamily="34" charset="-127"/>
-                <a:ea typeface="나눔바른고딕" panose="020B0603020101020101" pitchFamily="34" charset="-127"/>
-              </a:rPr>
-              <a:t>한 차례 재생 필요</a:t>
-            </a:r>
-            <a:endParaRPr lang="en-US" altLang="ko-KR" sz="1600" dirty="0">
-              <a:latin typeface="나눔바른고딕" panose="020B0603020101020101" pitchFamily="34" charset="-127"/>
-              <a:ea typeface="나눔바른고딕" panose="020B0603020101020101" pitchFamily="34" charset="-127"/>
-            </a:endParaRPr>
-          </a:p>
-          <a:p>
-            <a:pPr marL="742950" lvl="1" indent="-285750">
-              <a:buFont typeface="Arial" panose="020B0604020202020204" pitchFamily="34" charset="0"/>
-              <a:buChar char="•"/>
-            </a:pPr>
-            <a:r>
-              <a:rPr lang="ko-KR" altLang="en-US" sz="1600" dirty="0">
-                <a:latin typeface="나눔바른고딕" panose="020B0603020101020101" pitchFamily="34" charset="-127"/>
-                <a:ea typeface="나눔바른고딕" panose="020B0603020101020101" pitchFamily="34" charset="-127"/>
-              </a:rPr>
-              <a:t>점프</a:t>
-            </a:r>
-            <a:r>
-              <a:rPr lang="en-US" altLang="ko-KR" sz="1600" dirty="0">
-                <a:latin typeface="나눔바른고딕" panose="020B0603020101020101" pitchFamily="34" charset="-127"/>
-                <a:ea typeface="나눔바른고딕" panose="020B0603020101020101" pitchFamily="34" charset="-127"/>
-              </a:rPr>
-              <a:t>, </a:t>
-            </a:r>
-            <a:r>
-              <a:rPr lang="ko-KR" altLang="en-US" sz="1600" dirty="0">
-                <a:latin typeface="나눔바른고딕" panose="020B0603020101020101" pitchFamily="34" charset="-127"/>
-                <a:ea typeface="나눔바른고딕" panose="020B0603020101020101" pitchFamily="34" charset="-127"/>
-              </a:rPr>
-              <a:t>담 넘기</a:t>
-            </a:r>
-            <a:r>
-              <a:rPr lang="en-US" altLang="ko-KR" sz="1600" dirty="0">
-                <a:latin typeface="나눔바른고딕" panose="020B0603020101020101" pitchFamily="34" charset="-127"/>
-                <a:ea typeface="나눔바른고딕" panose="020B0603020101020101" pitchFamily="34" charset="-127"/>
-              </a:rPr>
-              <a:t> </a:t>
-            </a:r>
-            <a:r>
-              <a:rPr lang="ko-KR" altLang="en-US" sz="1600" dirty="0">
-                <a:latin typeface="나눔바른고딕" panose="020B0603020101020101" pitchFamily="34" charset="-127"/>
-                <a:ea typeface="나눔바른고딕" panose="020B0603020101020101" pitchFamily="34" charset="-127"/>
-              </a:rPr>
-              <a:t>등 </a:t>
-            </a:r>
-            <a:endParaRPr lang="en-US" altLang="ko-KR" sz="1600" dirty="0">
-              <a:latin typeface="나눔바른고딕" panose="020B0603020101020101" pitchFamily="34" charset="-127"/>
-              <a:ea typeface="나눔바른고딕" panose="020B0603020101020101" pitchFamily="34" charset="-127"/>
-            </a:endParaRPr>
-          </a:p>
-        </p:txBody>
-      </p:sp>
       <p:pic>
         <p:nvPicPr>
           <p:cNvPr id="4" name="그림 3">
@@ -4874,14 +4697,395 @@
         </p:blipFill>
         <p:spPr>
           <a:xfrm>
-            <a:off x="908050" y="2377556"/>
-            <a:ext cx="10598150" cy="3656441"/>
+            <a:off x="1407780" y="2758641"/>
+            <a:ext cx="9054657" cy="3123924"/>
           </a:xfrm>
           <a:prstGeom prst="rect">
             <a:avLst/>
           </a:prstGeom>
         </p:spPr>
       </p:pic>
+      <p:cxnSp>
+        <p:nvCxnSpPr>
+          <p:cNvPr id="2" name="직선 연결선 1">
+            <a:extLst>
+              <a:ext uri="{FF2B5EF4-FFF2-40B4-BE49-F238E27FC236}">
+                <a16:creationId xmlns:a16="http://schemas.microsoft.com/office/drawing/2014/main" id="{F0AEDE5D-DC06-076D-3194-CD013CF5401D}"/>
+              </a:ext>
+            </a:extLst>
+          </p:cNvPr>
+          <p:cNvCxnSpPr>
+            <a:cxnSpLocks/>
+          </p:cNvCxnSpPr>
+          <p:nvPr/>
+        </p:nvCxnSpPr>
+        <p:spPr>
+          <a:xfrm>
+            <a:off x="387511" y="818707"/>
+            <a:ext cx="11308303" cy="0"/>
+          </a:xfrm>
+          <a:prstGeom prst="line">
+            <a:avLst/>
+          </a:prstGeom>
+        </p:spPr>
+        <p:style>
+          <a:lnRef idx="2">
+            <a:schemeClr val="accent1"/>
+          </a:lnRef>
+          <a:fillRef idx="0">
+            <a:schemeClr val="accent1"/>
+          </a:fillRef>
+          <a:effectRef idx="1">
+            <a:schemeClr val="accent1"/>
+          </a:effectRef>
+          <a:fontRef idx="minor">
+            <a:schemeClr val="tx1"/>
+          </a:fontRef>
+        </p:style>
+      </p:cxnSp>
+      <p:sp>
+        <p:nvSpPr>
+          <p:cNvPr id="5" name="TextBox 4">
+            <a:extLst>
+              <a:ext uri="{FF2B5EF4-FFF2-40B4-BE49-F238E27FC236}">
+                <a16:creationId xmlns:a16="http://schemas.microsoft.com/office/drawing/2014/main" id="{8085A31F-B1EA-1009-8C7E-90D6BD05158A}"/>
+              </a:ext>
+            </a:extLst>
+          </p:cNvPr>
+          <p:cNvSpPr txBox="1"/>
+          <p:nvPr/>
+        </p:nvSpPr>
+        <p:spPr>
+          <a:xfrm>
+            <a:off x="302451" y="1011585"/>
+            <a:ext cx="8118068" cy="1569660"/>
+          </a:xfrm>
+          <a:prstGeom prst="rect">
+            <a:avLst/>
+          </a:prstGeom>
+          <a:noFill/>
+        </p:spPr>
+        <p:txBody>
+          <a:bodyPr wrap="square" rtlCol="0">
+            <a:spAutoFit/>
+          </a:bodyPr>
+          <a:lstStyle/>
+          <a:p>
+            <a:r>
+              <a:rPr lang="ko-KR" altLang="en-US" sz="1600" dirty="0" err="1">
+                <a:latin typeface="나눔바른고딕" panose="020B0603020101020101" pitchFamily="34" charset="-127"/>
+                <a:ea typeface="나눔바른고딕" panose="020B0603020101020101" pitchFamily="34" charset="-127"/>
+              </a:rPr>
+              <a:t>애니메이터</a:t>
+            </a:r>
+            <a:r>
+              <a:rPr lang="ko-KR" altLang="en-US" sz="1600" dirty="0">
+                <a:latin typeface="나눔바른고딕" panose="020B0603020101020101" pitchFamily="34" charset="-127"/>
+                <a:ea typeface="나눔바른고딕" panose="020B0603020101020101" pitchFamily="34" charset="-127"/>
+              </a:rPr>
+              <a:t> </a:t>
+            </a:r>
+            <a:r>
+              <a:rPr lang="en-US" altLang="ko-KR" sz="1600" dirty="0">
+                <a:latin typeface="나눔바른고딕" panose="020B0603020101020101" pitchFamily="34" charset="-127"/>
+                <a:ea typeface="나눔바른고딕" panose="020B0603020101020101" pitchFamily="34" charset="-127"/>
+              </a:rPr>
+              <a:t>: </a:t>
+            </a:r>
+            <a:r>
+              <a:rPr lang="ko-KR" altLang="en-US" sz="1600" dirty="0">
+                <a:latin typeface="나눔바른고딕" panose="020B0603020101020101" pitchFamily="34" charset="-127"/>
+                <a:ea typeface="나눔바른고딕" panose="020B0603020101020101" pitchFamily="34" charset="-127"/>
+              </a:rPr>
+              <a:t>애니메이션 재생 제어</a:t>
+            </a:r>
+            <a:endParaRPr lang="en-US" altLang="ko-KR" sz="1600" dirty="0">
+              <a:latin typeface="나눔바른고딕" panose="020B0603020101020101" pitchFamily="34" charset="-127"/>
+              <a:ea typeface="나눔바른고딕" panose="020B0603020101020101" pitchFamily="34" charset="-127"/>
+            </a:endParaRPr>
+          </a:p>
+          <a:p>
+            <a:pPr marL="285750" indent="-285750">
+              <a:buFont typeface="Arial" panose="020B0604020202020204" pitchFamily="34" charset="0"/>
+              <a:buChar char="•"/>
+            </a:pPr>
+            <a:r>
+              <a:rPr lang="ko-KR" altLang="en-US" sz="1600" dirty="0" err="1">
+                <a:latin typeface="나눔바른고딕" panose="020B0603020101020101" pitchFamily="34" charset="-127"/>
+                <a:ea typeface="나눔바른고딕" panose="020B0603020101020101" pitchFamily="34" charset="-127"/>
+              </a:rPr>
+              <a:t>애니메이터</a:t>
+            </a:r>
+            <a:r>
+              <a:rPr lang="ko-KR" altLang="en-US" sz="1600" dirty="0">
+                <a:latin typeface="나눔바른고딕" panose="020B0603020101020101" pitchFamily="34" charset="-127"/>
+                <a:ea typeface="나눔바른고딕" panose="020B0603020101020101" pitchFamily="34" charset="-127"/>
+              </a:rPr>
+              <a:t> 재생 </a:t>
+            </a:r>
+            <a:r>
+              <a:rPr lang="en-US" altLang="ko-KR" sz="1600" dirty="0">
+                <a:latin typeface="나눔바른고딕" panose="020B0603020101020101" pitchFamily="34" charset="-127"/>
+                <a:ea typeface="나눔바른고딕" panose="020B0603020101020101" pitchFamily="34" charset="-127"/>
+              </a:rPr>
+              <a:t>2 </a:t>
+            </a:r>
+            <a:r>
+              <a:rPr lang="ko-KR" altLang="en-US" sz="1600" dirty="0">
+                <a:latin typeface="나눔바른고딕" panose="020B0603020101020101" pitchFamily="34" charset="-127"/>
+                <a:ea typeface="나눔바른고딕" panose="020B0603020101020101" pitchFamily="34" charset="-127"/>
+              </a:rPr>
+              <a:t>트랙 구조</a:t>
+            </a:r>
+            <a:endParaRPr lang="en-US" altLang="ko-KR" sz="1600" dirty="0">
+              <a:latin typeface="나눔바른고딕" panose="020B0603020101020101" pitchFamily="34" charset="-127"/>
+              <a:ea typeface="나눔바른고딕" panose="020B0603020101020101" pitchFamily="34" charset="-127"/>
+            </a:endParaRPr>
+          </a:p>
+          <a:p>
+            <a:pPr marL="742950" lvl="1" indent="-285750">
+              <a:buFont typeface="Arial" panose="020B0604020202020204" pitchFamily="34" charset="0"/>
+              <a:buChar char="•"/>
+            </a:pPr>
+            <a:r>
+              <a:rPr lang="en-US" altLang="ko-KR" sz="1600" dirty="0">
+                <a:latin typeface="나눔바른고딕" panose="020B0603020101020101" pitchFamily="34" charset="-127"/>
+                <a:ea typeface="나눔바른고딕" panose="020B0603020101020101" pitchFamily="34" charset="-127"/>
+              </a:rPr>
+              <a:t>Base : </a:t>
+            </a:r>
+            <a:r>
+              <a:rPr lang="ko-KR" altLang="en-US" sz="1600" dirty="0">
+                <a:latin typeface="나눔바른고딕" panose="020B0603020101020101" pitchFamily="34" charset="-127"/>
+                <a:ea typeface="나눔바른고딕" panose="020B0603020101020101" pitchFamily="34" charset="-127"/>
+              </a:rPr>
+              <a:t>지속적인 재생이 필요한 경우</a:t>
+            </a:r>
+            <a:endParaRPr lang="en-US" altLang="ko-KR" sz="1600" dirty="0">
+              <a:latin typeface="나눔바른고딕" panose="020B0603020101020101" pitchFamily="34" charset="-127"/>
+              <a:ea typeface="나눔바른고딕" panose="020B0603020101020101" pitchFamily="34" charset="-127"/>
+            </a:endParaRPr>
+          </a:p>
+          <a:p>
+            <a:pPr marL="1200150" lvl="2" indent="-285750">
+              <a:buFont typeface="Arial" panose="020B0604020202020204" pitchFamily="34" charset="0"/>
+              <a:buChar char="•"/>
+            </a:pPr>
+            <a:r>
+              <a:rPr lang="ko-KR" altLang="en-US" sz="1600" dirty="0">
+                <a:latin typeface="나눔바른고딕" panose="020B0603020101020101" pitchFamily="34" charset="-127"/>
+                <a:ea typeface="나눔바른고딕" panose="020B0603020101020101" pitchFamily="34" charset="-127"/>
+              </a:rPr>
+              <a:t>평지</a:t>
+            </a:r>
+            <a:r>
+              <a:rPr lang="en-US" altLang="ko-KR" sz="1600" dirty="0">
+                <a:latin typeface="나눔바른고딕" panose="020B0603020101020101" pitchFamily="34" charset="-127"/>
+                <a:ea typeface="나눔바른고딕" panose="020B0603020101020101" pitchFamily="34" charset="-127"/>
+              </a:rPr>
+              <a:t>, </a:t>
+            </a:r>
+            <a:r>
+              <a:rPr lang="ko-KR" altLang="en-US" sz="1600" dirty="0">
+                <a:latin typeface="나눔바른고딕" panose="020B0603020101020101" pitchFamily="34" charset="-127"/>
+                <a:ea typeface="나눔바른고딕" panose="020B0603020101020101" pitchFamily="34" charset="-127"/>
+              </a:rPr>
+              <a:t>벽면 매달린 상태</a:t>
+            </a:r>
+            <a:r>
+              <a:rPr lang="en-US" altLang="ko-KR" sz="1600" dirty="0">
+                <a:latin typeface="나눔바른고딕" panose="020B0603020101020101" pitchFamily="34" charset="-127"/>
+                <a:ea typeface="나눔바른고딕" panose="020B0603020101020101" pitchFamily="34" charset="-127"/>
+              </a:rPr>
+              <a:t>, </a:t>
+            </a:r>
+            <a:r>
+              <a:rPr lang="ko-KR" altLang="en-US" sz="1600" dirty="0">
+                <a:latin typeface="나눔바른고딕" panose="020B0603020101020101" pitchFamily="34" charset="-127"/>
+                <a:ea typeface="나눔바른고딕" panose="020B0603020101020101" pitchFamily="34" charset="-127"/>
+              </a:rPr>
+              <a:t>벽 오르기 등 </a:t>
+            </a:r>
+            <a:r>
+              <a:rPr lang="ko-KR" altLang="en-US" sz="1600" dirty="0" err="1">
+                <a:latin typeface="나눔바른고딕" panose="020B0603020101020101" pitchFamily="34" charset="-127"/>
+                <a:ea typeface="나눔바른고딕" panose="020B0603020101020101" pitchFamily="34" charset="-127"/>
+              </a:rPr>
+              <a:t>상태머신</a:t>
+            </a:r>
+            <a:r>
+              <a:rPr lang="ko-KR" altLang="en-US" sz="1600" dirty="0">
+                <a:latin typeface="나눔바른고딕" panose="020B0603020101020101" pitchFamily="34" charset="-127"/>
+                <a:ea typeface="나눔바른고딕" panose="020B0603020101020101" pitchFamily="34" charset="-127"/>
+              </a:rPr>
+              <a:t> 형태로 구현</a:t>
+            </a:r>
+            <a:endParaRPr lang="en-US" altLang="ko-KR" sz="1600" dirty="0">
+              <a:latin typeface="나눔바른고딕" panose="020B0603020101020101" pitchFamily="34" charset="-127"/>
+              <a:ea typeface="나눔바른고딕" panose="020B0603020101020101" pitchFamily="34" charset="-127"/>
+            </a:endParaRPr>
+          </a:p>
+          <a:p>
+            <a:pPr marL="742950" lvl="1" indent="-285750">
+              <a:buFont typeface="Arial" panose="020B0604020202020204" pitchFamily="34" charset="0"/>
+              <a:buChar char="•"/>
+            </a:pPr>
+            <a:r>
+              <a:rPr lang="en-US" altLang="ko-KR" sz="1600" dirty="0">
+                <a:latin typeface="나눔바른고딕" panose="020B0603020101020101" pitchFamily="34" charset="-127"/>
+                <a:ea typeface="나눔바른고딕" panose="020B0603020101020101" pitchFamily="34" charset="-127"/>
+              </a:rPr>
+              <a:t>Override: </a:t>
+            </a:r>
+            <a:r>
+              <a:rPr lang="ko-KR" altLang="en-US" sz="1600" dirty="0">
+                <a:latin typeface="나눔바른고딕" panose="020B0603020101020101" pitchFamily="34" charset="-127"/>
+                <a:ea typeface="나눔바른고딕" panose="020B0603020101020101" pitchFamily="34" charset="-127"/>
+              </a:rPr>
+              <a:t>필요한 시점에</a:t>
+            </a:r>
+            <a:r>
+              <a:rPr lang="en-US" altLang="ko-KR" sz="1600" dirty="0">
+                <a:latin typeface="나눔바른고딕" panose="020B0603020101020101" pitchFamily="34" charset="-127"/>
+                <a:ea typeface="나눔바른고딕" panose="020B0603020101020101" pitchFamily="34" charset="-127"/>
+              </a:rPr>
+              <a:t> </a:t>
+            </a:r>
+            <a:r>
+              <a:rPr lang="ko-KR" altLang="en-US" sz="1600" dirty="0">
+                <a:latin typeface="나눔바른고딕" panose="020B0603020101020101" pitchFamily="34" charset="-127"/>
+                <a:ea typeface="나눔바른고딕" panose="020B0603020101020101" pitchFamily="34" charset="-127"/>
+              </a:rPr>
+              <a:t>한 차례 재생 필요</a:t>
+            </a:r>
+            <a:endParaRPr lang="en-US" altLang="ko-KR" sz="1600" dirty="0">
+              <a:latin typeface="나눔바른고딕" panose="020B0603020101020101" pitchFamily="34" charset="-127"/>
+              <a:ea typeface="나눔바른고딕" panose="020B0603020101020101" pitchFamily="34" charset="-127"/>
+            </a:endParaRPr>
+          </a:p>
+          <a:p>
+            <a:pPr marL="1200150" lvl="2" indent="-285750">
+              <a:buFont typeface="Arial" panose="020B0604020202020204" pitchFamily="34" charset="0"/>
+              <a:buChar char="•"/>
+            </a:pPr>
+            <a:r>
+              <a:rPr lang="ko-KR" altLang="en-US" sz="1600" dirty="0">
+                <a:latin typeface="나눔바른고딕" panose="020B0603020101020101" pitchFamily="34" charset="-127"/>
+                <a:ea typeface="나눔바른고딕" panose="020B0603020101020101" pitchFamily="34" charset="-127"/>
+              </a:rPr>
+              <a:t>점프</a:t>
+            </a:r>
+            <a:r>
+              <a:rPr lang="en-US" altLang="ko-KR" sz="1600" dirty="0">
+                <a:latin typeface="나눔바른고딕" panose="020B0603020101020101" pitchFamily="34" charset="-127"/>
+                <a:ea typeface="나눔바른고딕" panose="020B0603020101020101" pitchFamily="34" charset="-127"/>
+              </a:rPr>
+              <a:t>, </a:t>
+            </a:r>
+            <a:r>
+              <a:rPr lang="ko-KR" altLang="en-US" sz="1600" dirty="0">
+                <a:latin typeface="나눔바른고딕" panose="020B0603020101020101" pitchFamily="34" charset="-127"/>
+                <a:ea typeface="나눔바른고딕" panose="020B0603020101020101" pitchFamily="34" charset="-127"/>
+              </a:rPr>
+              <a:t>담 넘기</a:t>
+            </a:r>
+            <a:r>
+              <a:rPr lang="en-US" altLang="ko-KR" sz="1600" dirty="0">
+                <a:latin typeface="나눔바른고딕" panose="020B0603020101020101" pitchFamily="34" charset="-127"/>
+                <a:ea typeface="나눔바른고딕" panose="020B0603020101020101" pitchFamily="34" charset="-127"/>
+              </a:rPr>
+              <a:t> </a:t>
+            </a:r>
+            <a:r>
+              <a:rPr lang="ko-KR" altLang="en-US" sz="1600" dirty="0">
+                <a:latin typeface="나눔바른고딕" panose="020B0603020101020101" pitchFamily="34" charset="-127"/>
+                <a:ea typeface="나눔바른고딕" panose="020B0603020101020101" pitchFamily="34" charset="-127"/>
+              </a:rPr>
+              <a:t>등 </a:t>
+            </a:r>
+            <a:endParaRPr lang="en-US" altLang="ko-KR" sz="1600" dirty="0">
+              <a:latin typeface="나눔바른고딕" panose="020B0603020101020101" pitchFamily="34" charset="-127"/>
+              <a:ea typeface="나눔바른고딕" panose="020B0603020101020101" pitchFamily="34" charset="-127"/>
+            </a:endParaRPr>
+          </a:p>
+        </p:txBody>
+      </p:sp>
+      <p:sp>
+        <p:nvSpPr>
+          <p:cNvPr id="7" name="TextBox 6">
+            <a:extLst>
+              <a:ext uri="{FF2B5EF4-FFF2-40B4-BE49-F238E27FC236}">
+                <a16:creationId xmlns:a16="http://schemas.microsoft.com/office/drawing/2014/main" id="{C56D11DC-6D53-DC8A-06CD-FB3C24CDA2FD}"/>
+              </a:ext>
+            </a:extLst>
+          </p:cNvPr>
+          <p:cNvSpPr txBox="1"/>
+          <p:nvPr/>
+        </p:nvSpPr>
+        <p:spPr>
+          <a:xfrm>
+            <a:off x="302451" y="2758641"/>
+            <a:ext cx="1105329" cy="338554"/>
+          </a:xfrm>
+          <a:prstGeom prst="rect">
+            <a:avLst/>
+          </a:prstGeom>
+          <a:noFill/>
+        </p:spPr>
+        <p:txBody>
+          <a:bodyPr wrap="square" rtlCol="0">
+            <a:spAutoFit/>
+          </a:bodyPr>
+          <a:lstStyle/>
+          <a:p>
+            <a:r>
+              <a:rPr lang="en-US" altLang="ko-KR" sz="1600" dirty="0">
+                <a:latin typeface="나눔바른고딕" panose="020B0603020101020101" pitchFamily="34" charset="-127"/>
+                <a:ea typeface="나눔바른고딕" panose="020B0603020101020101" pitchFamily="34" charset="-127"/>
+              </a:rPr>
+              <a:t>Track 1</a:t>
+            </a:r>
+          </a:p>
+        </p:txBody>
+      </p:sp>
+      <p:sp>
+        <p:nvSpPr>
+          <p:cNvPr id="10" name="TextBox 9">
+            <a:extLst>
+              <a:ext uri="{FF2B5EF4-FFF2-40B4-BE49-F238E27FC236}">
+                <a16:creationId xmlns:a16="http://schemas.microsoft.com/office/drawing/2014/main" id="{3F832141-D0D2-D738-DBE8-C0B66E00321C}"/>
+              </a:ext>
+            </a:extLst>
+          </p:cNvPr>
+          <p:cNvSpPr txBox="1"/>
+          <p:nvPr/>
+        </p:nvSpPr>
+        <p:spPr>
+          <a:xfrm>
+            <a:off x="302451" y="4793420"/>
+            <a:ext cx="1105329" cy="338554"/>
+          </a:xfrm>
+          <a:prstGeom prst="rect">
+            <a:avLst/>
+          </a:prstGeom>
+          <a:noFill/>
+        </p:spPr>
+        <p:txBody>
+          <a:bodyPr wrap="square" rtlCol="0">
+            <a:spAutoFit/>
+          </a:bodyPr>
+          <a:lstStyle/>
+          <a:p>
+            <a:r>
+              <a:rPr lang="en-US" altLang="ko-KR" sz="1600" dirty="0">
+                <a:latin typeface="나눔바른고딕" panose="020B0603020101020101" pitchFamily="34" charset="-127"/>
+                <a:ea typeface="나눔바른고딕" panose="020B0603020101020101" pitchFamily="34" charset="-127"/>
+              </a:rPr>
+              <a:t>Track 2</a:t>
+            </a:r>
+          </a:p>
+        </p:txBody>
+      </p:sp>
     </p:spTree>
     <p:extLst>
       <p:ext uri="{BB962C8B-B14F-4D97-AF65-F5344CB8AC3E}">
@@ -4974,7 +5178,7 @@
         </p:nvSpPr>
         <p:spPr>
           <a:xfrm>
-            <a:off x="302451" y="758852"/>
+            <a:off x="302451" y="1051298"/>
             <a:ext cx="5211109" cy="830997"/>
           </a:xfrm>
           <a:prstGeom prst="rect">
@@ -5071,7 +5275,7 @@
         </p:nvSpPr>
         <p:spPr>
           <a:xfrm>
-            <a:off x="5930021" y="758851"/>
+            <a:off x="5930021" y="1051297"/>
             <a:ext cx="5785163" cy="830997"/>
           </a:xfrm>
           <a:prstGeom prst="rect">
@@ -5208,8 +5412,8 @@
         </p:blipFill>
         <p:spPr>
           <a:xfrm>
-            <a:off x="5832496" y="1747320"/>
-            <a:ext cx="6033579" cy="4818234"/>
+            <a:off x="5930021" y="2039766"/>
+            <a:ext cx="5785164" cy="4619857"/>
           </a:xfrm>
           <a:prstGeom prst="rect">
             <a:avLst/>
@@ -5244,7 +5448,7 @@
         </p:blipFill>
         <p:spPr>
           <a:xfrm>
-            <a:off x="325926" y="1747321"/>
+            <a:off x="387511" y="2039767"/>
             <a:ext cx="4920665" cy="3179407"/>
           </a:xfrm>
           <a:prstGeom prst="rect">
@@ -5252,6 +5456,44 @@
           </a:prstGeom>
         </p:spPr>
       </p:pic>
+      <p:cxnSp>
+        <p:nvCxnSpPr>
+          <p:cNvPr id="3" name="직선 연결선 2">
+            <a:extLst>
+              <a:ext uri="{FF2B5EF4-FFF2-40B4-BE49-F238E27FC236}">
+                <a16:creationId xmlns:a16="http://schemas.microsoft.com/office/drawing/2014/main" id="{F4607D94-1856-0C3E-2076-A43722963D45}"/>
+              </a:ext>
+            </a:extLst>
+          </p:cNvPr>
+          <p:cNvCxnSpPr>
+            <a:cxnSpLocks/>
+          </p:cNvCxnSpPr>
+          <p:nvPr/>
+        </p:nvCxnSpPr>
+        <p:spPr>
+          <a:xfrm>
+            <a:off x="387511" y="818707"/>
+            <a:ext cx="11308303" cy="0"/>
+          </a:xfrm>
+          <a:prstGeom prst="line">
+            <a:avLst/>
+          </a:prstGeom>
+        </p:spPr>
+        <p:style>
+          <a:lnRef idx="2">
+            <a:schemeClr val="accent1"/>
+          </a:lnRef>
+          <a:fillRef idx="0">
+            <a:schemeClr val="accent1"/>
+          </a:fillRef>
+          <a:effectRef idx="1">
+            <a:schemeClr val="accent1"/>
+          </a:effectRef>
+          <a:fontRef idx="minor">
+            <a:schemeClr val="tx1"/>
+          </a:fontRef>
+        </p:style>
+      </p:cxnSp>
     </p:spTree>
     <p:extLst>
       <p:ext uri="{BB962C8B-B14F-4D97-AF65-F5344CB8AC3E}">
@@ -5344,7 +5586,7 @@
         </p:nvSpPr>
         <p:spPr>
           <a:xfrm>
-            <a:off x="302450" y="758852"/>
+            <a:off x="302450" y="952630"/>
             <a:ext cx="10298209" cy="584775"/>
           </a:xfrm>
           <a:prstGeom prst="rect">
@@ -5358,10 +5600,6 @@
           </a:bodyPr>
           <a:lstStyle/>
           <a:p>
-            <a:pPr marL="285750" indent="-285750">
-              <a:buFont typeface="Arial" panose="020B0604020202020204" pitchFamily="34" charset="0"/>
-              <a:buChar char="•"/>
-            </a:pPr>
             <a:r>
               <a:rPr lang="ko-KR" altLang="en-US" sz="1600" dirty="0">
                 <a:latin typeface="나눔바른고딕" panose="020B0603020101020101" pitchFamily="34" charset="-127"/>
@@ -5375,7 +5613,7 @@
             </a:endParaRPr>
           </a:p>
           <a:p>
-            <a:pPr marL="742950" lvl="1" indent="-285750">
+            <a:pPr marL="285750" indent="-285750">
               <a:buFont typeface="Arial" panose="020B0604020202020204" pitchFamily="34" charset="0"/>
               <a:buChar char="•"/>
             </a:pPr>
@@ -5505,14 +5743,52 @@
         </p:blipFill>
         <p:spPr>
           <a:xfrm>
-            <a:off x="1973114" y="1591450"/>
-            <a:ext cx="7267575" cy="4695825"/>
+            <a:off x="2663554" y="1805250"/>
+            <a:ext cx="6756216" cy="4365419"/>
           </a:xfrm>
           <a:prstGeom prst="rect">
             <a:avLst/>
           </a:prstGeom>
         </p:spPr>
       </p:pic>
+      <p:cxnSp>
+        <p:nvCxnSpPr>
+          <p:cNvPr id="2" name="직선 연결선 1">
+            <a:extLst>
+              <a:ext uri="{FF2B5EF4-FFF2-40B4-BE49-F238E27FC236}">
+                <a16:creationId xmlns:a16="http://schemas.microsoft.com/office/drawing/2014/main" id="{655EF1D6-484D-88D6-0993-590B41443B13}"/>
+              </a:ext>
+            </a:extLst>
+          </p:cNvPr>
+          <p:cNvCxnSpPr>
+            <a:cxnSpLocks/>
+          </p:cNvCxnSpPr>
+          <p:nvPr/>
+        </p:nvCxnSpPr>
+        <p:spPr>
+          <a:xfrm>
+            <a:off x="387511" y="818707"/>
+            <a:ext cx="11308303" cy="0"/>
+          </a:xfrm>
+          <a:prstGeom prst="line">
+            <a:avLst/>
+          </a:prstGeom>
+        </p:spPr>
+        <p:style>
+          <a:lnRef idx="2">
+            <a:schemeClr val="accent1"/>
+          </a:lnRef>
+          <a:fillRef idx="0">
+            <a:schemeClr val="accent1"/>
+          </a:fillRef>
+          <a:effectRef idx="1">
+            <a:schemeClr val="accent1"/>
+          </a:effectRef>
+          <a:fontRef idx="minor">
+            <a:schemeClr val="tx1"/>
+          </a:fontRef>
+        </p:style>
+      </p:cxnSp>
     </p:spTree>
     <p:extLst>
       <p:ext uri="{BB962C8B-B14F-4D97-AF65-F5344CB8AC3E}">
